--- a/doc/presentation/Thesis.pptx
+++ b/doc/presentation/Thesis.pptx
@@ -5,7 +5,7 @@
     <p:sldMasterId id="2147483648" r:id="rId1"/>
   </p:sldMasterIdLst>
   <p:notesMasterIdLst>
-    <p:notesMasterId r:id="rId48"/>
+    <p:notesMasterId r:id="rId54"/>
   </p:notesMasterIdLst>
   <p:sldIdLst>
     <p:sldId id="256" r:id="rId2"/>
@@ -19,12 +19,12 @@
     <p:sldId id="273" r:id="rId10"/>
     <p:sldId id="299" r:id="rId11"/>
     <p:sldId id="276" r:id="rId12"/>
-    <p:sldId id="286" r:id="rId13"/>
-    <p:sldId id="280" r:id="rId14"/>
-    <p:sldId id="279" r:id="rId15"/>
-    <p:sldId id="282" r:id="rId16"/>
-    <p:sldId id="284" r:id="rId17"/>
-    <p:sldId id="263" r:id="rId18"/>
+    <p:sldId id="324" r:id="rId13"/>
+    <p:sldId id="286" r:id="rId14"/>
+    <p:sldId id="280" r:id="rId15"/>
+    <p:sldId id="279" r:id="rId16"/>
+    <p:sldId id="282" r:id="rId17"/>
+    <p:sldId id="284" r:id="rId18"/>
     <p:sldId id="285" r:id="rId19"/>
     <p:sldId id="287" r:id="rId20"/>
     <p:sldId id="288" r:id="rId21"/>
@@ -44,16 +44,22 @@
     <p:sldId id="315" r:id="rId35"/>
     <p:sldId id="316" r:id="rId36"/>
     <p:sldId id="266" r:id="rId37"/>
-    <p:sldId id="318" r:id="rId38"/>
-    <p:sldId id="267" r:id="rId39"/>
-    <p:sldId id="268" r:id="rId40"/>
-    <p:sldId id="277" r:id="rId41"/>
-    <p:sldId id="269" r:id="rId42"/>
-    <p:sldId id="317" r:id="rId43"/>
-    <p:sldId id="258" r:id="rId44"/>
-    <p:sldId id="274" r:id="rId45"/>
-    <p:sldId id="259" r:id="rId46"/>
-    <p:sldId id="260" r:id="rId47"/>
+    <p:sldId id="321" r:id="rId38"/>
+    <p:sldId id="322" r:id="rId39"/>
+    <p:sldId id="325" r:id="rId40"/>
+    <p:sldId id="318" r:id="rId41"/>
+    <p:sldId id="323" r:id="rId42"/>
+    <p:sldId id="267" r:id="rId43"/>
+    <p:sldId id="319" r:id="rId44"/>
+    <p:sldId id="320" r:id="rId45"/>
+    <p:sldId id="268" r:id="rId46"/>
+    <p:sldId id="277" r:id="rId47"/>
+    <p:sldId id="269" r:id="rId48"/>
+    <p:sldId id="317" r:id="rId49"/>
+    <p:sldId id="258" r:id="rId50"/>
+    <p:sldId id="274" r:id="rId51"/>
+    <p:sldId id="259" r:id="rId52"/>
+    <p:sldId id="260" r:id="rId53"/>
   </p:sldIdLst>
   <p:sldSz cx="12192000" cy="6858000"/>
   <p:notesSz cx="6858000" cy="9144000"/>
@@ -176,6 +182,7 @@
             <p14:sldId id="273"/>
             <p14:sldId id="299"/>
             <p14:sldId id="276"/>
+            <p14:sldId id="324"/>
             <p14:sldId id="286"/>
             <p14:sldId id="280"/>
             <p14:sldId id="279"/>
@@ -185,7 +192,6 @@
         </p14:section>
         <p14:section name="Problem Statement" id="{D007D5E9-0273-4A98-8D76-718A668981DA}">
           <p14:sldIdLst>
-            <p14:sldId id="263"/>
             <p14:sldId id="285"/>
             <p14:sldId id="287"/>
             <p14:sldId id="288"/>
@@ -213,12 +219,18 @@
         <p14:section name="Evaluation &amp; Results" id="{8219F86C-B3AF-4EAA-830F-8DFAE481BD8F}">
           <p14:sldIdLst>
             <p14:sldId id="266"/>
+            <p14:sldId id="321"/>
+            <p14:sldId id="322"/>
+            <p14:sldId id="325"/>
             <p14:sldId id="318"/>
+            <p14:sldId id="323"/>
           </p14:sldIdLst>
         </p14:section>
         <p14:section name="Conclusion &amp; Future Work" id="{803E403D-1B92-466A-BE97-26C9AB7892A5}">
           <p14:sldIdLst>
             <p14:sldId id="267"/>
+            <p14:sldId id="319"/>
+            <p14:sldId id="320"/>
           </p14:sldIdLst>
         </p14:section>
         <p14:section name="Q&amp;A" id="{4132604F-A5FF-4E6F-A51C-CD14EC1306E2}">
@@ -264,67 +276,7 @@
     </mc:Fallback>
   </mc:AlternateContent>
   <c:chart>
-    <c:title>
-      <c:tx>
-        <c:rich>
-          <a:bodyPr rot="0" spcFirstLastPara="1" vertOverflow="ellipsis" vert="horz" wrap="square" anchor="ctr" anchorCtr="1"/>
-          <a:lstStyle/>
-          <a:p>
-            <a:pPr>
-              <a:defRPr sz="1862" b="0" i="0" u="none" strike="noStrike" kern="1200" spc="0" baseline="0">
-                <a:solidFill>
-                  <a:schemeClr val="tx1">
-                    <a:lumMod val="65000"/>
-                    <a:lumOff val="35000"/>
-                  </a:schemeClr>
-                </a:solidFill>
-                <a:latin typeface="+mn-lt"/>
-                <a:ea typeface="+mn-ea"/>
-                <a:cs typeface="+mn-cs"/>
-              </a:defRPr>
-            </a:pPr>
-            <a:r>
-              <a:rPr lang="en-CH" dirty="0"/>
-              <a:t>Common</a:t>
-            </a:r>
-            <a:r>
-              <a:rPr lang="en-CH" baseline="0" dirty="0"/>
-              <a:t> Exploit Mechanisms</a:t>
-            </a:r>
-            <a:endParaRPr lang="en-US" dirty="0"/>
-          </a:p>
-        </c:rich>
-      </c:tx>
-      <c:overlay val="0"/>
-      <c:spPr>
-        <a:noFill/>
-        <a:ln>
-          <a:noFill/>
-        </a:ln>
-        <a:effectLst/>
-      </c:spPr>
-      <c:txPr>
-        <a:bodyPr rot="0" spcFirstLastPara="1" vertOverflow="ellipsis" vert="horz" wrap="square" anchor="ctr" anchorCtr="1"/>
-        <a:lstStyle/>
-        <a:p>
-          <a:pPr>
-            <a:defRPr sz="1862" b="0" i="0" u="none" strike="noStrike" kern="1200" spc="0" baseline="0">
-              <a:solidFill>
-                <a:schemeClr val="tx1">
-                  <a:lumMod val="65000"/>
-                  <a:lumOff val="35000"/>
-                </a:schemeClr>
-              </a:solidFill>
-              <a:latin typeface="+mn-lt"/>
-              <a:ea typeface="+mn-ea"/>
-              <a:cs typeface="+mn-cs"/>
-            </a:defRPr>
-          </a:pPr>
-          <a:endParaRPr lang="en-US"/>
-        </a:p>
-      </c:txPr>
-    </c:title>
-    <c:autoTitleDeleted val="0"/>
+    <c:autoTitleDeleted val="1"/>
     <c:plotArea>
       <c:layout>
         <c:manualLayout>
@@ -332,9 +284,9 @@
           <c:xMode val="edge"/>
           <c:yMode val="edge"/>
           <c:x val="5.6312431054813802E-2"/>
-          <c:y val="0.12852230739142764"/>
+          <c:y val="5.8480550407034114E-2"/>
           <c:w val="0.68317861082582065"/>
-          <c:h val="0.78799509484209229"/>
+          <c:h val="0.84537450487200039"/>
         </c:manualLayout>
       </c:layout>
       <c:barChart>
@@ -346,11 +298,11 @@
           <c:order val="0"/>
           <c:tx>
             <c:strRef>
-              <c:f>Sheet1!$B$1</c:f>
+              <c:f>Sheet1!$A$2</c:f>
               <c:strCache>
                 <c:ptCount val="1"/>
                 <c:pt idx="0">
-                  <c:v>Logic Flaw</c:v>
+                  <c:v>Business Logic</c:v>
                 </c:pt>
               </c:strCache>
             </c:strRef>
@@ -367,9 +319,9 @@
           <c:invertIfNegative val="0"/>
           <c:cat>
             <c:strRef>
-              <c:f>Sheet1!$A$2:$A$6</c:f>
+              <c:f>Sheet1!$B$1:$G$1</c:f>
               <c:strCache>
-                <c:ptCount val="5"/>
+                <c:ptCount val="6"/>
                 <c:pt idx="0">
                   <c:v>2021</c:v>
                 </c:pt>
@@ -385,29 +337,35 @@
                 <c:pt idx="4">
                   <c:v>Total</c:v>
                 </c:pt>
+                <c:pt idx="5">
+                  <c:v>Funds Lost</c:v>
+                </c:pt>
               </c:strCache>
             </c:strRef>
           </c:cat>
           <c:val>
             <c:numRef>
-              <c:f>Sheet1!$B$2:$B$6</c:f>
+              <c:f>Sheet1!$B$2:$G$2</c:f>
               <c:numCache>
                 <c:formatCode>General</c:formatCode>
-                <c:ptCount val="5"/>
+                <c:ptCount val="6"/>
                 <c:pt idx="0">
-                  <c:v>17</c:v>
+                  <c:v>7</c:v>
                 </c:pt>
                 <c:pt idx="1">
-                  <c:v>26</c:v>
+                  <c:v>21</c:v>
                 </c:pt>
                 <c:pt idx="2">
-                  <c:v>75</c:v>
+                  <c:v>65</c:v>
                 </c:pt>
                 <c:pt idx="3">
-                  <c:v>56</c:v>
+                  <c:v>58</c:v>
                 </c:pt>
                 <c:pt idx="4">
-                  <c:v>174</c:v>
+                  <c:v>151</c:v>
+                </c:pt>
+                <c:pt idx="5">
+                  <c:v>524</c:v>
                 </c:pt>
               </c:numCache>
             </c:numRef>
@@ -423,7 +381,7 @@
           <c:order val="1"/>
           <c:tx>
             <c:strRef>
-              <c:f>Sheet1!$C$1</c:f>
+              <c:f>Sheet1!$A$3</c:f>
               <c:strCache>
                 <c:ptCount val="1"/>
                 <c:pt idx="0">
@@ -444,9 +402,9 @@
           <c:invertIfNegative val="0"/>
           <c:cat>
             <c:strRef>
-              <c:f>Sheet1!$A$2:$A$6</c:f>
+              <c:f>Sheet1!$B$1:$G$1</c:f>
               <c:strCache>
-                <c:ptCount val="5"/>
+                <c:ptCount val="6"/>
                 <c:pt idx="0">
                   <c:v>2021</c:v>
                 </c:pt>
@@ -462,29 +420,35 @@
                 <c:pt idx="4">
                   <c:v>Total</c:v>
                 </c:pt>
+                <c:pt idx="5">
+                  <c:v>Funds Lost</c:v>
+                </c:pt>
               </c:strCache>
             </c:strRef>
           </c:cat>
           <c:val>
             <c:numRef>
-              <c:f>Sheet1!$C$2:$C$6</c:f>
+              <c:f>Sheet1!$B$3:$G$3</c:f>
               <c:numCache>
                 <c:formatCode>General</c:formatCode>
-                <c:ptCount val="5"/>
+                <c:ptCount val="6"/>
                 <c:pt idx="0">
                   <c:v>10</c:v>
                 </c:pt>
                 <c:pt idx="1">
-                  <c:v>25</c:v>
+                  <c:v>35</c:v>
                 </c:pt>
                 <c:pt idx="2">
-                  <c:v>38</c:v>
+                  <c:v>42</c:v>
                 </c:pt>
                 <c:pt idx="3">
-                  <c:v>28</c:v>
+                  <c:v>21</c:v>
                 </c:pt>
                 <c:pt idx="4">
-                  <c:v>101</c:v>
+                  <c:v>108</c:v>
+                </c:pt>
+                <c:pt idx="5">
+                  <c:v>422</c:v>
                 </c:pt>
               </c:numCache>
             </c:numRef>
@@ -500,7 +464,7 @@
           <c:order val="2"/>
           <c:tx>
             <c:strRef>
-              <c:f>Sheet1!$D$1</c:f>
+              <c:f>Sheet1!$A$4</c:f>
               <c:strCache>
                 <c:ptCount val="1"/>
                 <c:pt idx="0">
@@ -521,9 +485,9 @@
           <c:invertIfNegative val="0"/>
           <c:cat>
             <c:strRef>
-              <c:f>Sheet1!$A$2:$A$6</c:f>
+              <c:f>Sheet1!$B$1:$G$1</c:f>
               <c:strCache>
-                <c:ptCount val="5"/>
+                <c:ptCount val="6"/>
                 <c:pt idx="0">
                   <c:v>2021</c:v>
                 </c:pt>
@@ -539,29 +503,35 @@
                 <c:pt idx="4">
                   <c:v>Total</c:v>
                 </c:pt>
+                <c:pt idx="5">
+                  <c:v>Funds Lost</c:v>
+                </c:pt>
               </c:strCache>
             </c:strRef>
           </c:cat>
           <c:val>
             <c:numRef>
-              <c:f>Sheet1!$D$2:$D$6</c:f>
+              <c:f>Sheet1!$B$4:$G$4</c:f>
               <c:numCache>
                 <c:formatCode>General</c:formatCode>
-                <c:ptCount val="5"/>
+                <c:ptCount val="6"/>
                 <c:pt idx="0">
                   <c:v>3</c:v>
                 </c:pt>
                 <c:pt idx="1">
-                  <c:v>17</c:v>
+                  <c:v>16</c:v>
                 </c:pt>
                 <c:pt idx="2">
-                  <c:v>19</c:v>
+                  <c:v>22</c:v>
                 </c:pt>
                 <c:pt idx="3">
-                  <c:v>34</c:v>
+                  <c:v>35</c:v>
                 </c:pt>
                 <c:pt idx="4">
-                  <c:v>73</c:v>
+                  <c:v>76</c:v>
+                </c:pt>
+                <c:pt idx="5">
+                  <c:v>60.5</c:v>
                 </c:pt>
               </c:numCache>
             </c:numRef>
@@ -577,7 +547,7 @@
           <c:order val="3"/>
           <c:tx>
             <c:strRef>
-              <c:f>Sheet1!$E$1</c:f>
+              <c:f>Sheet1!$A$5</c:f>
               <c:strCache>
                 <c:ptCount val="1"/>
                 <c:pt idx="0">
@@ -598,9 +568,9 @@
           <c:invertIfNegative val="0"/>
           <c:cat>
             <c:strRef>
-              <c:f>Sheet1!$A$2:$A$6</c:f>
+              <c:f>Sheet1!$B$1:$G$1</c:f>
               <c:strCache>
-                <c:ptCount val="5"/>
+                <c:ptCount val="6"/>
                 <c:pt idx="0">
                   <c:v>2021</c:v>
                 </c:pt>
@@ -616,29 +586,35 @@
                 <c:pt idx="4">
                   <c:v>Total</c:v>
                 </c:pt>
+                <c:pt idx="5">
+                  <c:v>Funds Lost</c:v>
+                </c:pt>
               </c:strCache>
             </c:strRef>
           </c:cat>
           <c:val>
             <c:numRef>
-              <c:f>Sheet1!$E$2:$E$6</c:f>
+              <c:f>Sheet1!$B$5:$G$5</c:f>
               <c:numCache>
                 <c:formatCode>General</c:formatCode>
-                <c:ptCount val="5"/>
+                <c:ptCount val="6"/>
                 <c:pt idx="0">
-                  <c:v>11</c:v>
+                  <c:v>9</c:v>
                 </c:pt>
                 <c:pt idx="1">
-                  <c:v>15</c:v>
+                  <c:v>13</c:v>
                 </c:pt>
                 <c:pt idx="2">
-                  <c:v>19</c:v>
+                  <c:v>17</c:v>
                 </c:pt>
                 <c:pt idx="3">
                   <c:v>15</c:v>
                 </c:pt>
                 <c:pt idx="4">
-                  <c:v>60</c:v>
+                  <c:v>54</c:v>
+                </c:pt>
+                <c:pt idx="5">
+                  <c:v>284</c:v>
                 </c:pt>
               </c:numCache>
             </c:numRef>
@@ -654,7 +630,7 @@
           <c:order val="4"/>
           <c:tx>
             <c:strRef>
-              <c:f>Sheet1!$F$1</c:f>
+              <c:f>Sheet1!$A$6</c:f>
               <c:strCache>
                 <c:ptCount val="1"/>
                 <c:pt idx="0">
@@ -675,9 +651,9 @@
           <c:invertIfNegative val="0"/>
           <c:cat>
             <c:strRef>
-              <c:f>Sheet1!$A$2:$A$6</c:f>
+              <c:f>Sheet1!$B$1:$G$1</c:f>
               <c:strCache>
-                <c:ptCount val="5"/>
+                <c:ptCount val="6"/>
                 <c:pt idx="0">
                   <c:v>2021</c:v>
                 </c:pt>
@@ -693,29 +669,35 @@
                 <c:pt idx="4">
                   <c:v>Total</c:v>
                 </c:pt>
+                <c:pt idx="5">
+                  <c:v>Funds Lost</c:v>
+                </c:pt>
               </c:strCache>
             </c:strRef>
           </c:cat>
           <c:val>
             <c:numRef>
-              <c:f>Sheet1!$F$2:$F$6</c:f>
+              <c:f>Sheet1!$B$6:$G$6</c:f>
               <c:numCache>
                 <c:formatCode>General</c:formatCode>
-                <c:ptCount val="5"/>
+                <c:ptCount val="6"/>
                 <c:pt idx="0">
                   <c:v>2</c:v>
                 </c:pt>
                 <c:pt idx="1">
-                  <c:v>9</c:v>
+                  <c:v>10</c:v>
                 </c:pt>
                 <c:pt idx="2">
                   <c:v>8</c:v>
                 </c:pt>
                 <c:pt idx="3">
-                  <c:v>19</c:v>
+                  <c:v>18</c:v>
                 </c:pt>
                 <c:pt idx="4">
                   <c:v>38</c:v>
+                </c:pt>
+                <c:pt idx="5">
+                  <c:v>141.5</c:v>
                 </c:pt>
               </c:numCache>
             </c:numRef>
@@ -731,11 +713,11 @@
           <c:order val="5"/>
           <c:tx>
             <c:strRef>
-              <c:f>Sheet1!$G$1</c:f>
+              <c:f>Sheet1!$A$7</c:f>
               <c:strCache>
                 <c:ptCount val="1"/>
                 <c:pt idx="0">
-                  <c:v>Call Injection</c:v>
+                  <c:v>Precision</c:v>
                 </c:pt>
               </c:strCache>
             </c:strRef>
@@ -752,9 +734,9 @@
           <c:invertIfNegative val="0"/>
           <c:cat>
             <c:strRef>
-              <c:f>Sheet1!$A$2:$A$6</c:f>
+              <c:f>Sheet1!$B$1:$G$1</c:f>
               <c:strCache>
-                <c:ptCount val="5"/>
+                <c:ptCount val="6"/>
                 <c:pt idx="0">
                   <c:v>2021</c:v>
                 </c:pt>
@@ -770,36 +752,42 @@
                 <c:pt idx="4">
                   <c:v>Total</c:v>
                 </c:pt>
+                <c:pt idx="5">
+                  <c:v>Funds Lost</c:v>
+                </c:pt>
               </c:strCache>
             </c:strRef>
           </c:cat>
           <c:val>
             <c:numRef>
-              <c:f>Sheet1!$G$2:$G$6</c:f>
+              <c:f>Sheet1!$B$7:$G$7</c:f>
               <c:numCache>
                 <c:formatCode>General</c:formatCode>
-                <c:ptCount val="5"/>
+                <c:ptCount val="6"/>
                 <c:pt idx="0">
-                  <c:v>0</c:v>
+                  <c:v>5</c:v>
                 </c:pt>
                 <c:pt idx="1">
-                  <c:v>7</c:v>
+                  <c:v>5</c:v>
                 </c:pt>
                 <c:pt idx="2">
-                  <c:v>8</c:v>
+                  <c:v>18</c:v>
                 </c:pt>
                 <c:pt idx="3">
-                  <c:v>9</c:v>
+                  <c:v>12</c:v>
                 </c:pt>
                 <c:pt idx="4">
-                  <c:v>24</c:v>
+                  <c:v>40</c:v>
+                </c:pt>
+                <c:pt idx="5">
+                  <c:v>151.69999999999999</c:v>
                 </c:pt>
               </c:numCache>
             </c:numRef>
           </c:val>
           <c:extLst>
             <c:ext xmlns:c16="http://schemas.microsoft.com/office/drawing/2014/chart" uri="{C3380CC4-5D6E-409C-BE32-E72D297353CC}">
-              <c16:uniqueId val="{0000000B-8114-4D0D-A8EE-972C953D9669}"/>
+              <c16:uniqueId val="{00000000-3FAE-493D-997F-068EED26B0C5}"/>
             </c:ext>
           </c:extLst>
         </c:ser>
@@ -808,11 +796,11 @@
           <c:order val="6"/>
           <c:tx>
             <c:strRef>
-              <c:f>Sheet1!$H$1</c:f>
+              <c:f>Sheet1!$A$8</c:f>
               <c:strCache>
                 <c:ptCount val="1"/>
                 <c:pt idx="0">
-                  <c:v>Precision Loss</c:v>
+                  <c:v>Arbitrary Call</c:v>
                 </c:pt>
               </c:strCache>
             </c:strRef>
@@ -831,9 +819,9 @@
           <c:invertIfNegative val="0"/>
           <c:cat>
             <c:strRef>
-              <c:f>Sheet1!$A$2:$A$6</c:f>
+              <c:f>Sheet1!$B$1:$G$1</c:f>
               <c:strCache>
-                <c:ptCount val="5"/>
+                <c:ptCount val="6"/>
                 <c:pt idx="0">
                   <c:v>2021</c:v>
                 </c:pt>
@@ -849,36 +837,42 @@
                 <c:pt idx="4">
                   <c:v>Total</c:v>
                 </c:pt>
+                <c:pt idx="5">
+                  <c:v>Funds Lost</c:v>
+                </c:pt>
               </c:strCache>
             </c:strRef>
           </c:cat>
           <c:val>
             <c:numRef>
-              <c:f>Sheet1!$H$2:$H$6</c:f>
+              <c:f>Sheet1!$B$8:$G$8</c:f>
               <c:numCache>
                 <c:formatCode>General</c:formatCode>
-                <c:ptCount val="5"/>
+                <c:ptCount val="6"/>
                 <c:pt idx="0">
                   <c:v>0</c:v>
                 </c:pt>
                 <c:pt idx="1">
-                  <c:v>0</c:v>
+                  <c:v>8</c:v>
                 </c:pt>
                 <c:pt idx="2">
-                  <c:v>14</c:v>
+                  <c:v>9</c:v>
                 </c:pt>
                 <c:pt idx="3">
                   <c:v>9</c:v>
                 </c:pt>
                 <c:pt idx="4">
-                  <c:v>23</c:v>
+                  <c:v>26</c:v>
+                </c:pt>
+                <c:pt idx="5">
+                  <c:v>15.7</c:v>
                 </c:pt>
               </c:numCache>
             </c:numRef>
           </c:val>
           <c:extLst>
             <c:ext xmlns:c16="http://schemas.microsoft.com/office/drawing/2014/chart" uri="{C3380CC4-5D6E-409C-BE32-E72D297353CC}">
-              <c16:uniqueId val="{0000000C-8114-4D0D-A8EE-972C953D9669}"/>
+              <c16:uniqueId val="{00000001-3FAE-493D-997F-068EED26B0C5}"/>
             </c:ext>
           </c:extLst>
         </c:ser>
@@ -887,11 +881,11 @@
           <c:order val="7"/>
           <c:tx>
             <c:strRef>
-              <c:f>Sheet1!$I$1</c:f>
+              <c:f>Sheet1!$A$9</c:f>
               <c:strCache>
                 <c:ptCount val="1"/>
                 <c:pt idx="0">
-                  <c:v>Slippage</c:v>
+                  <c:v>Token Design</c:v>
                 </c:pt>
               </c:strCache>
             </c:strRef>
@@ -910,9 +904,9 @@
           <c:invertIfNegative val="0"/>
           <c:cat>
             <c:strRef>
-              <c:f>Sheet1!$A$2:$A$6</c:f>
+              <c:f>Sheet1!$B$1:$G$1</c:f>
               <c:strCache>
-                <c:ptCount val="5"/>
+                <c:ptCount val="6"/>
                 <c:pt idx="0">
                   <c:v>2021</c:v>
                 </c:pt>
@@ -928,36 +922,42 @@
                 <c:pt idx="4">
                   <c:v>Total</c:v>
                 </c:pt>
+                <c:pt idx="5">
+                  <c:v>Funds Lost</c:v>
+                </c:pt>
               </c:strCache>
             </c:strRef>
           </c:cat>
           <c:val>
             <c:numRef>
-              <c:f>Sheet1!$I$2:$I$6</c:f>
+              <c:f>Sheet1!$B$9:$G$9</c:f>
               <c:numCache>
                 <c:formatCode>General</c:formatCode>
-                <c:ptCount val="5"/>
+                <c:ptCount val="6"/>
                 <c:pt idx="0">
-                  <c:v>1</c:v>
+                  <c:v>3</c:v>
                 </c:pt>
                 <c:pt idx="1">
-                  <c:v>0</c:v>
+                  <c:v>4</c:v>
                 </c:pt>
                 <c:pt idx="2">
-                  <c:v>9</c:v>
+                  <c:v>18</c:v>
                 </c:pt>
                 <c:pt idx="3">
-                  <c:v>0</c:v>
+                  <c:v>3</c:v>
                 </c:pt>
                 <c:pt idx="4">
-                  <c:v>10</c:v>
+                  <c:v>28</c:v>
+                </c:pt>
+                <c:pt idx="5">
+                  <c:v>5.6310000000000002</c:v>
                 </c:pt>
               </c:numCache>
             </c:numRef>
           </c:val>
           <c:extLst>
             <c:ext xmlns:c16="http://schemas.microsoft.com/office/drawing/2014/chart" uri="{C3380CC4-5D6E-409C-BE32-E72D297353CC}">
-              <c16:uniqueId val="{0000000D-8114-4D0D-A8EE-972C953D9669}"/>
+              <c16:uniqueId val="{00000002-3FAE-493D-997F-068EED26B0C5}"/>
             </c:ext>
           </c:extLst>
         </c:ser>
@@ -966,11 +966,11 @@
           <c:order val="8"/>
           <c:tx>
             <c:strRef>
-              <c:f>Sheet1!$J$1</c:f>
+              <c:f>Sheet1!$A$10</c:f>
               <c:strCache>
                 <c:ptCount val="1"/>
                 <c:pt idx="0">
-                  <c:v>Overflow</c:v>
+                  <c:v>Slippage</c:v>
                 </c:pt>
               </c:strCache>
             </c:strRef>
@@ -989,9 +989,9 @@
           <c:invertIfNegative val="0"/>
           <c:cat>
             <c:strRef>
-              <c:f>Sheet1!$A$2:$A$6</c:f>
+              <c:f>Sheet1!$B$1:$G$1</c:f>
               <c:strCache>
-                <c:ptCount val="5"/>
+                <c:ptCount val="6"/>
                 <c:pt idx="0">
                   <c:v>2021</c:v>
                 </c:pt>
@@ -1007,36 +1007,42 @@
                 <c:pt idx="4">
                   <c:v>Total</c:v>
                 </c:pt>
+                <c:pt idx="5">
+                  <c:v>Funds Lost</c:v>
+                </c:pt>
               </c:strCache>
             </c:strRef>
           </c:cat>
           <c:val>
             <c:numRef>
-              <c:f>Sheet1!$J$2:$J$6</c:f>
+              <c:f>Sheet1!$B$10:$G$10</c:f>
               <c:numCache>
                 <c:formatCode>General</c:formatCode>
-                <c:ptCount val="5"/>
+                <c:ptCount val="6"/>
                 <c:pt idx="0">
+                  <c:v>2</c:v>
+                </c:pt>
+                <c:pt idx="1">
                   <c:v>0</c:v>
                 </c:pt>
-                <c:pt idx="1">
+                <c:pt idx="2">
+                  <c:v>9</c:v>
+                </c:pt>
+                <c:pt idx="3">
                   <c:v>2</c:v>
                 </c:pt>
-                <c:pt idx="2">
-                  <c:v>1</c:v>
+                <c:pt idx="4">
+                  <c:v>13</c:v>
                 </c:pt>
-                <c:pt idx="3">
-                  <c:v>3</c:v>
-                </c:pt>
-                <c:pt idx="4">
-                  <c:v>6</c:v>
+                <c:pt idx="5">
+                  <c:v>11.754</c:v>
                 </c:pt>
               </c:numCache>
             </c:numRef>
           </c:val>
           <c:extLst>
             <c:ext xmlns:c16="http://schemas.microsoft.com/office/drawing/2014/chart" uri="{C3380CC4-5D6E-409C-BE32-E72D297353CC}">
-              <c16:uniqueId val="{0000000E-8114-4D0D-A8EE-972C953D9669}"/>
+              <c16:uniqueId val="{00000003-3FAE-493D-997F-068EED26B0C5}"/>
             </c:ext>
           </c:extLst>
         </c:ser>
@@ -1045,7 +1051,7 @@
           <c:order val="9"/>
           <c:tx>
             <c:strRef>
-              <c:f>Sheet1!$K$1</c:f>
+              <c:f>Sheet1!$A$11</c:f>
               <c:strCache>
                 <c:ptCount val="1"/>
                 <c:pt idx="0">
@@ -1068,9 +1074,9 @@
           <c:invertIfNegative val="0"/>
           <c:cat>
             <c:strRef>
-              <c:f>Sheet1!$A$2:$A$6</c:f>
+              <c:f>Sheet1!$B$1:$G$1</c:f>
               <c:strCache>
-                <c:ptCount val="5"/>
+                <c:ptCount val="6"/>
                 <c:pt idx="0">
                   <c:v>2021</c:v>
                 </c:pt>
@@ -1086,36 +1092,42 @@
                 <c:pt idx="4">
                   <c:v>Total</c:v>
                 </c:pt>
+                <c:pt idx="5">
+                  <c:v>Funds Lost</c:v>
+                </c:pt>
               </c:strCache>
             </c:strRef>
           </c:cat>
           <c:val>
             <c:numRef>
-              <c:f>Sheet1!$K$2:$K$6</c:f>
+              <c:f>Sheet1!$B$11:$G$11</c:f>
               <c:numCache>
                 <c:formatCode>General</c:formatCode>
-                <c:ptCount val="5"/>
+                <c:ptCount val="6"/>
                 <c:pt idx="0">
                   <c:v>0</c:v>
                 </c:pt>
                 <c:pt idx="1">
-                  <c:v>4</c:v>
+                  <c:v>5</c:v>
                 </c:pt>
                 <c:pt idx="2">
-                  <c:v>8</c:v>
+                  <c:v>5</c:v>
                 </c:pt>
                 <c:pt idx="3">
-                  <c:v>7</c:v>
+                  <c:v>5</c:v>
                 </c:pt>
                 <c:pt idx="4">
-                  <c:v>19</c:v>
+                  <c:v>15</c:v>
+                </c:pt>
+                <c:pt idx="5">
+                  <c:v>54.4</c:v>
                 </c:pt>
               </c:numCache>
             </c:numRef>
           </c:val>
           <c:extLst>
             <c:ext xmlns:c16="http://schemas.microsoft.com/office/drawing/2014/chart" uri="{C3380CC4-5D6E-409C-BE32-E72D297353CC}">
-              <c16:uniqueId val="{0000000F-8114-4D0D-A8EE-972C953D9669}"/>
+              <c16:uniqueId val="{00000004-3FAE-493D-997F-068EED26B0C5}"/>
             </c:ext>
           </c:extLst>
         </c:ser>
@@ -1161,7 +1173,7 @@
           <a:lstStyle/>
           <a:p>
             <a:pPr>
-              <a:defRPr sz="1800" b="0" i="0" u="none" strike="noStrike" kern="1200" baseline="0">
+              <a:defRPr sz="2000" b="0" i="0" u="none" strike="noStrike" kern="1200" baseline="0">
                 <a:solidFill>
                   <a:schemeClr val="tx1">
                     <a:lumMod val="65000"/>
@@ -1253,10 +1265,10 @@
         <c:manualLayout>
           <c:xMode val="edge"/>
           <c:yMode val="edge"/>
-          <c:x val="0.76808056601620456"/>
-          <c:y val="0.13092501662706962"/>
-          <c:w val="0.2319194339837955"/>
-          <c:h val="0.78697862588472789"/>
+          <c:x val="0.76219961085865318"/>
+          <c:y val="5.6989830043032742E-2"/>
+          <c:w val="0.22368616636686292"/>
+          <c:h val="0.84236410671953621"/>
         </c:manualLayout>
       </c:layout>
       <c:overlay val="0"/>
@@ -1271,8 +1283,8 @@
         <a:bodyPr rot="0" spcFirstLastPara="1" vertOverflow="ellipsis" vert="horz" wrap="square" anchor="ctr" anchorCtr="1"/>
         <a:lstStyle/>
         <a:p>
-          <a:pPr algn="just">
-            <a:defRPr sz="2000" b="0" i="0" u="none" strike="noStrike" kern="0" baseline="0">
+          <a:pPr>
+            <a:defRPr sz="2000" b="0" i="0" u="none" strike="noStrike" kern="1200" baseline="0">
               <a:solidFill>
                 <a:schemeClr val="tx1">
                   <a:lumMod val="65000"/>
@@ -1319,11 +1331,1282 @@
   <c:externalData r:id="rId3">
     <c:autoUpdate val="0"/>
   </c:externalData>
-  <c:userShapes r:id="rId4"/>
+</c:chartSpace>
+</file>
+
+<file path=ppt/charts/chart2.xml><?xml version="1.0" encoding="utf-8"?>
+<c:chartSpace xmlns:c="http://schemas.openxmlformats.org/drawingml/2006/chart" xmlns:a="http://schemas.openxmlformats.org/drawingml/2006/main" xmlns:r="http://schemas.openxmlformats.org/officeDocument/2006/relationships" xmlns:c16r2="http://schemas.microsoft.com/office/drawing/2015/06/chart">
+  <c:date1904 val="0"/>
+  <c:lang val="en-US"/>
+  <c:roundedCorners val="0"/>
+  <mc:AlternateContent xmlns:mc="http://schemas.openxmlformats.org/markup-compatibility/2006">
+    <mc:Choice xmlns:c14="http://schemas.microsoft.com/office/drawing/2007/8/2/chart" Requires="c14">
+      <c14:style val="102"/>
+    </mc:Choice>
+    <mc:Fallback>
+      <c:style val="2"/>
+    </mc:Fallback>
+  </mc:AlternateContent>
+  <c:chart>
+    <c:autoTitleDeleted val="1"/>
+    <c:plotArea>
+      <c:layout>
+        <c:manualLayout>
+          <c:layoutTarget val="inner"/>
+          <c:xMode val="edge"/>
+          <c:yMode val="edge"/>
+          <c:x val="5.6312431054813802E-2"/>
+          <c:y val="5.8480550407034114E-2"/>
+          <c:w val="0.68317861082582065"/>
+          <c:h val="0.84537450487200039"/>
+        </c:manualLayout>
+      </c:layout>
+      <c:barChart>
+        <c:barDir val="col"/>
+        <c:grouping val="percentStacked"/>
+        <c:varyColors val="0"/>
+        <c:ser>
+          <c:idx val="0"/>
+          <c:order val="0"/>
+          <c:tx>
+            <c:strRef>
+              <c:f>Sheet1!$A$2</c:f>
+              <c:strCache>
+                <c:ptCount val="1"/>
+                <c:pt idx="0">
+                  <c:v>Business Logic</c:v>
+                </c:pt>
+              </c:strCache>
+            </c:strRef>
+          </c:tx>
+          <c:spPr>
+            <a:solidFill>
+              <a:schemeClr val="bg2"/>
+            </a:solidFill>
+            <a:ln>
+              <a:noFill/>
+            </a:ln>
+            <a:effectLst/>
+          </c:spPr>
+          <c:invertIfNegative val="0"/>
+          <c:cat>
+            <c:strRef>
+              <c:f>Sheet1!$B$1:$G$1</c:f>
+              <c:strCache>
+                <c:ptCount val="6"/>
+                <c:pt idx="0">
+                  <c:v>2021</c:v>
+                </c:pt>
+                <c:pt idx="1">
+                  <c:v>2022</c:v>
+                </c:pt>
+                <c:pt idx="2">
+                  <c:v>2023</c:v>
+                </c:pt>
+                <c:pt idx="3">
+                  <c:v>2024</c:v>
+                </c:pt>
+                <c:pt idx="4">
+                  <c:v>Total</c:v>
+                </c:pt>
+                <c:pt idx="5">
+                  <c:v>Funds Lost</c:v>
+                </c:pt>
+              </c:strCache>
+            </c:strRef>
+          </c:cat>
+          <c:val>
+            <c:numRef>
+              <c:f>Sheet1!$B$2:$G$2</c:f>
+              <c:numCache>
+                <c:formatCode>General</c:formatCode>
+                <c:ptCount val="6"/>
+                <c:pt idx="0">
+                  <c:v>7</c:v>
+                </c:pt>
+                <c:pt idx="1">
+                  <c:v>21</c:v>
+                </c:pt>
+                <c:pt idx="2">
+                  <c:v>65</c:v>
+                </c:pt>
+                <c:pt idx="3">
+                  <c:v>58</c:v>
+                </c:pt>
+                <c:pt idx="4">
+                  <c:v>151</c:v>
+                </c:pt>
+                <c:pt idx="5">
+                  <c:v>524</c:v>
+                </c:pt>
+              </c:numCache>
+            </c:numRef>
+          </c:val>
+          <c:extLst>
+            <c:ext xmlns:c16="http://schemas.microsoft.com/office/drawing/2014/chart" uri="{C3380CC4-5D6E-409C-BE32-E72D297353CC}">
+              <c16:uniqueId val="{00000000-8114-4D0D-A8EE-972C953D9669}"/>
+            </c:ext>
+          </c:extLst>
+        </c:ser>
+        <c:ser>
+          <c:idx val="1"/>
+          <c:order val="1"/>
+          <c:tx>
+            <c:strRef>
+              <c:f>Sheet1!$A$3</c:f>
+              <c:strCache>
+                <c:ptCount val="1"/>
+                <c:pt idx="0">
+                  <c:v>Price Manipulation</c:v>
+                </c:pt>
+              </c:strCache>
+            </c:strRef>
+          </c:tx>
+          <c:spPr>
+            <a:solidFill>
+              <a:schemeClr val="bg2"/>
+            </a:solidFill>
+            <a:ln>
+              <a:noFill/>
+            </a:ln>
+            <a:effectLst/>
+          </c:spPr>
+          <c:invertIfNegative val="0"/>
+          <c:cat>
+            <c:strRef>
+              <c:f>Sheet1!$B$1:$G$1</c:f>
+              <c:strCache>
+                <c:ptCount val="6"/>
+                <c:pt idx="0">
+                  <c:v>2021</c:v>
+                </c:pt>
+                <c:pt idx="1">
+                  <c:v>2022</c:v>
+                </c:pt>
+                <c:pt idx="2">
+                  <c:v>2023</c:v>
+                </c:pt>
+                <c:pt idx="3">
+                  <c:v>2024</c:v>
+                </c:pt>
+                <c:pt idx="4">
+                  <c:v>Total</c:v>
+                </c:pt>
+                <c:pt idx="5">
+                  <c:v>Funds Lost</c:v>
+                </c:pt>
+              </c:strCache>
+            </c:strRef>
+          </c:cat>
+          <c:val>
+            <c:numRef>
+              <c:f>Sheet1!$B$3:$G$3</c:f>
+              <c:numCache>
+                <c:formatCode>General</c:formatCode>
+                <c:ptCount val="6"/>
+                <c:pt idx="0">
+                  <c:v>10</c:v>
+                </c:pt>
+                <c:pt idx="1">
+                  <c:v>35</c:v>
+                </c:pt>
+                <c:pt idx="2">
+                  <c:v>42</c:v>
+                </c:pt>
+                <c:pt idx="3">
+                  <c:v>21</c:v>
+                </c:pt>
+                <c:pt idx="4">
+                  <c:v>108</c:v>
+                </c:pt>
+                <c:pt idx="5">
+                  <c:v>422</c:v>
+                </c:pt>
+              </c:numCache>
+            </c:numRef>
+          </c:val>
+          <c:extLst>
+            <c:ext xmlns:c16="http://schemas.microsoft.com/office/drawing/2014/chart" uri="{C3380CC4-5D6E-409C-BE32-E72D297353CC}">
+              <c16:uniqueId val="{00000001-8114-4D0D-A8EE-972C953D9669}"/>
+            </c:ext>
+          </c:extLst>
+        </c:ser>
+        <c:ser>
+          <c:idx val="2"/>
+          <c:order val="2"/>
+          <c:tx>
+            <c:strRef>
+              <c:f>Sheet1!$A$4</c:f>
+              <c:strCache>
+                <c:ptCount val="1"/>
+                <c:pt idx="0">
+                  <c:v>Access Control</c:v>
+                </c:pt>
+              </c:strCache>
+            </c:strRef>
+          </c:tx>
+          <c:spPr>
+            <a:solidFill>
+              <a:schemeClr val="bg2"/>
+            </a:solidFill>
+            <a:ln>
+              <a:noFill/>
+            </a:ln>
+            <a:effectLst/>
+          </c:spPr>
+          <c:invertIfNegative val="0"/>
+          <c:cat>
+            <c:strRef>
+              <c:f>Sheet1!$B$1:$G$1</c:f>
+              <c:strCache>
+                <c:ptCount val="6"/>
+                <c:pt idx="0">
+                  <c:v>2021</c:v>
+                </c:pt>
+                <c:pt idx="1">
+                  <c:v>2022</c:v>
+                </c:pt>
+                <c:pt idx="2">
+                  <c:v>2023</c:v>
+                </c:pt>
+                <c:pt idx="3">
+                  <c:v>2024</c:v>
+                </c:pt>
+                <c:pt idx="4">
+                  <c:v>Total</c:v>
+                </c:pt>
+                <c:pt idx="5">
+                  <c:v>Funds Lost</c:v>
+                </c:pt>
+              </c:strCache>
+            </c:strRef>
+          </c:cat>
+          <c:val>
+            <c:numRef>
+              <c:f>Sheet1!$B$4:$G$4</c:f>
+              <c:numCache>
+                <c:formatCode>General</c:formatCode>
+                <c:ptCount val="6"/>
+                <c:pt idx="0">
+                  <c:v>3</c:v>
+                </c:pt>
+                <c:pt idx="1">
+                  <c:v>16</c:v>
+                </c:pt>
+                <c:pt idx="2">
+                  <c:v>22</c:v>
+                </c:pt>
+                <c:pt idx="3">
+                  <c:v>35</c:v>
+                </c:pt>
+                <c:pt idx="4">
+                  <c:v>76</c:v>
+                </c:pt>
+                <c:pt idx="5">
+                  <c:v>60.5</c:v>
+                </c:pt>
+              </c:numCache>
+            </c:numRef>
+          </c:val>
+          <c:extLst>
+            <c:ext xmlns:c16="http://schemas.microsoft.com/office/drawing/2014/chart" uri="{C3380CC4-5D6E-409C-BE32-E72D297353CC}">
+              <c16:uniqueId val="{00000002-8114-4D0D-A8EE-972C953D9669}"/>
+            </c:ext>
+          </c:extLst>
+        </c:ser>
+        <c:ser>
+          <c:idx val="3"/>
+          <c:order val="3"/>
+          <c:tx>
+            <c:strRef>
+              <c:f>Sheet1!$A$5</c:f>
+              <c:strCache>
+                <c:ptCount val="1"/>
+                <c:pt idx="0">
+                  <c:v>Reentrancy</c:v>
+                </c:pt>
+              </c:strCache>
+            </c:strRef>
+          </c:tx>
+          <c:spPr>
+            <a:solidFill>
+              <a:schemeClr val="accent4"/>
+            </a:solidFill>
+            <a:ln>
+              <a:noFill/>
+            </a:ln>
+            <a:effectLst/>
+          </c:spPr>
+          <c:invertIfNegative val="0"/>
+          <c:cat>
+            <c:strRef>
+              <c:f>Sheet1!$B$1:$G$1</c:f>
+              <c:strCache>
+                <c:ptCount val="6"/>
+                <c:pt idx="0">
+                  <c:v>2021</c:v>
+                </c:pt>
+                <c:pt idx="1">
+                  <c:v>2022</c:v>
+                </c:pt>
+                <c:pt idx="2">
+                  <c:v>2023</c:v>
+                </c:pt>
+                <c:pt idx="3">
+                  <c:v>2024</c:v>
+                </c:pt>
+                <c:pt idx="4">
+                  <c:v>Total</c:v>
+                </c:pt>
+                <c:pt idx="5">
+                  <c:v>Funds Lost</c:v>
+                </c:pt>
+              </c:strCache>
+            </c:strRef>
+          </c:cat>
+          <c:val>
+            <c:numRef>
+              <c:f>Sheet1!$B$5:$G$5</c:f>
+              <c:numCache>
+                <c:formatCode>General</c:formatCode>
+                <c:ptCount val="6"/>
+                <c:pt idx="0">
+                  <c:v>9</c:v>
+                </c:pt>
+                <c:pt idx="1">
+                  <c:v>13</c:v>
+                </c:pt>
+                <c:pt idx="2">
+                  <c:v>17</c:v>
+                </c:pt>
+                <c:pt idx="3">
+                  <c:v>15</c:v>
+                </c:pt>
+                <c:pt idx="4">
+                  <c:v>54</c:v>
+                </c:pt>
+                <c:pt idx="5">
+                  <c:v>284</c:v>
+                </c:pt>
+              </c:numCache>
+            </c:numRef>
+          </c:val>
+          <c:extLst>
+            <c:ext xmlns:c16="http://schemas.microsoft.com/office/drawing/2014/chart" uri="{C3380CC4-5D6E-409C-BE32-E72D297353CC}">
+              <c16:uniqueId val="{00000003-8114-4D0D-A8EE-972C953D9669}"/>
+            </c:ext>
+          </c:extLst>
+        </c:ser>
+        <c:ser>
+          <c:idx val="4"/>
+          <c:order val="4"/>
+          <c:tx>
+            <c:strRef>
+              <c:f>Sheet1!$A$6</c:f>
+              <c:strCache>
+                <c:ptCount val="1"/>
+                <c:pt idx="0">
+                  <c:v>Input Validation</c:v>
+                </c:pt>
+              </c:strCache>
+            </c:strRef>
+          </c:tx>
+          <c:spPr>
+            <a:solidFill>
+              <a:schemeClr val="bg2"/>
+            </a:solidFill>
+            <a:ln>
+              <a:noFill/>
+            </a:ln>
+            <a:effectLst/>
+          </c:spPr>
+          <c:invertIfNegative val="0"/>
+          <c:cat>
+            <c:strRef>
+              <c:f>Sheet1!$B$1:$G$1</c:f>
+              <c:strCache>
+                <c:ptCount val="6"/>
+                <c:pt idx="0">
+                  <c:v>2021</c:v>
+                </c:pt>
+                <c:pt idx="1">
+                  <c:v>2022</c:v>
+                </c:pt>
+                <c:pt idx="2">
+                  <c:v>2023</c:v>
+                </c:pt>
+                <c:pt idx="3">
+                  <c:v>2024</c:v>
+                </c:pt>
+                <c:pt idx="4">
+                  <c:v>Total</c:v>
+                </c:pt>
+                <c:pt idx="5">
+                  <c:v>Funds Lost</c:v>
+                </c:pt>
+              </c:strCache>
+            </c:strRef>
+          </c:cat>
+          <c:val>
+            <c:numRef>
+              <c:f>Sheet1!$B$6:$G$6</c:f>
+              <c:numCache>
+                <c:formatCode>General</c:formatCode>
+                <c:ptCount val="6"/>
+                <c:pt idx="0">
+                  <c:v>2</c:v>
+                </c:pt>
+                <c:pt idx="1">
+                  <c:v>10</c:v>
+                </c:pt>
+                <c:pt idx="2">
+                  <c:v>8</c:v>
+                </c:pt>
+                <c:pt idx="3">
+                  <c:v>18</c:v>
+                </c:pt>
+                <c:pt idx="4">
+                  <c:v>38</c:v>
+                </c:pt>
+                <c:pt idx="5">
+                  <c:v>141.5</c:v>
+                </c:pt>
+              </c:numCache>
+            </c:numRef>
+          </c:val>
+          <c:extLst>
+            <c:ext xmlns:c16="http://schemas.microsoft.com/office/drawing/2014/chart" uri="{C3380CC4-5D6E-409C-BE32-E72D297353CC}">
+              <c16:uniqueId val="{0000000A-8114-4D0D-A8EE-972C953D9669}"/>
+            </c:ext>
+          </c:extLst>
+        </c:ser>
+        <c:ser>
+          <c:idx val="5"/>
+          <c:order val="5"/>
+          <c:tx>
+            <c:strRef>
+              <c:f>Sheet1!$A$7</c:f>
+              <c:strCache>
+                <c:ptCount val="1"/>
+                <c:pt idx="0">
+                  <c:v>Precision</c:v>
+                </c:pt>
+              </c:strCache>
+            </c:strRef>
+          </c:tx>
+          <c:spPr>
+            <a:solidFill>
+              <a:schemeClr val="bg2"/>
+            </a:solidFill>
+            <a:ln>
+              <a:noFill/>
+            </a:ln>
+            <a:effectLst/>
+          </c:spPr>
+          <c:invertIfNegative val="0"/>
+          <c:cat>
+            <c:strRef>
+              <c:f>Sheet1!$B$1:$G$1</c:f>
+              <c:strCache>
+                <c:ptCount val="6"/>
+                <c:pt idx="0">
+                  <c:v>2021</c:v>
+                </c:pt>
+                <c:pt idx="1">
+                  <c:v>2022</c:v>
+                </c:pt>
+                <c:pt idx="2">
+                  <c:v>2023</c:v>
+                </c:pt>
+                <c:pt idx="3">
+                  <c:v>2024</c:v>
+                </c:pt>
+                <c:pt idx="4">
+                  <c:v>Total</c:v>
+                </c:pt>
+                <c:pt idx="5">
+                  <c:v>Funds Lost</c:v>
+                </c:pt>
+              </c:strCache>
+            </c:strRef>
+          </c:cat>
+          <c:val>
+            <c:numRef>
+              <c:f>Sheet1!$B$7:$G$7</c:f>
+              <c:numCache>
+                <c:formatCode>General</c:formatCode>
+                <c:ptCount val="6"/>
+                <c:pt idx="0">
+                  <c:v>5</c:v>
+                </c:pt>
+                <c:pt idx="1">
+                  <c:v>5</c:v>
+                </c:pt>
+                <c:pt idx="2">
+                  <c:v>18</c:v>
+                </c:pt>
+                <c:pt idx="3">
+                  <c:v>12</c:v>
+                </c:pt>
+                <c:pt idx="4">
+                  <c:v>40</c:v>
+                </c:pt>
+                <c:pt idx="5">
+                  <c:v>151.69999999999999</c:v>
+                </c:pt>
+              </c:numCache>
+            </c:numRef>
+          </c:val>
+          <c:extLst>
+            <c:ext xmlns:c16="http://schemas.microsoft.com/office/drawing/2014/chart" uri="{C3380CC4-5D6E-409C-BE32-E72D297353CC}">
+              <c16:uniqueId val="{00000000-3FAE-493D-997F-068EED26B0C5}"/>
+            </c:ext>
+          </c:extLst>
+        </c:ser>
+        <c:ser>
+          <c:idx val="6"/>
+          <c:order val="6"/>
+          <c:tx>
+            <c:strRef>
+              <c:f>Sheet1!$A$8</c:f>
+              <c:strCache>
+                <c:ptCount val="1"/>
+                <c:pt idx="0">
+                  <c:v>Arbitrary Call</c:v>
+                </c:pt>
+              </c:strCache>
+            </c:strRef>
+          </c:tx>
+          <c:spPr>
+            <a:solidFill>
+              <a:schemeClr val="bg2"/>
+            </a:solidFill>
+            <a:ln>
+              <a:noFill/>
+            </a:ln>
+            <a:effectLst/>
+          </c:spPr>
+          <c:invertIfNegative val="0"/>
+          <c:cat>
+            <c:strRef>
+              <c:f>Sheet1!$B$1:$G$1</c:f>
+              <c:strCache>
+                <c:ptCount val="6"/>
+                <c:pt idx="0">
+                  <c:v>2021</c:v>
+                </c:pt>
+                <c:pt idx="1">
+                  <c:v>2022</c:v>
+                </c:pt>
+                <c:pt idx="2">
+                  <c:v>2023</c:v>
+                </c:pt>
+                <c:pt idx="3">
+                  <c:v>2024</c:v>
+                </c:pt>
+                <c:pt idx="4">
+                  <c:v>Total</c:v>
+                </c:pt>
+                <c:pt idx="5">
+                  <c:v>Funds Lost</c:v>
+                </c:pt>
+              </c:strCache>
+            </c:strRef>
+          </c:cat>
+          <c:val>
+            <c:numRef>
+              <c:f>Sheet1!$B$8:$G$8</c:f>
+              <c:numCache>
+                <c:formatCode>General</c:formatCode>
+                <c:ptCount val="6"/>
+                <c:pt idx="0">
+                  <c:v>0</c:v>
+                </c:pt>
+                <c:pt idx="1">
+                  <c:v>8</c:v>
+                </c:pt>
+                <c:pt idx="2">
+                  <c:v>9</c:v>
+                </c:pt>
+                <c:pt idx="3">
+                  <c:v>9</c:v>
+                </c:pt>
+                <c:pt idx="4">
+                  <c:v>26</c:v>
+                </c:pt>
+                <c:pt idx="5">
+                  <c:v>15.7</c:v>
+                </c:pt>
+              </c:numCache>
+            </c:numRef>
+          </c:val>
+          <c:extLst>
+            <c:ext xmlns:c16="http://schemas.microsoft.com/office/drawing/2014/chart" uri="{C3380CC4-5D6E-409C-BE32-E72D297353CC}">
+              <c16:uniqueId val="{00000001-3FAE-493D-997F-068EED26B0C5}"/>
+            </c:ext>
+          </c:extLst>
+        </c:ser>
+        <c:ser>
+          <c:idx val="7"/>
+          <c:order val="7"/>
+          <c:tx>
+            <c:strRef>
+              <c:f>Sheet1!$A$9</c:f>
+              <c:strCache>
+                <c:ptCount val="1"/>
+                <c:pt idx="0">
+                  <c:v>Token Design</c:v>
+                </c:pt>
+              </c:strCache>
+            </c:strRef>
+          </c:tx>
+          <c:spPr>
+            <a:solidFill>
+              <a:schemeClr val="bg2"/>
+            </a:solidFill>
+            <a:ln>
+              <a:noFill/>
+            </a:ln>
+            <a:effectLst/>
+          </c:spPr>
+          <c:invertIfNegative val="0"/>
+          <c:cat>
+            <c:strRef>
+              <c:f>Sheet1!$B$1:$G$1</c:f>
+              <c:strCache>
+                <c:ptCount val="6"/>
+                <c:pt idx="0">
+                  <c:v>2021</c:v>
+                </c:pt>
+                <c:pt idx="1">
+                  <c:v>2022</c:v>
+                </c:pt>
+                <c:pt idx="2">
+                  <c:v>2023</c:v>
+                </c:pt>
+                <c:pt idx="3">
+                  <c:v>2024</c:v>
+                </c:pt>
+                <c:pt idx="4">
+                  <c:v>Total</c:v>
+                </c:pt>
+                <c:pt idx="5">
+                  <c:v>Funds Lost</c:v>
+                </c:pt>
+              </c:strCache>
+            </c:strRef>
+          </c:cat>
+          <c:val>
+            <c:numRef>
+              <c:f>Sheet1!$B$9:$G$9</c:f>
+              <c:numCache>
+                <c:formatCode>General</c:formatCode>
+                <c:ptCount val="6"/>
+                <c:pt idx="0">
+                  <c:v>3</c:v>
+                </c:pt>
+                <c:pt idx="1">
+                  <c:v>4</c:v>
+                </c:pt>
+                <c:pt idx="2">
+                  <c:v>18</c:v>
+                </c:pt>
+                <c:pt idx="3">
+                  <c:v>3</c:v>
+                </c:pt>
+                <c:pt idx="4">
+                  <c:v>28</c:v>
+                </c:pt>
+                <c:pt idx="5">
+                  <c:v>5.6310000000000002</c:v>
+                </c:pt>
+              </c:numCache>
+            </c:numRef>
+          </c:val>
+          <c:extLst>
+            <c:ext xmlns:c16="http://schemas.microsoft.com/office/drawing/2014/chart" uri="{C3380CC4-5D6E-409C-BE32-E72D297353CC}">
+              <c16:uniqueId val="{00000002-3FAE-493D-997F-068EED26B0C5}"/>
+            </c:ext>
+          </c:extLst>
+        </c:ser>
+        <c:ser>
+          <c:idx val="8"/>
+          <c:order val="8"/>
+          <c:tx>
+            <c:strRef>
+              <c:f>Sheet1!$A$10</c:f>
+              <c:strCache>
+                <c:ptCount val="1"/>
+                <c:pt idx="0">
+                  <c:v>Slippage</c:v>
+                </c:pt>
+              </c:strCache>
+            </c:strRef>
+          </c:tx>
+          <c:spPr>
+            <a:solidFill>
+              <a:schemeClr val="bg2"/>
+            </a:solidFill>
+            <a:ln>
+              <a:noFill/>
+            </a:ln>
+            <a:effectLst/>
+          </c:spPr>
+          <c:invertIfNegative val="0"/>
+          <c:cat>
+            <c:strRef>
+              <c:f>Sheet1!$B$1:$G$1</c:f>
+              <c:strCache>
+                <c:ptCount val="6"/>
+                <c:pt idx="0">
+                  <c:v>2021</c:v>
+                </c:pt>
+                <c:pt idx="1">
+                  <c:v>2022</c:v>
+                </c:pt>
+                <c:pt idx="2">
+                  <c:v>2023</c:v>
+                </c:pt>
+                <c:pt idx="3">
+                  <c:v>2024</c:v>
+                </c:pt>
+                <c:pt idx="4">
+                  <c:v>Total</c:v>
+                </c:pt>
+                <c:pt idx="5">
+                  <c:v>Funds Lost</c:v>
+                </c:pt>
+              </c:strCache>
+            </c:strRef>
+          </c:cat>
+          <c:val>
+            <c:numRef>
+              <c:f>Sheet1!$B$10:$G$10</c:f>
+              <c:numCache>
+                <c:formatCode>General</c:formatCode>
+                <c:ptCount val="6"/>
+                <c:pt idx="0">
+                  <c:v>2</c:v>
+                </c:pt>
+                <c:pt idx="1">
+                  <c:v>0</c:v>
+                </c:pt>
+                <c:pt idx="2">
+                  <c:v>9</c:v>
+                </c:pt>
+                <c:pt idx="3">
+                  <c:v>2</c:v>
+                </c:pt>
+                <c:pt idx="4">
+                  <c:v>13</c:v>
+                </c:pt>
+                <c:pt idx="5">
+                  <c:v>11.754</c:v>
+                </c:pt>
+              </c:numCache>
+            </c:numRef>
+          </c:val>
+          <c:extLst>
+            <c:ext xmlns:c16="http://schemas.microsoft.com/office/drawing/2014/chart" uri="{C3380CC4-5D6E-409C-BE32-E72D297353CC}">
+              <c16:uniqueId val="{00000003-3FAE-493D-997F-068EED26B0C5}"/>
+            </c:ext>
+          </c:extLst>
+        </c:ser>
+        <c:ser>
+          <c:idx val="9"/>
+          <c:order val="9"/>
+          <c:tx>
+            <c:strRef>
+              <c:f>Sheet1!$A$11</c:f>
+              <c:strCache>
+                <c:ptCount val="1"/>
+                <c:pt idx="0">
+                  <c:v>Other</c:v>
+                </c:pt>
+              </c:strCache>
+            </c:strRef>
+          </c:tx>
+          <c:spPr>
+            <a:solidFill>
+              <a:schemeClr val="bg2"/>
+            </a:solidFill>
+            <a:ln>
+              <a:noFill/>
+            </a:ln>
+            <a:effectLst/>
+          </c:spPr>
+          <c:invertIfNegative val="0"/>
+          <c:cat>
+            <c:strRef>
+              <c:f>Sheet1!$B$1:$G$1</c:f>
+              <c:strCache>
+                <c:ptCount val="6"/>
+                <c:pt idx="0">
+                  <c:v>2021</c:v>
+                </c:pt>
+                <c:pt idx="1">
+                  <c:v>2022</c:v>
+                </c:pt>
+                <c:pt idx="2">
+                  <c:v>2023</c:v>
+                </c:pt>
+                <c:pt idx="3">
+                  <c:v>2024</c:v>
+                </c:pt>
+                <c:pt idx="4">
+                  <c:v>Total</c:v>
+                </c:pt>
+                <c:pt idx="5">
+                  <c:v>Funds Lost</c:v>
+                </c:pt>
+              </c:strCache>
+            </c:strRef>
+          </c:cat>
+          <c:val>
+            <c:numRef>
+              <c:f>Sheet1!$B$11:$G$11</c:f>
+              <c:numCache>
+                <c:formatCode>General</c:formatCode>
+                <c:ptCount val="6"/>
+                <c:pt idx="0">
+                  <c:v>0</c:v>
+                </c:pt>
+                <c:pt idx="1">
+                  <c:v>5</c:v>
+                </c:pt>
+                <c:pt idx="2">
+                  <c:v>5</c:v>
+                </c:pt>
+                <c:pt idx="3">
+                  <c:v>5</c:v>
+                </c:pt>
+                <c:pt idx="4">
+                  <c:v>15</c:v>
+                </c:pt>
+                <c:pt idx="5">
+                  <c:v>54.4</c:v>
+                </c:pt>
+              </c:numCache>
+            </c:numRef>
+          </c:val>
+          <c:extLst>
+            <c:ext xmlns:c16="http://schemas.microsoft.com/office/drawing/2014/chart" uri="{C3380CC4-5D6E-409C-BE32-E72D297353CC}">
+              <c16:uniqueId val="{00000004-3FAE-493D-997F-068EED26B0C5}"/>
+            </c:ext>
+          </c:extLst>
+        </c:ser>
+        <c:dLbls>
+          <c:showLegendKey val="0"/>
+          <c:showVal val="0"/>
+          <c:showCatName val="0"/>
+          <c:showSerName val="0"/>
+          <c:showPercent val="0"/>
+          <c:showBubbleSize val="0"/>
+        </c:dLbls>
+        <c:gapWidth val="155"/>
+        <c:overlap val="100"/>
+        <c:axId val="1477104384"/>
+        <c:axId val="1477098624"/>
+      </c:barChart>
+      <c:catAx>
+        <c:axId val="1477104384"/>
+        <c:scaling>
+          <c:orientation val="minMax"/>
+        </c:scaling>
+        <c:delete val="0"/>
+        <c:axPos val="b"/>
+        <c:numFmt formatCode="General" sourceLinked="1"/>
+        <c:majorTickMark val="none"/>
+        <c:minorTickMark val="none"/>
+        <c:tickLblPos val="nextTo"/>
+        <c:spPr>
+          <a:noFill/>
+          <a:ln w="9525" cap="flat" cmpd="sng" algn="ctr">
+            <a:solidFill>
+              <a:schemeClr val="tx2"/>
+            </a:solidFill>
+            <a:round/>
+          </a:ln>
+          <a:effectLst/>
+        </c:spPr>
+        <c:txPr>
+          <a:bodyPr rot="-60000000" spcFirstLastPara="1" vertOverflow="ellipsis" vert="horz" wrap="square" anchor="ctr" anchorCtr="1"/>
+          <a:lstStyle/>
+          <a:p>
+            <a:pPr>
+              <a:defRPr sz="2000" b="0" i="0" u="none" strike="noStrike" kern="1200" baseline="0">
+                <a:solidFill>
+                  <a:schemeClr val="tx2"/>
+                </a:solidFill>
+                <a:latin typeface="+mn-lt"/>
+                <a:ea typeface="+mn-ea"/>
+                <a:cs typeface="+mn-cs"/>
+              </a:defRPr>
+            </a:pPr>
+            <a:endParaRPr lang="en-CH"/>
+          </a:p>
+        </c:txPr>
+        <c:crossAx val="1477098624"/>
+        <c:crosses val="autoZero"/>
+        <c:auto val="1"/>
+        <c:lblAlgn val="ctr"/>
+        <c:lblOffset val="100"/>
+        <c:noMultiLvlLbl val="0"/>
+      </c:catAx>
+      <c:valAx>
+        <c:axId val="1477098624"/>
+        <c:scaling>
+          <c:orientation val="minMax"/>
+        </c:scaling>
+        <c:delete val="0"/>
+        <c:axPos val="l"/>
+        <c:majorGridlines>
+          <c:spPr>
+            <a:ln w="9525" cap="flat" cmpd="sng" algn="ctr">
+              <a:solidFill>
+                <a:schemeClr val="tx2"/>
+              </a:solidFill>
+              <a:round/>
+            </a:ln>
+            <a:effectLst/>
+          </c:spPr>
+        </c:majorGridlines>
+        <c:numFmt formatCode="0%" sourceLinked="1"/>
+        <c:majorTickMark val="none"/>
+        <c:minorTickMark val="none"/>
+        <c:tickLblPos val="nextTo"/>
+        <c:spPr>
+          <a:noFill/>
+          <a:ln>
+            <a:noFill/>
+          </a:ln>
+          <a:effectLst/>
+        </c:spPr>
+        <c:txPr>
+          <a:bodyPr rot="-60000000" spcFirstLastPara="1" vertOverflow="ellipsis" vert="horz" wrap="square" anchor="ctr" anchorCtr="1"/>
+          <a:lstStyle/>
+          <a:p>
+            <a:pPr>
+              <a:defRPr sz="1600" b="0" i="0" u="none" strike="noStrike" kern="1200" baseline="0">
+                <a:solidFill>
+                  <a:schemeClr val="tx2"/>
+                </a:solidFill>
+                <a:latin typeface="+mn-lt"/>
+                <a:ea typeface="+mn-ea"/>
+                <a:cs typeface="+mn-cs"/>
+              </a:defRPr>
+            </a:pPr>
+            <a:endParaRPr lang="en-CH"/>
+          </a:p>
+        </c:txPr>
+        <c:crossAx val="1477104384"/>
+        <c:crosses val="autoZero"/>
+        <c:crossBetween val="between"/>
+      </c:valAx>
+      <c:spPr>
+        <a:noFill/>
+        <a:ln>
+          <a:noFill/>
+        </a:ln>
+        <a:effectLst/>
+      </c:spPr>
+    </c:plotArea>
+    <c:legend>
+      <c:legendPos val="r"/>
+      <c:legendEntry>
+        <c:idx val="0"/>
+        <c:txPr>
+          <a:bodyPr rot="0" spcFirstLastPara="1" vertOverflow="ellipsis" vert="horz" wrap="square" anchor="ctr" anchorCtr="1"/>
+          <a:lstStyle/>
+          <a:p>
+            <a:pPr>
+              <a:defRPr sz="2000" b="0" i="0" u="none" strike="noStrike" kern="1200" baseline="0">
+                <a:solidFill>
+                  <a:schemeClr val="tx2"/>
+                </a:solidFill>
+                <a:latin typeface="+mn-lt"/>
+                <a:ea typeface="+mn-ea"/>
+                <a:cs typeface="+mn-cs"/>
+              </a:defRPr>
+            </a:pPr>
+            <a:endParaRPr lang="en-CH"/>
+          </a:p>
+        </c:txPr>
+      </c:legendEntry>
+      <c:legendEntry>
+        <c:idx val="1"/>
+        <c:txPr>
+          <a:bodyPr rot="0" spcFirstLastPara="1" vertOverflow="ellipsis" vert="horz" wrap="square" anchor="ctr" anchorCtr="1"/>
+          <a:lstStyle/>
+          <a:p>
+            <a:pPr>
+              <a:defRPr sz="2000" b="0" i="0" u="none" strike="noStrike" kern="1200" baseline="0">
+                <a:solidFill>
+                  <a:schemeClr val="tx2"/>
+                </a:solidFill>
+                <a:latin typeface="+mn-lt"/>
+                <a:ea typeface="+mn-ea"/>
+                <a:cs typeface="+mn-cs"/>
+              </a:defRPr>
+            </a:pPr>
+            <a:endParaRPr lang="en-CH"/>
+          </a:p>
+        </c:txPr>
+      </c:legendEntry>
+      <c:legendEntry>
+        <c:idx val="2"/>
+        <c:txPr>
+          <a:bodyPr rot="0" spcFirstLastPara="1" vertOverflow="ellipsis" vert="horz" wrap="square" anchor="ctr" anchorCtr="1"/>
+          <a:lstStyle/>
+          <a:p>
+            <a:pPr>
+              <a:defRPr sz="2000" b="0" i="0" u="none" strike="noStrike" kern="1200" baseline="0">
+                <a:solidFill>
+                  <a:schemeClr val="tx2"/>
+                </a:solidFill>
+                <a:latin typeface="+mn-lt"/>
+                <a:ea typeface="+mn-ea"/>
+                <a:cs typeface="+mn-cs"/>
+              </a:defRPr>
+            </a:pPr>
+            <a:endParaRPr lang="en-CH"/>
+          </a:p>
+        </c:txPr>
+      </c:legendEntry>
+      <c:legendEntry>
+        <c:idx val="3"/>
+        <c:txPr>
+          <a:bodyPr rot="0" spcFirstLastPara="1" vertOverflow="ellipsis" vert="horz" wrap="square" anchor="ctr" anchorCtr="1"/>
+          <a:lstStyle/>
+          <a:p>
+            <a:pPr>
+              <a:defRPr sz="2000" b="0" i="0" u="none" strike="noStrike" kern="1200" baseline="0">
+                <a:solidFill>
+                  <a:schemeClr val="tx2"/>
+                </a:solidFill>
+                <a:latin typeface="+mn-lt"/>
+                <a:ea typeface="+mn-ea"/>
+                <a:cs typeface="+mn-cs"/>
+              </a:defRPr>
+            </a:pPr>
+            <a:endParaRPr lang="en-CH"/>
+          </a:p>
+        </c:txPr>
+      </c:legendEntry>
+      <c:legendEntry>
+        <c:idx val="4"/>
+        <c:txPr>
+          <a:bodyPr rot="0" spcFirstLastPara="1" vertOverflow="ellipsis" vert="horz" wrap="square" anchor="ctr" anchorCtr="1"/>
+          <a:lstStyle/>
+          <a:p>
+            <a:pPr>
+              <a:defRPr sz="2000" b="0" i="0" u="none" strike="noStrike" kern="1200" baseline="0">
+                <a:solidFill>
+                  <a:schemeClr val="tx2"/>
+                </a:solidFill>
+                <a:latin typeface="+mn-lt"/>
+                <a:ea typeface="+mn-ea"/>
+                <a:cs typeface="+mn-cs"/>
+              </a:defRPr>
+            </a:pPr>
+            <a:endParaRPr lang="en-CH"/>
+          </a:p>
+        </c:txPr>
+      </c:legendEntry>
+      <c:legendEntry>
+        <c:idx val="5"/>
+        <c:txPr>
+          <a:bodyPr rot="0" spcFirstLastPara="1" vertOverflow="ellipsis" vert="horz" wrap="square" anchor="ctr" anchorCtr="1"/>
+          <a:lstStyle/>
+          <a:p>
+            <a:pPr>
+              <a:defRPr sz="2000" b="0" i="0" u="none" strike="noStrike" kern="1200" baseline="0">
+                <a:solidFill>
+                  <a:schemeClr val="tx2"/>
+                </a:solidFill>
+                <a:latin typeface="+mn-lt"/>
+                <a:ea typeface="+mn-ea"/>
+                <a:cs typeface="+mn-cs"/>
+              </a:defRPr>
+            </a:pPr>
+            <a:endParaRPr lang="en-CH"/>
+          </a:p>
+        </c:txPr>
+      </c:legendEntry>
+      <c:legendEntry>
+        <c:idx val="7"/>
+        <c:txPr>
+          <a:bodyPr rot="0" spcFirstLastPara="1" vertOverflow="ellipsis" vert="horz" wrap="square" anchor="ctr" anchorCtr="1"/>
+          <a:lstStyle/>
+          <a:p>
+            <a:pPr>
+              <a:defRPr sz="2000" b="0" i="0" u="none" strike="noStrike" kern="1200" baseline="0">
+                <a:solidFill>
+                  <a:schemeClr val="tx2"/>
+                </a:solidFill>
+                <a:latin typeface="+mn-lt"/>
+                <a:ea typeface="+mn-ea"/>
+                <a:cs typeface="+mn-cs"/>
+              </a:defRPr>
+            </a:pPr>
+            <a:endParaRPr lang="en-CH"/>
+          </a:p>
+        </c:txPr>
+      </c:legendEntry>
+      <c:legendEntry>
+        <c:idx val="8"/>
+        <c:txPr>
+          <a:bodyPr rot="0" spcFirstLastPara="1" vertOverflow="ellipsis" vert="horz" wrap="square" anchor="ctr" anchorCtr="1"/>
+          <a:lstStyle/>
+          <a:p>
+            <a:pPr>
+              <a:defRPr sz="2000" b="0" i="0" u="none" strike="noStrike" kern="1200" baseline="0">
+                <a:solidFill>
+                  <a:schemeClr val="tx2"/>
+                </a:solidFill>
+                <a:latin typeface="+mn-lt"/>
+                <a:ea typeface="+mn-ea"/>
+                <a:cs typeface="+mn-cs"/>
+              </a:defRPr>
+            </a:pPr>
+            <a:endParaRPr lang="en-CH"/>
+          </a:p>
+        </c:txPr>
+      </c:legendEntry>
+      <c:legendEntry>
+        <c:idx val="9"/>
+        <c:txPr>
+          <a:bodyPr rot="0" spcFirstLastPara="1" vertOverflow="ellipsis" vert="horz" wrap="square" anchor="ctr" anchorCtr="1"/>
+          <a:lstStyle/>
+          <a:p>
+            <a:pPr>
+              <a:defRPr sz="2000" b="0" i="0" u="none" strike="noStrike" kern="1200" baseline="0">
+                <a:solidFill>
+                  <a:schemeClr val="tx2"/>
+                </a:solidFill>
+                <a:latin typeface="+mn-lt"/>
+                <a:ea typeface="+mn-ea"/>
+                <a:cs typeface="+mn-cs"/>
+              </a:defRPr>
+            </a:pPr>
+            <a:endParaRPr lang="en-CH"/>
+          </a:p>
+        </c:txPr>
+      </c:legendEntry>
+      <c:layout>
+        <c:manualLayout>
+          <c:xMode val="edge"/>
+          <c:yMode val="edge"/>
+          <c:x val="0.76219961085865318"/>
+          <c:y val="5.6989830043032742E-2"/>
+          <c:w val="0.22368616636686292"/>
+          <c:h val="0.84236410671953621"/>
+        </c:manualLayout>
+      </c:layout>
+      <c:overlay val="0"/>
+      <c:spPr>
+        <a:noFill/>
+        <a:ln>
+          <a:noFill/>
+        </a:ln>
+        <a:effectLst/>
+      </c:spPr>
+      <c:txPr>
+        <a:bodyPr rot="0" spcFirstLastPara="1" vertOverflow="ellipsis" vert="horz" wrap="square" anchor="ctr" anchorCtr="1"/>
+        <a:lstStyle/>
+        <a:p>
+          <a:pPr>
+            <a:defRPr sz="2000" b="0" i="0" u="none" strike="noStrike" kern="1200" baseline="0">
+              <a:solidFill>
+                <a:schemeClr val="tx1">
+                  <a:lumMod val="65000"/>
+                  <a:lumOff val="35000"/>
+                </a:schemeClr>
+              </a:solidFill>
+              <a:latin typeface="+mn-lt"/>
+              <a:ea typeface="+mn-ea"/>
+              <a:cs typeface="+mn-cs"/>
+            </a:defRPr>
+          </a:pPr>
+          <a:endParaRPr lang="en-CH"/>
+        </a:p>
+      </c:txPr>
+    </c:legend>
+    <c:plotVisOnly val="1"/>
+    <c:dispBlanksAs val="gap"/>
+    <c:showDLblsOverMax val="0"/>
+    <c:extLst>
+      <c:ext xmlns:c16r3="http://schemas.microsoft.com/office/drawing/2017/03/chart" uri="{56B9EC1D-385E-4148-901F-78D8002777C0}">
+        <c16r3:dataDisplayOptions16>
+          <c16r3:dispNaAsBlank val="1"/>
+        </c16r3:dataDisplayOptions16>
+      </c:ext>
+    </c:extLst>
+  </c:chart>
+  <c:spPr>
+    <a:noFill/>
+    <a:ln>
+      <a:noFill/>
+    </a:ln>
+    <a:effectLst/>
+  </c:spPr>
+  <c:txPr>
+    <a:bodyPr/>
+    <a:lstStyle/>
+    <a:p>
+      <a:pPr>
+        <a:defRPr/>
+      </a:pPr>
+      <a:endParaRPr lang="en-CH"/>
+    </a:p>
+  </c:txPr>
+  <c:externalData r:id="rId3">
+    <c:autoUpdate val="0"/>
+  </c:externalData>
 </c:chartSpace>
 </file>
 
 <file path=ppt/charts/colors1.xml><?xml version="1.0" encoding="utf-8"?>
+<cs:colorStyle xmlns:cs="http://schemas.microsoft.com/office/drawing/2012/chartStyle" xmlns:a="http://schemas.openxmlformats.org/drawingml/2006/main" meth="cycle" id="10">
+  <a:schemeClr val="accent1"/>
+  <a:schemeClr val="accent2"/>
+  <a:schemeClr val="accent3"/>
+  <a:schemeClr val="accent4"/>
+  <a:schemeClr val="accent5"/>
+  <a:schemeClr val="accent6"/>
+  <cs:variation/>
+  <cs:variation>
+    <a:lumMod val="60000"/>
+  </cs:variation>
+  <cs:variation>
+    <a:lumMod val="80000"/>
+    <a:lumOff val="20000"/>
+  </cs:variation>
+  <cs:variation>
+    <a:lumMod val="80000"/>
+  </cs:variation>
+  <cs:variation>
+    <a:lumMod val="60000"/>
+    <a:lumOff val="40000"/>
+  </cs:variation>
+  <cs:variation>
+    <a:lumMod val="50000"/>
+  </cs:variation>
+  <cs:variation>
+    <a:lumMod val="70000"/>
+    <a:lumOff val="30000"/>
+  </cs:variation>
+  <cs:variation>
+    <a:lumMod val="70000"/>
+  </cs:variation>
+  <cs:variation>
+    <a:lumMod val="50000"/>
+    <a:lumOff val="50000"/>
+  </cs:variation>
+</cs:colorStyle>
+</file>
+
+<file path=ppt/charts/colors2.xml><?xml version="1.0" encoding="utf-8"?>
 <cs:colorStyle xmlns:cs="http://schemas.microsoft.com/office/drawing/2012/chartStyle" xmlns:a="http://schemas.openxmlformats.org/drawingml/2006/main" meth="cycle" id="10">
   <a:schemeClr val="accent1"/>
   <a:schemeClr val="accent2"/>
@@ -1868,331 +3151,509 @@
 </cs:chartStyle>
 </file>
 
-<file path=ppt/drawings/drawing1.xml><?xml version="1.0" encoding="utf-8"?>
-<c:userShapes xmlns:c="http://schemas.openxmlformats.org/drawingml/2006/chart">
-  <cdr:relSizeAnchor xmlns:cdr="http://schemas.openxmlformats.org/drawingml/2006/chartDrawing">
-    <cdr:from>
-      <cdr:x>0.70622</cdr:x>
-      <cdr:y>0.14155</cdr:y>
-    </cdr:from>
-    <cdr:to>
-      <cdr:x>0.78399</cdr:x>
-      <cdr:y>0.16971</cdr:y>
-    </cdr:to>
-    <cdr:cxnSp macro="">
-      <cdr:nvCxnSpPr>
-        <cdr:cNvPr id="29" name="Straight Connector 28">
-          <a:extLst xmlns:a="http://schemas.openxmlformats.org/drawingml/2006/main">
-            <a:ext uri="{FF2B5EF4-FFF2-40B4-BE49-F238E27FC236}">
-              <a16:creationId xmlns:a16="http://schemas.microsoft.com/office/drawing/2014/main" id="{FA86A381-7740-346A-433D-6DD445412B50}"/>
-            </a:ext>
-          </a:extLst>
-        </cdr:cNvPr>
-        <cdr:cNvCxnSpPr/>
-      </cdr:nvCxnSpPr>
-      <cdr:spPr>
-        <a:xfrm xmlns:a="http://schemas.openxmlformats.org/drawingml/2006/main">
-          <a:off x="7625500" y="615917"/>
-          <a:ext cx="839771" cy="122550"/>
-        </a:xfrm>
-        <a:prstGeom xmlns:a="http://schemas.openxmlformats.org/drawingml/2006/main" prst="line">
-          <a:avLst/>
-        </a:prstGeom>
-        <a:ln xmlns:a="http://schemas.openxmlformats.org/drawingml/2006/main">
-          <a:solidFill>
-            <a:schemeClr val="accent4">
-              <a:lumMod val="50000"/>
-            </a:schemeClr>
-          </a:solidFill>
-        </a:ln>
-      </cdr:spPr>
-      <cdr:style>
-        <a:lnRef xmlns:a="http://schemas.openxmlformats.org/drawingml/2006/main" idx="2">
-          <a:schemeClr val="accent4"/>
-        </a:lnRef>
-        <a:fillRef xmlns:a="http://schemas.openxmlformats.org/drawingml/2006/main" idx="0">
-          <a:schemeClr val="accent4"/>
-        </a:fillRef>
-        <a:effectRef xmlns:a="http://schemas.openxmlformats.org/drawingml/2006/main" idx="1">
-          <a:schemeClr val="accent4"/>
-        </a:effectRef>
-        <a:fontRef xmlns:a="http://schemas.openxmlformats.org/drawingml/2006/main" idx="minor">
-          <a:schemeClr val="tx1"/>
-        </a:fontRef>
-      </cdr:style>
-    </cdr:cxnSp>
-  </cdr:relSizeAnchor>
-  <cdr:relSizeAnchor xmlns:cdr="http://schemas.openxmlformats.org/drawingml/2006/chartDrawing">
-    <cdr:from>
-      <cdr:x>0.7036</cdr:x>
-      <cdr:y>0.75897</cdr:y>
-    </cdr:from>
-    <cdr:to>
-      <cdr:x>0.78487</cdr:x>
-      <cdr:y>0.88029</cdr:y>
-    </cdr:to>
-    <cdr:cxnSp macro="">
-      <cdr:nvCxnSpPr>
-        <cdr:cNvPr id="3" name="Straight Connector 2">
-          <a:extLst xmlns:a="http://schemas.openxmlformats.org/drawingml/2006/main">
-            <a:ext uri="{FF2B5EF4-FFF2-40B4-BE49-F238E27FC236}">
-              <a16:creationId xmlns:a16="http://schemas.microsoft.com/office/drawing/2014/main" id="{4BABB67D-12E2-3AEB-F98B-56A40E4E6524}"/>
-            </a:ext>
-          </a:extLst>
-        </cdr:cNvPr>
-        <cdr:cNvCxnSpPr/>
-      </cdr:nvCxnSpPr>
-      <cdr:spPr>
-        <a:xfrm xmlns:a="http://schemas.openxmlformats.org/drawingml/2006/main" flipH="1" flipV="1">
-          <a:off x="7597219" y="3302556"/>
-          <a:ext cx="877478" cy="527901"/>
-        </a:xfrm>
-        <a:prstGeom xmlns:a="http://schemas.openxmlformats.org/drawingml/2006/main" prst="line">
-          <a:avLst/>
-        </a:prstGeom>
-      </cdr:spPr>
-      <cdr:style>
-        <a:lnRef xmlns:a="http://schemas.openxmlformats.org/drawingml/2006/main" idx="2">
-          <a:schemeClr val="accent1"/>
-        </a:lnRef>
-        <a:fillRef xmlns:a="http://schemas.openxmlformats.org/drawingml/2006/main" idx="0">
-          <a:schemeClr val="accent1"/>
-        </a:fillRef>
-        <a:effectRef xmlns:a="http://schemas.openxmlformats.org/drawingml/2006/main" idx="1">
-          <a:schemeClr val="accent1"/>
-        </a:effectRef>
-        <a:fontRef xmlns:a="http://schemas.openxmlformats.org/drawingml/2006/main" idx="minor">
-          <a:schemeClr val="tx1"/>
-        </a:fontRef>
-      </cdr:style>
-    </cdr:cxnSp>
-  </cdr:relSizeAnchor>
-  <cdr:relSizeAnchor xmlns:cdr="http://schemas.openxmlformats.org/drawingml/2006/chartDrawing">
-    <cdr:from>
-      <cdr:x>0.7036</cdr:x>
-      <cdr:y>0.5705</cdr:y>
-    </cdr:from>
-    <cdr:to>
-      <cdr:x>0.78312</cdr:x>
-      <cdr:y>0.79797</cdr:y>
-    </cdr:to>
-    <cdr:cxnSp macro="">
-      <cdr:nvCxnSpPr>
-        <cdr:cNvPr id="5" name="Straight Connector 4">
-          <a:extLst xmlns:a="http://schemas.openxmlformats.org/drawingml/2006/main">
-            <a:ext uri="{FF2B5EF4-FFF2-40B4-BE49-F238E27FC236}">
-              <a16:creationId xmlns:a16="http://schemas.microsoft.com/office/drawing/2014/main" id="{3A7B1661-DCC7-C9CF-8462-103D15132469}"/>
-            </a:ext>
-          </a:extLst>
-        </cdr:cNvPr>
-        <cdr:cNvCxnSpPr/>
-      </cdr:nvCxnSpPr>
-      <cdr:spPr>
-        <a:xfrm xmlns:a="http://schemas.openxmlformats.org/drawingml/2006/main" flipH="1" flipV="1">
-          <a:off x="7597219" y="2482424"/>
-          <a:ext cx="858625" cy="989815"/>
-        </a:xfrm>
-        <a:prstGeom xmlns:a="http://schemas.openxmlformats.org/drawingml/2006/main" prst="line">
-          <a:avLst/>
-        </a:prstGeom>
-      </cdr:spPr>
-      <cdr:style>
-        <a:lnRef xmlns:a="http://schemas.openxmlformats.org/drawingml/2006/main" idx="2">
-          <a:schemeClr val="accent2"/>
-        </a:lnRef>
-        <a:fillRef xmlns:a="http://schemas.openxmlformats.org/drawingml/2006/main" idx="0">
-          <a:schemeClr val="accent2"/>
-        </a:fillRef>
-        <a:effectRef xmlns:a="http://schemas.openxmlformats.org/drawingml/2006/main" idx="1">
-          <a:schemeClr val="accent2"/>
-        </a:effectRef>
-        <a:fontRef xmlns:a="http://schemas.openxmlformats.org/drawingml/2006/main" idx="minor">
-          <a:schemeClr val="tx1"/>
-        </a:fontRef>
-      </cdr:style>
-    </cdr:cxnSp>
-  </cdr:relSizeAnchor>
-  <cdr:relSizeAnchor xmlns:cdr="http://schemas.openxmlformats.org/drawingml/2006/chartDrawing">
-    <cdr:from>
-      <cdr:x>0.7036</cdr:x>
-      <cdr:y>0.43835</cdr:y>
-    </cdr:from>
-    <cdr:to>
-      <cdr:x>0.78138</cdr:x>
-      <cdr:y>0.71998</cdr:y>
-    </cdr:to>
-    <cdr:cxnSp macro="">
-      <cdr:nvCxnSpPr>
-        <cdr:cNvPr id="7" name="Straight Connector 6">
-          <a:extLst xmlns:a="http://schemas.openxmlformats.org/drawingml/2006/main">
-            <a:ext uri="{FF2B5EF4-FFF2-40B4-BE49-F238E27FC236}">
-              <a16:creationId xmlns:a16="http://schemas.microsoft.com/office/drawing/2014/main" id="{CACB513A-484F-B314-A952-5AB194CBEEAD}"/>
-            </a:ext>
-          </a:extLst>
-        </cdr:cNvPr>
-        <cdr:cNvCxnSpPr/>
-      </cdr:nvCxnSpPr>
-      <cdr:spPr>
-        <a:xfrm xmlns:a="http://schemas.openxmlformats.org/drawingml/2006/main" flipH="1" flipV="1">
-          <a:off x="7597219" y="1907389"/>
-          <a:ext cx="839771" cy="1225485"/>
-        </a:xfrm>
-        <a:prstGeom xmlns:a="http://schemas.openxmlformats.org/drawingml/2006/main" prst="line">
-          <a:avLst/>
-        </a:prstGeom>
-      </cdr:spPr>
-      <cdr:style>
-        <a:lnRef xmlns:a="http://schemas.openxmlformats.org/drawingml/2006/main" idx="2">
-          <a:schemeClr val="accent3"/>
-        </a:lnRef>
-        <a:fillRef xmlns:a="http://schemas.openxmlformats.org/drawingml/2006/main" idx="0">
-          <a:schemeClr val="accent3"/>
-        </a:fillRef>
-        <a:effectRef xmlns:a="http://schemas.openxmlformats.org/drawingml/2006/main" idx="1">
-          <a:schemeClr val="accent3"/>
-        </a:effectRef>
-        <a:fontRef xmlns:a="http://schemas.openxmlformats.org/drawingml/2006/main" idx="minor">
-          <a:schemeClr val="tx1"/>
-        </a:fontRef>
-      </cdr:style>
-    </cdr:cxnSp>
-  </cdr:relSizeAnchor>
-  <cdr:relSizeAnchor xmlns:cdr="http://schemas.openxmlformats.org/drawingml/2006/chartDrawing">
-    <cdr:from>
-      <cdr:x>0.7036</cdr:x>
-      <cdr:y>0.34086</cdr:y>
-    </cdr:from>
-    <cdr:to>
-      <cdr:x>0.78138</cdr:x>
-      <cdr:y>0.63982</cdr:y>
-    </cdr:to>
-    <cdr:cxnSp macro="">
-      <cdr:nvCxnSpPr>
-        <cdr:cNvPr id="10" name="Straight Connector 9">
-          <a:extLst xmlns:a="http://schemas.openxmlformats.org/drawingml/2006/main">
-            <a:ext uri="{FF2B5EF4-FFF2-40B4-BE49-F238E27FC236}">
-              <a16:creationId xmlns:a16="http://schemas.microsoft.com/office/drawing/2014/main" id="{BE3C0216-CEE6-229F-B9FF-A0F69DCFC0CA}"/>
-            </a:ext>
-          </a:extLst>
-        </cdr:cNvPr>
-        <cdr:cNvCxnSpPr/>
-      </cdr:nvCxnSpPr>
-      <cdr:spPr>
-        <a:xfrm xmlns:a="http://schemas.openxmlformats.org/drawingml/2006/main" flipH="1" flipV="1">
-          <a:off x="7597219" y="1483183"/>
-          <a:ext cx="839771" cy="1300899"/>
-        </a:xfrm>
-        <a:prstGeom xmlns:a="http://schemas.openxmlformats.org/drawingml/2006/main" prst="line">
-          <a:avLst/>
-        </a:prstGeom>
-      </cdr:spPr>
-      <cdr:style>
-        <a:lnRef xmlns:a="http://schemas.openxmlformats.org/drawingml/2006/main" idx="2">
-          <a:schemeClr val="accent4"/>
-        </a:lnRef>
-        <a:fillRef xmlns:a="http://schemas.openxmlformats.org/drawingml/2006/main" idx="0">
-          <a:schemeClr val="accent4"/>
-        </a:fillRef>
-        <a:effectRef xmlns:a="http://schemas.openxmlformats.org/drawingml/2006/main" idx="1">
-          <a:schemeClr val="accent4"/>
-        </a:effectRef>
-        <a:fontRef xmlns:a="http://schemas.openxmlformats.org/drawingml/2006/main" idx="minor">
-          <a:schemeClr val="tx1"/>
-        </a:fontRef>
-      </cdr:style>
-    </cdr:cxnSp>
-  </cdr:relSizeAnchor>
-  <cdr:relSizeAnchor xmlns:cdr="http://schemas.openxmlformats.org/drawingml/2006/chartDrawing">
-    <cdr:from>
-      <cdr:x>0.7036</cdr:x>
-      <cdr:y>0.26503</cdr:y>
-    </cdr:from>
-    <cdr:to>
-      <cdr:x>0.78312</cdr:x>
-      <cdr:y>0.56833</cdr:y>
-    </cdr:to>
-    <cdr:cxnSp macro="">
-      <cdr:nvCxnSpPr>
-        <cdr:cNvPr id="12" name="Straight Connector 11">
-          <a:extLst xmlns:a="http://schemas.openxmlformats.org/drawingml/2006/main">
-            <a:ext uri="{FF2B5EF4-FFF2-40B4-BE49-F238E27FC236}">
-              <a16:creationId xmlns:a16="http://schemas.microsoft.com/office/drawing/2014/main" id="{902E92E2-E259-0EE3-6645-64B4F37D74AC}"/>
-            </a:ext>
-          </a:extLst>
-        </cdr:cNvPr>
-        <cdr:cNvCxnSpPr/>
-      </cdr:nvCxnSpPr>
-      <cdr:spPr>
-        <a:xfrm xmlns:a="http://schemas.openxmlformats.org/drawingml/2006/main" flipH="1" flipV="1">
-          <a:off x="7597219" y="1153245"/>
-          <a:ext cx="858625" cy="1319753"/>
-        </a:xfrm>
-        <a:prstGeom xmlns:a="http://schemas.openxmlformats.org/drawingml/2006/main" prst="line">
-          <a:avLst/>
-        </a:prstGeom>
-      </cdr:spPr>
-      <cdr:style>
-        <a:lnRef xmlns:a="http://schemas.openxmlformats.org/drawingml/2006/main" idx="2">
-          <a:schemeClr val="accent5"/>
-        </a:lnRef>
-        <a:fillRef xmlns:a="http://schemas.openxmlformats.org/drawingml/2006/main" idx="0">
-          <a:schemeClr val="accent5"/>
-        </a:fillRef>
-        <a:effectRef xmlns:a="http://schemas.openxmlformats.org/drawingml/2006/main" idx="1">
-          <a:schemeClr val="accent5"/>
-        </a:effectRef>
-        <a:fontRef xmlns:a="http://schemas.openxmlformats.org/drawingml/2006/main" idx="minor">
-          <a:schemeClr val="tx1"/>
-        </a:fontRef>
-      </cdr:style>
-    </cdr:cxnSp>
-  </cdr:relSizeAnchor>
-  <cdr:relSizeAnchor xmlns:cdr="http://schemas.openxmlformats.org/drawingml/2006/chartDrawing">
-    <cdr:from>
-      <cdr:x>0.7036</cdr:x>
-      <cdr:y>0.21954</cdr:y>
-    </cdr:from>
-    <cdr:to>
-      <cdr:x>0.78312</cdr:x>
-      <cdr:y>0.4865</cdr:y>
-    </cdr:to>
-    <cdr:cxnSp macro="">
-      <cdr:nvCxnSpPr>
-        <cdr:cNvPr id="14" name="Straight Connector 13">
-          <a:extLst xmlns:a="http://schemas.openxmlformats.org/drawingml/2006/main">
-            <a:ext uri="{FF2B5EF4-FFF2-40B4-BE49-F238E27FC236}">
-              <a16:creationId xmlns:a16="http://schemas.microsoft.com/office/drawing/2014/main" id="{892CDFEC-EAF6-E88F-42E6-113F4156F4FF}"/>
-            </a:ext>
-          </a:extLst>
-        </cdr:cNvPr>
-        <cdr:cNvCxnSpPr/>
-      </cdr:nvCxnSpPr>
-      <cdr:spPr>
-        <a:xfrm xmlns:a="http://schemas.openxmlformats.org/drawingml/2006/main" flipH="1" flipV="1">
-          <a:off x="7597219" y="955282"/>
-          <a:ext cx="858625" cy="1161663"/>
-        </a:xfrm>
-        <a:prstGeom xmlns:a="http://schemas.openxmlformats.org/drawingml/2006/main" prst="line">
-          <a:avLst/>
-        </a:prstGeom>
-      </cdr:spPr>
-      <cdr:style>
-        <a:lnRef xmlns:a="http://schemas.openxmlformats.org/drawingml/2006/main" idx="2">
-          <a:schemeClr val="accent6"/>
-        </a:lnRef>
-        <a:fillRef xmlns:a="http://schemas.openxmlformats.org/drawingml/2006/main" idx="0">
-          <a:schemeClr val="accent6"/>
-        </a:fillRef>
-        <a:effectRef xmlns:a="http://schemas.openxmlformats.org/drawingml/2006/main" idx="1">
-          <a:schemeClr val="accent6"/>
-        </a:effectRef>
-        <a:fontRef xmlns:a="http://schemas.openxmlformats.org/drawingml/2006/main" idx="minor">
-          <a:schemeClr val="tx1"/>
-        </a:fontRef>
-      </cdr:style>
-    </cdr:cxnSp>
-  </cdr:relSizeAnchor>
-</c:userShapes>
+<file path=ppt/charts/style2.xml><?xml version="1.0" encoding="utf-8"?>
+<cs:chartStyle xmlns:cs="http://schemas.microsoft.com/office/drawing/2012/chartStyle" xmlns:a="http://schemas.openxmlformats.org/drawingml/2006/main" id="297">
+  <cs:axisTitle>
+    <cs:lnRef idx="0"/>
+    <cs:fillRef idx="0"/>
+    <cs:effectRef idx="0"/>
+    <cs:fontRef idx="minor">
+      <a:schemeClr val="tx1">
+        <a:lumMod val="65000"/>
+        <a:lumOff val="35000"/>
+      </a:schemeClr>
+    </cs:fontRef>
+    <cs:defRPr sz="1330" kern="1200"/>
+  </cs:axisTitle>
+  <cs:categoryAxis>
+    <cs:lnRef idx="0"/>
+    <cs:fillRef idx="0"/>
+    <cs:effectRef idx="0"/>
+    <cs:fontRef idx="minor">
+      <a:schemeClr val="tx1">
+        <a:lumMod val="65000"/>
+        <a:lumOff val="35000"/>
+      </a:schemeClr>
+    </cs:fontRef>
+    <cs:spPr>
+      <a:ln w="9525" cap="flat" cmpd="sng" algn="ctr">
+        <a:solidFill>
+          <a:schemeClr val="tx1">
+            <a:lumMod val="15000"/>
+            <a:lumOff val="85000"/>
+          </a:schemeClr>
+        </a:solidFill>
+        <a:round/>
+      </a:ln>
+    </cs:spPr>
+    <cs:defRPr sz="1197" kern="1200"/>
+  </cs:categoryAxis>
+  <cs:chartArea mods="allowNoFillOverride allowNoLineOverride">
+    <cs:lnRef idx="0"/>
+    <cs:fillRef idx="0"/>
+    <cs:effectRef idx="0"/>
+    <cs:fontRef idx="minor">
+      <a:schemeClr val="tx1"/>
+    </cs:fontRef>
+    <cs:spPr>
+      <a:solidFill>
+        <a:schemeClr val="bg1"/>
+      </a:solidFill>
+      <a:ln w="9525" cap="flat" cmpd="sng" algn="ctr">
+        <a:solidFill>
+          <a:schemeClr val="tx1">
+            <a:lumMod val="15000"/>
+            <a:lumOff val="85000"/>
+          </a:schemeClr>
+        </a:solidFill>
+        <a:round/>
+      </a:ln>
+    </cs:spPr>
+    <cs:defRPr sz="1330" kern="1200"/>
+  </cs:chartArea>
+  <cs:dataLabel>
+    <cs:lnRef idx="0"/>
+    <cs:fillRef idx="0"/>
+    <cs:effectRef idx="0"/>
+    <cs:fontRef idx="minor">
+      <a:schemeClr val="tx1">
+        <a:lumMod val="75000"/>
+        <a:lumOff val="25000"/>
+      </a:schemeClr>
+    </cs:fontRef>
+    <cs:defRPr sz="1197" kern="1200"/>
+  </cs:dataLabel>
+  <cs:dataLabelCallout>
+    <cs:lnRef idx="0"/>
+    <cs:fillRef idx="0"/>
+    <cs:effectRef idx="0"/>
+    <cs:fontRef idx="minor">
+      <a:schemeClr val="dk1">
+        <a:lumMod val="65000"/>
+        <a:lumOff val="35000"/>
+      </a:schemeClr>
+    </cs:fontRef>
+    <cs:spPr>
+      <a:solidFill>
+        <a:schemeClr val="lt1"/>
+      </a:solidFill>
+      <a:ln>
+        <a:solidFill>
+          <a:schemeClr val="dk1">
+            <a:lumMod val="25000"/>
+            <a:lumOff val="75000"/>
+          </a:schemeClr>
+        </a:solidFill>
+      </a:ln>
+    </cs:spPr>
+    <cs:defRPr sz="1197" kern="1200"/>
+    <cs:bodyPr rot="0" spcFirstLastPara="1" vertOverflow="clip" horzOverflow="clip" vert="horz" wrap="square" lIns="36576" tIns="18288" rIns="36576" bIns="18288" anchor="ctr" anchorCtr="1">
+      <a:spAutoFit/>
+    </cs:bodyPr>
+  </cs:dataLabelCallout>
+  <cs:dataPoint>
+    <cs:lnRef idx="0"/>
+    <cs:fillRef idx="1">
+      <cs:styleClr val="auto"/>
+    </cs:fillRef>
+    <cs:effectRef idx="0"/>
+    <cs:fontRef idx="minor">
+      <a:schemeClr val="tx1"/>
+    </cs:fontRef>
+  </cs:dataPoint>
+  <cs:dataPoint3D>
+    <cs:lnRef idx="0"/>
+    <cs:fillRef idx="1">
+      <cs:styleClr val="auto"/>
+    </cs:fillRef>
+    <cs:effectRef idx="0"/>
+    <cs:fontRef idx="minor">
+      <a:schemeClr val="tx1"/>
+    </cs:fontRef>
+  </cs:dataPoint3D>
+  <cs:dataPointLine>
+    <cs:lnRef idx="0">
+      <cs:styleClr val="auto"/>
+    </cs:lnRef>
+    <cs:fillRef idx="1"/>
+    <cs:effectRef idx="0"/>
+    <cs:fontRef idx="minor">
+      <a:schemeClr val="tx1"/>
+    </cs:fontRef>
+    <cs:spPr>
+      <a:ln w="28575" cap="rnd">
+        <a:solidFill>
+          <a:schemeClr val="phClr"/>
+        </a:solidFill>
+        <a:round/>
+      </a:ln>
+    </cs:spPr>
+  </cs:dataPointLine>
+  <cs:dataPointMarker>
+    <cs:lnRef idx="0">
+      <cs:styleClr val="auto"/>
+    </cs:lnRef>
+    <cs:fillRef idx="1">
+      <cs:styleClr val="auto"/>
+    </cs:fillRef>
+    <cs:effectRef idx="0"/>
+    <cs:fontRef idx="minor">
+      <a:schemeClr val="tx1"/>
+    </cs:fontRef>
+    <cs:spPr>
+      <a:ln w="9525">
+        <a:solidFill>
+          <a:schemeClr val="phClr"/>
+        </a:solidFill>
+      </a:ln>
+    </cs:spPr>
+  </cs:dataPointMarker>
+  <cs:dataPointMarkerLayout symbol="circle" size="5"/>
+  <cs:dataPointWireframe>
+    <cs:lnRef idx="0">
+      <cs:styleClr val="auto"/>
+    </cs:lnRef>
+    <cs:fillRef idx="1"/>
+    <cs:effectRef idx="0"/>
+    <cs:fontRef idx="minor">
+      <a:schemeClr val="tx1"/>
+    </cs:fontRef>
+    <cs:spPr>
+      <a:ln w="9525" cap="rnd">
+        <a:solidFill>
+          <a:schemeClr val="phClr"/>
+        </a:solidFill>
+        <a:round/>
+      </a:ln>
+    </cs:spPr>
+  </cs:dataPointWireframe>
+  <cs:dataTable>
+    <cs:lnRef idx="0"/>
+    <cs:fillRef idx="0"/>
+    <cs:effectRef idx="0"/>
+    <cs:fontRef idx="minor">
+      <a:schemeClr val="tx1">
+        <a:lumMod val="65000"/>
+        <a:lumOff val="35000"/>
+      </a:schemeClr>
+    </cs:fontRef>
+    <cs:spPr>
+      <a:noFill/>
+      <a:ln w="9525" cap="flat" cmpd="sng" algn="ctr">
+        <a:solidFill>
+          <a:schemeClr val="tx1">
+            <a:lumMod val="15000"/>
+            <a:lumOff val="85000"/>
+          </a:schemeClr>
+        </a:solidFill>
+        <a:round/>
+      </a:ln>
+    </cs:spPr>
+    <cs:defRPr sz="1197" kern="1200"/>
+  </cs:dataTable>
+  <cs:downBar>
+    <cs:lnRef idx="0"/>
+    <cs:fillRef idx="0"/>
+    <cs:effectRef idx="0"/>
+    <cs:fontRef idx="minor">
+      <a:schemeClr val="tx1"/>
+    </cs:fontRef>
+    <cs:spPr>
+      <a:solidFill>
+        <a:schemeClr val="dk1">
+          <a:lumMod val="75000"/>
+          <a:lumOff val="25000"/>
+        </a:schemeClr>
+      </a:solidFill>
+      <a:ln w="9525" cap="flat" cmpd="sng" algn="ctr">
+        <a:solidFill>
+          <a:schemeClr val="tx1">
+            <a:lumMod val="65000"/>
+            <a:lumOff val="35000"/>
+          </a:schemeClr>
+        </a:solidFill>
+        <a:round/>
+      </a:ln>
+    </cs:spPr>
+  </cs:downBar>
+  <cs:dropLine>
+    <cs:lnRef idx="0"/>
+    <cs:fillRef idx="0"/>
+    <cs:effectRef idx="0"/>
+    <cs:fontRef idx="minor">
+      <a:schemeClr val="tx1"/>
+    </cs:fontRef>
+    <cs:spPr>
+      <a:ln w="9525" cap="flat" cmpd="sng" algn="ctr">
+        <a:solidFill>
+          <a:schemeClr val="tx1">
+            <a:lumMod val="35000"/>
+            <a:lumOff val="65000"/>
+          </a:schemeClr>
+        </a:solidFill>
+        <a:round/>
+      </a:ln>
+    </cs:spPr>
+  </cs:dropLine>
+  <cs:errorBar>
+    <cs:lnRef idx="0"/>
+    <cs:fillRef idx="0"/>
+    <cs:effectRef idx="0"/>
+    <cs:fontRef idx="minor">
+      <a:schemeClr val="tx1"/>
+    </cs:fontRef>
+    <cs:spPr>
+      <a:ln w="9525" cap="flat" cmpd="sng" algn="ctr">
+        <a:solidFill>
+          <a:schemeClr val="tx1">
+            <a:lumMod val="65000"/>
+            <a:lumOff val="35000"/>
+          </a:schemeClr>
+        </a:solidFill>
+        <a:round/>
+      </a:ln>
+    </cs:spPr>
+  </cs:errorBar>
+  <cs:floor>
+    <cs:lnRef idx="0"/>
+    <cs:fillRef idx="0"/>
+    <cs:effectRef idx="0"/>
+    <cs:fontRef idx="minor">
+      <a:schemeClr val="tx1"/>
+    </cs:fontRef>
+    <cs:spPr>
+      <a:noFill/>
+      <a:ln>
+        <a:noFill/>
+      </a:ln>
+    </cs:spPr>
+  </cs:floor>
+  <cs:gridlineMajor>
+    <cs:lnRef idx="0"/>
+    <cs:fillRef idx="0"/>
+    <cs:effectRef idx="0"/>
+    <cs:fontRef idx="minor">
+      <a:schemeClr val="tx1"/>
+    </cs:fontRef>
+    <cs:spPr>
+      <a:ln w="9525" cap="flat" cmpd="sng" algn="ctr">
+        <a:solidFill>
+          <a:schemeClr val="tx1">
+            <a:lumMod val="15000"/>
+            <a:lumOff val="85000"/>
+          </a:schemeClr>
+        </a:solidFill>
+        <a:round/>
+      </a:ln>
+    </cs:spPr>
+  </cs:gridlineMajor>
+  <cs:gridlineMinor>
+    <cs:lnRef idx="0"/>
+    <cs:fillRef idx="0"/>
+    <cs:effectRef idx="0"/>
+    <cs:fontRef idx="minor">
+      <a:schemeClr val="tx1"/>
+    </cs:fontRef>
+    <cs:spPr>
+      <a:ln w="9525" cap="flat" cmpd="sng" algn="ctr">
+        <a:solidFill>
+          <a:schemeClr val="tx1">
+            <a:lumMod val="5000"/>
+            <a:lumOff val="95000"/>
+          </a:schemeClr>
+        </a:solidFill>
+        <a:round/>
+      </a:ln>
+    </cs:spPr>
+  </cs:gridlineMinor>
+  <cs:hiLoLine>
+    <cs:lnRef idx="0"/>
+    <cs:fillRef idx="0"/>
+    <cs:effectRef idx="0"/>
+    <cs:fontRef idx="minor">
+      <a:schemeClr val="tx1"/>
+    </cs:fontRef>
+    <cs:spPr>
+      <a:ln w="9525" cap="flat" cmpd="sng" algn="ctr">
+        <a:solidFill>
+          <a:schemeClr val="tx1">
+            <a:lumMod val="50000"/>
+            <a:lumOff val="50000"/>
+          </a:schemeClr>
+        </a:solidFill>
+        <a:round/>
+      </a:ln>
+    </cs:spPr>
+  </cs:hiLoLine>
+  <cs:leaderLine>
+    <cs:lnRef idx="0"/>
+    <cs:fillRef idx="0"/>
+    <cs:effectRef idx="0"/>
+    <cs:fontRef idx="minor">
+      <a:schemeClr val="tx1"/>
+    </cs:fontRef>
+    <cs:spPr>
+      <a:ln w="9525" cap="flat" cmpd="sng" algn="ctr">
+        <a:solidFill>
+          <a:schemeClr val="tx1">
+            <a:lumMod val="35000"/>
+            <a:lumOff val="65000"/>
+          </a:schemeClr>
+        </a:solidFill>
+        <a:round/>
+      </a:ln>
+    </cs:spPr>
+  </cs:leaderLine>
+  <cs:legend>
+    <cs:lnRef idx="0"/>
+    <cs:fillRef idx="0"/>
+    <cs:effectRef idx="0"/>
+    <cs:fontRef idx="minor">
+      <a:schemeClr val="tx1">
+        <a:lumMod val="65000"/>
+        <a:lumOff val="35000"/>
+      </a:schemeClr>
+    </cs:fontRef>
+    <cs:defRPr sz="1197" kern="1200"/>
+  </cs:legend>
+  <cs:plotArea mods="allowNoFillOverride allowNoLineOverride">
+    <cs:lnRef idx="0"/>
+    <cs:fillRef idx="0"/>
+    <cs:effectRef idx="0"/>
+    <cs:fontRef idx="minor">
+      <a:schemeClr val="tx1"/>
+    </cs:fontRef>
+  </cs:plotArea>
+  <cs:plotArea3D mods="allowNoFillOverride allowNoLineOverride">
+    <cs:lnRef idx="0"/>
+    <cs:fillRef idx="0"/>
+    <cs:effectRef idx="0"/>
+    <cs:fontRef idx="minor">
+      <a:schemeClr val="tx1"/>
+    </cs:fontRef>
+  </cs:plotArea3D>
+  <cs:seriesAxis>
+    <cs:lnRef idx="0"/>
+    <cs:fillRef idx="0"/>
+    <cs:effectRef idx="0"/>
+    <cs:fontRef idx="minor">
+      <a:schemeClr val="tx1">
+        <a:lumMod val="65000"/>
+        <a:lumOff val="35000"/>
+      </a:schemeClr>
+    </cs:fontRef>
+    <cs:defRPr sz="1197" kern="1200"/>
+  </cs:seriesAxis>
+  <cs:seriesLine>
+    <cs:lnRef idx="0"/>
+    <cs:fillRef idx="0"/>
+    <cs:effectRef idx="0"/>
+    <cs:fontRef idx="minor">
+      <a:schemeClr val="tx1"/>
+    </cs:fontRef>
+    <cs:spPr>
+      <a:ln w="9525" cap="flat" cmpd="sng" algn="ctr">
+        <a:solidFill>
+          <a:schemeClr val="tx1">
+            <a:lumMod val="35000"/>
+            <a:lumOff val="65000"/>
+          </a:schemeClr>
+        </a:solidFill>
+        <a:round/>
+      </a:ln>
+    </cs:spPr>
+  </cs:seriesLine>
+  <cs:title>
+    <cs:lnRef idx="0"/>
+    <cs:fillRef idx="0"/>
+    <cs:effectRef idx="0"/>
+    <cs:fontRef idx="minor">
+      <a:schemeClr val="tx1">
+        <a:lumMod val="65000"/>
+        <a:lumOff val="35000"/>
+      </a:schemeClr>
+    </cs:fontRef>
+    <cs:defRPr sz="1862" b="0" kern="1200" spc="0" baseline="0"/>
+  </cs:title>
+  <cs:trendline>
+    <cs:lnRef idx="0">
+      <cs:styleClr val="auto"/>
+    </cs:lnRef>
+    <cs:fillRef idx="0"/>
+    <cs:effectRef idx="0"/>
+    <cs:fontRef idx="minor">
+      <a:schemeClr val="tx1"/>
+    </cs:fontRef>
+    <cs:spPr>
+      <a:ln w="19050" cap="rnd">
+        <a:solidFill>
+          <a:schemeClr val="phClr"/>
+        </a:solidFill>
+        <a:prstDash val="sysDot"/>
+      </a:ln>
+    </cs:spPr>
+  </cs:trendline>
+  <cs:trendlineLabel>
+    <cs:lnRef idx="0"/>
+    <cs:fillRef idx="0"/>
+    <cs:effectRef idx="0"/>
+    <cs:fontRef idx="minor">
+      <a:schemeClr val="tx1">
+        <a:lumMod val="65000"/>
+        <a:lumOff val="35000"/>
+      </a:schemeClr>
+    </cs:fontRef>
+    <cs:defRPr sz="1197" kern="1200"/>
+  </cs:trendlineLabel>
+  <cs:upBar>
+    <cs:lnRef idx="0"/>
+    <cs:fillRef idx="0"/>
+    <cs:effectRef idx="0"/>
+    <cs:fontRef idx="minor">
+      <a:schemeClr val="tx1"/>
+    </cs:fontRef>
+    <cs:spPr>
+      <a:solidFill>
+        <a:schemeClr val="lt1"/>
+      </a:solidFill>
+      <a:ln w="9525" cap="flat" cmpd="sng" algn="ctr">
+        <a:solidFill>
+          <a:schemeClr val="tx1">
+            <a:lumMod val="65000"/>
+            <a:lumOff val="35000"/>
+          </a:schemeClr>
+        </a:solidFill>
+        <a:round/>
+      </a:ln>
+    </cs:spPr>
+  </cs:upBar>
+  <cs:valueAxis>
+    <cs:lnRef idx="0"/>
+    <cs:fillRef idx="0"/>
+    <cs:effectRef idx="0"/>
+    <cs:fontRef idx="minor">
+      <a:schemeClr val="tx1">
+        <a:lumMod val="65000"/>
+        <a:lumOff val="35000"/>
+      </a:schemeClr>
+    </cs:fontRef>
+    <cs:defRPr sz="1197" kern="1200"/>
+  </cs:valueAxis>
+  <cs:wall>
+    <cs:lnRef idx="0"/>
+    <cs:fillRef idx="0"/>
+    <cs:effectRef idx="0"/>
+    <cs:fontRef idx="minor">
+      <a:schemeClr val="tx1"/>
+    </cs:fontRef>
+    <cs:spPr>
+      <a:noFill/>
+      <a:ln>
+        <a:noFill/>
+      </a:ln>
+    </cs:spPr>
+  </cs:wall>
+</cs:chartStyle>
 </file>
 
 <file path=ppt/notesMasters/notesMaster1.xml><?xml version="1.0" encoding="utf-8"?>
@@ -2277,7 +3738,7 @@
           <a:p>
             <a:fld id="{A1478CE3-0542-442B-AF7E-6DC0ED069798}" type="datetimeFigureOut">
               <a:rPr lang="en-CH" smtClean="0"/>
-              <a:t>24/03/2026</a:t>
+              <a:t>25/03/2026</a:t>
             </a:fld>
             <a:endParaRPr lang="en-CH"/>
           </a:p>
@@ -2546,6 +4007,328 @@
 </file>
 
 <file path=ppt/notesSlides/notesSlide1.xml><?xml version="1.0" encoding="utf-8"?>
+<p:notes xmlns:a="http://schemas.openxmlformats.org/drawingml/2006/main" xmlns:r="http://schemas.openxmlformats.org/officeDocument/2006/relationships" xmlns:p="http://schemas.openxmlformats.org/presentationml/2006/main">
+  <p:cSld>
+    <p:spTree>
+      <p:nvGrpSpPr>
+        <p:cNvPr id="1" name=""/>
+        <p:cNvGrpSpPr/>
+        <p:nvPr/>
+      </p:nvGrpSpPr>
+      <p:grpSpPr>
+        <a:xfrm>
+          <a:off x="0" y="0"/>
+          <a:ext cx="0" cy="0"/>
+          <a:chOff x="0" y="0"/>
+          <a:chExt cx="0" cy="0"/>
+        </a:xfrm>
+      </p:grpSpPr>
+      <p:sp>
+        <p:nvSpPr>
+          <p:cNvPr id="2" name="Slide Image Placeholder 1"/>
+          <p:cNvSpPr>
+            <a:spLocks noGrp="1" noRot="1" noChangeAspect="1"/>
+          </p:cNvSpPr>
+          <p:nvPr>
+            <p:ph type="sldImg"/>
+          </p:nvPr>
+        </p:nvSpPr>
+        <p:spPr/>
+        <p:txBody>
+          <a:bodyPr/>
+          <a:lstStyle/>
+          <a:p>
+            <a:endParaRPr lang="en-CH"/>
+          </a:p>
+        </p:txBody>
+      </p:sp>
+      <p:sp>
+        <p:nvSpPr>
+          <p:cNvPr id="3" name="Notes Placeholder 2"/>
+          <p:cNvSpPr>
+            <a:spLocks noGrp="1"/>
+          </p:cNvSpPr>
+          <p:nvPr>
+            <p:ph type="body" idx="1"/>
+          </p:nvPr>
+        </p:nvSpPr>
+        <p:spPr/>
+        <p:txBody>
+          <a:bodyPr/>
+          <a:lstStyle/>
+          <a:p>
+            <a:r>
+              <a:rPr lang="en-CH" dirty="0"/>
+              <a:t>549 recent exploits in 2020-2024, totalling $1.671 billion. excluding some huge outliers (e.g. bridge exploits)</a:t>
+            </a:r>
+          </a:p>
+        </p:txBody>
+      </p:sp>
+      <p:sp>
+        <p:nvSpPr>
+          <p:cNvPr id="4" name="Slide Number Placeholder 3"/>
+          <p:cNvSpPr>
+            <a:spLocks noGrp="1"/>
+          </p:cNvSpPr>
+          <p:nvPr>
+            <p:ph type="sldNum" sz="quarter" idx="5"/>
+          </p:nvPr>
+        </p:nvSpPr>
+        <p:spPr/>
+        <p:txBody>
+          <a:bodyPr/>
+          <a:lstStyle/>
+          <a:p>
+            <a:fld id="{ADB26BFD-26FA-41FF-A418-AE5D5C01BD91}" type="slidenum">
+              <a:rPr lang="en-CH" smtClean="0"/>
+              <a:t>11</a:t>
+            </a:fld>
+            <a:endParaRPr lang="en-CH"/>
+          </a:p>
+        </p:txBody>
+      </p:sp>
+    </p:spTree>
+    <p:extLst>
+      <p:ext uri="{BB962C8B-B14F-4D97-AF65-F5344CB8AC3E}">
+        <p14:creationId xmlns:p14="http://schemas.microsoft.com/office/powerpoint/2010/main" val="923235815"/>
+      </p:ext>
+    </p:extLst>
+  </p:cSld>
+  <p:clrMapOvr>
+    <a:masterClrMapping/>
+  </p:clrMapOvr>
+</p:notes>
+</file>
+
+<file path=ppt/notesSlides/notesSlide2.xml><?xml version="1.0" encoding="utf-8"?>
+<p:notes xmlns:a="http://schemas.openxmlformats.org/drawingml/2006/main" xmlns:r="http://schemas.openxmlformats.org/officeDocument/2006/relationships" xmlns:p="http://schemas.openxmlformats.org/presentationml/2006/main">
+  <p:cSld>
+    <p:spTree>
+      <p:nvGrpSpPr>
+        <p:cNvPr id="1" name="">
+          <a:extLst>
+            <a:ext uri="{FF2B5EF4-FFF2-40B4-BE49-F238E27FC236}">
+              <a16:creationId xmlns:a16="http://schemas.microsoft.com/office/drawing/2014/main" id="{70193E79-A427-7220-C0BD-F07F1CB88E6B}"/>
+            </a:ext>
+          </a:extLst>
+        </p:cNvPr>
+        <p:cNvGrpSpPr/>
+        <p:nvPr/>
+      </p:nvGrpSpPr>
+      <p:grpSpPr>
+        <a:xfrm>
+          <a:off x="0" y="0"/>
+          <a:ext cx="0" cy="0"/>
+          <a:chOff x="0" y="0"/>
+          <a:chExt cx="0" cy="0"/>
+        </a:xfrm>
+      </p:grpSpPr>
+      <p:sp>
+        <p:nvSpPr>
+          <p:cNvPr id="2" name="Slide Image Placeholder 1">
+            <a:extLst>
+              <a:ext uri="{FF2B5EF4-FFF2-40B4-BE49-F238E27FC236}">
+                <a16:creationId xmlns:a16="http://schemas.microsoft.com/office/drawing/2014/main" id="{F15FB4FB-97B1-0B84-833F-00C7609468FD}"/>
+              </a:ext>
+            </a:extLst>
+          </p:cNvPr>
+          <p:cNvSpPr>
+            <a:spLocks noGrp="1" noRot="1" noChangeAspect="1"/>
+          </p:cNvSpPr>
+          <p:nvPr>
+            <p:ph type="sldImg"/>
+          </p:nvPr>
+        </p:nvSpPr>
+        <p:spPr/>
+        <p:txBody>
+          <a:bodyPr/>
+          <a:lstStyle/>
+          <a:p>
+            <a:endParaRPr lang="en-CH"/>
+          </a:p>
+        </p:txBody>
+      </p:sp>
+      <p:sp>
+        <p:nvSpPr>
+          <p:cNvPr id="3" name="Notes Placeholder 2">
+            <a:extLst>
+              <a:ext uri="{FF2B5EF4-FFF2-40B4-BE49-F238E27FC236}">
+                <a16:creationId xmlns:a16="http://schemas.microsoft.com/office/drawing/2014/main" id="{8848D4AA-69F6-1599-EF0D-C5B063968BDE}"/>
+              </a:ext>
+            </a:extLst>
+          </p:cNvPr>
+          <p:cNvSpPr>
+            <a:spLocks noGrp="1"/>
+          </p:cNvSpPr>
+          <p:nvPr>
+            <p:ph type="body" idx="1"/>
+          </p:nvPr>
+        </p:nvSpPr>
+        <p:spPr/>
+        <p:txBody>
+          <a:bodyPr/>
+          <a:lstStyle/>
+          <a:p>
+            <a:r>
+              <a:rPr lang="en-CH" dirty="0"/>
+              <a:t>549 recent exploits in 2020-2024, totalling $1.671 billion. excluding some huge outliers (e.g. bridge exploits)</a:t>
+            </a:r>
+          </a:p>
+        </p:txBody>
+      </p:sp>
+      <p:sp>
+        <p:nvSpPr>
+          <p:cNvPr id="4" name="Slide Number Placeholder 3">
+            <a:extLst>
+              <a:ext uri="{FF2B5EF4-FFF2-40B4-BE49-F238E27FC236}">
+                <a16:creationId xmlns:a16="http://schemas.microsoft.com/office/drawing/2014/main" id="{4DED981B-5927-25F0-8DE4-94AF82176D81}"/>
+              </a:ext>
+            </a:extLst>
+          </p:cNvPr>
+          <p:cNvSpPr>
+            <a:spLocks noGrp="1"/>
+          </p:cNvSpPr>
+          <p:nvPr>
+            <p:ph type="sldNum" sz="quarter" idx="5"/>
+          </p:nvPr>
+        </p:nvSpPr>
+        <p:spPr/>
+        <p:txBody>
+          <a:bodyPr/>
+          <a:lstStyle/>
+          <a:p>
+            <a:fld id="{ADB26BFD-26FA-41FF-A418-AE5D5C01BD91}" type="slidenum">
+              <a:rPr lang="en-CH" smtClean="0"/>
+              <a:t>12</a:t>
+            </a:fld>
+            <a:endParaRPr lang="en-CH"/>
+          </a:p>
+        </p:txBody>
+      </p:sp>
+    </p:spTree>
+    <p:extLst>
+      <p:ext uri="{BB962C8B-B14F-4D97-AF65-F5344CB8AC3E}">
+        <p14:creationId xmlns:p14="http://schemas.microsoft.com/office/powerpoint/2010/main" val="1859107669"/>
+      </p:ext>
+    </p:extLst>
+  </p:cSld>
+  <p:clrMapOvr>
+    <a:masterClrMapping/>
+  </p:clrMapOvr>
+</p:notes>
+</file>
+
+<file path=ppt/notesSlides/notesSlide3.xml><?xml version="1.0" encoding="utf-8"?>
+<p:notes xmlns:a="http://schemas.openxmlformats.org/drawingml/2006/main" xmlns:r="http://schemas.openxmlformats.org/officeDocument/2006/relationships" xmlns:p="http://schemas.openxmlformats.org/presentationml/2006/main">
+  <p:cSld>
+    <p:spTree>
+      <p:nvGrpSpPr>
+        <p:cNvPr id="1" name=""/>
+        <p:cNvGrpSpPr/>
+        <p:nvPr/>
+      </p:nvGrpSpPr>
+      <p:grpSpPr>
+        <a:xfrm>
+          <a:off x="0" y="0"/>
+          <a:ext cx="0" cy="0"/>
+          <a:chOff x="0" y="0"/>
+          <a:chExt cx="0" cy="0"/>
+        </a:xfrm>
+      </p:grpSpPr>
+      <p:sp>
+        <p:nvSpPr>
+          <p:cNvPr id="2" name="Slide Image Placeholder 1"/>
+          <p:cNvSpPr>
+            <a:spLocks noGrp="1" noRot="1" noChangeAspect="1"/>
+          </p:cNvSpPr>
+          <p:nvPr>
+            <p:ph type="sldImg"/>
+          </p:nvPr>
+        </p:nvSpPr>
+        <p:spPr/>
+        <p:txBody>
+          <a:bodyPr/>
+          <a:lstStyle/>
+          <a:p>
+            <a:endParaRPr lang="en-CH"/>
+          </a:p>
+        </p:txBody>
+      </p:sp>
+      <p:sp>
+        <p:nvSpPr>
+          <p:cNvPr id="3" name="Notes Placeholder 2"/>
+          <p:cNvSpPr>
+            <a:spLocks noGrp="1"/>
+          </p:cNvSpPr>
+          <p:nvPr>
+            <p:ph type="body" idx="1"/>
+          </p:nvPr>
+        </p:nvSpPr>
+        <p:spPr/>
+        <p:txBody>
+          <a:bodyPr/>
+          <a:lstStyle/>
+          <a:p>
+            <a:r>
+              <a:rPr lang="en-CH" dirty="0"/>
+              <a:t>actually, it’s even worse – the </a:t>
+            </a:r>
+            <a:r>
+              <a:rPr lang="en-CH" dirty="0" err="1"/>
+              <a:t>reentrancies</a:t>
+            </a:r>
+            <a:r>
+              <a:rPr lang="en-CH" dirty="0"/>
+              <a:t> are only guarded against if we entered the contract through one of the @nonReentrant </a:t>
+            </a:r>
+            <a:r>
+              <a:rPr lang="en-CH" dirty="0" err="1"/>
+              <a:t>entrypoints</a:t>
+            </a:r>
+            <a:r>
+              <a:rPr lang="en-CH" dirty="0"/>
+              <a:t>. but I’m not sure how to concisely explain that...</a:t>
+            </a:r>
+          </a:p>
+        </p:txBody>
+      </p:sp>
+      <p:sp>
+        <p:nvSpPr>
+          <p:cNvPr id="4" name="Slide Number Placeholder 3"/>
+          <p:cNvSpPr>
+            <a:spLocks noGrp="1"/>
+          </p:cNvSpPr>
+          <p:nvPr>
+            <p:ph type="sldNum" sz="quarter" idx="5"/>
+          </p:nvPr>
+        </p:nvSpPr>
+        <p:spPr/>
+        <p:txBody>
+          <a:bodyPr/>
+          <a:lstStyle/>
+          <a:p>
+            <a:fld id="{ADB26BFD-26FA-41FF-A418-AE5D5C01BD91}" type="slidenum">
+              <a:rPr lang="en-CH" smtClean="0"/>
+              <a:t>21</a:t>
+            </a:fld>
+            <a:endParaRPr lang="en-CH"/>
+          </a:p>
+        </p:txBody>
+      </p:sp>
+    </p:spTree>
+    <p:extLst>
+      <p:ext uri="{BB962C8B-B14F-4D97-AF65-F5344CB8AC3E}">
+        <p14:creationId xmlns:p14="http://schemas.microsoft.com/office/powerpoint/2010/main" val="131999998"/>
+      </p:ext>
+    </p:extLst>
+  </p:cSld>
+  <p:clrMapOvr>
+    <a:masterClrMapping/>
+  </p:clrMapOvr>
+</p:notes>
+</file>
+
+<file path=ppt/notesSlides/notesSlide4.xml><?xml version="1.0" encoding="utf-8"?>
 <p:notes xmlns:a="http://schemas.openxmlformats.org/drawingml/2006/main" xmlns:r="http://schemas.openxmlformats.org/officeDocument/2006/relationships" xmlns:p="http://schemas.openxmlformats.org/presentationml/2006/main">
   <p:cSld>
     <p:spTree>
@@ -8906,64 +10689,6 @@
           <a:chExt cx="0" cy="0"/>
         </a:xfrm>
       </p:grpSpPr>
-      <p:sp>
-        <p:nvSpPr>
-          <p:cNvPr id="11" name="Rectangle 10">
-            <a:extLst>
-              <a:ext uri="{FF2B5EF4-FFF2-40B4-BE49-F238E27FC236}">
-                <a16:creationId xmlns:a16="http://schemas.microsoft.com/office/drawing/2014/main" id="{46923590-A5CA-35B6-6271-2F725DF18FC0}"/>
-              </a:ext>
-            </a:extLst>
-          </p:cNvPr>
-          <p:cNvSpPr>
-            <a:spLocks noGrp="1" noRot="1" noMove="1" noResize="1" noEditPoints="1" noAdjustHandles="1" noChangeArrowheads="1" noChangeShapeType="1"/>
-          </p:cNvSpPr>
-          <p:nvPr/>
-        </p:nvSpPr>
-        <p:spPr>
-          <a:xfrm>
-            <a:off x="8872221" y="4462780"/>
-            <a:ext cx="1713864" cy="292100"/>
-          </a:xfrm>
-          <a:prstGeom prst="rect">
-            <a:avLst/>
-          </a:prstGeom>
-          <a:solidFill>
-            <a:schemeClr val="accent4">
-              <a:lumMod val="50000"/>
-            </a:schemeClr>
-          </a:solidFill>
-          <a:ln>
-            <a:solidFill>
-              <a:schemeClr val="accent4"/>
-            </a:solidFill>
-          </a:ln>
-        </p:spPr>
-        <p:style>
-          <a:lnRef idx="2">
-            <a:schemeClr val="accent1">
-              <a:shade val="15000"/>
-            </a:schemeClr>
-          </a:lnRef>
-          <a:fillRef idx="1">
-            <a:schemeClr val="accent1"/>
-          </a:fillRef>
-          <a:effectRef idx="0">
-            <a:schemeClr val="accent1"/>
-          </a:effectRef>
-          <a:fontRef idx="minor">
-            <a:schemeClr val="lt1"/>
-          </a:fontRef>
-        </p:style>
-        <p:txBody>
-          <a:bodyPr rtlCol="0" anchor="ctr"/>
-          <a:lstStyle/>
-          <a:p>
-            <a:pPr algn="ctr"/>
-            <a:endParaRPr lang="en-CH"/>
-          </a:p>
-        </p:txBody>
-      </p:sp>
       <p:graphicFrame>
         <p:nvGraphicFramePr>
           <p:cNvPr id="9" name="Content Placeholder 8">
@@ -8980,156 +10705,21 @@
             <p:ph idx="1"/>
             <p:extLst>
               <p:ext uri="{D42A27DB-BD31-4B8C-83A1-F6EECF244321}">
-                <p14:modId xmlns:p14="http://schemas.microsoft.com/office/powerpoint/2010/main" val="1924047605"/>
+                <p14:modId xmlns:p14="http://schemas.microsoft.com/office/powerpoint/2010/main" val="2089828584"/>
               </p:ext>
             </p:extLst>
           </p:nvPr>
         </p:nvGraphicFramePr>
         <p:xfrm>
-          <a:off x="556181" y="1825625"/>
-          <a:ext cx="10797619" cy="4351338"/>
+          <a:off x="697190" y="1392382"/>
+          <a:ext cx="10797619" cy="4806805"/>
         </p:xfrm>
         <a:graphic>
           <a:graphicData uri="http://schemas.openxmlformats.org/drawingml/2006/chart">
-            <c:chart xmlns:c="http://schemas.openxmlformats.org/drawingml/2006/chart" xmlns:r="http://schemas.openxmlformats.org/officeDocument/2006/relationships" r:id="rId2"/>
+            <c:chart xmlns:c="http://schemas.openxmlformats.org/drawingml/2006/chart" xmlns:r="http://schemas.openxmlformats.org/officeDocument/2006/relationships" r:id="rId3"/>
           </a:graphicData>
         </a:graphic>
       </p:graphicFrame>
-      <p:cxnSp>
-        <p:nvCxnSpPr>
-          <p:cNvPr id="21" name="Straight Connector 20">
-            <a:extLst>
-              <a:ext uri="{FF2B5EF4-FFF2-40B4-BE49-F238E27FC236}">
-                <a16:creationId xmlns:a16="http://schemas.microsoft.com/office/drawing/2014/main" id="{EC38B879-76CC-05CA-6506-05BE3D9E3922}"/>
-              </a:ext>
-            </a:extLst>
-          </p:cNvPr>
-          <p:cNvCxnSpPr>
-            <a:cxnSpLocks/>
-          </p:cNvCxnSpPr>
-          <p:nvPr/>
-        </p:nvCxnSpPr>
-        <p:spPr>
-          <a:xfrm>
-            <a:off x="8181681" y="2516957"/>
-            <a:ext cx="830344" cy="405353"/>
-          </a:xfrm>
-          <a:prstGeom prst="line">
-            <a:avLst/>
-          </a:prstGeom>
-          <a:ln>
-            <a:solidFill>
-              <a:schemeClr val="accent3">
-                <a:lumMod val="50000"/>
-              </a:schemeClr>
-            </a:solidFill>
-          </a:ln>
-        </p:spPr>
-        <p:style>
-          <a:lnRef idx="2">
-            <a:schemeClr val="accent3"/>
-          </a:lnRef>
-          <a:fillRef idx="0">
-            <a:schemeClr val="accent3"/>
-          </a:fillRef>
-          <a:effectRef idx="1">
-            <a:schemeClr val="accent3"/>
-          </a:effectRef>
-          <a:fontRef idx="minor">
-            <a:schemeClr val="tx1"/>
-          </a:fontRef>
-        </p:style>
-      </p:cxnSp>
-      <p:cxnSp>
-        <p:nvCxnSpPr>
-          <p:cNvPr id="12" name="Straight Connector 11">
-            <a:extLst>
-              <a:ext uri="{FF2B5EF4-FFF2-40B4-BE49-F238E27FC236}">
-                <a16:creationId xmlns:a16="http://schemas.microsoft.com/office/drawing/2014/main" id="{4C8A1AAD-229C-85D1-C438-341249A5D458}"/>
-              </a:ext>
-            </a:extLst>
-          </p:cNvPr>
-          <p:cNvCxnSpPr>
-            <a:cxnSpLocks/>
-          </p:cNvCxnSpPr>
-          <p:nvPr/>
-        </p:nvCxnSpPr>
-        <p:spPr>
-          <a:xfrm flipH="1" flipV="1">
-            <a:off x="8162827" y="2667786"/>
-            <a:ext cx="849198" cy="923826"/>
-          </a:xfrm>
-          <a:prstGeom prst="line">
-            <a:avLst/>
-          </a:prstGeom>
-          <a:ln>
-            <a:solidFill>
-              <a:schemeClr val="accent1">
-                <a:lumMod val="50000"/>
-              </a:schemeClr>
-            </a:solidFill>
-          </a:ln>
-        </p:spPr>
-        <p:style>
-          <a:lnRef idx="2">
-            <a:schemeClr val="accent1"/>
-          </a:lnRef>
-          <a:fillRef idx="0">
-            <a:schemeClr val="accent1"/>
-          </a:fillRef>
-          <a:effectRef idx="1">
-            <a:schemeClr val="accent1"/>
-          </a:effectRef>
-          <a:fontRef idx="minor">
-            <a:schemeClr val="tx1"/>
-          </a:fontRef>
-        </p:style>
-      </p:cxnSp>
-      <p:cxnSp>
-        <p:nvCxnSpPr>
-          <p:cNvPr id="15" name="Straight Connector 14">
-            <a:extLst>
-              <a:ext uri="{FF2B5EF4-FFF2-40B4-BE49-F238E27FC236}">
-                <a16:creationId xmlns:a16="http://schemas.microsoft.com/office/drawing/2014/main" id="{4500ABF9-14AE-0699-1ADD-0EDBDC0B1166}"/>
-              </a:ext>
-            </a:extLst>
-          </p:cNvPr>
-          <p:cNvCxnSpPr>
-            <a:cxnSpLocks/>
-          </p:cNvCxnSpPr>
-          <p:nvPr/>
-        </p:nvCxnSpPr>
-        <p:spPr>
-          <a:xfrm flipH="1" flipV="1">
-            <a:off x="8181681" y="2564092"/>
-            <a:ext cx="849198" cy="707869"/>
-          </a:xfrm>
-          <a:prstGeom prst="line">
-            <a:avLst/>
-          </a:prstGeom>
-          <a:ln>
-            <a:solidFill>
-              <a:schemeClr val="accent2">
-                <a:lumMod val="50000"/>
-              </a:schemeClr>
-            </a:solidFill>
-          </a:ln>
-        </p:spPr>
-        <p:style>
-          <a:lnRef idx="2">
-            <a:schemeClr val="accent2"/>
-          </a:lnRef>
-          <a:fillRef idx="0">
-            <a:schemeClr val="accent2"/>
-          </a:fillRef>
-          <a:effectRef idx="1">
-            <a:schemeClr val="accent2"/>
-          </a:effectRef>
-          <a:fontRef idx="minor">
-            <a:schemeClr val="tx1"/>
-          </a:fontRef>
-        </p:style>
-      </p:cxnSp>
       <p:sp>
         <p:nvSpPr>
           <p:cNvPr id="2" name="Title 1">
@@ -9245,224 +10835,150 @@
           </a:p>
         </p:txBody>
       </p:sp>
-      <p:sp>
-        <p:nvSpPr>
-          <p:cNvPr id="3" name="TextBox 2">
-            <a:extLst>
-              <a:ext uri="{FF2B5EF4-FFF2-40B4-BE49-F238E27FC236}">
-                <a16:creationId xmlns:a16="http://schemas.microsoft.com/office/drawing/2014/main" id="{5298D349-EEEC-B8C6-0935-D857927E3F62}"/>
-              </a:ext>
-            </a:extLst>
-          </p:cNvPr>
-          <p:cNvSpPr txBox="1"/>
+      <p:grpSp>
+        <p:nvGrpSpPr>
+          <p:cNvPr id="22" name="Group 21">
+            <a:extLst>
+              <a:ext uri="{FF2B5EF4-FFF2-40B4-BE49-F238E27FC236}">
+                <a16:creationId xmlns:a16="http://schemas.microsoft.com/office/drawing/2014/main" id="{271EB870-A322-67F0-9A53-EC3F5455D594}"/>
+              </a:ext>
+            </a:extLst>
+          </p:cNvPr>
+          <p:cNvGrpSpPr/>
           <p:nvPr/>
-        </p:nvSpPr>
-        <p:spPr>
+        </p:nvGrpSpPr>
+        <p:grpSpPr>
           <a:xfrm>
-            <a:off x="7687499" y="5128181"/>
-            <a:ext cx="437620" cy="276999"/>
+            <a:off x="7837405" y="2768507"/>
+            <a:ext cx="747001" cy="2487983"/>
+            <a:chOff x="7837405" y="2768507"/>
+            <a:chExt cx="747001" cy="2487983"/>
           </a:xfrm>
-          <a:prstGeom prst="rect">
-            <a:avLst/>
-          </a:prstGeom>
-          <a:noFill/>
-        </p:spPr>
-        <p:txBody>
-          <a:bodyPr wrap="none" lIns="0" tIns="0" rIns="0" bIns="0" rtlCol="0">
-            <a:spAutoFit/>
-          </a:bodyPr>
-          <a:lstStyle/>
-          <a:p>
-            <a:r>
-              <a:rPr lang="en-GB" dirty="0">
-                <a:solidFill>
-                  <a:schemeClr val="bg1"/>
-                </a:solidFill>
-              </a:rPr>
-              <a:t>33%</a:t>
-            </a:r>
-          </a:p>
-        </p:txBody>
-      </p:sp>
-      <p:sp>
-        <p:nvSpPr>
-          <p:cNvPr id="7" name="TextBox 6">
-            <a:extLst>
-              <a:ext uri="{FF2B5EF4-FFF2-40B4-BE49-F238E27FC236}">
-                <a16:creationId xmlns:a16="http://schemas.microsoft.com/office/drawing/2014/main" id="{B348D253-96CA-619A-BE33-10BC40B0F36D}"/>
-              </a:ext>
-            </a:extLst>
-          </p:cNvPr>
-          <p:cNvSpPr txBox="1"/>
-          <p:nvPr/>
-        </p:nvSpPr>
-        <p:spPr>
-          <a:xfrm>
-            <a:off x="7667860" y="4217898"/>
-            <a:ext cx="437620" cy="276999"/>
-          </a:xfrm>
-          <a:prstGeom prst="rect">
-            <a:avLst/>
-          </a:prstGeom>
-          <a:noFill/>
-        </p:spPr>
-        <p:txBody>
-          <a:bodyPr wrap="none" lIns="0" tIns="0" rIns="0" bIns="0" rtlCol="0">
-            <a:spAutoFit/>
-          </a:bodyPr>
-          <a:lstStyle/>
-          <a:p>
-            <a:r>
-              <a:rPr lang="en-GB" dirty="0">
-                <a:solidFill>
-                  <a:schemeClr val="bg1"/>
-                </a:solidFill>
-              </a:rPr>
-              <a:t>19%</a:t>
-            </a:r>
-          </a:p>
-        </p:txBody>
-      </p:sp>
-      <p:sp>
-        <p:nvSpPr>
-          <p:cNvPr id="8" name="TextBox 7">
-            <a:extLst>
-              <a:ext uri="{FF2B5EF4-FFF2-40B4-BE49-F238E27FC236}">
-                <a16:creationId xmlns:a16="http://schemas.microsoft.com/office/drawing/2014/main" id="{34F30219-3F09-B195-6C7D-94D28F5FA39D}"/>
-              </a:ext>
-            </a:extLst>
-          </p:cNvPr>
-          <p:cNvSpPr txBox="1"/>
-          <p:nvPr/>
-        </p:nvSpPr>
-        <p:spPr>
-          <a:xfrm>
-            <a:off x="7667860" y="3665571"/>
-            <a:ext cx="437620" cy="276999"/>
-          </a:xfrm>
-          <a:prstGeom prst="rect">
-            <a:avLst/>
-          </a:prstGeom>
-          <a:noFill/>
-        </p:spPr>
-        <p:txBody>
-          <a:bodyPr wrap="none" lIns="0" tIns="0" rIns="0" bIns="0" rtlCol="0">
-            <a:spAutoFit/>
-          </a:bodyPr>
-          <a:lstStyle/>
-          <a:p>
-            <a:r>
-              <a:rPr lang="en-GB" dirty="0">
-                <a:solidFill>
-                  <a:schemeClr val="bg1"/>
-                </a:solidFill>
-              </a:rPr>
-              <a:t>14%</a:t>
-            </a:r>
-          </a:p>
-        </p:txBody>
-      </p:sp>
-      <p:sp>
-        <p:nvSpPr>
-          <p:cNvPr id="10" name="TextBox 9">
-            <a:extLst>
-              <a:ext uri="{FF2B5EF4-FFF2-40B4-BE49-F238E27FC236}">
-                <a16:creationId xmlns:a16="http://schemas.microsoft.com/office/drawing/2014/main" id="{C03D9760-CCB8-FF3B-D5B9-C26B12CF8B8D}"/>
-              </a:ext>
-            </a:extLst>
-          </p:cNvPr>
-          <p:cNvSpPr txBox="1"/>
-          <p:nvPr/>
-        </p:nvSpPr>
-        <p:spPr>
-          <a:xfrm>
-            <a:off x="7667860" y="3224826"/>
-            <a:ext cx="437620" cy="276999"/>
-          </a:xfrm>
-          <a:prstGeom prst="rect">
-            <a:avLst/>
-          </a:prstGeom>
-          <a:noFill/>
-        </p:spPr>
-        <p:txBody>
-          <a:bodyPr wrap="none" lIns="0" tIns="0" rIns="0" bIns="0" rtlCol="0">
-            <a:spAutoFit/>
-          </a:bodyPr>
-          <a:lstStyle/>
-          <a:p>
-            <a:r>
-              <a:rPr lang="en-GB" dirty="0">
-                <a:solidFill>
-                  <a:schemeClr val="bg1"/>
-                </a:solidFill>
-              </a:rPr>
-              <a:t>11%</a:t>
-            </a:r>
-          </a:p>
-        </p:txBody>
-      </p:sp>
-      <p:sp>
-        <p:nvSpPr>
-          <p:cNvPr id="13" name="Frame 12">
-            <a:extLst>
-              <a:ext uri="{FF2B5EF4-FFF2-40B4-BE49-F238E27FC236}">
-                <a16:creationId xmlns:a16="http://schemas.microsoft.com/office/drawing/2014/main" id="{1A4E2500-0EDA-71E9-AF96-9FC7AC272EB4}"/>
-              </a:ext>
-            </a:extLst>
-          </p:cNvPr>
-          <p:cNvSpPr>
-            <a:spLocks noGrp="1" noRot="1" noMove="1" noResize="1" noEditPoints="1" noAdjustHandles="1" noChangeArrowheads="1" noChangeShapeType="1"/>
-          </p:cNvSpPr>
-          <p:nvPr/>
-        </p:nvSpPr>
-        <p:spPr>
-          <a:xfrm>
-            <a:off x="-137160" y="-4547708"/>
-            <a:ext cx="19735800" cy="18311778"/>
-          </a:xfrm>
-          <a:prstGeom prst="frame">
-            <a:avLst>
-              <a:gd name="adj1" fmla="val 49154"/>
-            </a:avLst>
-          </a:prstGeom>
-          <a:solidFill>
-            <a:schemeClr val="bg2">
-              <a:alpha val="50000"/>
-            </a:schemeClr>
-          </a:solidFill>
-          <a:ln>
-            <a:noFill/>
-          </a:ln>
-        </p:spPr>
-        <p:style>
-          <a:lnRef idx="2">
-            <a:schemeClr val="accent1">
-              <a:shade val="15000"/>
-            </a:schemeClr>
-          </a:lnRef>
-          <a:fillRef idx="1">
-            <a:schemeClr val="accent1"/>
-          </a:fillRef>
-          <a:effectRef idx="0">
-            <a:schemeClr val="accent1"/>
-          </a:effectRef>
-          <a:fontRef idx="minor">
-            <a:schemeClr val="lt1"/>
-          </a:fontRef>
-        </p:style>
-        <p:txBody>
-          <a:bodyPr rtlCol="0" anchor="ctr"/>
-          <a:lstStyle/>
-          <a:p>
-            <a:pPr algn="ctr"/>
-            <a:endParaRPr lang="en-CH">
-              <a:solidFill>
-                <a:schemeClr val="tx1"/>
-              </a:solidFill>
-            </a:endParaRPr>
-          </a:p>
-        </p:txBody>
-      </p:sp>
+        </p:grpSpPr>
+        <p:sp>
+          <p:nvSpPr>
+            <p:cNvPr id="17" name="TextBox 16">
+              <a:extLst>
+                <a:ext uri="{FF2B5EF4-FFF2-40B4-BE49-F238E27FC236}">
+                  <a16:creationId xmlns:a16="http://schemas.microsoft.com/office/drawing/2014/main" id="{032DF3E9-7EBD-E36A-18B1-E96B8595B3A6}"/>
+                </a:ext>
+              </a:extLst>
+            </p:cNvPr>
+            <p:cNvSpPr txBox="1"/>
+            <p:nvPr/>
+          </p:nvSpPr>
+          <p:spPr>
+            <a:xfrm>
+              <a:off x="7837407" y="4948713"/>
+              <a:ext cx="746999" cy="307777"/>
+            </a:xfrm>
+            <a:prstGeom prst="rect">
+              <a:avLst/>
+            </a:prstGeom>
+            <a:solidFill>
+              <a:schemeClr val="accent1"/>
+            </a:solidFill>
+          </p:spPr>
+          <p:txBody>
+            <a:bodyPr wrap="none" lIns="0" tIns="0" rIns="0" bIns="0" rtlCol="0">
+              <a:spAutoFit/>
+            </a:bodyPr>
+            <a:lstStyle/>
+            <a:p>
+              <a:r>
+                <a:rPr lang="en-CH" sz="2000" dirty="0">
+                  <a:solidFill>
+                    <a:schemeClr val="bg1"/>
+                  </a:solidFill>
+                </a:rPr>
+                <a:t>$524M</a:t>
+              </a:r>
+            </a:p>
+          </p:txBody>
+        </p:sp>
+        <p:sp>
+          <p:nvSpPr>
+            <p:cNvPr id="18" name="TextBox 17">
+              <a:extLst>
+                <a:ext uri="{FF2B5EF4-FFF2-40B4-BE49-F238E27FC236}">
+                  <a16:creationId xmlns:a16="http://schemas.microsoft.com/office/drawing/2014/main" id="{D4E37218-9366-45FC-D4B3-13F7EC41DB57}"/>
+                </a:ext>
+              </a:extLst>
+            </p:cNvPr>
+            <p:cNvSpPr txBox="1"/>
+            <p:nvPr/>
+          </p:nvSpPr>
+          <p:spPr>
+            <a:xfrm>
+              <a:off x="7837406" y="3743801"/>
+              <a:ext cx="746999" cy="307777"/>
+            </a:xfrm>
+            <a:prstGeom prst="rect">
+              <a:avLst/>
+            </a:prstGeom>
+            <a:solidFill>
+              <a:schemeClr val="accent2"/>
+            </a:solidFill>
+          </p:spPr>
+          <p:txBody>
+            <a:bodyPr wrap="none" lIns="0" tIns="0" rIns="0" bIns="0" rtlCol="0">
+              <a:spAutoFit/>
+            </a:bodyPr>
+            <a:lstStyle/>
+            <a:p>
+              <a:r>
+                <a:rPr lang="en-CH" sz="2000" dirty="0">
+                  <a:solidFill>
+                    <a:schemeClr val="bg1"/>
+                  </a:solidFill>
+                </a:rPr>
+                <a:t>$422M</a:t>
+              </a:r>
+            </a:p>
+          </p:txBody>
+        </p:sp>
+        <p:sp>
+          <p:nvSpPr>
+            <p:cNvPr id="19" name="TextBox 18">
+              <a:extLst>
+                <a:ext uri="{FF2B5EF4-FFF2-40B4-BE49-F238E27FC236}">
+                  <a16:creationId xmlns:a16="http://schemas.microsoft.com/office/drawing/2014/main" id="{F4F04AEC-19E1-1A0D-E719-521C33EAA4B2}"/>
+                </a:ext>
+              </a:extLst>
+            </p:cNvPr>
+            <p:cNvSpPr txBox="1"/>
+            <p:nvPr/>
+          </p:nvSpPr>
+          <p:spPr>
+            <a:xfrm>
+              <a:off x="7837405" y="2768507"/>
+              <a:ext cx="746999" cy="307777"/>
+            </a:xfrm>
+            <a:prstGeom prst="rect">
+              <a:avLst/>
+            </a:prstGeom>
+            <a:solidFill>
+              <a:schemeClr val="accent4"/>
+            </a:solidFill>
+          </p:spPr>
+          <p:txBody>
+            <a:bodyPr wrap="none" lIns="0" tIns="0" rIns="0" bIns="0" rtlCol="0">
+              <a:spAutoFit/>
+            </a:bodyPr>
+            <a:lstStyle/>
+            <a:p>
+              <a:r>
+                <a:rPr lang="en-CH" sz="2000" dirty="0">
+                  <a:solidFill>
+                    <a:schemeClr val="bg1"/>
+                  </a:solidFill>
+                </a:rPr>
+                <a:t>$284M</a:t>
+              </a:r>
+            </a:p>
+          </p:txBody>
+        </p:sp>
+      </p:grpSp>
     </p:spTree>
     <p:extLst>
       <p:ext uri="{BB962C8B-B14F-4D97-AF65-F5344CB8AC3E}">
@@ -9494,7 +11010,7 @@
                             </p:stCondLst>
                             <p:childTnLst>
                               <p:par>
-                                <p:cTn id="5" presetID="1" presetClass="entr" presetSubtype="0" fill="hold" grpId="0" nodeType="clickEffect">
+                                <p:cTn id="5" presetID="1" presetClass="entr" presetSubtype="0" fill="hold" nodeType="clickEffect">
                                   <p:stCondLst>
                                     <p:cond delay="0"/>
                                   </p:stCondLst>
@@ -9507,34 +11023,7 @@
                                           </p:stCondLst>
                                         </p:cTn>
                                         <p:tgtEl>
-                                          <p:spTgt spid="11"/>
-                                        </p:tgtEl>
-                                        <p:attrNameLst>
-                                          <p:attrName>style.visibility</p:attrName>
-                                        </p:attrNameLst>
-                                      </p:cBhvr>
-                                      <p:to>
-                                        <p:strVal val="visible"/>
-                                      </p:to>
-                                    </p:set>
-                                  </p:childTnLst>
-                                </p:cTn>
-                              </p:par>
-                              <p:par>
-                                <p:cTn id="7" presetID="1" presetClass="entr" presetSubtype="0" fill="hold" grpId="0" nodeType="withEffect">
-                                  <p:stCondLst>
-                                    <p:cond delay="0"/>
-                                  </p:stCondLst>
-                                  <p:childTnLst>
-                                    <p:set>
-                                      <p:cBhvr>
-                                        <p:cTn id="8" dur="1" fill="hold">
-                                          <p:stCondLst>
-                                            <p:cond delay="0"/>
-                                          </p:stCondLst>
-                                        </p:cTn>
-                                        <p:tgtEl>
-                                          <p:spTgt spid="13"/>
+                                          <p:spTgt spid="22"/>
                                         </p:tgtEl>
                                         <p:attrNameLst>
                                           <p:attrName>style.visibility</p:attrName>
@@ -9574,15 +11063,238 @@
         </p:cTn>
       </p:par>
     </p:tnLst>
-    <p:bldLst>
-      <p:bldP spid="11" grpId="0" animBg="1"/>
-      <p:bldP spid="13" grpId="0" animBg="1"/>
-    </p:bldLst>
   </p:timing>
 </p:sld>
 </file>
 
 <file path=ppt/slides/slide12.xml><?xml version="1.0" encoding="utf-8"?>
+<p:sld xmlns:a="http://schemas.openxmlformats.org/drawingml/2006/main" xmlns:r="http://schemas.openxmlformats.org/officeDocument/2006/relationships" xmlns:p="http://schemas.openxmlformats.org/presentationml/2006/main">
+  <p:cSld>
+    <p:spTree>
+      <p:nvGrpSpPr>
+        <p:cNvPr id="1" name="">
+          <a:extLst>
+            <a:ext uri="{FF2B5EF4-FFF2-40B4-BE49-F238E27FC236}">
+              <a16:creationId xmlns:a16="http://schemas.microsoft.com/office/drawing/2014/main" id="{7061EF8E-54A4-2000-F07F-0973BADF9B2D}"/>
+            </a:ext>
+          </a:extLst>
+        </p:cNvPr>
+        <p:cNvGrpSpPr/>
+        <p:nvPr/>
+      </p:nvGrpSpPr>
+      <p:grpSpPr>
+        <a:xfrm>
+          <a:off x="0" y="0"/>
+          <a:ext cx="0" cy="0"/>
+          <a:chOff x="0" y="0"/>
+          <a:chExt cx="0" cy="0"/>
+        </a:xfrm>
+      </p:grpSpPr>
+      <p:graphicFrame>
+        <p:nvGraphicFramePr>
+          <p:cNvPr id="9" name="Content Placeholder 8">
+            <a:extLst>
+              <a:ext uri="{FF2B5EF4-FFF2-40B4-BE49-F238E27FC236}">
+                <a16:creationId xmlns:a16="http://schemas.microsoft.com/office/drawing/2014/main" id="{9AE86CBA-9283-9AAD-9530-DC8A3A568B51}"/>
+              </a:ext>
+            </a:extLst>
+          </p:cNvPr>
+          <p:cNvGraphicFramePr>
+            <a:graphicFrameLocks noGrp="1"/>
+          </p:cNvGraphicFramePr>
+          <p:nvPr>
+            <p:ph idx="1"/>
+            <p:extLst>
+              <p:ext uri="{D42A27DB-BD31-4B8C-83A1-F6EECF244321}">
+                <p14:modId xmlns:p14="http://schemas.microsoft.com/office/powerpoint/2010/main" val="1244253500"/>
+              </p:ext>
+            </p:extLst>
+          </p:nvPr>
+        </p:nvGraphicFramePr>
+        <p:xfrm>
+          <a:off x="697190" y="1392382"/>
+          <a:ext cx="10797619" cy="4806805"/>
+        </p:xfrm>
+        <a:graphic>
+          <a:graphicData uri="http://schemas.openxmlformats.org/drawingml/2006/chart">
+            <c:chart xmlns:c="http://schemas.openxmlformats.org/drawingml/2006/chart" xmlns:r="http://schemas.openxmlformats.org/officeDocument/2006/relationships" r:id="rId3"/>
+          </a:graphicData>
+        </a:graphic>
+      </p:graphicFrame>
+      <p:sp>
+        <p:nvSpPr>
+          <p:cNvPr id="2" name="Title 1">
+            <a:extLst>
+              <a:ext uri="{FF2B5EF4-FFF2-40B4-BE49-F238E27FC236}">
+                <a16:creationId xmlns:a16="http://schemas.microsoft.com/office/drawing/2014/main" id="{96396E26-BF22-ABF0-29B7-7D696D727496}"/>
+              </a:ext>
+            </a:extLst>
+          </p:cNvPr>
+          <p:cNvSpPr>
+            <a:spLocks noGrp="1"/>
+          </p:cNvSpPr>
+          <p:nvPr>
+            <p:ph type="title"/>
+          </p:nvPr>
+        </p:nvSpPr>
+        <p:spPr/>
+        <p:txBody>
+          <a:bodyPr/>
+          <a:lstStyle/>
+          <a:p>
+            <a:r>
+              <a:rPr lang="en-CH" dirty="0">
+                <a:solidFill>
+                  <a:schemeClr val="tx2"/>
+                </a:solidFill>
+              </a:rPr>
+              <a:t>Common Vulnerabilities</a:t>
+            </a:r>
+          </a:p>
+        </p:txBody>
+      </p:sp>
+      <p:sp>
+        <p:nvSpPr>
+          <p:cNvPr id="4" name="Date Placeholder 3">
+            <a:extLst>
+              <a:ext uri="{FF2B5EF4-FFF2-40B4-BE49-F238E27FC236}">
+                <a16:creationId xmlns:a16="http://schemas.microsoft.com/office/drawing/2014/main" id="{AAB6B4D1-1DCE-3422-D694-A34CF015F24C}"/>
+              </a:ext>
+            </a:extLst>
+          </p:cNvPr>
+          <p:cNvSpPr>
+            <a:spLocks noGrp="1"/>
+          </p:cNvSpPr>
+          <p:nvPr>
+            <p:ph type="dt" sz="half" idx="10"/>
+          </p:nvPr>
+        </p:nvSpPr>
+        <p:spPr/>
+        <p:txBody>
+          <a:bodyPr/>
+          <a:lstStyle/>
+          <a:p>
+            <a:r>
+              <a:rPr lang="en-CH"/>
+              <a:t>30/03/2026</a:t>
+            </a:r>
+          </a:p>
+        </p:txBody>
+      </p:sp>
+      <p:sp>
+        <p:nvSpPr>
+          <p:cNvPr id="5" name="Footer Placeholder 4">
+            <a:extLst>
+              <a:ext uri="{FF2B5EF4-FFF2-40B4-BE49-F238E27FC236}">
+                <a16:creationId xmlns:a16="http://schemas.microsoft.com/office/drawing/2014/main" id="{A619D011-3434-56C6-5FB0-B32B96165050}"/>
+              </a:ext>
+            </a:extLst>
+          </p:cNvPr>
+          <p:cNvSpPr>
+            <a:spLocks noGrp="1"/>
+          </p:cNvSpPr>
+          <p:nvPr>
+            <p:ph type="ftr" sz="quarter" idx="11"/>
+          </p:nvPr>
+        </p:nvSpPr>
+        <p:spPr/>
+        <p:txBody>
+          <a:bodyPr/>
+          <a:lstStyle/>
+          <a:p>
+            <a:endParaRPr lang="en-CH"/>
+          </a:p>
+        </p:txBody>
+      </p:sp>
+      <p:sp>
+        <p:nvSpPr>
+          <p:cNvPr id="6" name="Slide Number Placeholder 5">
+            <a:extLst>
+              <a:ext uri="{FF2B5EF4-FFF2-40B4-BE49-F238E27FC236}">
+                <a16:creationId xmlns:a16="http://schemas.microsoft.com/office/drawing/2014/main" id="{CB094CBD-3CE5-8B9F-0E4E-B9C8D1A96049}"/>
+              </a:ext>
+            </a:extLst>
+          </p:cNvPr>
+          <p:cNvSpPr>
+            <a:spLocks noGrp="1"/>
+          </p:cNvSpPr>
+          <p:nvPr>
+            <p:ph type="sldNum" sz="quarter" idx="12"/>
+          </p:nvPr>
+        </p:nvSpPr>
+        <p:spPr/>
+        <p:txBody>
+          <a:bodyPr/>
+          <a:lstStyle/>
+          <a:p>
+            <a:fld id="{1013ED95-016C-42D7-B550-5C99AA40E4D5}" type="slidenum">
+              <a:rPr lang="en-CH" smtClean="0"/>
+              <a:pPr/>
+              <a:t>12</a:t>
+            </a:fld>
+            <a:r>
+              <a:rPr lang="en-CH"/>
+              <a:t> / XX</a:t>
+            </a:r>
+            <a:endParaRPr lang="en-CH" dirty="0"/>
+          </a:p>
+        </p:txBody>
+      </p:sp>
+      <p:sp>
+        <p:nvSpPr>
+          <p:cNvPr id="19" name="TextBox 18">
+            <a:extLst>
+              <a:ext uri="{FF2B5EF4-FFF2-40B4-BE49-F238E27FC236}">
+                <a16:creationId xmlns:a16="http://schemas.microsoft.com/office/drawing/2014/main" id="{5C472FDE-9EF7-EA8C-3B5F-BA5D0ACA35E8}"/>
+              </a:ext>
+            </a:extLst>
+          </p:cNvPr>
+          <p:cNvSpPr txBox="1"/>
+          <p:nvPr/>
+        </p:nvSpPr>
+        <p:spPr>
+          <a:xfrm>
+            <a:off x="7837405" y="2768507"/>
+            <a:ext cx="746999" cy="307777"/>
+          </a:xfrm>
+          <a:prstGeom prst="rect">
+            <a:avLst/>
+          </a:prstGeom>
+          <a:solidFill>
+            <a:schemeClr val="accent4"/>
+          </a:solidFill>
+        </p:spPr>
+        <p:txBody>
+          <a:bodyPr wrap="none" lIns="0" tIns="0" rIns="0" bIns="0" rtlCol="0">
+            <a:spAutoFit/>
+          </a:bodyPr>
+          <a:lstStyle/>
+          <a:p>
+            <a:r>
+              <a:rPr lang="en-CH" sz="2000" dirty="0">
+                <a:solidFill>
+                  <a:schemeClr val="bg1"/>
+                </a:solidFill>
+              </a:rPr>
+              <a:t>$284M</a:t>
+            </a:r>
+          </a:p>
+        </p:txBody>
+      </p:sp>
+    </p:spTree>
+    <p:extLst>
+      <p:ext uri="{BB962C8B-B14F-4D97-AF65-F5344CB8AC3E}">
+        <p14:creationId xmlns:p14="http://schemas.microsoft.com/office/powerpoint/2010/main" val="3072959622"/>
+      </p:ext>
+    </p:extLst>
+  </p:cSld>
+  <p:clrMapOvr>
+    <a:masterClrMapping/>
+  </p:clrMapOvr>
+</p:sld>
+</file>
+
+<file path=ppt/slides/slide13.xml><?xml version="1.0" encoding="utf-8"?>
 <p:sld xmlns:a="http://schemas.openxmlformats.org/drawingml/2006/main" xmlns:r="http://schemas.openxmlformats.org/officeDocument/2006/relationships" xmlns:p="http://schemas.openxmlformats.org/presentationml/2006/main">
   <p:cSld>
     <p:spTree>
@@ -9777,7 +11489,7 @@
             <a:fld id="{1013ED95-016C-42D7-B550-5C99AA40E4D5}" type="slidenum">
               <a:rPr lang="en-CH" smtClean="0"/>
               <a:pPr/>
-              <a:t>12</a:t>
+              <a:t>13</a:t>
             </a:fld>
             <a:r>
               <a:rPr lang="en-CH"/>
@@ -9800,7 +11512,7 @@
 </p:sld>
 </file>
 
-<file path=ppt/slides/slide13.xml><?xml version="1.0" encoding="utf-8"?>
+<file path=ppt/slides/slide14.xml><?xml version="1.0" encoding="utf-8"?>
 <p:sld xmlns:a="http://schemas.openxmlformats.org/drawingml/2006/main" xmlns:r="http://schemas.openxmlformats.org/officeDocument/2006/relationships" xmlns:p="http://schemas.openxmlformats.org/presentationml/2006/main">
   <p:cSld>
     <p:spTree>
@@ -9933,7 +11645,7 @@
             <a:fld id="{1013ED95-016C-42D7-B550-5C99AA40E4D5}" type="slidenum">
               <a:rPr lang="en-CH" smtClean="0"/>
               <a:pPr/>
-              <a:t>13</a:t>
+              <a:t>14</a:t>
             </a:fld>
             <a:r>
               <a:rPr lang="en-CH"/>
@@ -10858,7 +12570,7 @@
 </p:sld>
 </file>
 
-<file path=ppt/slides/slide14.xml><?xml version="1.0" encoding="utf-8"?>
+<file path=ppt/slides/slide15.xml><?xml version="1.0" encoding="utf-8"?>
 <p:sld xmlns:a="http://schemas.openxmlformats.org/drawingml/2006/main" xmlns:r="http://schemas.openxmlformats.org/officeDocument/2006/relationships" xmlns:p="http://schemas.openxmlformats.org/presentationml/2006/main">
   <p:cSld>
     <p:spTree>
@@ -10991,7 +12703,7 @@
             <a:fld id="{1013ED95-016C-42D7-B550-5C99AA40E4D5}" type="slidenum">
               <a:rPr lang="en-CH" smtClean="0"/>
               <a:pPr/>
-              <a:t>14</a:t>
+              <a:t>15</a:t>
             </a:fld>
             <a:r>
               <a:rPr lang="en-CH"/>
@@ -12757,7 +14469,7 @@
 </p:sld>
 </file>
 
-<file path=ppt/slides/slide15.xml><?xml version="1.0" encoding="utf-8"?>
+<file path=ppt/slides/slide16.xml><?xml version="1.0" encoding="utf-8"?>
 <p:sld xmlns:a="http://schemas.openxmlformats.org/drawingml/2006/main" xmlns:r="http://schemas.openxmlformats.org/officeDocument/2006/relationships" xmlns:p="http://schemas.openxmlformats.org/presentationml/2006/main">
   <p:cSld>
     <p:spTree>
@@ -12890,7 +14602,7 @@
             <a:fld id="{1013ED95-016C-42D7-B550-5C99AA40E4D5}" type="slidenum">
               <a:rPr lang="en-CH" smtClean="0"/>
               <a:pPr/>
-              <a:t>15</a:t>
+              <a:t>16</a:t>
             </a:fld>
             <a:r>
               <a:rPr lang="en-CH"/>
@@ -14687,7 +16399,7 @@
 </p:sld>
 </file>
 
-<file path=ppt/slides/slide16.xml><?xml version="1.0" encoding="utf-8"?>
+<file path=ppt/slides/slide17.xml><?xml version="1.0" encoding="utf-8"?>
 <p:sld xmlns:a="http://schemas.openxmlformats.org/drawingml/2006/main" xmlns:r="http://schemas.openxmlformats.org/officeDocument/2006/relationships" xmlns:p="http://schemas.openxmlformats.org/presentationml/2006/main">
   <p:cSld>
     <p:spTree>
@@ -14874,7 +16586,7 @@
             <a:fld id="{1013ED95-016C-42D7-B550-5C99AA40E4D5}" type="slidenum">
               <a:rPr lang="en-CH" smtClean="0"/>
               <a:pPr/>
-              <a:t>16</a:t>
+              <a:t>17</a:t>
             </a:fld>
             <a:r>
               <a:rPr lang="en-CH"/>
@@ -15921,189 +17633,6 @@
 </p:sld>
 </file>
 
-<file path=ppt/slides/slide17.xml><?xml version="1.0" encoding="utf-8"?>
-<p:sld xmlns:a="http://schemas.openxmlformats.org/drawingml/2006/main" xmlns:r="http://schemas.openxmlformats.org/officeDocument/2006/relationships" xmlns:p="http://schemas.openxmlformats.org/presentationml/2006/main">
-  <p:cSld>
-    <p:spTree>
-      <p:nvGrpSpPr>
-        <p:cNvPr id="1" name=""/>
-        <p:cNvGrpSpPr/>
-        <p:nvPr/>
-      </p:nvGrpSpPr>
-      <p:grpSpPr>
-        <a:xfrm>
-          <a:off x="0" y="0"/>
-          <a:ext cx="0" cy="0"/>
-          <a:chOff x="0" y="0"/>
-          <a:chExt cx="0" cy="0"/>
-        </a:xfrm>
-      </p:grpSpPr>
-      <p:sp>
-        <p:nvSpPr>
-          <p:cNvPr id="2" name="Title 1">
-            <a:extLst>
-              <a:ext uri="{FF2B5EF4-FFF2-40B4-BE49-F238E27FC236}">
-                <a16:creationId xmlns:a16="http://schemas.microsoft.com/office/drawing/2014/main" id="{6F09E49F-7C32-26F7-BE0C-463D0439D227}"/>
-              </a:ext>
-            </a:extLst>
-          </p:cNvPr>
-          <p:cNvSpPr>
-            <a:spLocks noGrp="1"/>
-          </p:cNvSpPr>
-          <p:nvPr>
-            <p:ph type="title"/>
-          </p:nvPr>
-        </p:nvSpPr>
-        <p:spPr/>
-        <p:txBody>
-          <a:bodyPr/>
-          <a:lstStyle/>
-          <a:p>
-            <a:r>
-              <a:rPr lang="en-CH" dirty="0"/>
-              <a:t>Problem Statement</a:t>
-            </a:r>
-          </a:p>
-        </p:txBody>
-      </p:sp>
-      <p:sp>
-        <p:nvSpPr>
-          <p:cNvPr id="3" name="Content Placeholder 2">
-            <a:extLst>
-              <a:ext uri="{FF2B5EF4-FFF2-40B4-BE49-F238E27FC236}">
-                <a16:creationId xmlns:a16="http://schemas.microsoft.com/office/drawing/2014/main" id="{EADEE3E2-DDC0-1554-6366-1F55AE46E6C2}"/>
-              </a:ext>
-            </a:extLst>
-          </p:cNvPr>
-          <p:cNvSpPr>
-            <a:spLocks noGrp="1"/>
-          </p:cNvSpPr>
-          <p:nvPr>
-            <p:ph idx="1"/>
-          </p:nvPr>
-        </p:nvSpPr>
-        <p:spPr/>
-        <p:txBody>
-          <a:bodyPr/>
-          <a:lstStyle/>
-          <a:p>
-            <a:r>
-              <a:rPr lang="en-CH" b="1" dirty="0"/>
-              <a:t>The Gap: </a:t>
-            </a:r>
-            <a:r>
-              <a:rPr lang="en-CH" dirty="0"/>
-              <a:t>What are the specific limitations and challenges of these existing tools?</a:t>
-            </a:r>
-          </a:p>
-          <a:p>
-            <a:r>
-              <a:rPr lang="en-CH" dirty="0"/>
-              <a:t>Clearly state your core research question or objective.</a:t>
-            </a:r>
-          </a:p>
-        </p:txBody>
-      </p:sp>
-      <p:sp>
-        <p:nvSpPr>
-          <p:cNvPr id="10" name="Date Placeholder 9">
-            <a:extLst>
-              <a:ext uri="{FF2B5EF4-FFF2-40B4-BE49-F238E27FC236}">
-                <a16:creationId xmlns:a16="http://schemas.microsoft.com/office/drawing/2014/main" id="{6BCC5D9B-F93F-DC07-471D-E3788AD8F14E}"/>
-              </a:ext>
-            </a:extLst>
-          </p:cNvPr>
-          <p:cNvSpPr>
-            <a:spLocks noGrp="1"/>
-          </p:cNvSpPr>
-          <p:nvPr>
-            <p:ph type="dt" sz="half" idx="10"/>
-          </p:nvPr>
-        </p:nvSpPr>
-        <p:spPr/>
-        <p:txBody>
-          <a:bodyPr/>
-          <a:lstStyle/>
-          <a:p>
-            <a:r>
-              <a:rPr lang="en-CH"/>
-              <a:t>30/03/2026</a:t>
-            </a:r>
-          </a:p>
-        </p:txBody>
-      </p:sp>
-      <p:sp>
-        <p:nvSpPr>
-          <p:cNvPr id="11" name="Footer Placeholder 10">
-            <a:extLst>
-              <a:ext uri="{FF2B5EF4-FFF2-40B4-BE49-F238E27FC236}">
-                <a16:creationId xmlns:a16="http://schemas.microsoft.com/office/drawing/2014/main" id="{02814983-3F3A-AC07-6B22-099DA48B7139}"/>
-              </a:ext>
-            </a:extLst>
-          </p:cNvPr>
-          <p:cNvSpPr>
-            <a:spLocks noGrp="1"/>
-          </p:cNvSpPr>
-          <p:nvPr>
-            <p:ph type="ftr" sz="quarter" idx="11"/>
-          </p:nvPr>
-        </p:nvSpPr>
-        <p:spPr/>
-        <p:txBody>
-          <a:bodyPr/>
-          <a:lstStyle/>
-          <a:p>
-            <a:endParaRPr lang="en-CH"/>
-          </a:p>
-        </p:txBody>
-      </p:sp>
-      <p:sp>
-        <p:nvSpPr>
-          <p:cNvPr id="12" name="Slide Number Placeholder 11">
-            <a:extLst>
-              <a:ext uri="{FF2B5EF4-FFF2-40B4-BE49-F238E27FC236}">
-                <a16:creationId xmlns:a16="http://schemas.microsoft.com/office/drawing/2014/main" id="{C596690E-368F-528B-C80C-244B73A28E28}"/>
-              </a:ext>
-            </a:extLst>
-          </p:cNvPr>
-          <p:cNvSpPr>
-            <a:spLocks noGrp="1"/>
-          </p:cNvSpPr>
-          <p:nvPr>
-            <p:ph type="sldNum" sz="quarter" idx="12"/>
-          </p:nvPr>
-        </p:nvSpPr>
-        <p:spPr/>
-        <p:txBody>
-          <a:bodyPr/>
-          <a:lstStyle/>
-          <a:p>
-            <a:fld id="{1013ED95-016C-42D7-B550-5C99AA40E4D5}" type="slidenum">
-              <a:rPr lang="en-CH" smtClean="0"/>
-              <a:pPr/>
-              <a:t>17</a:t>
-            </a:fld>
-            <a:r>
-              <a:rPr lang="en-CH"/>
-              <a:t> / XX</a:t>
-            </a:r>
-            <a:endParaRPr lang="en-CH" dirty="0"/>
-          </a:p>
-        </p:txBody>
-      </p:sp>
-    </p:spTree>
-    <p:extLst>
-      <p:ext uri="{BB962C8B-B14F-4D97-AF65-F5344CB8AC3E}">
-        <p14:creationId xmlns:p14="http://schemas.microsoft.com/office/powerpoint/2010/main" val="962960915"/>
-      </p:ext>
-    </p:extLst>
-  </p:cSld>
-  <p:clrMapOvr>
-    <a:masterClrMapping/>
-  </p:clrMapOvr>
-</p:sld>
-</file>
-
 <file path=ppt/slides/slide18.xml><?xml version="1.0" encoding="utf-8"?>
 <p:sld xmlns:a="http://schemas.openxmlformats.org/drawingml/2006/main" xmlns:r="http://schemas.openxmlformats.org/officeDocument/2006/relationships" xmlns:p="http://schemas.openxmlformats.org/presentationml/2006/main">
   <p:cSld>
@@ -17225,8 +18754,30 @@
           <a:p>
             <a:r>
               <a:rPr lang="en-GB" dirty="0"/>
-              <a:t>One desired reentrant call</a:t>
-            </a:r>
+              <a:t>One desired </a:t>
+            </a:r>
+            <a:r>
+              <a:rPr lang="en-GB" dirty="0" err="1"/>
+              <a:t>reentrant</a:t>
+            </a:r>
+            <a:r>
+              <a:rPr lang="en-GB" dirty="0"/>
+              <a:t> call</a:t>
+            </a:r>
+            <a:endParaRPr lang="en-CH" dirty="0"/>
+          </a:p>
+          <a:p>
+            <a:endParaRPr lang="en-CH" dirty="0"/>
+          </a:p>
+          <a:p>
+            <a:pPr marL="0" indent="0">
+              <a:buNone/>
+            </a:pPr>
+            <a:r>
+              <a:rPr lang="en-CH" sz="2400" i="1" dirty="0"/>
+              <a:t>Protection must use runtime check!</a:t>
+            </a:r>
+            <a:endParaRPr lang="en-GB" i="1" dirty="0"/>
           </a:p>
         </p:txBody>
       </p:sp>
@@ -17794,15 +19345,64 @@
                                   </p:childTnLst>
                                 </p:cTn>
                               </p:par>
+                            </p:childTnLst>
+                          </p:cTn>
+                        </p:par>
+                      </p:childTnLst>
+                    </p:cTn>
+                  </p:par>
+                  <p:par>
+                    <p:cTn id="23" fill="hold">
+                      <p:stCondLst>
+                        <p:cond delay="indefinite"/>
+                      </p:stCondLst>
+                      <p:childTnLst>
+                        <p:par>
+                          <p:cTn id="24" fill="hold">
+                            <p:stCondLst>
+                              <p:cond delay="0"/>
+                            </p:stCondLst>
+                            <p:childTnLst>
                               <p:par>
-                                <p:cTn id="23" presetID="1" presetClass="entr" presetSubtype="0" fill="hold" grpId="0" nodeType="withEffect">
+                                <p:cTn id="25" presetID="1" presetClass="entr" presetSubtype="0" fill="hold" grpId="0" nodeType="clickEffect">
                                   <p:stCondLst>
                                     <p:cond delay="0"/>
                                   </p:stCondLst>
                                   <p:childTnLst>
                                     <p:set>
                                       <p:cBhvr>
-                                        <p:cTn id="24" dur="1" fill="hold">
+                                        <p:cTn id="26" dur="1" fill="hold">
+                                          <p:stCondLst>
+                                            <p:cond delay="0"/>
+                                          </p:stCondLst>
+                                        </p:cTn>
+                                        <p:tgtEl>
+                                          <p:spTgt spid="3">
+                                            <p:txEl>
+                                              <p:pRg st="4" end="4"/>
+                                            </p:txEl>
+                                          </p:spTgt>
+                                        </p:tgtEl>
+                                        <p:attrNameLst>
+                                          <p:attrName>style.visibility</p:attrName>
+                                        </p:attrNameLst>
+                                      </p:cBhvr>
+                                      <p:to>
+                                        <p:strVal val="visible"/>
+                                      </p:to>
+                                    </p:set>
+                                  </p:childTnLst>
+                                </p:cTn>
+                              </p:par>
+                              <p:par>
+                                <p:cTn id="27" presetID="1" presetClass="entr" presetSubtype="0" fill="hold" grpId="0" nodeType="withEffect">
+                                  <p:stCondLst>
+                                    <p:cond delay="0"/>
+                                  </p:stCondLst>
+                                  <p:childTnLst>
+                                    <p:set>
+                                      <p:cBhvr>
+                                        <p:cTn id="28" dur="1" fill="hold">
                                           <p:stCondLst>
                                             <p:cond delay="0"/>
                                           </p:stCondLst>
@@ -17822,14 +19422,14 @@
                                 </p:cTn>
                               </p:par>
                               <p:par>
-                                <p:cTn id="25" presetID="1" presetClass="entr" presetSubtype="0" fill="hold" nodeType="withEffect">
+                                <p:cTn id="29" presetID="1" presetClass="entr" presetSubtype="0" fill="hold" nodeType="withEffect">
                                   <p:stCondLst>
                                     <p:cond delay="0"/>
                                   </p:stCondLst>
                                   <p:childTnLst>
                                     <p:set>
                                       <p:cBhvr>
-                                        <p:cTn id="26" dur="1" fill="hold">
+                                        <p:cTn id="30" dur="1" fill="hold">
                                           <p:stCondLst>
                                             <p:cond delay="0"/>
                                           </p:stCondLst>
@@ -17849,14 +19449,14 @@
                                 </p:cTn>
                               </p:par>
                               <p:par>
-                                <p:cTn id="27" presetID="1" presetClass="entr" presetSubtype="0" fill="hold" nodeType="withEffect">
+                                <p:cTn id="31" presetID="1" presetClass="entr" presetSubtype="0" fill="hold" nodeType="withEffect">
                                   <p:stCondLst>
                                     <p:cond delay="0"/>
                                   </p:stCondLst>
                                   <p:childTnLst>
                                     <p:set>
                                       <p:cBhvr>
-                                        <p:cTn id="28" dur="1" fill="hold">
+                                        <p:cTn id="32" dur="1" fill="hold">
                                           <p:stCondLst>
                                             <p:cond delay="0"/>
                                           </p:stCondLst>
@@ -19037,10 +20637,10 @@
           <p:nvPr/>
         </p:nvPicPr>
         <p:blipFill>
-          <a:blip r:embed="rId2">
+          <a:blip r:embed="rId3">
             <a:extLst>
               <a:ext uri="{96DAC541-7B7A-43D3-8B79-37D633B846F1}">
-                <asvg:svgBlip xmlns:asvg="http://schemas.microsoft.com/office/drawing/2016/SVG/main" r:embed="rId3"/>
+                <asvg:svgBlip xmlns:asvg="http://schemas.microsoft.com/office/drawing/2016/SVG/main" r:embed="rId4"/>
               </a:ext>
             </a:extLst>
           </a:blip>
@@ -19073,10 +20673,10 @@
           <p:nvPr/>
         </p:nvPicPr>
         <p:blipFill>
-          <a:blip r:embed="rId2">
+          <a:blip r:embed="rId3">
             <a:extLst>
               <a:ext uri="{96DAC541-7B7A-43D3-8B79-37D633B846F1}">
-                <asvg:svgBlip xmlns:asvg="http://schemas.microsoft.com/office/drawing/2016/SVG/main" r:embed="rId3"/>
+                <asvg:svgBlip xmlns:asvg="http://schemas.microsoft.com/office/drawing/2016/SVG/main" r:embed="rId4"/>
               </a:ext>
             </a:extLst>
           </a:blip>
@@ -36449,78 +38049,202 @@
         </p:nvSpPr>
         <p:spPr/>
         <p:txBody>
-          <a:bodyPr/>
+          <a:bodyPr>
+            <a:normAutofit fontScale="92500" lnSpcReduction="10000"/>
+          </a:bodyPr>
           <a:lstStyle/>
           <a:p>
             <a:r>
               <a:rPr lang="en-CH" dirty="0"/>
-              <a:t>structs, traits as in Rust</a:t>
-            </a:r>
-          </a:p>
-          <a:p>
-            <a:r>
-              <a:rPr lang="en-CH" dirty="0"/>
-              <a:t>“Dual” types:</a:t>
+              <a:t>User-defined types as in Rust (</a:t>
+            </a:r>
+            <a:r>
+              <a:rPr lang="en-CH" sz="2400" dirty="0">
+                <a:solidFill>
+                  <a:schemeClr val="accent2"/>
+                </a:solidFill>
+                <a:latin typeface="Lucida Console" panose="020B0609040504020204" pitchFamily="49" charset="0"/>
+              </a:rPr>
+              <a:t>struct</a:t>
+            </a:r>
+            <a:r>
+              <a:rPr lang="en-CH" dirty="0"/>
+              <a:t>, </a:t>
+            </a:r>
+            <a:r>
+              <a:rPr lang="en-CH" sz="2400" dirty="0">
+                <a:solidFill>
+                  <a:schemeClr val="accent2"/>
+                </a:solidFill>
+                <a:latin typeface="Lucida Console" panose="020B0609040504020204" pitchFamily="49" charset="0"/>
+              </a:rPr>
+              <a:t>trait</a:t>
+            </a:r>
+            <a:r>
+              <a:rPr lang="en-CH" dirty="0"/>
+              <a:t>, etc.)</a:t>
             </a:r>
           </a:p>
           <a:p>
             <a:pPr lvl="1"/>
             <a:r>
               <a:rPr lang="en-CH" dirty="0"/>
-              <a:t>contract &lt;-&gt; struct</a:t>
+              <a:t>Rust “</a:t>
+            </a:r>
+            <a:r>
+              <a:rPr lang="en-CH" sz="2000" dirty="0" err="1">
+                <a:solidFill>
+                  <a:schemeClr val="accent2"/>
+                </a:solidFill>
+                <a:latin typeface="Lucida Console" panose="020B0609040504020204" pitchFamily="49" charset="0"/>
+              </a:rPr>
+              <a:t>enum</a:t>
+            </a:r>
+            <a:r>
+              <a:rPr lang="en-CH" dirty="0"/>
+              <a:t>” is actually ADT</a:t>
             </a:r>
           </a:p>
           <a:p>
             <a:pPr lvl="1"/>
             <a:r>
+              <a:rPr lang="en-CH" dirty="0"/>
+              <a:t>Extended with:</a:t>
+            </a:r>
+          </a:p>
+          <a:p>
+            <a:pPr lvl="2"/>
+            <a:r>
+              <a:rPr lang="en-CH" sz="1800" dirty="0">
+                <a:latin typeface="Lucida Console" panose="020B0609040504020204" pitchFamily="49" charset="0"/>
+              </a:rPr>
+              <a:t> </a:t>
+            </a:r>
+            <a:r>
+              <a:rPr lang="en-CH" sz="1800" dirty="0">
+                <a:solidFill>
+                  <a:schemeClr val="accent2"/>
+                </a:solidFill>
+                <a:latin typeface="Lucida Console" panose="020B0609040504020204" pitchFamily="49" charset="0"/>
+              </a:rPr>
+              <a:t>contract</a:t>
+            </a:r>
+            <a:r>
+              <a:rPr lang="en-CH" dirty="0"/>
+              <a:t>  ~  </a:t>
+            </a:r>
+            <a:r>
+              <a:rPr lang="en-CH" sz="1800" dirty="0">
+                <a:solidFill>
+                  <a:schemeClr val="accent2"/>
+                </a:solidFill>
+                <a:latin typeface="Lucida Console" panose="020B0609040504020204" pitchFamily="49" charset="0"/>
+              </a:rPr>
+              <a:t>struct</a:t>
+            </a:r>
+            <a:endParaRPr lang="en-CH" dirty="0">
+              <a:solidFill>
+                <a:schemeClr val="accent2"/>
+              </a:solidFill>
+              <a:latin typeface="Lucida Console" panose="020B0609040504020204" pitchFamily="49" charset="0"/>
+            </a:endParaRPr>
+          </a:p>
+          <a:p>
+            <a:pPr lvl="2"/>
+            <a:r>
+              <a:rPr lang="en-CH" sz="1800" dirty="0">
+                <a:latin typeface="Lucida Console" panose="020B0609040504020204" pitchFamily="49" charset="0"/>
+              </a:rPr>
+              <a:t> </a:t>
+            </a:r>
+            <a:r>
+              <a:rPr lang="en-CH" sz="1800" dirty="0" err="1">
+                <a:solidFill>
+                  <a:schemeClr val="accent2"/>
+                </a:solidFill>
+                <a:latin typeface="Lucida Console" panose="020B0609040504020204" pitchFamily="49" charset="0"/>
+              </a:rPr>
+              <a:t>abi</a:t>
+            </a:r>
+            <a:r>
+              <a:rPr lang="en-CH" dirty="0"/>
+              <a:t>  ~  </a:t>
+            </a:r>
+            <a:r>
+              <a:rPr lang="en-CH" sz="1800" dirty="0">
+                <a:solidFill>
+                  <a:schemeClr val="accent2"/>
+                </a:solidFill>
+                <a:latin typeface="Lucida Console" panose="020B0609040504020204" pitchFamily="49" charset="0"/>
+              </a:rPr>
+              <a:t>trait</a:t>
+            </a:r>
+            <a:endParaRPr lang="en-CH" dirty="0">
+              <a:solidFill>
+                <a:schemeClr val="accent2"/>
+              </a:solidFill>
+              <a:latin typeface="Lucida Console" panose="020B0609040504020204" pitchFamily="49" charset="0"/>
+            </a:endParaRPr>
+          </a:p>
+          <a:p>
+            <a:r>
+              <a:rPr lang="en-CH" dirty="0"/>
+              <a:t>Generics and trait bounds</a:t>
+            </a:r>
+          </a:p>
+          <a:p>
+            <a:pPr lvl="1"/>
+            <a:r>
+              <a:rPr lang="en-CH" dirty="0"/>
+              <a:t>mostly intended for Result types, still experimental</a:t>
+            </a:r>
+          </a:p>
+          <a:p>
+            <a:pPr lvl="1"/>
+            <a:r>
+              <a:rPr lang="en-CH" dirty="0"/>
+              <a:t>Contracts and </a:t>
+            </a:r>
+            <a:r>
               <a:rPr lang="en-CH" dirty="0" err="1"/>
-              <a:t>abi</a:t>
-            </a:r>
-            <a:r>
-              <a:rPr lang="en-CH" dirty="0"/>
-              <a:t> &lt;-&gt; trait</a:t>
-            </a:r>
-          </a:p>
-          <a:p>
-            <a:r>
-              <a:rPr lang="en-CH" dirty="0" err="1"/>
-              <a:t>enums</a:t>
-            </a:r>
-            <a:r>
-              <a:rPr lang="en-CH" dirty="0"/>
-              <a:t> in Rust are just ADTs</a:t>
-            </a:r>
-          </a:p>
-          <a:p>
-            <a:r>
-              <a:rPr lang="en-CH" dirty="0"/>
-              <a:t>Generics and trait bounds</a:t>
+              <a:t>ABIs</a:t>
+            </a:r>
+            <a:r>
+              <a:rPr lang="en-CH" dirty="0"/>
+              <a:t> are monomorphic</a:t>
+            </a:r>
+          </a:p>
+          <a:p>
+            <a:r>
+              <a:rPr lang="en-CH" dirty="0"/>
+              <a:t>Type inference (Hindley-Milner)</a:t>
+            </a:r>
+          </a:p>
+          <a:p>
+            <a:r>
+              <a:rPr lang="en-CH" dirty="0"/>
+              <a:t>Side effect checks:</a:t>
             </a:r>
           </a:p>
           <a:p>
             <a:pPr lvl="1"/>
             <a:r>
               <a:rPr lang="en-CH" dirty="0"/>
-              <a:t>intended for Result types, still experimental</a:t>
-            </a:r>
-          </a:p>
-          <a:p>
-            <a:r>
-              <a:rPr lang="en-CH" dirty="0"/>
-              <a:t>Type inference (Hindley-Milner)</a:t>
-            </a:r>
-          </a:p>
-          <a:p>
-            <a:r>
-              <a:rPr lang="en-CH" dirty="0"/>
-              <a:t>Side effect checks (lenient or strict)</a:t>
-            </a:r>
-          </a:p>
-          <a:p>
-            <a:pPr marL="0" indent="0">
-              <a:buNone/>
-            </a:pPr>
-            <a:endParaRPr lang="en-CH" dirty="0"/>
+              <a:t>Default: Function signatures</a:t>
+            </a:r>
+          </a:p>
+          <a:p>
+            <a:pPr lvl="1"/>
+            <a:r>
+              <a:rPr lang="en-CH" sz="2200" dirty="0">
+                <a:latin typeface="Lucida Console" panose="020B0609040504020204" pitchFamily="49" charset="0"/>
+              </a:rPr>
+              <a:t>--strict</a:t>
+            </a:r>
+            <a:r>
+              <a:rPr lang="en-CH" dirty="0"/>
+              <a:t>: require inline effect annotations</a:t>
+            </a:r>
           </a:p>
         </p:txBody>
       </p:sp>
@@ -36731,7 +38455,7 @@
             <a:pPr lvl="1"/>
             <a:r>
               <a:rPr lang="en-CH" dirty="0"/>
-              <a:t>“Inline assembly” for specific behaviour</a:t>
+              <a:t>“Inline assembly” for specific optimizations</a:t>
             </a:r>
           </a:p>
           <a:p>
@@ -37061,7 +38785,7 @@
           <p:cNvPr id="2" name="Title 1">
             <a:extLst>
               <a:ext uri="{FF2B5EF4-FFF2-40B4-BE49-F238E27FC236}">
-                <a16:creationId xmlns:a16="http://schemas.microsoft.com/office/drawing/2014/main" id="{AF9BC46B-551E-AB41-F6BD-AD90740DD9EE}"/>
+                <a16:creationId xmlns:a16="http://schemas.microsoft.com/office/drawing/2014/main" id="{CC854303-9C4B-60B6-D791-4093181D4826}"/>
               </a:ext>
             </a:extLst>
           </p:cNvPr>
@@ -37077,7 +38801,10 @@
           <a:bodyPr/>
           <a:lstStyle/>
           <a:p>
-            <a:endParaRPr lang="en-CH"/>
+            <a:r>
+              <a:rPr lang="en-CH" dirty="0"/>
+              <a:t>Evaluation</a:t>
+            </a:r>
           </a:p>
         </p:txBody>
       </p:sp>
@@ -37086,7 +38813,7 @@
           <p:cNvPr id="3" name="Content Placeholder 2">
             <a:extLst>
               <a:ext uri="{FF2B5EF4-FFF2-40B4-BE49-F238E27FC236}">
-                <a16:creationId xmlns:a16="http://schemas.microsoft.com/office/drawing/2014/main" id="{B5DF9B8A-D3FB-DCE7-91C8-0078921B07EE}"/>
+                <a16:creationId xmlns:a16="http://schemas.microsoft.com/office/drawing/2014/main" id="{0283892A-D240-3D04-0134-14BF1AB614AF}"/>
               </a:ext>
             </a:extLst>
           </p:cNvPr>
@@ -37102,7 +38829,77 @@
           <a:bodyPr/>
           <a:lstStyle/>
           <a:p>
-            <a:endParaRPr lang="en-CH"/>
+            <a:r>
+              <a:rPr lang="en-CH" dirty="0"/>
+              <a:t>ADTs:</a:t>
+            </a:r>
+          </a:p>
+          <a:p>
+            <a:pPr lvl="1"/>
+            <a:r>
+              <a:rPr lang="en-CH" dirty="0"/>
+              <a:t>Reduced code complexity</a:t>
+            </a:r>
+          </a:p>
+          <a:p>
+            <a:pPr lvl="1"/>
+            <a:r>
+              <a:rPr lang="en-CH" dirty="0"/>
+              <a:t>Less error-prone</a:t>
+            </a:r>
+          </a:p>
+          <a:p>
+            <a:pPr lvl="1"/>
+            <a:r>
+              <a:rPr lang="en-CH" dirty="0"/>
+              <a:t>High memory usage</a:t>
+            </a:r>
+          </a:p>
+          <a:p>
+            <a:r>
+              <a:rPr lang="en-CH" dirty="0"/>
+              <a:t>Reentrancy Protection:</a:t>
+            </a:r>
+          </a:p>
+          <a:p>
+            <a:pPr lvl="1"/>
+            <a:r>
+              <a:rPr lang="en-CH" dirty="0"/>
+              <a:t>Disabling reentrancy by default does most of the work</a:t>
+            </a:r>
+          </a:p>
+          <a:p>
+            <a:pPr lvl="1"/>
+            <a:r>
+              <a:rPr lang="en-CH" dirty="0"/>
+              <a:t>When does it not suffice?</a:t>
+            </a:r>
+          </a:p>
+          <a:p>
+            <a:pPr lvl="2"/>
+            <a:r>
+              <a:rPr lang="en-CH" dirty="0"/>
+              <a:t>Mandated callbacks in token standards</a:t>
+            </a:r>
+          </a:p>
+          <a:p>
+            <a:pPr lvl="2"/>
+            <a:r>
+              <a:rPr lang="en-CH" dirty="0"/>
+              <a:t>Cross-contract </a:t>
+            </a:r>
+            <a:r>
+              <a:rPr lang="en-CH" dirty="0" err="1"/>
+              <a:t>reentrancies</a:t>
+            </a:r>
+            <a:endParaRPr lang="en-CH" dirty="0"/>
+          </a:p>
+          <a:p>
+            <a:pPr lvl="2"/>
+            <a:r>
+              <a:rPr lang="en-CH" dirty="0"/>
+              <a:t>Specific use cases (e.g. flash loans)</a:t>
+            </a:r>
           </a:p>
         </p:txBody>
       </p:sp>
@@ -37111,7 +38908,7 @@
           <p:cNvPr id="4" name="Date Placeholder 3">
             <a:extLst>
               <a:ext uri="{FF2B5EF4-FFF2-40B4-BE49-F238E27FC236}">
-                <a16:creationId xmlns:a16="http://schemas.microsoft.com/office/drawing/2014/main" id="{EF92E660-6274-CAB3-1E76-E66D6392CD9C}"/>
+                <a16:creationId xmlns:a16="http://schemas.microsoft.com/office/drawing/2014/main" id="{D78B9E4D-228B-1EBF-08D5-756645865851}"/>
               </a:ext>
             </a:extLst>
           </p:cNvPr>
@@ -37139,7 +38936,7 @@
           <p:cNvPr id="5" name="Footer Placeholder 4">
             <a:extLst>
               <a:ext uri="{FF2B5EF4-FFF2-40B4-BE49-F238E27FC236}">
-                <a16:creationId xmlns:a16="http://schemas.microsoft.com/office/drawing/2014/main" id="{B688E735-1875-850E-7082-26F73F6C97B4}"/>
+                <a16:creationId xmlns:a16="http://schemas.microsoft.com/office/drawing/2014/main" id="{46C6F595-200A-59FE-CC12-BAD8DBE4D078}"/>
               </a:ext>
             </a:extLst>
           </p:cNvPr>
@@ -37164,7 +38961,7 @@
           <p:cNvPr id="6" name="Slide Number Placeholder 5">
             <a:extLst>
               <a:ext uri="{FF2B5EF4-FFF2-40B4-BE49-F238E27FC236}">
-                <a16:creationId xmlns:a16="http://schemas.microsoft.com/office/drawing/2014/main" id="{B6D2D1F0-66B8-C97A-37DE-4CEB717B674C}"/>
+                <a16:creationId xmlns:a16="http://schemas.microsoft.com/office/drawing/2014/main" id="{4DBC10FA-B9F5-DD7F-06F4-5434154789DE}"/>
               </a:ext>
             </a:extLst>
           </p:cNvPr>
@@ -37196,7 +38993,7 @@
     </p:spTree>
     <p:extLst>
       <p:ext uri="{BB962C8B-B14F-4D97-AF65-F5344CB8AC3E}">
-        <p14:creationId xmlns:p14="http://schemas.microsoft.com/office/powerpoint/2010/main" val="3913272762"/>
+        <p14:creationId xmlns:p14="http://schemas.microsoft.com/office/powerpoint/2010/main" val="2206728200"/>
       </p:ext>
     </p:extLst>
   </p:cSld>
@@ -37211,13 +39008,7 @@
   <p:cSld>
     <p:spTree>
       <p:nvGrpSpPr>
-        <p:cNvPr id="1" name="">
-          <a:extLst>
-            <a:ext uri="{FF2B5EF4-FFF2-40B4-BE49-F238E27FC236}">
-              <a16:creationId xmlns:a16="http://schemas.microsoft.com/office/drawing/2014/main" id="{029FA1AF-D3B7-4197-B4AA-D9F2112CA11C}"/>
-            </a:ext>
-          </a:extLst>
-        </p:cNvPr>
+        <p:cNvPr id="1" name=""/>
         <p:cNvGrpSpPr/>
         <p:nvPr/>
       </p:nvGrpSpPr>
@@ -37234,7 +39025,7 @@
           <p:cNvPr id="2" name="Title 1">
             <a:extLst>
               <a:ext uri="{FF2B5EF4-FFF2-40B4-BE49-F238E27FC236}">
-                <a16:creationId xmlns:a16="http://schemas.microsoft.com/office/drawing/2014/main" id="{40716033-2719-5D00-2C17-DAAF07A7A41B}"/>
+                <a16:creationId xmlns:a16="http://schemas.microsoft.com/office/drawing/2014/main" id="{4F5D12ED-B89B-47F9-274E-31ACAA1287B6}"/>
               </a:ext>
             </a:extLst>
           </p:cNvPr>
@@ -37252,7 +39043,7 @@
           <a:p>
             <a:r>
               <a:rPr lang="en-CH" dirty="0"/>
-              <a:t>Conclusion &amp; Future Work</a:t>
+              <a:t>Reentrancies</a:t>
             </a:r>
           </a:p>
         </p:txBody>
@@ -37262,7 +39053,7 @@
           <p:cNvPr id="3" name="Content Placeholder 2">
             <a:extLst>
               <a:ext uri="{FF2B5EF4-FFF2-40B4-BE49-F238E27FC236}">
-                <a16:creationId xmlns:a16="http://schemas.microsoft.com/office/drawing/2014/main" id="{A2AB248D-3648-CB55-611C-BDBCC3D96A2F}"/>
+                <a16:creationId xmlns:a16="http://schemas.microsoft.com/office/drawing/2014/main" id="{A79C1ED4-F0C5-E839-0E0F-99DF3B8D1C2B}"/>
               </a:ext>
             </a:extLst>
           </p:cNvPr>
@@ -37280,23 +39071,17 @@
           <a:p>
             <a:r>
               <a:rPr lang="en-CH" dirty="0"/>
-              <a:t>Summarize your main contributions (identified gap -&gt; novel approach -&gt; working tool).</a:t>
-            </a:r>
-          </a:p>
-          <a:p>
-            <a:r>
-              <a:rPr lang="en-CH" dirty="0"/>
-              <a:t>Briefly mention what could be done next.</a:t>
+              <a:t>Breakdown of 54 reentrancy exploits 2021-2024:</a:t>
             </a:r>
           </a:p>
         </p:txBody>
       </p:sp>
       <p:sp>
         <p:nvSpPr>
-          <p:cNvPr id="10" name="Date Placeholder 9">
-            <a:extLst>
-              <a:ext uri="{FF2B5EF4-FFF2-40B4-BE49-F238E27FC236}">
-                <a16:creationId xmlns:a16="http://schemas.microsoft.com/office/drawing/2014/main" id="{59B9A612-775D-998B-1D7A-D2B46DF8D7CD}"/>
+          <p:cNvPr id="4" name="Date Placeholder 3">
+            <a:extLst>
+              <a:ext uri="{FF2B5EF4-FFF2-40B4-BE49-F238E27FC236}">
+                <a16:creationId xmlns:a16="http://schemas.microsoft.com/office/drawing/2014/main" id="{3AC29F6C-7D5E-46FB-93AC-F42F14DA59C0}"/>
               </a:ext>
             </a:extLst>
           </p:cNvPr>
@@ -37321,10 +39106,10 @@
       </p:sp>
       <p:sp>
         <p:nvSpPr>
-          <p:cNvPr id="11" name="Footer Placeholder 10">
-            <a:extLst>
-              <a:ext uri="{FF2B5EF4-FFF2-40B4-BE49-F238E27FC236}">
-                <a16:creationId xmlns:a16="http://schemas.microsoft.com/office/drawing/2014/main" id="{960BCA54-D022-260C-5931-14F12AB49087}"/>
+          <p:cNvPr id="5" name="Footer Placeholder 4">
+            <a:extLst>
+              <a:ext uri="{FF2B5EF4-FFF2-40B4-BE49-F238E27FC236}">
+                <a16:creationId xmlns:a16="http://schemas.microsoft.com/office/drawing/2014/main" id="{388F80E4-61B4-B319-B434-3E89BF70EB57}"/>
               </a:ext>
             </a:extLst>
           </p:cNvPr>
@@ -37346,10 +39131,10 @@
       </p:sp>
       <p:sp>
         <p:nvSpPr>
-          <p:cNvPr id="12" name="Slide Number Placeholder 11">
-            <a:extLst>
-              <a:ext uri="{FF2B5EF4-FFF2-40B4-BE49-F238E27FC236}">
-                <a16:creationId xmlns:a16="http://schemas.microsoft.com/office/drawing/2014/main" id="{FB7D8A20-A614-B8EC-88C2-4B7D500B62ED}"/>
+          <p:cNvPr id="6" name="Slide Number Placeholder 5">
+            <a:extLst>
+              <a:ext uri="{FF2B5EF4-FFF2-40B4-BE49-F238E27FC236}">
+                <a16:creationId xmlns:a16="http://schemas.microsoft.com/office/drawing/2014/main" id="{A318EE6D-E6F0-DF0D-5D9D-679BCC2E281E}"/>
               </a:ext>
             </a:extLst>
           </p:cNvPr>
@@ -37378,10 +39163,2019 @@
           </a:p>
         </p:txBody>
       </p:sp>
+      <p:graphicFrame>
+        <p:nvGraphicFramePr>
+          <p:cNvPr id="7" name="Table 6">
+            <a:extLst>
+              <a:ext uri="{FF2B5EF4-FFF2-40B4-BE49-F238E27FC236}">
+                <a16:creationId xmlns:a16="http://schemas.microsoft.com/office/drawing/2014/main" id="{E4DB1B0D-3F5B-02E8-2AFC-3CC805FB238E}"/>
+              </a:ext>
+            </a:extLst>
+          </p:cNvPr>
+          <p:cNvGraphicFramePr>
+            <a:graphicFrameLocks noGrp="1"/>
+          </p:cNvGraphicFramePr>
+          <p:nvPr>
+            <p:extLst>
+              <p:ext uri="{D42A27DB-BD31-4B8C-83A1-F6EECF244321}">
+                <p14:modId xmlns:p14="http://schemas.microsoft.com/office/powerpoint/2010/main" val="196030229"/>
+              </p:ext>
+            </p:extLst>
+          </p:nvPr>
+        </p:nvGraphicFramePr>
+        <p:xfrm>
+          <a:off x="838200" y="2431574"/>
+          <a:ext cx="7942606" cy="3510280"/>
+        </p:xfrm>
+        <a:graphic>
+          <a:graphicData uri="http://schemas.openxmlformats.org/drawingml/2006/table">
+            <a:tbl>
+              <a:tblPr firstRow="1" lastRow="1">
+                <a:tableStyleId>{073A0DAA-6AF3-43AB-8588-CEC1D06C72B9}</a:tableStyleId>
+              </a:tblPr>
+              <a:tblGrid>
+                <a:gridCol w="1663886">
+                  <a:extLst>
+                    <a:ext uri="{9D8B030D-6E8A-4147-A177-3AD203B41FA5}">
+                      <a16:colId xmlns:a16="http://schemas.microsoft.com/office/drawing/2014/main" val="894599600"/>
+                    </a:ext>
+                  </a:extLst>
+                </a:gridCol>
+                <a:gridCol w="782558">
+                  <a:extLst>
+                    <a:ext uri="{9D8B030D-6E8A-4147-A177-3AD203B41FA5}">
+                      <a16:colId xmlns:a16="http://schemas.microsoft.com/office/drawing/2014/main" val="203540333"/>
+                    </a:ext>
+                  </a:extLst>
+                </a:gridCol>
+                <a:gridCol w="1397968">
+                  <a:extLst>
+                    <a:ext uri="{9D8B030D-6E8A-4147-A177-3AD203B41FA5}">
+                      <a16:colId xmlns:a16="http://schemas.microsoft.com/office/drawing/2014/main" val="1149094040"/>
+                    </a:ext>
+                  </a:extLst>
+                </a:gridCol>
+                <a:gridCol w="2124000">
+                  <a:extLst>
+                    <a:ext uri="{9D8B030D-6E8A-4147-A177-3AD203B41FA5}">
+                      <a16:colId xmlns:a16="http://schemas.microsoft.com/office/drawing/2014/main" val="733630150"/>
+                    </a:ext>
+                  </a:extLst>
+                </a:gridCol>
+                <a:gridCol w="1974194">
+                  <a:extLst>
+                    <a:ext uri="{9D8B030D-6E8A-4147-A177-3AD203B41FA5}">
+                      <a16:colId xmlns:a16="http://schemas.microsoft.com/office/drawing/2014/main" val="2522803025"/>
+                    </a:ext>
+                  </a:extLst>
+                </a:gridCol>
+              </a:tblGrid>
+              <a:tr h="370840">
+                <a:tc>
+                  <a:txBody>
+                    <a:bodyPr/>
+                    <a:lstStyle/>
+                    <a:p>
+                      <a:pPr algn="r"/>
+                      <a:r>
+                        <a:rPr lang="en-CH" dirty="0"/>
+                        <a:t>Category</a:t>
+                      </a:r>
+                    </a:p>
+                  </a:txBody>
+                  <a:tcPr marL="54000" marR="54000">
+                    <a:lnL w="12700" cap="flat" cmpd="sng" algn="ctr">
+                      <a:noFill/>
+                      <a:prstDash val="solid"/>
+                      <a:round/>
+                      <a:headEnd type="none" w="med" len="med"/>
+                      <a:tailEnd type="none" w="med" len="med"/>
+                    </a:lnL>
+                    <a:lnR w="12700" cap="flat" cmpd="sng" algn="ctr">
+                      <a:noFill/>
+                      <a:prstDash val="solid"/>
+                      <a:round/>
+                      <a:headEnd type="none" w="med" len="med"/>
+                      <a:tailEnd type="none" w="med" len="med"/>
+                    </a:lnR>
+                    <a:lnT w="12700" cap="flat" cmpd="sng" algn="ctr">
+                      <a:noFill/>
+                      <a:prstDash val="solid"/>
+                      <a:round/>
+                      <a:headEnd type="none" w="med" len="med"/>
+                      <a:tailEnd type="none" w="med" len="med"/>
+                    </a:lnT>
+                    <a:lnB w="12700" cap="flat" cmpd="sng" algn="ctr">
+                      <a:noFill/>
+                      <a:prstDash val="solid"/>
+                      <a:round/>
+                      <a:headEnd type="none" w="med" len="med"/>
+                      <a:tailEnd type="none" w="med" len="med"/>
+                    </a:lnB>
+                  </a:tcPr>
+                </a:tc>
+                <a:tc>
+                  <a:txBody>
+                    <a:bodyPr/>
+                    <a:lstStyle/>
+                    <a:p>
+                      <a:pPr algn="ctr"/>
+                      <a:r>
+                        <a:rPr lang="en-CH" dirty="0"/>
+                        <a:t>Count</a:t>
+                      </a:r>
+                    </a:p>
+                  </a:txBody>
+                  <a:tcPr marL="54000" marR="54000">
+                    <a:lnL w="12700" cap="flat" cmpd="sng" algn="ctr">
+                      <a:noFill/>
+                      <a:prstDash val="solid"/>
+                      <a:round/>
+                      <a:headEnd type="none" w="med" len="med"/>
+                      <a:tailEnd type="none" w="med" len="med"/>
+                    </a:lnL>
+                    <a:lnR w="12700" cap="flat" cmpd="sng" algn="ctr">
+                      <a:noFill/>
+                      <a:prstDash val="solid"/>
+                      <a:round/>
+                      <a:headEnd type="none" w="med" len="med"/>
+                      <a:tailEnd type="none" w="med" len="med"/>
+                    </a:lnR>
+                    <a:lnT w="12700" cap="flat" cmpd="sng" algn="ctr">
+                      <a:noFill/>
+                      <a:prstDash val="solid"/>
+                      <a:round/>
+                      <a:headEnd type="none" w="med" len="med"/>
+                      <a:tailEnd type="none" w="med" len="med"/>
+                    </a:lnT>
+                    <a:lnB w="12700" cap="flat" cmpd="sng" algn="ctr">
+                      <a:noFill/>
+                      <a:prstDash val="solid"/>
+                      <a:round/>
+                      <a:headEnd type="none" w="med" len="med"/>
+                      <a:tailEnd type="none" w="med" len="med"/>
+                    </a:lnB>
+                  </a:tcPr>
+                </a:tc>
+                <a:tc>
+                  <a:txBody>
+                    <a:bodyPr/>
+                    <a:lstStyle/>
+                    <a:p>
+                      <a:pPr algn="ctr"/>
+                      <a:r>
+                        <a:rPr lang="en-CH" dirty="0"/>
+                        <a:t>Funds Lost</a:t>
+                      </a:r>
+                    </a:p>
+                  </a:txBody>
+                  <a:tcPr marL="54000" marR="54000">
+                    <a:lnL w="12700" cap="flat" cmpd="sng" algn="ctr">
+                      <a:noFill/>
+                      <a:prstDash val="solid"/>
+                      <a:round/>
+                      <a:headEnd type="none" w="med" len="med"/>
+                      <a:tailEnd type="none" w="med" len="med"/>
+                    </a:lnL>
+                    <a:lnR w="12700" cap="flat" cmpd="sng" algn="ctr">
+                      <a:noFill/>
+                      <a:prstDash val="solid"/>
+                      <a:round/>
+                      <a:headEnd type="none" w="med" len="med"/>
+                      <a:tailEnd type="none" w="med" len="med"/>
+                    </a:lnR>
+                    <a:lnT w="12700" cap="flat" cmpd="sng" algn="ctr">
+                      <a:noFill/>
+                      <a:prstDash val="solid"/>
+                      <a:round/>
+                      <a:headEnd type="none" w="med" len="med"/>
+                      <a:tailEnd type="none" w="med" len="med"/>
+                    </a:lnT>
+                    <a:lnB w="12700" cap="flat" cmpd="sng" algn="ctr">
+                      <a:noFill/>
+                      <a:prstDash val="solid"/>
+                      <a:round/>
+                      <a:headEnd type="none" w="med" len="med"/>
+                      <a:tailEnd type="none" w="med" len="med"/>
+                    </a:lnB>
+                  </a:tcPr>
+                </a:tc>
+                <a:tc>
+                  <a:txBody>
+                    <a:bodyPr/>
+                    <a:lstStyle/>
+                    <a:p>
+                      <a:pPr algn="ctr"/>
+                      <a:r>
+                        <a:rPr lang="en-CH" dirty="0"/>
+                        <a:t>No Reentrancies</a:t>
+                      </a:r>
+                    </a:p>
+                  </a:txBody>
+                  <a:tcPr marL="54000" marR="54000">
+                    <a:lnL w="12700" cap="flat" cmpd="sng" algn="ctr">
+                      <a:noFill/>
+                      <a:prstDash val="solid"/>
+                      <a:round/>
+                      <a:headEnd type="none" w="med" len="med"/>
+                      <a:tailEnd type="none" w="med" len="med"/>
+                    </a:lnL>
+                    <a:lnR w="12700" cap="flat" cmpd="sng" algn="ctr">
+                      <a:noFill/>
+                      <a:prstDash val="solid"/>
+                      <a:round/>
+                      <a:headEnd type="none" w="med" len="med"/>
+                      <a:tailEnd type="none" w="med" len="med"/>
+                    </a:lnR>
+                    <a:lnT w="12700" cap="flat" cmpd="sng" algn="ctr">
+                      <a:noFill/>
+                      <a:prstDash val="solid"/>
+                      <a:round/>
+                      <a:headEnd type="none" w="med" len="med"/>
+                      <a:tailEnd type="none" w="med" len="med"/>
+                    </a:lnT>
+                    <a:lnB w="12700" cap="flat" cmpd="sng" algn="ctr">
+                      <a:noFill/>
+                      <a:prstDash val="solid"/>
+                      <a:round/>
+                      <a:headEnd type="none" w="med" len="med"/>
+                      <a:tailEnd type="none" w="med" len="med"/>
+                    </a:lnB>
+                  </a:tcPr>
+                </a:tc>
+                <a:tc>
+                  <a:txBody>
+                    <a:bodyPr/>
+                    <a:lstStyle/>
+                    <a:p>
+                      <a:pPr algn="ctr"/>
+                      <a:r>
+                        <a:rPr lang="en-CH" dirty="0"/>
+                        <a:t>Path-Specific</a:t>
+                      </a:r>
+                    </a:p>
+                  </a:txBody>
+                  <a:tcPr marL="54000" marR="54000">
+                    <a:lnL w="12700" cap="flat" cmpd="sng" algn="ctr">
+                      <a:noFill/>
+                      <a:prstDash val="solid"/>
+                      <a:round/>
+                      <a:headEnd type="none" w="med" len="med"/>
+                      <a:tailEnd type="none" w="med" len="med"/>
+                    </a:lnL>
+                    <a:lnR w="12700" cap="flat" cmpd="sng" algn="ctr">
+                      <a:noFill/>
+                      <a:prstDash val="solid"/>
+                      <a:round/>
+                      <a:headEnd type="none" w="med" len="med"/>
+                      <a:tailEnd type="none" w="med" len="med"/>
+                    </a:lnR>
+                    <a:lnT w="12700" cap="flat" cmpd="sng" algn="ctr">
+                      <a:noFill/>
+                      <a:prstDash val="solid"/>
+                      <a:round/>
+                      <a:headEnd type="none" w="med" len="med"/>
+                      <a:tailEnd type="none" w="med" len="med"/>
+                    </a:lnT>
+                    <a:lnB w="12700" cap="flat" cmpd="sng" algn="ctr">
+                      <a:noFill/>
+                      <a:prstDash val="solid"/>
+                      <a:round/>
+                      <a:headEnd type="none" w="med" len="med"/>
+                      <a:tailEnd type="none" w="med" len="med"/>
+                    </a:lnB>
+                  </a:tcPr>
+                </a:tc>
+                <a:extLst>
+                  <a:ext uri="{0D108BD9-81ED-4DB2-BD59-A6C34878D82A}">
+                    <a16:rowId xmlns:a16="http://schemas.microsoft.com/office/drawing/2014/main" val="4176821780"/>
+                  </a:ext>
+                </a:extLst>
+              </a:tr>
+              <a:tr h="370840">
+                <a:tc>
+                  <a:txBody>
+                    <a:bodyPr/>
+                    <a:lstStyle/>
+                    <a:p>
+                      <a:pPr algn="r"/>
+                      <a:r>
+                        <a:rPr lang="en-CH" dirty="0"/>
+                        <a:t>Missing Guard</a:t>
+                      </a:r>
+                    </a:p>
+                  </a:txBody>
+                  <a:tcPr marL="54000" marR="54000" anchor="ctr">
+                    <a:lnL w="12700" cap="flat" cmpd="sng" algn="ctr">
+                      <a:solidFill>
+                        <a:schemeClr val="bg1"/>
+                      </a:solidFill>
+                      <a:prstDash val="solid"/>
+                      <a:round/>
+                      <a:headEnd type="none" w="med" len="med"/>
+                      <a:tailEnd type="none" w="med" len="med"/>
+                    </a:lnL>
+                    <a:lnR w="12700" cap="flat" cmpd="sng" algn="ctr">
+                      <a:solidFill>
+                        <a:schemeClr val="bg1"/>
+                      </a:solidFill>
+                      <a:prstDash val="solid"/>
+                      <a:round/>
+                      <a:headEnd type="none" w="med" len="med"/>
+                      <a:tailEnd type="none" w="med" len="med"/>
+                    </a:lnR>
+                    <a:lnT w="12700" cap="flat" cmpd="sng" algn="ctr">
+                      <a:noFill/>
+                      <a:prstDash val="solid"/>
+                      <a:round/>
+                      <a:headEnd type="none" w="med" len="med"/>
+                      <a:tailEnd type="none" w="med" len="med"/>
+                    </a:lnT>
+                    <a:lnB w="12700" cap="flat" cmpd="sng" algn="ctr">
+                      <a:solidFill>
+                        <a:schemeClr val="bg1"/>
+                      </a:solidFill>
+                      <a:prstDash val="solid"/>
+                      <a:round/>
+                      <a:headEnd type="none" w="med" len="med"/>
+                      <a:tailEnd type="none" w="med" len="med"/>
+                    </a:lnB>
+                  </a:tcPr>
+                </a:tc>
+                <a:tc>
+                  <a:txBody>
+                    <a:bodyPr/>
+                    <a:lstStyle/>
+                    <a:p>
+                      <a:pPr algn="r"/>
+                      <a:r>
+                        <a:rPr lang="en-CH" dirty="0"/>
+                        <a:t>37</a:t>
+                      </a:r>
+                    </a:p>
+                  </a:txBody>
+                  <a:tcPr marL="54000" marR="54000" anchor="ctr">
+                    <a:lnL w="12700" cap="flat" cmpd="sng" algn="ctr">
+                      <a:solidFill>
+                        <a:schemeClr val="bg1"/>
+                      </a:solidFill>
+                      <a:prstDash val="solid"/>
+                      <a:round/>
+                      <a:headEnd type="none" w="med" len="med"/>
+                      <a:tailEnd type="none" w="med" len="med"/>
+                    </a:lnL>
+                    <a:lnR w="12700" cap="flat" cmpd="sng" algn="ctr">
+                      <a:solidFill>
+                        <a:schemeClr val="bg1"/>
+                      </a:solidFill>
+                      <a:prstDash val="solid"/>
+                      <a:round/>
+                      <a:headEnd type="none" w="med" len="med"/>
+                      <a:tailEnd type="none" w="med" len="med"/>
+                    </a:lnR>
+                    <a:lnT w="12700" cap="flat" cmpd="sng" algn="ctr">
+                      <a:noFill/>
+                      <a:prstDash val="solid"/>
+                      <a:round/>
+                      <a:headEnd type="none" w="med" len="med"/>
+                      <a:tailEnd type="none" w="med" len="med"/>
+                    </a:lnT>
+                    <a:lnB w="12700" cap="flat" cmpd="sng" algn="ctr">
+                      <a:solidFill>
+                        <a:schemeClr val="bg1"/>
+                      </a:solidFill>
+                      <a:prstDash val="solid"/>
+                      <a:round/>
+                      <a:headEnd type="none" w="med" len="med"/>
+                      <a:tailEnd type="none" w="med" len="med"/>
+                    </a:lnB>
+                  </a:tcPr>
+                </a:tc>
+                <a:tc>
+                  <a:txBody>
+                    <a:bodyPr/>
+                    <a:lstStyle/>
+                    <a:p>
+                      <a:pPr algn="ctr"/>
+                      <a:r>
+                        <a:rPr lang="en-CH" dirty="0"/>
+                        <a:t>$141 million</a:t>
+                      </a:r>
+                    </a:p>
+                  </a:txBody>
+                  <a:tcPr marL="54000" marR="54000" anchor="ctr">
+                    <a:lnL w="12700" cap="flat" cmpd="sng" algn="ctr">
+                      <a:solidFill>
+                        <a:schemeClr val="bg1"/>
+                      </a:solidFill>
+                      <a:prstDash val="solid"/>
+                      <a:round/>
+                      <a:headEnd type="none" w="med" len="med"/>
+                      <a:tailEnd type="none" w="med" len="med"/>
+                    </a:lnL>
+                    <a:lnR w="12700" cap="flat" cmpd="sng" algn="ctr">
+                      <a:solidFill>
+                        <a:schemeClr val="bg1"/>
+                      </a:solidFill>
+                      <a:prstDash val="solid"/>
+                      <a:round/>
+                      <a:headEnd type="none" w="med" len="med"/>
+                      <a:tailEnd type="none" w="med" len="med"/>
+                    </a:lnR>
+                    <a:lnT w="12700" cap="flat" cmpd="sng" algn="ctr">
+                      <a:noFill/>
+                      <a:prstDash val="solid"/>
+                      <a:round/>
+                      <a:headEnd type="none" w="med" len="med"/>
+                      <a:tailEnd type="none" w="med" len="med"/>
+                    </a:lnT>
+                    <a:lnB w="12700" cap="flat" cmpd="sng" algn="ctr">
+                      <a:solidFill>
+                        <a:schemeClr val="bg1"/>
+                      </a:solidFill>
+                      <a:prstDash val="solid"/>
+                      <a:round/>
+                      <a:headEnd type="none" w="med" len="med"/>
+                      <a:tailEnd type="none" w="med" len="med"/>
+                    </a:lnB>
+                  </a:tcPr>
+                </a:tc>
+                <a:tc gridSpan="2">
+                  <a:txBody>
+                    <a:bodyPr/>
+                    <a:lstStyle/>
+                    <a:p>
+                      <a:pPr algn="ctr"/>
+                      <a:r>
+                        <a:rPr lang="en-CH" dirty="0"/>
+                        <a:t>Yes</a:t>
+                      </a:r>
+                    </a:p>
+                  </a:txBody>
+                  <a:tcPr marL="54000" marR="54000" anchor="ctr">
+                    <a:lnL w="12700" cap="flat" cmpd="sng" algn="ctr">
+                      <a:solidFill>
+                        <a:schemeClr val="bg1"/>
+                      </a:solidFill>
+                      <a:prstDash val="solid"/>
+                      <a:round/>
+                      <a:headEnd type="none" w="med" len="med"/>
+                      <a:tailEnd type="none" w="med" len="med"/>
+                    </a:lnL>
+                    <a:lnR w="12700" cap="flat" cmpd="sng" algn="ctr">
+                      <a:solidFill>
+                        <a:schemeClr val="bg1"/>
+                      </a:solidFill>
+                      <a:prstDash val="solid"/>
+                      <a:round/>
+                      <a:headEnd type="none" w="med" len="med"/>
+                      <a:tailEnd type="none" w="med" len="med"/>
+                    </a:lnR>
+                    <a:lnT w="12700" cap="flat" cmpd="sng" algn="ctr">
+                      <a:noFill/>
+                      <a:prstDash val="solid"/>
+                      <a:round/>
+                      <a:headEnd type="none" w="med" len="med"/>
+                      <a:tailEnd type="none" w="med" len="med"/>
+                    </a:lnT>
+                    <a:lnB w="12700" cap="flat" cmpd="sng" algn="ctr">
+                      <a:solidFill>
+                        <a:schemeClr val="bg1"/>
+                      </a:solidFill>
+                      <a:prstDash val="solid"/>
+                      <a:round/>
+                      <a:headEnd type="none" w="med" len="med"/>
+                      <a:tailEnd type="none" w="med" len="med"/>
+                    </a:lnB>
+                    <a:solidFill>
+                      <a:schemeClr val="accent6">
+                        <a:lumMod val="40000"/>
+                        <a:lumOff val="60000"/>
+                      </a:schemeClr>
+                    </a:solidFill>
+                  </a:tcPr>
+                </a:tc>
+                <a:tc hMerge="1">
+                  <a:txBody>
+                    <a:bodyPr/>
+                    <a:lstStyle/>
+                    <a:p>
+                      <a:endParaRPr lang="en-CH"/>
+                    </a:p>
+                  </a:txBody>
+                  <a:tcPr/>
+                </a:tc>
+                <a:extLst>
+                  <a:ext uri="{0D108BD9-81ED-4DB2-BD59-A6C34878D82A}">
+                    <a16:rowId xmlns:a16="http://schemas.microsoft.com/office/drawing/2014/main" val="3190909825"/>
+                  </a:ext>
+                </a:extLst>
+              </a:tr>
+              <a:tr h="370840">
+                <a:tc>
+                  <a:txBody>
+                    <a:bodyPr/>
+                    <a:lstStyle/>
+                    <a:p>
+                      <a:pPr algn="r"/>
+                      <a:r>
+                        <a:rPr lang="en-CH" dirty="0"/>
+                        <a:t>Cross-Protocol</a:t>
+                      </a:r>
+                    </a:p>
+                  </a:txBody>
+                  <a:tcPr marL="54000" marR="54000" anchor="ctr">
+                    <a:lnL w="12700" cap="flat" cmpd="sng" algn="ctr">
+                      <a:solidFill>
+                        <a:schemeClr val="bg1"/>
+                      </a:solidFill>
+                      <a:prstDash val="solid"/>
+                      <a:round/>
+                      <a:headEnd type="none" w="med" len="med"/>
+                      <a:tailEnd type="none" w="med" len="med"/>
+                    </a:lnL>
+                    <a:lnR w="12700" cap="flat" cmpd="sng" algn="ctr">
+                      <a:solidFill>
+                        <a:schemeClr val="bg1"/>
+                      </a:solidFill>
+                      <a:prstDash val="solid"/>
+                      <a:round/>
+                      <a:headEnd type="none" w="med" len="med"/>
+                      <a:tailEnd type="none" w="med" len="med"/>
+                    </a:lnR>
+                    <a:lnT w="12700" cap="flat" cmpd="sng" algn="ctr">
+                      <a:solidFill>
+                        <a:schemeClr val="bg1"/>
+                      </a:solidFill>
+                      <a:prstDash val="solid"/>
+                      <a:round/>
+                      <a:headEnd type="none" w="med" len="med"/>
+                      <a:tailEnd type="none" w="med" len="med"/>
+                    </a:lnT>
+                    <a:lnB w="12700" cap="flat" cmpd="sng" algn="ctr">
+                      <a:solidFill>
+                        <a:schemeClr val="bg1"/>
+                      </a:solidFill>
+                      <a:prstDash val="solid"/>
+                      <a:round/>
+                      <a:headEnd type="none" w="med" len="med"/>
+                      <a:tailEnd type="none" w="med" len="med"/>
+                    </a:lnB>
+                  </a:tcPr>
+                </a:tc>
+                <a:tc>
+                  <a:txBody>
+                    <a:bodyPr/>
+                    <a:lstStyle/>
+                    <a:p>
+                      <a:pPr algn="r"/>
+                      <a:r>
+                        <a:rPr lang="en-CH" dirty="0"/>
+                        <a:t>6</a:t>
+                      </a:r>
+                    </a:p>
+                  </a:txBody>
+                  <a:tcPr marL="54000" marR="54000" anchor="ctr">
+                    <a:lnL w="12700" cap="flat" cmpd="sng" algn="ctr">
+                      <a:solidFill>
+                        <a:schemeClr val="bg1"/>
+                      </a:solidFill>
+                      <a:prstDash val="solid"/>
+                      <a:round/>
+                      <a:headEnd type="none" w="med" len="med"/>
+                      <a:tailEnd type="none" w="med" len="med"/>
+                    </a:lnL>
+                    <a:lnR w="12700" cap="flat" cmpd="sng" algn="ctr">
+                      <a:solidFill>
+                        <a:schemeClr val="bg1"/>
+                      </a:solidFill>
+                      <a:prstDash val="solid"/>
+                      <a:round/>
+                      <a:headEnd type="none" w="med" len="med"/>
+                      <a:tailEnd type="none" w="med" len="med"/>
+                    </a:lnR>
+                    <a:lnT w="12700" cap="flat" cmpd="sng" algn="ctr">
+                      <a:solidFill>
+                        <a:schemeClr val="bg1"/>
+                      </a:solidFill>
+                      <a:prstDash val="solid"/>
+                      <a:round/>
+                      <a:headEnd type="none" w="med" len="med"/>
+                      <a:tailEnd type="none" w="med" len="med"/>
+                    </a:lnT>
+                    <a:lnB w="12700" cap="flat" cmpd="sng" algn="ctr">
+                      <a:solidFill>
+                        <a:schemeClr val="bg1"/>
+                      </a:solidFill>
+                      <a:prstDash val="solid"/>
+                      <a:round/>
+                      <a:headEnd type="none" w="med" len="med"/>
+                      <a:tailEnd type="none" w="med" len="med"/>
+                    </a:lnB>
+                  </a:tcPr>
+                </a:tc>
+                <a:tc>
+                  <a:txBody>
+                    <a:bodyPr/>
+                    <a:lstStyle/>
+                    <a:p>
+                      <a:pPr algn="ctr"/>
+                      <a:r>
+                        <a:rPr lang="en-CH" dirty="0"/>
+                        <a:t>$9.6 million</a:t>
+                      </a:r>
+                    </a:p>
+                  </a:txBody>
+                  <a:tcPr marL="54000" marR="54000" anchor="ctr">
+                    <a:lnL w="12700" cap="flat" cmpd="sng" algn="ctr">
+                      <a:solidFill>
+                        <a:schemeClr val="bg1"/>
+                      </a:solidFill>
+                      <a:prstDash val="solid"/>
+                      <a:round/>
+                      <a:headEnd type="none" w="med" len="med"/>
+                      <a:tailEnd type="none" w="med" len="med"/>
+                    </a:lnL>
+                    <a:lnR w="12700" cap="flat" cmpd="sng" algn="ctr">
+                      <a:solidFill>
+                        <a:schemeClr val="bg1"/>
+                      </a:solidFill>
+                      <a:prstDash val="solid"/>
+                      <a:round/>
+                      <a:headEnd type="none" w="med" len="med"/>
+                      <a:tailEnd type="none" w="med" len="med"/>
+                    </a:lnR>
+                    <a:lnT w="12700" cap="flat" cmpd="sng" algn="ctr">
+                      <a:solidFill>
+                        <a:schemeClr val="bg1"/>
+                      </a:solidFill>
+                      <a:prstDash val="solid"/>
+                      <a:round/>
+                      <a:headEnd type="none" w="med" len="med"/>
+                      <a:tailEnd type="none" w="med" len="med"/>
+                    </a:lnT>
+                    <a:lnB w="12700" cap="flat" cmpd="sng" algn="ctr">
+                      <a:solidFill>
+                        <a:schemeClr val="bg1"/>
+                      </a:solidFill>
+                      <a:prstDash val="solid"/>
+                      <a:round/>
+                      <a:headEnd type="none" w="med" len="med"/>
+                      <a:tailEnd type="none" w="med" len="med"/>
+                    </a:lnB>
+                  </a:tcPr>
+                </a:tc>
+                <a:tc gridSpan="2">
+                  <a:txBody>
+                    <a:bodyPr/>
+                    <a:lstStyle/>
+                    <a:p>
+                      <a:pPr algn="ctr"/>
+                      <a:r>
+                        <a:rPr lang="en-CH" dirty="0"/>
+                        <a:t>If upstream protocol uses this compiler</a:t>
+                      </a:r>
+                    </a:p>
+                  </a:txBody>
+                  <a:tcPr marL="36000" marR="36000" anchor="ctr">
+                    <a:lnL w="12700" cap="flat" cmpd="sng" algn="ctr">
+                      <a:solidFill>
+                        <a:schemeClr val="bg1"/>
+                      </a:solidFill>
+                      <a:prstDash val="solid"/>
+                      <a:round/>
+                      <a:headEnd type="none" w="med" len="med"/>
+                      <a:tailEnd type="none" w="med" len="med"/>
+                    </a:lnL>
+                    <a:lnR w="12700" cap="flat" cmpd="sng" algn="ctr">
+                      <a:solidFill>
+                        <a:schemeClr val="bg1"/>
+                      </a:solidFill>
+                      <a:prstDash val="solid"/>
+                      <a:round/>
+                      <a:headEnd type="none" w="med" len="med"/>
+                      <a:tailEnd type="none" w="med" len="med"/>
+                    </a:lnR>
+                    <a:lnT w="12700" cap="flat" cmpd="sng" algn="ctr">
+                      <a:solidFill>
+                        <a:schemeClr val="bg1"/>
+                      </a:solidFill>
+                      <a:prstDash val="solid"/>
+                      <a:round/>
+                      <a:headEnd type="none" w="med" len="med"/>
+                      <a:tailEnd type="none" w="med" len="med"/>
+                    </a:lnT>
+                    <a:lnB w="12700" cap="flat" cmpd="sng" algn="ctr">
+                      <a:solidFill>
+                        <a:schemeClr val="bg1"/>
+                      </a:solidFill>
+                      <a:prstDash val="solid"/>
+                      <a:round/>
+                      <a:headEnd type="none" w="med" len="med"/>
+                      <a:tailEnd type="none" w="med" len="med"/>
+                    </a:lnB>
+                    <a:solidFill>
+                      <a:schemeClr val="accent6">
+                        <a:lumMod val="40000"/>
+                        <a:lumOff val="60000"/>
+                      </a:schemeClr>
+                    </a:solidFill>
+                  </a:tcPr>
+                </a:tc>
+                <a:tc hMerge="1">
+                  <a:txBody>
+                    <a:bodyPr/>
+                    <a:lstStyle/>
+                    <a:p>
+                      <a:endParaRPr lang="en-CH" dirty="0"/>
+                    </a:p>
+                  </a:txBody>
+                  <a:tcPr/>
+                </a:tc>
+                <a:extLst>
+                  <a:ext uri="{0D108BD9-81ED-4DB2-BD59-A6C34878D82A}">
+                    <a16:rowId xmlns:a16="http://schemas.microsoft.com/office/drawing/2014/main" val="2488488522"/>
+                  </a:ext>
+                </a:extLst>
+              </a:tr>
+              <a:tr h="370840">
+                <a:tc>
+                  <a:txBody>
+                    <a:bodyPr/>
+                    <a:lstStyle/>
+                    <a:p>
+                      <a:pPr algn="r"/>
+                      <a:r>
+                        <a:rPr lang="en-CH" dirty="0"/>
+                        <a:t>Callback Token</a:t>
+                      </a:r>
+                    </a:p>
+                  </a:txBody>
+                  <a:tcPr marL="54000" marR="54000" anchor="ctr">
+                    <a:lnL w="12700" cap="flat" cmpd="sng" algn="ctr">
+                      <a:solidFill>
+                        <a:schemeClr val="bg1"/>
+                      </a:solidFill>
+                      <a:prstDash val="solid"/>
+                      <a:round/>
+                      <a:headEnd type="none" w="med" len="med"/>
+                      <a:tailEnd type="none" w="med" len="med"/>
+                    </a:lnL>
+                    <a:lnR w="12700" cap="flat" cmpd="sng" algn="ctr">
+                      <a:solidFill>
+                        <a:schemeClr val="bg1"/>
+                      </a:solidFill>
+                      <a:prstDash val="solid"/>
+                      <a:round/>
+                      <a:headEnd type="none" w="med" len="med"/>
+                      <a:tailEnd type="none" w="med" len="med"/>
+                    </a:lnR>
+                    <a:lnT w="12700" cap="flat" cmpd="sng" algn="ctr">
+                      <a:solidFill>
+                        <a:schemeClr val="bg1"/>
+                      </a:solidFill>
+                      <a:prstDash val="solid"/>
+                      <a:round/>
+                      <a:headEnd type="none" w="med" len="med"/>
+                      <a:tailEnd type="none" w="med" len="med"/>
+                    </a:lnT>
+                    <a:lnB w="12700" cap="flat" cmpd="sng" algn="ctr">
+                      <a:solidFill>
+                        <a:schemeClr val="bg1"/>
+                      </a:solidFill>
+                      <a:prstDash val="solid"/>
+                      <a:round/>
+                      <a:headEnd type="none" w="med" len="med"/>
+                      <a:tailEnd type="none" w="med" len="med"/>
+                    </a:lnB>
+                  </a:tcPr>
+                </a:tc>
+                <a:tc>
+                  <a:txBody>
+                    <a:bodyPr/>
+                    <a:lstStyle/>
+                    <a:p>
+                      <a:pPr algn="r"/>
+                      <a:r>
+                        <a:rPr lang="en-CH" dirty="0"/>
+                        <a:t>6</a:t>
+                      </a:r>
+                    </a:p>
+                  </a:txBody>
+                  <a:tcPr marL="54000" marR="54000" anchor="ctr">
+                    <a:lnL w="12700" cap="flat" cmpd="sng" algn="ctr">
+                      <a:solidFill>
+                        <a:schemeClr val="bg1"/>
+                      </a:solidFill>
+                      <a:prstDash val="solid"/>
+                      <a:round/>
+                      <a:headEnd type="none" w="med" len="med"/>
+                      <a:tailEnd type="none" w="med" len="med"/>
+                    </a:lnL>
+                    <a:lnR w="12700" cap="flat" cmpd="sng" algn="ctr">
+                      <a:solidFill>
+                        <a:schemeClr val="bg1"/>
+                      </a:solidFill>
+                      <a:prstDash val="solid"/>
+                      <a:round/>
+                      <a:headEnd type="none" w="med" len="med"/>
+                      <a:tailEnd type="none" w="med" len="med"/>
+                    </a:lnR>
+                    <a:lnT w="12700" cap="flat" cmpd="sng" algn="ctr">
+                      <a:solidFill>
+                        <a:schemeClr val="bg1"/>
+                      </a:solidFill>
+                      <a:prstDash val="solid"/>
+                      <a:round/>
+                      <a:headEnd type="none" w="med" len="med"/>
+                      <a:tailEnd type="none" w="med" len="med"/>
+                    </a:lnT>
+                    <a:lnB w="12700" cap="flat" cmpd="sng" algn="ctr">
+                      <a:solidFill>
+                        <a:schemeClr val="bg1"/>
+                      </a:solidFill>
+                      <a:prstDash val="solid"/>
+                      <a:round/>
+                      <a:headEnd type="none" w="med" len="med"/>
+                      <a:tailEnd type="none" w="med" len="med"/>
+                    </a:lnB>
+                  </a:tcPr>
+                </a:tc>
+                <a:tc>
+                  <a:txBody>
+                    <a:bodyPr/>
+                    <a:lstStyle/>
+                    <a:p>
+                      <a:pPr algn="ctr"/>
+                      <a:r>
+                        <a:rPr lang="en-CH" dirty="0"/>
+                        <a:t>$57.6 million</a:t>
+                      </a:r>
+                    </a:p>
+                  </a:txBody>
+                  <a:tcPr marL="54000" marR="54000" anchor="ctr">
+                    <a:lnL w="12700" cap="flat" cmpd="sng" algn="ctr">
+                      <a:solidFill>
+                        <a:schemeClr val="bg1"/>
+                      </a:solidFill>
+                      <a:prstDash val="solid"/>
+                      <a:round/>
+                      <a:headEnd type="none" w="med" len="med"/>
+                      <a:tailEnd type="none" w="med" len="med"/>
+                    </a:lnL>
+                    <a:lnR w="12700" cap="flat" cmpd="sng" algn="ctr">
+                      <a:solidFill>
+                        <a:schemeClr val="bg1"/>
+                      </a:solidFill>
+                      <a:prstDash val="solid"/>
+                      <a:round/>
+                      <a:headEnd type="none" w="med" len="med"/>
+                      <a:tailEnd type="none" w="med" len="med"/>
+                    </a:lnR>
+                    <a:lnT w="12700" cap="flat" cmpd="sng" algn="ctr">
+                      <a:solidFill>
+                        <a:schemeClr val="bg1"/>
+                      </a:solidFill>
+                      <a:prstDash val="solid"/>
+                      <a:round/>
+                      <a:headEnd type="none" w="med" len="med"/>
+                      <a:tailEnd type="none" w="med" len="med"/>
+                    </a:lnT>
+                    <a:lnB w="12700" cap="flat" cmpd="sng" algn="ctr">
+                      <a:solidFill>
+                        <a:schemeClr val="bg1"/>
+                      </a:solidFill>
+                      <a:prstDash val="solid"/>
+                      <a:round/>
+                      <a:headEnd type="none" w="med" len="med"/>
+                      <a:tailEnd type="none" w="med" len="med"/>
+                    </a:lnB>
+                  </a:tcPr>
+                </a:tc>
+                <a:tc>
+                  <a:txBody>
+                    <a:bodyPr/>
+                    <a:lstStyle/>
+                    <a:p>
+                      <a:pPr algn="ctr"/>
+                      <a:r>
+                        <a:rPr lang="en-CH" dirty="0"/>
+                        <a:t>Yes</a:t>
+                      </a:r>
+                    </a:p>
+                    <a:p>
+                      <a:pPr algn="ctr"/>
+                      <a:r>
+                        <a:rPr lang="en-CH" dirty="0"/>
+                        <a:t>(incompatible with the token standard)</a:t>
+                      </a:r>
+                    </a:p>
+                  </a:txBody>
+                  <a:tcPr marL="54000" marR="54000" anchor="ctr">
+                    <a:lnL w="12700" cap="flat" cmpd="sng" algn="ctr">
+                      <a:solidFill>
+                        <a:schemeClr val="bg1"/>
+                      </a:solidFill>
+                      <a:prstDash val="solid"/>
+                      <a:round/>
+                      <a:headEnd type="none" w="med" len="med"/>
+                      <a:tailEnd type="none" w="med" len="med"/>
+                    </a:lnL>
+                    <a:lnR w="12700" cap="flat" cmpd="sng" algn="ctr">
+                      <a:solidFill>
+                        <a:schemeClr val="bg1"/>
+                      </a:solidFill>
+                      <a:prstDash val="solid"/>
+                      <a:round/>
+                      <a:headEnd type="none" w="med" len="med"/>
+                      <a:tailEnd type="none" w="med" len="med"/>
+                    </a:lnR>
+                    <a:lnT w="12700" cap="flat" cmpd="sng" algn="ctr">
+                      <a:solidFill>
+                        <a:schemeClr val="bg1"/>
+                      </a:solidFill>
+                      <a:prstDash val="solid"/>
+                      <a:round/>
+                      <a:headEnd type="none" w="med" len="med"/>
+                      <a:tailEnd type="none" w="med" len="med"/>
+                    </a:lnT>
+                    <a:lnB w="12700" cap="flat" cmpd="sng" algn="ctr">
+                      <a:solidFill>
+                        <a:schemeClr val="bg1"/>
+                      </a:solidFill>
+                      <a:prstDash val="solid"/>
+                      <a:round/>
+                      <a:headEnd type="none" w="med" len="med"/>
+                      <a:tailEnd type="none" w="med" len="med"/>
+                    </a:lnB>
+                    <a:solidFill>
+                      <a:schemeClr val="accent5">
+                        <a:lumMod val="60000"/>
+                        <a:lumOff val="40000"/>
+                      </a:schemeClr>
+                    </a:solidFill>
+                  </a:tcPr>
+                </a:tc>
+                <a:tc>
+                  <a:txBody>
+                    <a:bodyPr/>
+                    <a:lstStyle/>
+                    <a:p>
+                      <a:pPr algn="ctr"/>
+                      <a:r>
+                        <a:rPr lang="en-CH" dirty="0"/>
+                        <a:t>Yes</a:t>
+                      </a:r>
+                    </a:p>
+                  </a:txBody>
+                  <a:tcPr marL="54000" marR="54000" anchor="ctr">
+                    <a:lnL w="12700" cap="flat" cmpd="sng" algn="ctr">
+                      <a:solidFill>
+                        <a:schemeClr val="bg1"/>
+                      </a:solidFill>
+                      <a:prstDash val="solid"/>
+                      <a:round/>
+                      <a:headEnd type="none" w="med" len="med"/>
+                      <a:tailEnd type="none" w="med" len="med"/>
+                    </a:lnL>
+                    <a:lnR w="12700" cap="flat" cmpd="sng" algn="ctr">
+                      <a:solidFill>
+                        <a:schemeClr val="bg1"/>
+                      </a:solidFill>
+                      <a:prstDash val="solid"/>
+                      <a:round/>
+                      <a:headEnd type="none" w="med" len="med"/>
+                      <a:tailEnd type="none" w="med" len="med"/>
+                    </a:lnR>
+                    <a:lnT w="12700" cap="flat" cmpd="sng" algn="ctr">
+                      <a:solidFill>
+                        <a:schemeClr val="bg1"/>
+                      </a:solidFill>
+                      <a:prstDash val="solid"/>
+                      <a:round/>
+                      <a:headEnd type="none" w="med" len="med"/>
+                      <a:tailEnd type="none" w="med" len="med"/>
+                    </a:lnT>
+                    <a:lnB w="12700" cap="flat" cmpd="sng" algn="ctr">
+                      <a:solidFill>
+                        <a:schemeClr val="bg1"/>
+                      </a:solidFill>
+                      <a:prstDash val="solid"/>
+                      <a:round/>
+                      <a:headEnd type="none" w="med" len="med"/>
+                      <a:tailEnd type="none" w="med" len="med"/>
+                    </a:lnB>
+                    <a:solidFill>
+                      <a:schemeClr val="accent6">
+                        <a:lumMod val="40000"/>
+                        <a:lumOff val="60000"/>
+                      </a:schemeClr>
+                    </a:solidFill>
+                  </a:tcPr>
+                </a:tc>
+                <a:extLst>
+                  <a:ext uri="{0D108BD9-81ED-4DB2-BD59-A6C34878D82A}">
+                    <a16:rowId xmlns:a16="http://schemas.microsoft.com/office/drawing/2014/main" val="613551260"/>
+                  </a:ext>
+                </a:extLst>
+              </a:tr>
+              <a:tr h="370840">
+                <a:tc>
+                  <a:txBody>
+                    <a:bodyPr/>
+                    <a:lstStyle/>
+                    <a:p>
+                      <a:pPr algn="r"/>
+                      <a:r>
+                        <a:rPr lang="en-CH" dirty="0"/>
+                        <a:t>Cross-Function</a:t>
+                      </a:r>
+                    </a:p>
+                  </a:txBody>
+                  <a:tcPr marL="54000" marR="54000" anchor="ctr">
+                    <a:lnL w="12700" cap="flat" cmpd="sng" algn="ctr">
+                      <a:solidFill>
+                        <a:schemeClr val="bg1"/>
+                      </a:solidFill>
+                      <a:prstDash val="solid"/>
+                      <a:round/>
+                      <a:headEnd type="none" w="med" len="med"/>
+                      <a:tailEnd type="none" w="med" len="med"/>
+                    </a:lnL>
+                    <a:lnR w="12700" cap="flat" cmpd="sng" algn="ctr">
+                      <a:solidFill>
+                        <a:schemeClr val="bg1"/>
+                      </a:solidFill>
+                      <a:prstDash val="solid"/>
+                      <a:round/>
+                      <a:headEnd type="none" w="med" len="med"/>
+                      <a:tailEnd type="none" w="med" len="med"/>
+                    </a:lnR>
+                    <a:lnT w="12700" cap="flat" cmpd="sng" algn="ctr">
+                      <a:solidFill>
+                        <a:schemeClr val="bg1"/>
+                      </a:solidFill>
+                      <a:prstDash val="solid"/>
+                      <a:round/>
+                      <a:headEnd type="none" w="med" len="med"/>
+                      <a:tailEnd type="none" w="med" len="med"/>
+                    </a:lnT>
+                    <a:lnB w="12700" cap="flat" cmpd="sng" algn="ctr">
+                      <a:solidFill>
+                        <a:schemeClr val="bg1"/>
+                      </a:solidFill>
+                      <a:prstDash val="solid"/>
+                      <a:round/>
+                      <a:headEnd type="none" w="med" len="med"/>
+                      <a:tailEnd type="none" w="med" len="med"/>
+                    </a:lnB>
+                  </a:tcPr>
+                </a:tc>
+                <a:tc>
+                  <a:txBody>
+                    <a:bodyPr/>
+                    <a:lstStyle/>
+                    <a:p>
+                      <a:pPr algn="r"/>
+                      <a:r>
+                        <a:rPr lang="en-CH" dirty="0"/>
+                        <a:t>2</a:t>
+                      </a:r>
+                    </a:p>
+                  </a:txBody>
+                  <a:tcPr marL="54000" marR="54000" anchor="ctr">
+                    <a:lnL w="12700" cap="flat" cmpd="sng" algn="ctr">
+                      <a:solidFill>
+                        <a:schemeClr val="bg1"/>
+                      </a:solidFill>
+                      <a:prstDash val="solid"/>
+                      <a:round/>
+                      <a:headEnd type="none" w="med" len="med"/>
+                      <a:tailEnd type="none" w="med" len="med"/>
+                    </a:lnL>
+                    <a:lnR w="12700" cap="flat" cmpd="sng" algn="ctr">
+                      <a:solidFill>
+                        <a:schemeClr val="bg1"/>
+                      </a:solidFill>
+                      <a:prstDash val="solid"/>
+                      <a:round/>
+                      <a:headEnd type="none" w="med" len="med"/>
+                      <a:tailEnd type="none" w="med" len="med"/>
+                    </a:lnR>
+                    <a:lnT w="12700" cap="flat" cmpd="sng" algn="ctr">
+                      <a:solidFill>
+                        <a:schemeClr val="bg1"/>
+                      </a:solidFill>
+                      <a:prstDash val="solid"/>
+                      <a:round/>
+                      <a:headEnd type="none" w="med" len="med"/>
+                      <a:tailEnd type="none" w="med" len="med"/>
+                    </a:lnT>
+                    <a:lnB w="12700" cap="flat" cmpd="sng" algn="ctr">
+                      <a:solidFill>
+                        <a:schemeClr val="bg1"/>
+                      </a:solidFill>
+                      <a:prstDash val="solid"/>
+                      <a:round/>
+                      <a:headEnd type="none" w="med" len="med"/>
+                      <a:tailEnd type="none" w="med" len="med"/>
+                    </a:lnB>
+                  </a:tcPr>
+                </a:tc>
+                <a:tc>
+                  <a:txBody>
+                    <a:bodyPr/>
+                    <a:lstStyle/>
+                    <a:p>
+                      <a:pPr algn="ctr"/>
+                      <a:r>
+                        <a:rPr lang="en-CH" dirty="0"/>
+                        <a:t>$27.7 million</a:t>
+                      </a:r>
+                    </a:p>
+                  </a:txBody>
+                  <a:tcPr marL="54000" marR="54000" anchor="ctr">
+                    <a:lnL w="12700" cap="flat" cmpd="sng" algn="ctr">
+                      <a:solidFill>
+                        <a:schemeClr val="bg1"/>
+                      </a:solidFill>
+                      <a:prstDash val="solid"/>
+                      <a:round/>
+                      <a:headEnd type="none" w="med" len="med"/>
+                      <a:tailEnd type="none" w="med" len="med"/>
+                    </a:lnL>
+                    <a:lnR w="12700" cap="flat" cmpd="sng" algn="ctr">
+                      <a:solidFill>
+                        <a:schemeClr val="bg1"/>
+                      </a:solidFill>
+                      <a:prstDash val="solid"/>
+                      <a:round/>
+                      <a:headEnd type="none" w="med" len="med"/>
+                      <a:tailEnd type="none" w="med" len="med"/>
+                    </a:lnR>
+                    <a:lnT w="12700" cap="flat" cmpd="sng" algn="ctr">
+                      <a:solidFill>
+                        <a:schemeClr val="bg1"/>
+                      </a:solidFill>
+                      <a:prstDash val="solid"/>
+                      <a:round/>
+                      <a:headEnd type="none" w="med" len="med"/>
+                      <a:tailEnd type="none" w="med" len="med"/>
+                    </a:lnT>
+                    <a:lnB w="12700" cap="flat" cmpd="sng" algn="ctr">
+                      <a:solidFill>
+                        <a:schemeClr val="bg1"/>
+                      </a:solidFill>
+                      <a:prstDash val="solid"/>
+                      <a:round/>
+                      <a:headEnd type="none" w="med" len="med"/>
+                      <a:tailEnd type="none" w="med" len="med"/>
+                    </a:lnB>
+                  </a:tcPr>
+                </a:tc>
+                <a:tc>
+                  <a:txBody>
+                    <a:bodyPr/>
+                    <a:lstStyle/>
+                    <a:p>
+                      <a:pPr algn="ctr"/>
+                      <a:r>
+                        <a:rPr lang="en-CH" dirty="0"/>
+                        <a:t>No</a:t>
+                      </a:r>
+                    </a:p>
+                  </a:txBody>
+                  <a:tcPr marL="36000" marR="36000" anchor="ctr">
+                    <a:lnL w="12700" cap="flat" cmpd="sng" algn="ctr">
+                      <a:solidFill>
+                        <a:schemeClr val="bg1"/>
+                      </a:solidFill>
+                      <a:prstDash val="solid"/>
+                      <a:round/>
+                      <a:headEnd type="none" w="med" len="med"/>
+                      <a:tailEnd type="none" w="med" len="med"/>
+                    </a:lnL>
+                    <a:lnR w="12700" cap="flat" cmpd="sng" algn="ctr">
+                      <a:solidFill>
+                        <a:schemeClr val="bg1"/>
+                      </a:solidFill>
+                      <a:prstDash val="solid"/>
+                      <a:round/>
+                      <a:headEnd type="none" w="med" len="med"/>
+                      <a:tailEnd type="none" w="med" len="med"/>
+                    </a:lnR>
+                    <a:lnT w="12700" cap="flat" cmpd="sng" algn="ctr">
+                      <a:solidFill>
+                        <a:schemeClr val="bg1"/>
+                      </a:solidFill>
+                      <a:prstDash val="solid"/>
+                      <a:round/>
+                      <a:headEnd type="none" w="med" len="med"/>
+                      <a:tailEnd type="none" w="med" len="med"/>
+                    </a:lnT>
+                    <a:lnB w="12700" cap="flat" cmpd="sng" algn="ctr">
+                      <a:solidFill>
+                        <a:schemeClr val="bg1"/>
+                      </a:solidFill>
+                      <a:prstDash val="solid"/>
+                      <a:round/>
+                      <a:headEnd type="none" w="med" len="med"/>
+                      <a:tailEnd type="none" w="med" len="med"/>
+                    </a:lnB>
+                    <a:solidFill>
+                      <a:schemeClr val="accent1">
+                        <a:lumMod val="40000"/>
+                        <a:lumOff val="60000"/>
+                      </a:schemeClr>
+                    </a:solidFill>
+                  </a:tcPr>
+                </a:tc>
+                <a:tc>
+                  <a:txBody>
+                    <a:bodyPr/>
+                    <a:lstStyle/>
+                    <a:p>
+                      <a:pPr algn="ctr"/>
+                      <a:r>
+                        <a:rPr lang="en-CH" dirty="0"/>
+                        <a:t>Yes</a:t>
+                      </a:r>
+                    </a:p>
+                  </a:txBody>
+                  <a:tcPr marL="36000" marR="36000" anchor="ctr">
+                    <a:lnL w="12700" cap="flat" cmpd="sng" algn="ctr">
+                      <a:solidFill>
+                        <a:schemeClr val="bg1"/>
+                      </a:solidFill>
+                      <a:prstDash val="solid"/>
+                      <a:round/>
+                      <a:headEnd type="none" w="med" len="med"/>
+                      <a:tailEnd type="none" w="med" len="med"/>
+                    </a:lnL>
+                    <a:lnR w="12700" cap="flat" cmpd="sng" algn="ctr">
+                      <a:solidFill>
+                        <a:schemeClr val="bg1"/>
+                      </a:solidFill>
+                      <a:prstDash val="solid"/>
+                      <a:round/>
+                      <a:headEnd type="none" w="med" len="med"/>
+                      <a:tailEnd type="none" w="med" len="med"/>
+                    </a:lnR>
+                    <a:lnT w="12700" cap="flat" cmpd="sng" algn="ctr">
+                      <a:solidFill>
+                        <a:schemeClr val="bg1"/>
+                      </a:solidFill>
+                      <a:prstDash val="solid"/>
+                      <a:round/>
+                      <a:headEnd type="none" w="med" len="med"/>
+                      <a:tailEnd type="none" w="med" len="med"/>
+                    </a:lnT>
+                    <a:lnB w="12700" cap="flat" cmpd="sng" algn="ctr">
+                      <a:solidFill>
+                        <a:schemeClr val="bg1"/>
+                      </a:solidFill>
+                      <a:prstDash val="solid"/>
+                      <a:round/>
+                      <a:headEnd type="none" w="med" len="med"/>
+                      <a:tailEnd type="none" w="med" len="med"/>
+                    </a:lnB>
+                    <a:solidFill>
+                      <a:schemeClr val="accent6">
+                        <a:lumMod val="40000"/>
+                        <a:lumOff val="60000"/>
+                      </a:schemeClr>
+                    </a:solidFill>
+                  </a:tcPr>
+                </a:tc>
+                <a:extLst>
+                  <a:ext uri="{0D108BD9-81ED-4DB2-BD59-A6C34878D82A}">
+                    <a16:rowId xmlns:a16="http://schemas.microsoft.com/office/drawing/2014/main" val="2564374599"/>
+                  </a:ext>
+                </a:extLst>
+              </a:tr>
+              <a:tr h="370840">
+                <a:tc>
+                  <a:txBody>
+                    <a:bodyPr/>
+                    <a:lstStyle/>
+                    <a:p>
+                      <a:pPr algn="r"/>
+                      <a:r>
+                        <a:rPr lang="en-CH" dirty="0"/>
+                        <a:t>Flash Loan</a:t>
+                      </a:r>
+                    </a:p>
+                  </a:txBody>
+                  <a:tcPr marL="54000" marR="54000" anchor="ctr">
+                    <a:lnL w="12700" cap="flat" cmpd="sng" algn="ctr">
+                      <a:solidFill>
+                        <a:schemeClr val="bg1"/>
+                      </a:solidFill>
+                      <a:prstDash val="solid"/>
+                      <a:round/>
+                      <a:headEnd type="none" w="med" len="med"/>
+                      <a:tailEnd type="none" w="med" len="med"/>
+                    </a:lnL>
+                    <a:lnR w="12700" cap="flat" cmpd="sng" algn="ctr">
+                      <a:solidFill>
+                        <a:schemeClr val="bg1"/>
+                      </a:solidFill>
+                      <a:prstDash val="solid"/>
+                      <a:round/>
+                      <a:headEnd type="none" w="med" len="med"/>
+                      <a:tailEnd type="none" w="med" len="med"/>
+                    </a:lnR>
+                    <a:lnT w="12700" cap="flat" cmpd="sng" algn="ctr">
+                      <a:solidFill>
+                        <a:schemeClr val="bg1"/>
+                      </a:solidFill>
+                      <a:prstDash val="solid"/>
+                      <a:round/>
+                      <a:headEnd type="none" w="med" len="med"/>
+                      <a:tailEnd type="none" w="med" len="med"/>
+                    </a:lnT>
+                    <a:lnB w="12700" cap="flat" cmpd="sng" algn="ctr">
+                      <a:solidFill>
+                        <a:schemeClr val="bg1"/>
+                      </a:solidFill>
+                      <a:prstDash val="solid"/>
+                      <a:round/>
+                      <a:headEnd type="none" w="med" len="med"/>
+                      <a:tailEnd type="none" w="med" len="med"/>
+                    </a:lnB>
+                  </a:tcPr>
+                </a:tc>
+                <a:tc>
+                  <a:txBody>
+                    <a:bodyPr/>
+                    <a:lstStyle/>
+                    <a:p>
+                      <a:pPr algn="r"/>
+                      <a:r>
+                        <a:rPr lang="en-CH" dirty="0"/>
+                        <a:t>2</a:t>
+                      </a:r>
+                    </a:p>
+                  </a:txBody>
+                  <a:tcPr marL="54000" marR="54000" anchor="ctr">
+                    <a:lnL w="12700" cap="flat" cmpd="sng" algn="ctr">
+                      <a:solidFill>
+                        <a:schemeClr val="bg1"/>
+                      </a:solidFill>
+                      <a:prstDash val="solid"/>
+                      <a:round/>
+                      <a:headEnd type="none" w="med" len="med"/>
+                      <a:tailEnd type="none" w="med" len="med"/>
+                    </a:lnL>
+                    <a:lnR w="12700" cap="flat" cmpd="sng" algn="ctr">
+                      <a:solidFill>
+                        <a:schemeClr val="bg1"/>
+                      </a:solidFill>
+                      <a:prstDash val="solid"/>
+                      <a:round/>
+                      <a:headEnd type="none" w="med" len="med"/>
+                      <a:tailEnd type="none" w="med" len="med"/>
+                    </a:lnR>
+                    <a:lnT w="12700" cap="flat" cmpd="sng" algn="ctr">
+                      <a:solidFill>
+                        <a:schemeClr val="bg1"/>
+                      </a:solidFill>
+                      <a:prstDash val="solid"/>
+                      <a:round/>
+                      <a:headEnd type="none" w="med" len="med"/>
+                      <a:tailEnd type="none" w="med" len="med"/>
+                    </a:lnT>
+                    <a:lnB w="12700" cap="flat" cmpd="sng" algn="ctr">
+                      <a:solidFill>
+                        <a:schemeClr val="bg1"/>
+                      </a:solidFill>
+                      <a:prstDash val="solid"/>
+                      <a:round/>
+                      <a:headEnd type="none" w="med" len="med"/>
+                      <a:tailEnd type="none" w="med" len="med"/>
+                    </a:lnB>
+                  </a:tcPr>
+                </a:tc>
+                <a:tc>
+                  <a:txBody>
+                    <a:bodyPr/>
+                    <a:lstStyle/>
+                    <a:p>
+                      <a:pPr algn="ctr"/>
+                      <a:r>
+                        <a:rPr lang="en-CH" dirty="0"/>
+                        <a:t>$5.7 million</a:t>
+                      </a:r>
+                    </a:p>
+                  </a:txBody>
+                  <a:tcPr marL="54000" marR="54000" anchor="ctr">
+                    <a:lnL w="12700" cap="flat" cmpd="sng" algn="ctr">
+                      <a:solidFill>
+                        <a:schemeClr val="bg1"/>
+                      </a:solidFill>
+                      <a:prstDash val="solid"/>
+                      <a:round/>
+                      <a:headEnd type="none" w="med" len="med"/>
+                      <a:tailEnd type="none" w="med" len="med"/>
+                    </a:lnL>
+                    <a:lnR w="12700" cap="flat" cmpd="sng" algn="ctr">
+                      <a:solidFill>
+                        <a:schemeClr val="bg1"/>
+                      </a:solidFill>
+                      <a:prstDash val="solid"/>
+                      <a:round/>
+                      <a:headEnd type="none" w="med" len="med"/>
+                      <a:tailEnd type="none" w="med" len="med"/>
+                    </a:lnR>
+                    <a:lnT w="12700" cap="flat" cmpd="sng" algn="ctr">
+                      <a:solidFill>
+                        <a:schemeClr val="bg1"/>
+                      </a:solidFill>
+                      <a:prstDash val="solid"/>
+                      <a:round/>
+                      <a:headEnd type="none" w="med" len="med"/>
+                      <a:tailEnd type="none" w="med" len="med"/>
+                    </a:lnT>
+                    <a:lnB w="12700" cap="flat" cmpd="sng" algn="ctr">
+                      <a:solidFill>
+                        <a:schemeClr val="bg1"/>
+                      </a:solidFill>
+                      <a:prstDash val="solid"/>
+                      <a:round/>
+                      <a:headEnd type="none" w="med" len="med"/>
+                      <a:tailEnd type="none" w="med" len="med"/>
+                    </a:lnB>
+                  </a:tcPr>
+                </a:tc>
+                <a:tc>
+                  <a:txBody>
+                    <a:bodyPr/>
+                    <a:lstStyle/>
+                    <a:p>
+                      <a:pPr algn="ctr"/>
+                      <a:r>
+                        <a:rPr lang="en-CH" dirty="0"/>
+                        <a:t>No</a:t>
+                      </a:r>
+                    </a:p>
+                  </a:txBody>
+                  <a:tcPr marL="54000" marR="54000" anchor="ctr">
+                    <a:lnL w="12700" cap="flat" cmpd="sng" algn="ctr">
+                      <a:solidFill>
+                        <a:schemeClr val="bg1"/>
+                      </a:solidFill>
+                      <a:prstDash val="solid"/>
+                      <a:round/>
+                      <a:headEnd type="none" w="med" len="med"/>
+                      <a:tailEnd type="none" w="med" len="med"/>
+                    </a:lnL>
+                    <a:lnR w="12700" cap="flat" cmpd="sng" algn="ctr">
+                      <a:solidFill>
+                        <a:schemeClr val="bg1"/>
+                      </a:solidFill>
+                      <a:prstDash val="solid"/>
+                      <a:round/>
+                      <a:headEnd type="none" w="med" len="med"/>
+                      <a:tailEnd type="none" w="med" len="med"/>
+                    </a:lnR>
+                    <a:lnT w="12700" cap="flat" cmpd="sng" algn="ctr">
+                      <a:solidFill>
+                        <a:schemeClr val="bg1"/>
+                      </a:solidFill>
+                      <a:prstDash val="solid"/>
+                      <a:round/>
+                      <a:headEnd type="none" w="med" len="med"/>
+                      <a:tailEnd type="none" w="med" len="med"/>
+                    </a:lnT>
+                    <a:lnB w="12700" cap="flat" cmpd="sng" algn="ctr">
+                      <a:solidFill>
+                        <a:schemeClr val="bg1"/>
+                      </a:solidFill>
+                      <a:prstDash val="solid"/>
+                      <a:round/>
+                      <a:headEnd type="none" w="med" len="med"/>
+                      <a:tailEnd type="none" w="med" len="med"/>
+                    </a:lnB>
+                    <a:solidFill>
+                      <a:schemeClr val="accent1">
+                        <a:lumMod val="40000"/>
+                        <a:lumOff val="60000"/>
+                      </a:schemeClr>
+                    </a:solidFill>
+                  </a:tcPr>
+                </a:tc>
+                <a:tc>
+                  <a:txBody>
+                    <a:bodyPr/>
+                    <a:lstStyle/>
+                    <a:p>
+                      <a:pPr algn="ctr"/>
+                      <a:r>
+                        <a:rPr lang="en-CH" dirty="0"/>
+                        <a:t>Yes</a:t>
+                      </a:r>
+                    </a:p>
+                  </a:txBody>
+                  <a:tcPr marL="54000" marR="54000" anchor="ctr">
+                    <a:lnL w="12700" cap="flat" cmpd="sng" algn="ctr">
+                      <a:solidFill>
+                        <a:schemeClr val="bg1"/>
+                      </a:solidFill>
+                      <a:prstDash val="solid"/>
+                      <a:round/>
+                      <a:headEnd type="none" w="med" len="med"/>
+                      <a:tailEnd type="none" w="med" len="med"/>
+                    </a:lnL>
+                    <a:lnR w="12700" cap="flat" cmpd="sng" algn="ctr">
+                      <a:solidFill>
+                        <a:schemeClr val="bg1"/>
+                      </a:solidFill>
+                      <a:prstDash val="solid"/>
+                      <a:round/>
+                      <a:headEnd type="none" w="med" len="med"/>
+                      <a:tailEnd type="none" w="med" len="med"/>
+                    </a:lnR>
+                    <a:lnT w="12700" cap="flat" cmpd="sng" algn="ctr">
+                      <a:solidFill>
+                        <a:schemeClr val="bg1"/>
+                      </a:solidFill>
+                      <a:prstDash val="solid"/>
+                      <a:round/>
+                      <a:headEnd type="none" w="med" len="med"/>
+                      <a:tailEnd type="none" w="med" len="med"/>
+                    </a:lnT>
+                    <a:lnB w="12700" cap="flat" cmpd="sng" algn="ctr">
+                      <a:solidFill>
+                        <a:schemeClr val="bg1"/>
+                      </a:solidFill>
+                      <a:prstDash val="solid"/>
+                      <a:round/>
+                      <a:headEnd type="none" w="med" len="med"/>
+                      <a:tailEnd type="none" w="med" len="med"/>
+                    </a:lnB>
+                    <a:solidFill>
+                      <a:schemeClr val="accent6">
+                        <a:lumMod val="40000"/>
+                        <a:lumOff val="60000"/>
+                      </a:schemeClr>
+                    </a:solidFill>
+                  </a:tcPr>
+                </a:tc>
+                <a:extLst>
+                  <a:ext uri="{0D108BD9-81ED-4DB2-BD59-A6C34878D82A}">
+                    <a16:rowId xmlns:a16="http://schemas.microsoft.com/office/drawing/2014/main" val="2637932769"/>
+                  </a:ext>
+                </a:extLst>
+              </a:tr>
+              <a:tr h="370840">
+                <a:tc>
+                  <a:txBody>
+                    <a:bodyPr/>
+                    <a:lstStyle/>
+                    <a:p>
+                      <a:pPr algn="r"/>
+                      <a:r>
+                        <a:rPr lang="en-CH" dirty="0"/>
+                        <a:t>Compiler Bug</a:t>
+                      </a:r>
+                    </a:p>
+                  </a:txBody>
+                  <a:tcPr marL="54000" marR="54000" anchor="ctr">
+                    <a:lnL w="12700" cap="flat" cmpd="sng" algn="ctr">
+                      <a:solidFill>
+                        <a:schemeClr val="bg1"/>
+                      </a:solidFill>
+                      <a:prstDash val="solid"/>
+                      <a:round/>
+                      <a:headEnd type="none" w="med" len="med"/>
+                      <a:tailEnd type="none" w="med" len="med"/>
+                    </a:lnL>
+                    <a:lnR w="12700" cap="flat" cmpd="sng" algn="ctr">
+                      <a:solidFill>
+                        <a:schemeClr val="bg1"/>
+                      </a:solidFill>
+                      <a:prstDash val="solid"/>
+                      <a:round/>
+                      <a:headEnd type="none" w="med" len="med"/>
+                      <a:tailEnd type="none" w="med" len="med"/>
+                    </a:lnR>
+                    <a:lnT w="12700" cap="flat" cmpd="sng" algn="ctr">
+                      <a:solidFill>
+                        <a:schemeClr val="bg1"/>
+                      </a:solidFill>
+                      <a:prstDash val="solid"/>
+                      <a:round/>
+                      <a:headEnd type="none" w="med" len="med"/>
+                      <a:tailEnd type="none" w="med" len="med"/>
+                    </a:lnT>
+                    <a:lnB w="12700" cap="flat" cmpd="sng" algn="ctr">
+                      <a:noFill/>
+                      <a:prstDash val="solid"/>
+                      <a:round/>
+                      <a:headEnd type="none" w="med" len="med"/>
+                      <a:tailEnd type="none" w="med" len="med"/>
+                    </a:lnB>
+                  </a:tcPr>
+                </a:tc>
+                <a:tc>
+                  <a:txBody>
+                    <a:bodyPr/>
+                    <a:lstStyle/>
+                    <a:p>
+                      <a:pPr algn="r"/>
+                      <a:r>
+                        <a:rPr lang="en-CH" dirty="0"/>
+                        <a:t>1</a:t>
+                      </a:r>
+                    </a:p>
+                  </a:txBody>
+                  <a:tcPr marL="54000" marR="54000" anchor="ctr">
+                    <a:lnL w="12700" cap="flat" cmpd="sng" algn="ctr">
+                      <a:solidFill>
+                        <a:schemeClr val="bg1"/>
+                      </a:solidFill>
+                      <a:prstDash val="solid"/>
+                      <a:round/>
+                      <a:headEnd type="none" w="med" len="med"/>
+                      <a:tailEnd type="none" w="med" len="med"/>
+                    </a:lnL>
+                    <a:lnR w="12700" cap="flat" cmpd="sng" algn="ctr">
+                      <a:solidFill>
+                        <a:schemeClr val="bg1"/>
+                      </a:solidFill>
+                      <a:prstDash val="solid"/>
+                      <a:round/>
+                      <a:headEnd type="none" w="med" len="med"/>
+                      <a:tailEnd type="none" w="med" len="med"/>
+                    </a:lnR>
+                    <a:lnT w="12700" cap="flat" cmpd="sng" algn="ctr">
+                      <a:solidFill>
+                        <a:schemeClr val="bg1"/>
+                      </a:solidFill>
+                      <a:prstDash val="solid"/>
+                      <a:round/>
+                      <a:headEnd type="none" w="med" len="med"/>
+                      <a:tailEnd type="none" w="med" len="med"/>
+                    </a:lnT>
+                    <a:lnB w="12700" cap="flat" cmpd="sng" algn="ctr">
+                      <a:noFill/>
+                      <a:prstDash val="solid"/>
+                      <a:round/>
+                      <a:headEnd type="none" w="med" len="med"/>
+                      <a:tailEnd type="none" w="med" len="med"/>
+                    </a:lnB>
+                  </a:tcPr>
+                </a:tc>
+                <a:tc>
+                  <a:txBody>
+                    <a:bodyPr/>
+                    <a:lstStyle/>
+                    <a:p>
+                      <a:pPr algn="ctr"/>
+                      <a:r>
+                        <a:rPr lang="en-CH" dirty="0"/>
+                        <a:t>$41 million</a:t>
+                      </a:r>
+                    </a:p>
+                  </a:txBody>
+                  <a:tcPr marL="54000" marR="54000" anchor="ctr">
+                    <a:lnL w="12700" cap="flat" cmpd="sng" algn="ctr">
+                      <a:solidFill>
+                        <a:schemeClr val="bg1"/>
+                      </a:solidFill>
+                      <a:prstDash val="solid"/>
+                      <a:round/>
+                      <a:headEnd type="none" w="med" len="med"/>
+                      <a:tailEnd type="none" w="med" len="med"/>
+                    </a:lnL>
+                    <a:lnR w="12700" cap="flat" cmpd="sng" algn="ctr">
+                      <a:solidFill>
+                        <a:schemeClr val="bg1"/>
+                      </a:solidFill>
+                      <a:prstDash val="solid"/>
+                      <a:round/>
+                      <a:headEnd type="none" w="med" len="med"/>
+                      <a:tailEnd type="none" w="med" len="med"/>
+                    </a:lnR>
+                    <a:lnT w="12700" cap="flat" cmpd="sng" algn="ctr">
+                      <a:solidFill>
+                        <a:schemeClr val="bg1"/>
+                      </a:solidFill>
+                      <a:prstDash val="solid"/>
+                      <a:round/>
+                      <a:headEnd type="none" w="med" len="med"/>
+                      <a:tailEnd type="none" w="med" len="med"/>
+                    </a:lnT>
+                    <a:lnB w="12700" cap="flat" cmpd="sng" algn="ctr">
+                      <a:noFill/>
+                      <a:prstDash val="solid"/>
+                      <a:round/>
+                      <a:headEnd type="none" w="med" len="med"/>
+                      <a:tailEnd type="none" w="med" len="med"/>
+                    </a:lnB>
+                  </a:tcPr>
+                </a:tc>
+                <a:tc gridSpan="2">
+                  <a:txBody>
+                    <a:bodyPr/>
+                    <a:lstStyle/>
+                    <a:p>
+                      <a:pPr algn="ctr"/>
+                      <a:r>
+                        <a:rPr lang="en-CH" dirty="0"/>
+                        <a:t>Unclear</a:t>
+                      </a:r>
+                    </a:p>
+                  </a:txBody>
+                  <a:tcPr marL="54000" marR="54000" anchor="ctr">
+                    <a:lnL w="12700" cap="flat" cmpd="sng" algn="ctr">
+                      <a:solidFill>
+                        <a:schemeClr val="bg1"/>
+                      </a:solidFill>
+                      <a:prstDash val="solid"/>
+                      <a:round/>
+                      <a:headEnd type="none" w="med" len="med"/>
+                      <a:tailEnd type="none" w="med" len="med"/>
+                    </a:lnL>
+                    <a:lnR w="12700" cap="flat" cmpd="sng" algn="ctr">
+                      <a:solidFill>
+                        <a:schemeClr val="bg1"/>
+                      </a:solidFill>
+                      <a:prstDash val="solid"/>
+                      <a:round/>
+                      <a:headEnd type="none" w="med" len="med"/>
+                      <a:tailEnd type="none" w="med" len="med"/>
+                    </a:lnR>
+                    <a:lnT w="12700" cap="flat" cmpd="sng" algn="ctr">
+                      <a:solidFill>
+                        <a:schemeClr val="bg1"/>
+                      </a:solidFill>
+                      <a:prstDash val="solid"/>
+                      <a:round/>
+                      <a:headEnd type="none" w="med" len="med"/>
+                      <a:tailEnd type="none" w="med" len="med"/>
+                    </a:lnT>
+                    <a:lnB w="12700" cap="flat" cmpd="sng" algn="ctr">
+                      <a:noFill/>
+                      <a:prstDash val="solid"/>
+                      <a:round/>
+                      <a:headEnd type="none" w="med" len="med"/>
+                      <a:tailEnd type="none" w="med" len="med"/>
+                    </a:lnB>
+                    <a:solidFill>
+                      <a:schemeClr val="accent1">
+                        <a:lumMod val="40000"/>
+                        <a:lumOff val="60000"/>
+                      </a:schemeClr>
+                    </a:solidFill>
+                  </a:tcPr>
+                </a:tc>
+                <a:tc hMerge="1">
+                  <a:txBody>
+                    <a:bodyPr/>
+                    <a:lstStyle/>
+                    <a:p>
+                      <a:endParaRPr lang="en-CH"/>
+                    </a:p>
+                  </a:txBody>
+                  <a:tcPr/>
+                </a:tc>
+                <a:extLst>
+                  <a:ext uri="{0D108BD9-81ED-4DB2-BD59-A6C34878D82A}">
+                    <a16:rowId xmlns:a16="http://schemas.microsoft.com/office/drawing/2014/main" val="1698656711"/>
+                  </a:ext>
+                </a:extLst>
+              </a:tr>
+              <a:tr h="370840">
+                <a:tc>
+                  <a:txBody>
+                    <a:bodyPr/>
+                    <a:lstStyle/>
+                    <a:p>
+                      <a:pPr algn="r"/>
+                      <a:r>
+                        <a:rPr lang="en-CH" dirty="0"/>
+                        <a:t>Total</a:t>
+                      </a:r>
+                    </a:p>
+                  </a:txBody>
+                  <a:tcPr marL="54000" marR="54000" anchor="ctr">
+                    <a:lnL w="12700" cap="flat" cmpd="sng" algn="ctr">
+                      <a:noFill/>
+                      <a:prstDash val="solid"/>
+                      <a:round/>
+                      <a:headEnd type="none" w="med" len="med"/>
+                      <a:tailEnd type="none" w="med" len="med"/>
+                    </a:lnL>
+                    <a:lnR w="12700" cap="flat" cmpd="sng" algn="ctr">
+                      <a:noFill/>
+                      <a:prstDash val="solid"/>
+                      <a:round/>
+                      <a:headEnd type="none" w="med" len="med"/>
+                      <a:tailEnd type="none" w="med" len="med"/>
+                    </a:lnR>
+                    <a:lnT w="12700" cap="flat" cmpd="sng" algn="ctr">
+                      <a:noFill/>
+                      <a:prstDash val="solid"/>
+                      <a:round/>
+                      <a:headEnd type="none" w="med" len="med"/>
+                      <a:tailEnd type="none" w="med" len="med"/>
+                    </a:lnT>
+                    <a:lnB w="12700" cap="flat" cmpd="sng" algn="ctr">
+                      <a:noFill/>
+                      <a:prstDash val="solid"/>
+                      <a:round/>
+                      <a:headEnd type="none" w="med" len="med"/>
+                      <a:tailEnd type="none" w="med" len="med"/>
+                    </a:lnB>
+                  </a:tcPr>
+                </a:tc>
+                <a:tc>
+                  <a:txBody>
+                    <a:bodyPr/>
+                    <a:lstStyle/>
+                    <a:p>
+                      <a:pPr algn="r"/>
+                      <a:r>
+                        <a:rPr lang="en-CH" dirty="0"/>
+                        <a:t>54</a:t>
+                      </a:r>
+                    </a:p>
+                  </a:txBody>
+                  <a:tcPr marL="54000" marR="54000" anchor="ctr">
+                    <a:lnL w="12700" cap="flat" cmpd="sng" algn="ctr">
+                      <a:noFill/>
+                      <a:prstDash val="solid"/>
+                      <a:round/>
+                      <a:headEnd type="none" w="med" len="med"/>
+                      <a:tailEnd type="none" w="med" len="med"/>
+                    </a:lnL>
+                    <a:lnR w="12700" cap="flat" cmpd="sng" algn="ctr">
+                      <a:noFill/>
+                      <a:prstDash val="solid"/>
+                      <a:round/>
+                      <a:headEnd type="none" w="med" len="med"/>
+                      <a:tailEnd type="none" w="med" len="med"/>
+                    </a:lnR>
+                    <a:lnT w="12700" cap="flat" cmpd="sng" algn="ctr">
+                      <a:noFill/>
+                      <a:prstDash val="solid"/>
+                      <a:round/>
+                      <a:headEnd type="none" w="med" len="med"/>
+                      <a:tailEnd type="none" w="med" len="med"/>
+                    </a:lnT>
+                    <a:lnB w="12700" cap="flat" cmpd="sng" algn="ctr">
+                      <a:noFill/>
+                      <a:prstDash val="solid"/>
+                      <a:round/>
+                      <a:headEnd type="none" w="med" len="med"/>
+                      <a:tailEnd type="none" w="med" len="med"/>
+                    </a:lnB>
+                  </a:tcPr>
+                </a:tc>
+                <a:tc>
+                  <a:txBody>
+                    <a:bodyPr/>
+                    <a:lstStyle/>
+                    <a:p>
+                      <a:pPr algn="r"/>
+                      <a:r>
+                        <a:rPr lang="en-CH" dirty="0"/>
+                        <a:t>$187 million</a:t>
+                      </a:r>
+                    </a:p>
+                  </a:txBody>
+                  <a:tcPr marL="54000" marR="54000" anchor="ctr">
+                    <a:lnL w="12700" cap="flat" cmpd="sng" algn="ctr">
+                      <a:noFill/>
+                      <a:prstDash val="solid"/>
+                      <a:round/>
+                      <a:headEnd type="none" w="med" len="med"/>
+                      <a:tailEnd type="none" w="med" len="med"/>
+                    </a:lnL>
+                    <a:lnR w="12700" cap="flat" cmpd="sng" algn="ctr">
+                      <a:noFill/>
+                      <a:prstDash val="solid"/>
+                      <a:round/>
+                      <a:headEnd type="none" w="med" len="med"/>
+                      <a:tailEnd type="none" w="med" len="med"/>
+                    </a:lnR>
+                    <a:lnT w="12700" cap="flat" cmpd="sng" algn="ctr">
+                      <a:noFill/>
+                      <a:prstDash val="solid"/>
+                      <a:round/>
+                      <a:headEnd type="none" w="med" len="med"/>
+                      <a:tailEnd type="none" w="med" len="med"/>
+                    </a:lnT>
+                    <a:lnB w="12700" cap="flat" cmpd="sng" algn="ctr">
+                      <a:noFill/>
+                      <a:prstDash val="solid"/>
+                      <a:round/>
+                      <a:headEnd type="none" w="med" len="med"/>
+                      <a:tailEnd type="none" w="med" len="med"/>
+                    </a:lnB>
+                  </a:tcPr>
+                </a:tc>
+                <a:tc>
+                  <a:txBody>
+                    <a:bodyPr/>
+                    <a:lstStyle/>
+                    <a:p>
+                      <a:pPr algn="ctr"/>
+                      <a:r>
+                        <a:rPr lang="en-CH" dirty="0"/>
+                        <a:t>49/54</a:t>
+                      </a:r>
+                    </a:p>
+                  </a:txBody>
+                  <a:tcPr marL="54000" marR="54000" anchor="ctr">
+                    <a:lnL w="12700" cap="flat" cmpd="sng" algn="ctr">
+                      <a:noFill/>
+                      <a:prstDash val="solid"/>
+                      <a:round/>
+                      <a:headEnd type="none" w="med" len="med"/>
+                      <a:tailEnd type="none" w="med" len="med"/>
+                    </a:lnL>
+                    <a:lnR w="12700" cap="flat" cmpd="sng" algn="ctr">
+                      <a:noFill/>
+                      <a:prstDash val="solid"/>
+                      <a:round/>
+                      <a:headEnd type="none" w="med" len="med"/>
+                      <a:tailEnd type="none" w="med" len="med"/>
+                    </a:lnR>
+                    <a:lnT w="12700" cap="flat" cmpd="sng" algn="ctr">
+                      <a:noFill/>
+                      <a:prstDash val="solid"/>
+                      <a:round/>
+                      <a:headEnd type="none" w="med" len="med"/>
+                      <a:tailEnd type="none" w="med" len="med"/>
+                    </a:lnT>
+                    <a:lnB w="12700" cap="flat" cmpd="sng" algn="ctr">
+                      <a:noFill/>
+                      <a:prstDash val="solid"/>
+                      <a:round/>
+                      <a:headEnd type="none" w="med" len="med"/>
+                      <a:tailEnd type="none" w="med" len="med"/>
+                    </a:lnB>
+                  </a:tcPr>
+                </a:tc>
+                <a:tc>
+                  <a:txBody>
+                    <a:bodyPr/>
+                    <a:lstStyle/>
+                    <a:p>
+                      <a:pPr algn="ctr"/>
+                      <a:r>
+                        <a:rPr lang="en-CH" dirty="0"/>
+                        <a:t>53/54</a:t>
+                      </a:r>
+                    </a:p>
+                  </a:txBody>
+                  <a:tcPr marL="54000" marR="54000" anchor="ctr">
+                    <a:lnL w="12700" cap="flat" cmpd="sng" algn="ctr">
+                      <a:noFill/>
+                      <a:prstDash val="solid"/>
+                      <a:round/>
+                      <a:headEnd type="none" w="med" len="med"/>
+                      <a:tailEnd type="none" w="med" len="med"/>
+                    </a:lnL>
+                    <a:lnR w="12700" cap="flat" cmpd="sng" algn="ctr">
+                      <a:noFill/>
+                      <a:prstDash val="solid"/>
+                      <a:round/>
+                      <a:headEnd type="none" w="med" len="med"/>
+                      <a:tailEnd type="none" w="med" len="med"/>
+                    </a:lnR>
+                    <a:lnT w="12700" cap="flat" cmpd="sng" algn="ctr">
+                      <a:noFill/>
+                      <a:prstDash val="solid"/>
+                      <a:round/>
+                      <a:headEnd type="none" w="med" len="med"/>
+                      <a:tailEnd type="none" w="med" len="med"/>
+                    </a:lnT>
+                    <a:lnB w="12700" cap="flat" cmpd="sng" algn="ctr">
+                      <a:noFill/>
+                      <a:prstDash val="solid"/>
+                      <a:round/>
+                      <a:headEnd type="none" w="med" len="med"/>
+                      <a:tailEnd type="none" w="med" len="med"/>
+                    </a:lnB>
+                  </a:tcPr>
+                </a:tc>
+                <a:extLst>
+                  <a:ext uri="{0D108BD9-81ED-4DB2-BD59-A6C34878D82A}">
+                    <a16:rowId xmlns:a16="http://schemas.microsoft.com/office/drawing/2014/main" val="3011685451"/>
+                  </a:ext>
+                </a:extLst>
+              </a:tr>
+            </a:tbl>
+          </a:graphicData>
+        </a:graphic>
+      </p:graphicFrame>
     </p:spTree>
     <p:extLst>
       <p:ext uri="{BB962C8B-B14F-4D97-AF65-F5344CB8AC3E}">
-        <p14:creationId xmlns:p14="http://schemas.microsoft.com/office/powerpoint/2010/main" val="4189042900"/>
+        <p14:creationId xmlns:p14="http://schemas.microsoft.com/office/powerpoint/2010/main" val="2015732397"/>
       </p:ext>
     </p:extLst>
   </p:cSld>
@@ -37396,13 +41190,7 @@
   <p:cSld>
     <p:spTree>
       <p:nvGrpSpPr>
-        <p:cNvPr id="1" name="">
-          <a:extLst>
-            <a:ext uri="{FF2B5EF4-FFF2-40B4-BE49-F238E27FC236}">
-              <a16:creationId xmlns:a16="http://schemas.microsoft.com/office/drawing/2014/main" id="{657A24B2-0BCB-536E-3C94-3974987D0DFD}"/>
-            </a:ext>
-          </a:extLst>
-        </p:cNvPr>
+        <p:cNvPr id="1" name=""/>
         <p:cNvGrpSpPr/>
         <p:nvPr/>
       </p:nvGrpSpPr>
@@ -37419,7 +41207,7 @@
           <p:cNvPr id="2" name="Title 1">
             <a:extLst>
               <a:ext uri="{FF2B5EF4-FFF2-40B4-BE49-F238E27FC236}">
-                <a16:creationId xmlns:a16="http://schemas.microsoft.com/office/drawing/2014/main" id="{8EA1BC9C-2DBC-4906-EEF7-0EAE2FD8F8FE}"/>
+                <a16:creationId xmlns:a16="http://schemas.microsoft.com/office/drawing/2014/main" id="{E4CA7ADE-B4B8-B85A-F47D-ED4D211EE3F0}"/>
               </a:ext>
             </a:extLst>
           </p:cNvPr>
@@ -37437,7 +41225,7 @@
           <a:p>
             <a:r>
               <a:rPr lang="en-CH" dirty="0"/>
-              <a:t>Q&amp;A</a:t>
+              <a:t>Evaluation</a:t>
             </a:r>
           </a:p>
         </p:txBody>
@@ -37447,7 +41235,7 @@
           <p:cNvPr id="3" name="Content Placeholder 2">
             <a:extLst>
               <a:ext uri="{FF2B5EF4-FFF2-40B4-BE49-F238E27FC236}">
-                <a16:creationId xmlns:a16="http://schemas.microsoft.com/office/drawing/2014/main" id="{00564DF2-C902-80E3-AA11-7B92E60D3461}"/>
+                <a16:creationId xmlns:a16="http://schemas.microsoft.com/office/drawing/2014/main" id="{F8E0D93E-6A31-BCD0-6F8C-D15DC783C024}"/>
               </a:ext>
             </a:extLst>
           </p:cNvPr>
@@ -37465,17 +41253,29 @@
           <a:p>
             <a:r>
               <a:rPr lang="en-CH" dirty="0"/>
-              <a:t>A clean slide thanking the audience and opening the floor for questions.</a:t>
-            </a:r>
+              <a:t>Side Effect Annotations:</a:t>
+            </a:r>
+          </a:p>
+          <a:p>
+            <a:pPr lvl="1"/>
+            <a:r>
+              <a:rPr lang="en-CH" dirty="0"/>
+              <a:t>Difficult </a:t>
+            </a:r>
+            <a:r>
+              <a:rPr lang="en-CH"/>
+              <a:t>to quantify</a:t>
+            </a:r>
+            <a:endParaRPr lang="en-CH" dirty="0"/>
           </a:p>
         </p:txBody>
       </p:sp>
       <p:sp>
         <p:nvSpPr>
-          <p:cNvPr id="10" name="Date Placeholder 9">
-            <a:extLst>
-              <a:ext uri="{FF2B5EF4-FFF2-40B4-BE49-F238E27FC236}">
-                <a16:creationId xmlns:a16="http://schemas.microsoft.com/office/drawing/2014/main" id="{CFDCC38E-1A4D-CEFF-E68B-F5C34D78885B}"/>
+          <p:cNvPr id="4" name="Date Placeholder 3">
+            <a:extLst>
+              <a:ext uri="{FF2B5EF4-FFF2-40B4-BE49-F238E27FC236}">
+                <a16:creationId xmlns:a16="http://schemas.microsoft.com/office/drawing/2014/main" id="{09BF006E-4640-9756-F504-32C007ACBE5B}"/>
               </a:ext>
             </a:extLst>
           </p:cNvPr>
@@ -37500,10 +41300,10 @@
       </p:sp>
       <p:sp>
         <p:nvSpPr>
-          <p:cNvPr id="11" name="Footer Placeholder 10">
-            <a:extLst>
-              <a:ext uri="{FF2B5EF4-FFF2-40B4-BE49-F238E27FC236}">
-                <a16:creationId xmlns:a16="http://schemas.microsoft.com/office/drawing/2014/main" id="{C39B10B4-FBCE-956E-8150-5A75B99DD836}"/>
+          <p:cNvPr id="5" name="Footer Placeholder 4">
+            <a:extLst>
+              <a:ext uri="{FF2B5EF4-FFF2-40B4-BE49-F238E27FC236}">
+                <a16:creationId xmlns:a16="http://schemas.microsoft.com/office/drawing/2014/main" id="{51BB7486-FCC8-1558-F142-3260A3EAF69F}"/>
               </a:ext>
             </a:extLst>
           </p:cNvPr>
@@ -37525,10 +41325,10 @@
       </p:sp>
       <p:sp>
         <p:nvSpPr>
-          <p:cNvPr id="12" name="Slide Number Placeholder 11">
-            <a:extLst>
-              <a:ext uri="{FF2B5EF4-FFF2-40B4-BE49-F238E27FC236}">
-                <a16:creationId xmlns:a16="http://schemas.microsoft.com/office/drawing/2014/main" id="{FFFFC763-946A-9599-2042-7EA94017D011}"/>
+          <p:cNvPr id="6" name="Slide Number Placeholder 5">
+            <a:extLst>
+              <a:ext uri="{FF2B5EF4-FFF2-40B4-BE49-F238E27FC236}">
+                <a16:creationId xmlns:a16="http://schemas.microsoft.com/office/drawing/2014/main" id="{80C4EC8B-8437-3353-110C-C837DE368C13}"/>
               </a:ext>
             </a:extLst>
           </p:cNvPr>
@@ -37560,7 +41360,7 @@
     </p:spTree>
     <p:extLst>
       <p:ext uri="{BB962C8B-B14F-4D97-AF65-F5344CB8AC3E}">
-        <p14:creationId xmlns:p14="http://schemas.microsoft.com/office/powerpoint/2010/main" val="4071451834"/>
+        <p14:creationId xmlns:p14="http://schemas.microsoft.com/office/powerpoint/2010/main" val="73526890"/>
       </p:ext>
     </p:extLst>
   </p:cSld>
@@ -37832,6 +41632,1320 @@
   <p:cSld>
     <p:spTree>
       <p:nvGrpSpPr>
+        <p:cNvPr id="1" name=""/>
+        <p:cNvGrpSpPr/>
+        <p:nvPr/>
+      </p:nvGrpSpPr>
+      <p:grpSpPr>
+        <a:xfrm>
+          <a:off x="0" y="0"/>
+          <a:ext cx="0" cy="0"/>
+          <a:chOff x="0" y="0"/>
+          <a:chExt cx="0" cy="0"/>
+        </a:xfrm>
+      </p:grpSpPr>
+      <p:sp>
+        <p:nvSpPr>
+          <p:cNvPr id="2" name="Title 1">
+            <a:extLst>
+              <a:ext uri="{FF2B5EF4-FFF2-40B4-BE49-F238E27FC236}">
+                <a16:creationId xmlns:a16="http://schemas.microsoft.com/office/drawing/2014/main" id="{AF9BC46B-551E-AB41-F6BD-AD90740DD9EE}"/>
+              </a:ext>
+            </a:extLst>
+          </p:cNvPr>
+          <p:cNvSpPr>
+            <a:spLocks noGrp="1"/>
+          </p:cNvSpPr>
+          <p:nvPr>
+            <p:ph type="title"/>
+          </p:nvPr>
+        </p:nvSpPr>
+        <p:spPr/>
+        <p:txBody>
+          <a:bodyPr/>
+          <a:lstStyle/>
+          <a:p>
+            <a:r>
+              <a:rPr lang="en-CH" dirty="0"/>
+              <a:t>Performance Comparison</a:t>
+            </a:r>
+          </a:p>
+        </p:txBody>
+      </p:sp>
+      <p:sp>
+        <p:nvSpPr>
+          <p:cNvPr id="3" name="Content Placeholder 2">
+            <a:extLst>
+              <a:ext uri="{FF2B5EF4-FFF2-40B4-BE49-F238E27FC236}">
+                <a16:creationId xmlns:a16="http://schemas.microsoft.com/office/drawing/2014/main" id="{B5DF9B8A-D3FB-DCE7-91C8-0078921B07EE}"/>
+              </a:ext>
+            </a:extLst>
+          </p:cNvPr>
+          <p:cNvSpPr>
+            <a:spLocks noGrp="1"/>
+          </p:cNvSpPr>
+          <p:nvPr>
+            <p:ph idx="1"/>
+          </p:nvPr>
+        </p:nvSpPr>
+        <p:spPr/>
+        <p:txBody>
+          <a:bodyPr/>
+          <a:lstStyle/>
+          <a:p>
+            <a:r>
+              <a:rPr lang="en-CH" dirty="0"/>
+              <a:t>mostly in terms of memory usage</a:t>
+            </a:r>
+          </a:p>
+        </p:txBody>
+      </p:sp>
+      <p:sp>
+        <p:nvSpPr>
+          <p:cNvPr id="4" name="Date Placeholder 3">
+            <a:extLst>
+              <a:ext uri="{FF2B5EF4-FFF2-40B4-BE49-F238E27FC236}">
+                <a16:creationId xmlns:a16="http://schemas.microsoft.com/office/drawing/2014/main" id="{EF92E660-6274-CAB3-1E76-E66D6392CD9C}"/>
+              </a:ext>
+            </a:extLst>
+          </p:cNvPr>
+          <p:cNvSpPr>
+            <a:spLocks noGrp="1"/>
+          </p:cNvSpPr>
+          <p:nvPr>
+            <p:ph type="dt" sz="half" idx="10"/>
+          </p:nvPr>
+        </p:nvSpPr>
+        <p:spPr/>
+        <p:txBody>
+          <a:bodyPr/>
+          <a:lstStyle/>
+          <a:p>
+            <a:r>
+              <a:rPr lang="en-CH"/>
+              <a:t>30/03/2026</a:t>
+            </a:r>
+          </a:p>
+        </p:txBody>
+      </p:sp>
+      <p:sp>
+        <p:nvSpPr>
+          <p:cNvPr id="5" name="Footer Placeholder 4">
+            <a:extLst>
+              <a:ext uri="{FF2B5EF4-FFF2-40B4-BE49-F238E27FC236}">
+                <a16:creationId xmlns:a16="http://schemas.microsoft.com/office/drawing/2014/main" id="{B688E735-1875-850E-7082-26F73F6C97B4}"/>
+              </a:ext>
+            </a:extLst>
+          </p:cNvPr>
+          <p:cNvSpPr>
+            <a:spLocks noGrp="1"/>
+          </p:cNvSpPr>
+          <p:nvPr>
+            <p:ph type="ftr" sz="quarter" idx="11"/>
+          </p:nvPr>
+        </p:nvSpPr>
+        <p:spPr/>
+        <p:txBody>
+          <a:bodyPr/>
+          <a:lstStyle/>
+          <a:p>
+            <a:endParaRPr lang="en-CH"/>
+          </a:p>
+        </p:txBody>
+      </p:sp>
+      <p:sp>
+        <p:nvSpPr>
+          <p:cNvPr id="6" name="Slide Number Placeholder 5">
+            <a:extLst>
+              <a:ext uri="{FF2B5EF4-FFF2-40B4-BE49-F238E27FC236}">
+                <a16:creationId xmlns:a16="http://schemas.microsoft.com/office/drawing/2014/main" id="{B6D2D1F0-66B8-C97A-37DE-4CEB717B674C}"/>
+              </a:ext>
+            </a:extLst>
+          </p:cNvPr>
+          <p:cNvSpPr>
+            <a:spLocks noGrp="1"/>
+          </p:cNvSpPr>
+          <p:nvPr>
+            <p:ph type="sldNum" sz="quarter" idx="12"/>
+          </p:nvPr>
+        </p:nvSpPr>
+        <p:spPr/>
+        <p:txBody>
+          <a:bodyPr/>
+          <a:lstStyle/>
+          <a:p>
+            <a:fld id="{1013ED95-016C-42D7-B550-5C99AA40E4D5}" type="slidenum">
+              <a:rPr lang="en-CH" smtClean="0"/>
+              <a:pPr/>
+              <a:t>40</a:t>
+            </a:fld>
+            <a:r>
+              <a:rPr lang="en-CH"/>
+              <a:t> / XX</a:t>
+            </a:r>
+            <a:endParaRPr lang="en-CH" dirty="0"/>
+          </a:p>
+        </p:txBody>
+      </p:sp>
+    </p:spTree>
+    <p:extLst>
+      <p:ext uri="{BB962C8B-B14F-4D97-AF65-F5344CB8AC3E}">
+        <p14:creationId xmlns:p14="http://schemas.microsoft.com/office/powerpoint/2010/main" val="3913272762"/>
+      </p:ext>
+    </p:extLst>
+  </p:cSld>
+  <p:clrMapOvr>
+    <a:masterClrMapping/>
+  </p:clrMapOvr>
+</p:sld>
+</file>
+
+<file path=ppt/slides/slide41.xml><?xml version="1.0" encoding="utf-8"?>
+<p:sld xmlns:a="http://schemas.openxmlformats.org/drawingml/2006/main" xmlns:r="http://schemas.openxmlformats.org/officeDocument/2006/relationships" xmlns:p="http://schemas.openxmlformats.org/presentationml/2006/main">
+  <p:cSld>
+    <p:spTree>
+      <p:nvGrpSpPr>
+        <p:cNvPr id="1" name=""/>
+        <p:cNvGrpSpPr/>
+        <p:nvPr/>
+      </p:nvGrpSpPr>
+      <p:grpSpPr>
+        <a:xfrm>
+          <a:off x="0" y="0"/>
+          <a:ext cx="0" cy="0"/>
+          <a:chOff x="0" y="0"/>
+          <a:chExt cx="0" cy="0"/>
+        </a:xfrm>
+      </p:grpSpPr>
+      <p:sp>
+        <p:nvSpPr>
+          <p:cNvPr id="2" name="Title 1">
+            <a:extLst>
+              <a:ext uri="{FF2B5EF4-FFF2-40B4-BE49-F238E27FC236}">
+                <a16:creationId xmlns:a16="http://schemas.microsoft.com/office/drawing/2014/main" id="{7F88D1DC-16BA-AC15-FD23-2C9971E3498B}"/>
+              </a:ext>
+            </a:extLst>
+          </p:cNvPr>
+          <p:cNvSpPr>
+            <a:spLocks noGrp="1"/>
+          </p:cNvSpPr>
+          <p:nvPr>
+            <p:ph type="title"/>
+          </p:nvPr>
+        </p:nvSpPr>
+        <p:spPr/>
+        <p:txBody>
+          <a:bodyPr/>
+          <a:lstStyle/>
+          <a:p>
+            <a:r>
+              <a:rPr lang="en-CH" dirty="0"/>
+              <a:t>Code Overhead</a:t>
+            </a:r>
+          </a:p>
+        </p:txBody>
+      </p:sp>
+      <p:sp>
+        <p:nvSpPr>
+          <p:cNvPr id="3" name="Content Placeholder 2">
+            <a:extLst>
+              <a:ext uri="{FF2B5EF4-FFF2-40B4-BE49-F238E27FC236}">
+                <a16:creationId xmlns:a16="http://schemas.microsoft.com/office/drawing/2014/main" id="{E71B073C-A903-CA8B-A8CD-3A95B9BAFF58}"/>
+              </a:ext>
+            </a:extLst>
+          </p:cNvPr>
+          <p:cNvSpPr>
+            <a:spLocks noGrp="1"/>
+          </p:cNvSpPr>
+          <p:nvPr>
+            <p:ph idx="1"/>
+          </p:nvPr>
+        </p:nvSpPr>
+        <p:spPr/>
+        <p:txBody>
+          <a:bodyPr/>
+          <a:lstStyle/>
+          <a:p>
+            <a:r>
+              <a:rPr lang="en-CH" dirty="0"/>
+              <a:t>how many additional lines of code, etc?</a:t>
+            </a:r>
+          </a:p>
+        </p:txBody>
+      </p:sp>
+      <p:sp>
+        <p:nvSpPr>
+          <p:cNvPr id="4" name="Date Placeholder 3">
+            <a:extLst>
+              <a:ext uri="{FF2B5EF4-FFF2-40B4-BE49-F238E27FC236}">
+                <a16:creationId xmlns:a16="http://schemas.microsoft.com/office/drawing/2014/main" id="{81724778-0D67-4519-B242-81A385C36D9E}"/>
+              </a:ext>
+            </a:extLst>
+          </p:cNvPr>
+          <p:cNvSpPr>
+            <a:spLocks noGrp="1"/>
+          </p:cNvSpPr>
+          <p:nvPr>
+            <p:ph type="dt" sz="half" idx="10"/>
+          </p:nvPr>
+        </p:nvSpPr>
+        <p:spPr/>
+        <p:txBody>
+          <a:bodyPr/>
+          <a:lstStyle/>
+          <a:p>
+            <a:r>
+              <a:rPr lang="en-CH"/>
+              <a:t>30/03/2026</a:t>
+            </a:r>
+          </a:p>
+        </p:txBody>
+      </p:sp>
+      <p:sp>
+        <p:nvSpPr>
+          <p:cNvPr id="5" name="Footer Placeholder 4">
+            <a:extLst>
+              <a:ext uri="{FF2B5EF4-FFF2-40B4-BE49-F238E27FC236}">
+                <a16:creationId xmlns:a16="http://schemas.microsoft.com/office/drawing/2014/main" id="{2A8D67A7-B7A6-9CA1-0C7B-73B8BB9B6BA3}"/>
+              </a:ext>
+            </a:extLst>
+          </p:cNvPr>
+          <p:cNvSpPr>
+            <a:spLocks noGrp="1"/>
+          </p:cNvSpPr>
+          <p:nvPr>
+            <p:ph type="ftr" sz="quarter" idx="11"/>
+          </p:nvPr>
+        </p:nvSpPr>
+        <p:spPr/>
+        <p:txBody>
+          <a:bodyPr/>
+          <a:lstStyle/>
+          <a:p>
+            <a:endParaRPr lang="en-CH"/>
+          </a:p>
+        </p:txBody>
+      </p:sp>
+      <p:sp>
+        <p:nvSpPr>
+          <p:cNvPr id="6" name="Slide Number Placeholder 5">
+            <a:extLst>
+              <a:ext uri="{FF2B5EF4-FFF2-40B4-BE49-F238E27FC236}">
+                <a16:creationId xmlns:a16="http://schemas.microsoft.com/office/drawing/2014/main" id="{01DF68E6-9AA3-3821-A5A9-671C79982BBE}"/>
+              </a:ext>
+            </a:extLst>
+          </p:cNvPr>
+          <p:cNvSpPr>
+            <a:spLocks noGrp="1"/>
+          </p:cNvSpPr>
+          <p:nvPr>
+            <p:ph type="sldNum" sz="quarter" idx="12"/>
+          </p:nvPr>
+        </p:nvSpPr>
+        <p:spPr/>
+        <p:txBody>
+          <a:bodyPr/>
+          <a:lstStyle/>
+          <a:p>
+            <a:fld id="{1013ED95-016C-42D7-B550-5C99AA40E4D5}" type="slidenum">
+              <a:rPr lang="en-CH" smtClean="0"/>
+              <a:pPr/>
+              <a:t>41</a:t>
+            </a:fld>
+            <a:r>
+              <a:rPr lang="en-CH"/>
+              <a:t> / XX</a:t>
+            </a:r>
+            <a:endParaRPr lang="en-CH" dirty="0"/>
+          </a:p>
+        </p:txBody>
+      </p:sp>
+    </p:spTree>
+    <p:extLst>
+      <p:ext uri="{BB962C8B-B14F-4D97-AF65-F5344CB8AC3E}">
+        <p14:creationId xmlns:p14="http://schemas.microsoft.com/office/powerpoint/2010/main" val="3880314168"/>
+      </p:ext>
+    </p:extLst>
+  </p:cSld>
+  <p:clrMapOvr>
+    <a:masterClrMapping/>
+  </p:clrMapOvr>
+</p:sld>
+</file>
+
+<file path=ppt/slides/slide42.xml><?xml version="1.0" encoding="utf-8"?>
+<p:sld xmlns:a="http://schemas.openxmlformats.org/drawingml/2006/main" xmlns:r="http://schemas.openxmlformats.org/officeDocument/2006/relationships" xmlns:p="http://schemas.openxmlformats.org/presentationml/2006/main">
+  <p:cSld>
+    <p:spTree>
+      <p:nvGrpSpPr>
+        <p:cNvPr id="1" name="">
+          <a:extLst>
+            <a:ext uri="{FF2B5EF4-FFF2-40B4-BE49-F238E27FC236}">
+              <a16:creationId xmlns:a16="http://schemas.microsoft.com/office/drawing/2014/main" id="{029FA1AF-D3B7-4197-B4AA-D9F2112CA11C}"/>
+            </a:ext>
+          </a:extLst>
+        </p:cNvPr>
+        <p:cNvGrpSpPr/>
+        <p:nvPr/>
+      </p:nvGrpSpPr>
+      <p:grpSpPr>
+        <a:xfrm>
+          <a:off x="0" y="0"/>
+          <a:ext cx="0" cy="0"/>
+          <a:chOff x="0" y="0"/>
+          <a:chExt cx="0" cy="0"/>
+        </a:xfrm>
+      </p:grpSpPr>
+      <p:sp>
+        <p:nvSpPr>
+          <p:cNvPr id="2" name="Title 1">
+            <a:extLst>
+              <a:ext uri="{FF2B5EF4-FFF2-40B4-BE49-F238E27FC236}">
+                <a16:creationId xmlns:a16="http://schemas.microsoft.com/office/drawing/2014/main" id="{40716033-2719-5D00-2C17-DAAF07A7A41B}"/>
+              </a:ext>
+            </a:extLst>
+          </p:cNvPr>
+          <p:cNvSpPr>
+            <a:spLocks noGrp="1"/>
+          </p:cNvSpPr>
+          <p:nvPr>
+            <p:ph type="title"/>
+          </p:nvPr>
+        </p:nvSpPr>
+        <p:spPr/>
+        <p:txBody>
+          <a:bodyPr/>
+          <a:lstStyle/>
+          <a:p>
+            <a:r>
+              <a:rPr lang="en-CH" dirty="0"/>
+              <a:t>Conclusion &amp; Future Work</a:t>
+            </a:r>
+          </a:p>
+        </p:txBody>
+      </p:sp>
+      <p:sp>
+        <p:nvSpPr>
+          <p:cNvPr id="3" name="Content Placeholder 2">
+            <a:extLst>
+              <a:ext uri="{FF2B5EF4-FFF2-40B4-BE49-F238E27FC236}">
+                <a16:creationId xmlns:a16="http://schemas.microsoft.com/office/drawing/2014/main" id="{A2AB248D-3648-CB55-611C-BDBCC3D96A2F}"/>
+              </a:ext>
+            </a:extLst>
+          </p:cNvPr>
+          <p:cNvSpPr>
+            <a:spLocks noGrp="1"/>
+          </p:cNvSpPr>
+          <p:nvPr>
+            <p:ph idx="1"/>
+          </p:nvPr>
+        </p:nvSpPr>
+        <p:spPr/>
+        <p:txBody>
+          <a:bodyPr/>
+          <a:lstStyle/>
+          <a:p>
+            <a:r>
+              <a:rPr lang="en-CH" dirty="0"/>
+              <a:t>Summarize your main contributions (identified gap -&gt; novel approach -&gt; working tool).</a:t>
+            </a:r>
+          </a:p>
+          <a:p>
+            <a:r>
+              <a:rPr lang="en-CH" dirty="0"/>
+              <a:t>Briefly mention what could be done next.</a:t>
+            </a:r>
+          </a:p>
+        </p:txBody>
+      </p:sp>
+      <p:sp>
+        <p:nvSpPr>
+          <p:cNvPr id="10" name="Date Placeholder 9">
+            <a:extLst>
+              <a:ext uri="{FF2B5EF4-FFF2-40B4-BE49-F238E27FC236}">
+                <a16:creationId xmlns:a16="http://schemas.microsoft.com/office/drawing/2014/main" id="{59B9A612-775D-998B-1D7A-D2B46DF8D7CD}"/>
+              </a:ext>
+            </a:extLst>
+          </p:cNvPr>
+          <p:cNvSpPr>
+            <a:spLocks noGrp="1"/>
+          </p:cNvSpPr>
+          <p:nvPr>
+            <p:ph type="dt" sz="half" idx="10"/>
+          </p:nvPr>
+        </p:nvSpPr>
+        <p:spPr/>
+        <p:txBody>
+          <a:bodyPr/>
+          <a:lstStyle/>
+          <a:p>
+            <a:r>
+              <a:rPr lang="en-CH"/>
+              <a:t>30/03/2026</a:t>
+            </a:r>
+          </a:p>
+        </p:txBody>
+      </p:sp>
+      <p:sp>
+        <p:nvSpPr>
+          <p:cNvPr id="11" name="Footer Placeholder 10">
+            <a:extLst>
+              <a:ext uri="{FF2B5EF4-FFF2-40B4-BE49-F238E27FC236}">
+                <a16:creationId xmlns:a16="http://schemas.microsoft.com/office/drawing/2014/main" id="{960BCA54-D022-260C-5931-14F12AB49087}"/>
+              </a:ext>
+            </a:extLst>
+          </p:cNvPr>
+          <p:cNvSpPr>
+            <a:spLocks noGrp="1"/>
+          </p:cNvSpPr>
+          <p:nvPr>
+            <p:ph type="ftr" sz="quarter" idx="11"/>
+          </p:nvPr>
+        </p:nvSpPr>
+        <p:spPr/>
+        <p:txBody>
+          <a:bodyPr/>
+          <a:lstStyle/>
+          <a:p>
+            <a:endParaRPr lang="en-CH"/>
+          </a:p>
+        </p:txBody>
+      </p:sp>
+      <p:sp>
+        <p:nvSpPr>
+          <p:cNvPr id="12" name="Slide Number Placeholder 11">
+            <a:extLst>
+              <a:ext uri="{FF2B5EF4-FFF2-40B4-BE49-F238E27FC236}">
+                <a16:creationId xmlns:a16="http://schemas.microsoft.com/office/drawing/2014/main" id="{FB7D8A20-A614-B8EC-88C2-4B7D500B62ED}"/>
+              </a:ext>
+            </a:extLst>
+          </p:cNvPr>
+          <p:cNvSpPr>
+            <a:spLocks noGrp="1"/>
+          </p:cNvSpPr>
+          <p:nvPr>
+            <p:ph type="sldNum" sz="quarter" idx="12"/>
+          </p:nvPr>
+        </p:nvSpPr>
+        <p:spPr/>
+        <p:txBody>
+          <a:bodyPr/>
+          <a:lstStyle/>
+          <a:p>
+            <a:fld id="{1013ED95-016C-42D7-B550-5C99AA40E4D5}" type="slidenum">
+              <a:rPr lang="en-CH" smtClean="0"/>
+              <a:pPr/>
+              <a:t>42</a:t>
+            </a:fld>
+            <a:r>
+              <a:rPr lang="en-CH"/>
+              <a:t> / XX</a:t>
+            </a:r>
+            <a:endParaRPr lang="en-CH" dirty="0"/>
+          </a:p>
+        </p:txBody>
+      </p:sp>
+    </p:spTree>
+    <p:extLst>
+      <p:ext uri="{BB962C8B-B14F-4D97-AF65-F5344CB8AC3E}">
+        <p14:creationId xmlns:p14="http://schemas.microsoft.com/office/powerpoint/2010/main" val="4189042900"/>
+      </p:ext>
+    </p:extLst>
+  </p:cSld>
+  <p:clrMapOvr>
+    <a:masterClrMapping/>
+  </p:clrMapOvr>
+</p:sld>
+</file>
+
+<file path=ppt/slides/slide43.xml><?xml version="1.0" encoding="utf-8"?>
+<p:sld xmlns:a="http://schemas.openxmlformats.org/drawingml/2006/main" xmlns:r="http://schemas.openxmlformats.org/officeDocument/2006/relationships" xmlns:p="http://schemas.openxmlformats.org/presentationml/2006/main">
+  <p:cSld>
+    <p:spTree>
+      <p:nvGrpSpPr>
+        <p:cNvPr id="1" name=""/>
+        <p:cNvGrpSpPr/>
+        <p:nvPr/>
+      </p:nvGrpSpPr>
+      <p:grpSpPr>
+        <a:xfrm>
+          <a:off x="0" y="0"/>
+          <a:ext cx="0" cy="0"/>
+          <a:chOff x="0" y="0"/>
+          <a:chExt cx="0" cy="0"/>
+        </a:xfrm>
+      </p:grpSpPr>
+      <p:sp>
+        <p:nvSpPr>
+          <p:cNvPr id="2" name="Title 1">
+            <a:extLst>
+              <a:ext uri="{FF2B5EF4-FFF2-40B4-BE49-F238E27FC236}">
+                <a16:creationId xmlns:a16="http://schemas.microsoft.com/office/drawing/2014/main" id="{FC893ECD-B222-140F-0CF6-39096498FE6A}"/>
+              </a:ext>
+            </a:extLst>
+          </p:cNvPr>
+          <p:cNvSpPr>
+            <a:spLocks noGrp="1"/>
+          </p:cNvSpPr>
+          <p:nvPr>
+            <p:ph type="title"/>
+          </p:nvPr>
+        </p:nvSpPr>
+        <p:spPr/>
+        <p:txBody>
+          <a:bodyPr/>
+          <a:lstStyle/>
+          <a:p>
+            <a:r>
+              <a:rPr lang="en-CH" dirty="0"/>
+              <a:t>Future Work</a:t>
+            </a:r>
+          </a:p>
+        </p:txBody>
+      </p:sp>
+      <p:sp>
+        <p:nvSpPr>
+          <p:cNvPr id="3" name="Content Placeholder 2">
+            <a:extLst>
+              <a:ext uri="{FF2B5EF4-FFF2-40B4-BE49-F238E27FC236}">
+                <a16:creationId xmlns:a16="http://schemas.microsoft.com/office/drawing/2014/main" id="{D6A6F952-40A4-519A-DE97-003D3E3CF191}"/>
+              </a:ext>
+            </a:extLst>
+          </p:cNvPr>
+          <p:cNvSpPr>
+            <a:spLocks noGrp="1"/>
+          </p:cNvSpPr>
+          <p:nvPr>
+            <p:ph sz="half" idx="1"/>
+          </p:nvPr>
+        </p:nvSpPr>
+        <p:spPr/>
+        <p:txBody>
+          <a:bodyPr>
+            <a:normAutofit fontScale="92500" lnSpcReduction="10000"/>
+          </a:bodyPr>
+          <a:lstStyle/>
+          <a:p>
+            <a:r>
+              <a:rPr lang="en-CH" dirty="0"/>
+              <a:t>Features:</a:t>
+            </a:r>
+          </a:p>
+          <a:p>
+            <a:pPr lvl="1"/>
+            <a:r>
+              <a:rPr lang="en-CH" dirty="0"/>
+              <a:t>Automatically split large contracts</a:t>
+            </a:r>
+          </a:p>
+          <a:p>
+            <a:pPr lvl="1"/>
+            <a:r>
+              <a:rPr lang="en-CH" dirty="0"/>
+              <a:t>Error handling (with result types)</a:t>
+            </a:r>
+          </a:p>
+          <a:p>
+            <a:pPr lvl="1"/>
+            <a:r>
+              <a:rPr lang="en-CH" dirty="0"/>
+              <a:t>More effect types</a:t>
+            </a:r>
+          </a:p>
+          <a:p>
+            <a:pPr lvl="1"/>
+            <a:r>
+              <a:rPr lang="en-CH" dirty="0"/>
+              <a:t>Access Control Mechanisms</a:t>
+            </a:r>
+          </a:p>
+          <a:p>
+            <a:endParaRPr lang="en-CH" dirty="0"/>
+          </a:p>
+          <a:p>
+            <a:r>
+              <a:rPr lang="en-CH" dirty="0"/>
+              <a:t>Codegen: Rely less on Solidity</a:t>
+            </a:r>
+          </a:p>
+          <a:p>
+            <a:pPr lvl="1"/>
+            <a:r>
+              <a:rPr lang="en-CH" dirty="0"/>
+              <a:t>Memory Allocations</a:t>
+            </a:r>
+          </a:p>
+          <a:p>
+            <a:pPr lvl="1"/>
+            <a:r>
+              <a:rPr lang="en-CH" dirty="0"/>
+              <a:t>Generate Yul IR directly</a:t>
+            </a:r>
+          </a:p>
+          <a:p>
+            <a:endParaRPr lang="en-CH" dirty="0"/>
+          </a:p>
+          <a:p>
+            <a:r>
+              <a:rPr lang="en-CH" dirty="0"/>
+              <a:t>User Studies</a:t>
+            </a:r>
+          </a:p>
+        </p:txBody>
+      </p:sp>
+      <p:sp>
+        <p:nvSpPr>
+          <p:cNvPr id="7" name="Content Placeholder 6">
+            <a:extLst>
+              <a:ext uri="{FF2B5EF4-FFF2-40B4-BE49-F238E27FC236}">
+                <a16:creationId xmlns:a16="http://schemas.microsoft.com/office/drawing/2014/main" id="{60C5272F-270B-8F01-1127-F98F45E4463A}"/>
+              </a:ext>
+            </a:extLst>
+          </p:cNvPr>
+          <p:cNvSpPr>
+            <a:spLocks noGrp="1"/>
+          </p:cNvSpPr>
+          <p:nvPr>
+            <p:ph sz="half" idx="2"/>
+          </p:nvPr>
+        </p:nvSpPr>
+        <p:spPr>
+          <a:xfrm>
+            <a:off x="6172200" y="1825625"/>
+            <a:ext cx="5539740" cy="4351338"/>
+          </a:xfrm>
+        </p:spPr>
+        <p:txBody>
+          <a:bodyPr>
+            <a:normAutofit fontScale="92500" lnSpcReduction="10000"/>
+          </a:bodyPr>
+          <a:lstStyle/>
+          <a:p>
+            <a:r>
+              <a:rPr lang="en-CH" dirty="0"/>
+              <a:t>Adoption Road-Blocks:</a:t>
+            </a:r>
+          </a:p>
+          <a:p>
+            <a:pPr lvl="1"/>
+            <a:r>
+              <a:rPr lang="en-CH" dirty="0"/>
+              <a:t>EVM features:</a:t>
+            </a:r>
+          </a:p>
+          <a:p>
+            <a:pPr lvl="2"/>
+            <a:r>
+              <a:rPr lang="en-CH" dirty="0"/>
+              <a:t>events</a:t>
+            </a:r>
+          </a:p>
+          <a:p>
+            <a:pPr lvl="2"/>
+            <a:r>
+              <a:rPr lang="en-CH" dirty="0"/>
+              <a:t>special call types</a:t>
+            </a:r>
+          </a:p>
+          <a:p>
+            <a:pPr lvl="2"/>
+            <a:r>
+              <a:rPr lang="en-CH" dirty="0"/>
+              <a:t>programmatic contract creation</a:t>
+            </a:r>
+          </a:p>
+          <a:p>
+            <a:pPr lvl="1"/>
+            <a:r>
+              <a:rPr lang="en-CH" dirty="0"/>
+              <a:t>Improve effect syntax</a:t>
+            </a:r>
+          </a:p>
+          <a:p>
+            <a:pPr lvl="2"/>
+            <a:r>
+              <a:rPr lang="en-CH" dirty="0"/>
+              <a:t>rigorous handling of variable mutability</a:t>
+            </a:r>
+          </a:p>
+          <a:p>
+            <a:pPr lvl="1"/>
+            <a:r>
+              <a:rPr lang="en-CH" dirty="0"/>
+              <a:t>Auto-generate effect annotations</a:t>
+            </a:r>
+          </a:p>
+          <a:p>
+            <a:pPr lvl="2"/>
+            <a:r>
+              <a:rPr lang="en-CH" dirty="0"/>
+              <a:t>to reduce overhead</a:t>
+            </a:r>
+          </a:p>
+          <a:p>
+            <a:pPr lvl="1"/>
+            <a:r>
+              <a:rPr lang="en-CH" dirty="0"/>
+              <a:t>Memory-efficient ADTs</a:t>
+            </a:r>
+          </a:p>
+          <a:p>
+            <a:pPr lvl="1"/>
+            <a:r>
+              <a:rPr lang="en-CH" dirty="0"/>
+              <a:t>Modularity </a:t>
+            </a:r>
+            <a:r>
+              <a:rPr lang="en-CH" sz="1900" dirty="0"/>
+              <a:t>(libraries, contract composition)</a:t>
+            </a:r>
+            <a:endParaRPr lang="en-CH" dirty="0"/>
+          </a:p>
+          <a:p>
+            <a:pPr lvl="1"/>
+            <a:r>
+              <a:rPr lang="en-CH" dirty="0"/>
+              <a:t>Documentation</a:t>
+            </a:r>
+          </a:p>
+          <a:p>
+            <a:pPr lvl="1"/>
+            <a:r>
+              <a:rPr lang="en-CH" dirty="0"/>
+              <a:t>Tooling</a:t>
+            </a:r>
+          </a:p>
+          <a:p>
+            <a:pPr marL="0" indent="0">
+              <a:buNone/>
+            </a:pPr>
+            <a:endParaRPr lang="en-CH" dirty="0"/>
+          </a:p>
+        </p:txBody>
+      </p:sp>
+      <p:sp>
+        <p:nvSpPr>
+          <p:cNvPr id="4" name="Date Placeholder 3">
+            <a:extLst>
+              <a:ext uri="{FF2B5EF4-FFF2-40B4-BE49-F238E27FC236}">
+                <a16:creationId xmlns:a16="http://schemas.microsoft.com/office/drawing/2014/main" id="{0E7066AD-3315-1E5B-6CD1-9E23E8A10868}"/>
+              </a:ext>
+            </a:extLst>
+          </p:cNvPr>
+          <p:cNvSpPr>
+            <a:spLocks noGrp="1"/>
+          </p:cNvSpPr>
+          <p:nvPr>
+            <p:ph type="dt" sz="half" idx="10"/>
+          </p:nvPr>
+        </p:nvSpPr>
+        <p:spPr/>
+        <p:txBody>
+          <a:bodyPr/>
+          <a:lstStyle/>
+          <a:p>
+            <a:r>
+              <a:rPr lang="en-CH"/>
+              <a:t>30/03/2026</a:t>
+            </a:r>
+          </a:p>
+        </p:txBody>
+      </p:sp>
+      <p:sp>
+        <p:nvSpPr>
+          <p:cNvPr id="5" name="Footer Placeholder 4">
+            <a:extLst>
+              <a:ext uri="{FF2B5EF4-FFF2-40B4-BE49-F238E27FC236}">
+                <a16:creationId xmlns:a16="http://schemas.microsoft.com/office/drawing/2014/main" id="{57811F5F-A0C9-1FDB-1685-2E450D9ACE29}"/>
+              </a:ext>
+            </a:extLst>
+          </p:cNvPr>
+          <p:cNvSpPr>
+            <a:spLocks noGrp="1"/>
+          </p:cNvSpPr>
+          <p:nvPr>
+            <p:ph type="ftr" sz="quarter" idx="11"/>
+          </p:nvPr>
+        </p:nvSpPr>
+        <p:spPr/>
+        <p:txBody>
+          <a:bodyPr/>
+          <a:lstStyle/>
+          <a:p>
+            <a:endParaRPr lang="en-CH"/>
+          </a:p>
+        </p:txBody>
+      </p:sp>
+      <p:sp>
+        <p:nvSpPr>
+          <p:cNvPr id="6" name="Slide Number Placeholder 5">
+            <a:extLst>
+              <a:ext uri="{FF2B5EF4-FFF2-40B4-BE49-F238E27FC236}">
+                <a16:creationId xmlns:a16="http://schemas.microsoft.com/office/drawing/2014/main" id="{063370B4-B3A9-2302-C6D8-6448BE28949B}"/>
+              </a:ext>
+            </a:extLst>
+          </p:cNvPr>
+          <p:cNvSpPr>
+            <a:spLocks noGrp="1"/>
+          </p:cNvSpPr>
+          <p:nvPr>
+            <p:ph type="sldNum" sz="quarter" idx="12"/>
+          </p:nvPr>
+        </p:nvSpPr>
+        <p:spPr/>
+        <p:txBody>
+          <a:bodyPr/>
+          <a:lstStyle/>
+          <a:p>
+            <a:fld id="{1013ED95-016C-42D7-B550-5C99AA40E4D5}" type="slidenum">
+              <a:rPr lang="en-CH" smtClean="0"/>
+              <a:pPr/>
+              <a:t>43</a:t>
+            </a:fld>
+            <a:r>
+              <a:rPr lang="en-CH"/>
+              <a:t> / XX</a:t>
+            </a:r>
+            <a:endParaRPr lang="en-CH" dirty="0"/>
+          </a:p>
+        </p:txBody>
+      </p:sp>
+    </p:spTree>
+    <p:extLst>
+      <p:ext uri="{BB962C8B-B14F-4D97-AF65-F5344CB8AC3E}">
+        <p14:creationId xmlns:p14="http://schemas.microsoft.com/office/powerpoint/2010/main" val="3689462097"/>
+      </p:ext>
+    </p:extLst>
+  </p:cSld>
+  <p:clrMapOvr>
+    <a:masterClrMapping/>
+  </p:clrMapOvr>
+</p:sld>
+</file>
+
+<file path=ppt/slides/slide44.xml><?xml version="1.0" encoding="utf-8"?>
+<p:sld xmlns:a="http://schemas.openxmlformats.org/drawingml/2006/main" xmlns:r="http://schemas.openxmlformats.org/officeDocument/2006/relationships" xmlns:p="http://schemas.openxmlformats.org/presentationml/2006/main">
+  <p:cSld>
+    <p:spTree>
+      <p:nvGrpSpPr>
+        <p:cNvPr id="1" name=""/>
+        <p:cNvGrpSpPr/>
+        <p:nvPr/>
+      </p:nvGrpSpPr>
+      <p:grpSpPr>
+        <a:xfrm>
+          <a:off x="0" y="0"/>
+          <a:ext cx="0" cy="0"/>
+          <a:chOff x="0" y="0"/>
+          <a:chExt cx="0" cy="0"/>
+        </a:xfrm>
+      </p:grpSpPr>
+      <p:sp>
+        <p:nvSpPr>
+          <p:cNvPr id="2" name="Title 1">
+            <a:extLst>
+              <a:ext uri="{FF2B5EF4-FFF2-40B4-BE49-F238E27FC236}">
+                <a16:creationId xmlns:a16="http://schemas.microsoft.com/office/drawing/2014/main" id="{4E71206B-7346-72AF-4514-E2F5B0E0723A}"/>
+              </a:ext>
+            </a:extLst>
+          </p:cNvPr>
+          <p:cNvSpPr>
+            <a:spLocks noGrp="1"/>
+          </p:cNvSpPr>
+          <p:nvPr>
+            <p:ph type="title"/>
+          </p:nvPr>
+        </p:nvSpPr>
+        <p:spPr/>
+        <p:txBody>
+          <a:bodyPr/>
+          <a:lstStyle/>
+          <a:p>
+            <a:r>
+              <a:rPr lang="en-CH" dirty="0"/>
+              <a:t>Future Work: Tooling</a:t>
+            </a:r>
+          </a:p>
+        </p:txBody>
+      </p:sp>
+      <p:sp>
+        <p:nvSpPr>
+          <p:cNvPr id="3" name="Content Placeholder 2">
+            <a:extLst>
+              <a:ext uri="{FF2B5EF4-FFF2-40B4-BE49-F238E27FC236}">
+                <a16:creationId xmlns:a16="http://schemas.microsoft.com/office/drawing/2014/main" id="{85B406FC-A085-DB12-6D86-EB47A829326C}"/>
+              </a:ext>
+            </a:extLst>
+          </p:cNvPr>
+          <p:cNvSpPr>
+            <a:spLocks noGrp="1"/>
+          </p:cNvSpPr>
+          <p:nvPr>
+            <p:ph sz="half" idx="1"/>
+          </p:nvPr>
+        </p:nvSpPr>
+        <p:spPr/>
+        <p:txBody>
+          <a:bodyPr/>
+          <a:lstStyle/>
+          <a:p>
+            <a:r>
+              <a:rPr lang="en-CH" dirty="0"/>
+              <a:t>Interpreter:</a:t>
+            </a:r>
+          </a:p>
+          <a:p>
+            <a:pPr lvl="1"/>
+            <a:r>
+              <a:rPr lang="en-CH" dirty="0"/>
+              <a:t>Testing tools deploy mock blockchain, simulate full VM execution</a:t>
+            </a:r>
+          </a:p>
+          <a:p>
+            <a:pPr lvl="2">
+              <a:buFont typeface="Aptos" panose="020B0004020202020204" pitchFamily="34" charset="0"/>
+              <a:buChar char="→"/>
+            </a:pPr>
+            <a:r>
+              <a:rPr lang="en-CH" dirty="0"/>
+              <a:t>huge overhead, bad performance</a:t>
+            </a:r>
+          </a:p>
+          <a:p>
+            <a:pPr lvl="2">
+              <a:buFont typeface="Aptos" panose="020B0004020202020204" pitchFamily="34" charset="0"/>
+              <a:buChar char="→"/>
+            </a:pPr>
+            <a:r>
+              <a:rPr lang="en-CH" dirty="0"/>
+              <a:t>debugging tools are not great</a:t>
+            </a:r>
+          </a:p>
+          <a:p>
+            <a:pPr lvl="1"/>
+            <a:r>
+              <a:rPr lang="en-CH" dirty="0"/>
+              <a:t>Performance greatly impacts fuzz testing</a:t>
+            </a:r>
+          </a:p>
+          <a:p>
+            <a:pPr lvl="1"/>
+            <a:r>
+              <a:rPr lang="en-CH" dirty="0"/>
+              <a:t>Unit tests, step-by-step debugging for internal functions</a:t>
+            </a:r>
+          </a:p>
+        </p:txBody>
+      </p:sp>
+      <p:sp>
+        <p:nvSpPr>
+          <p:cNvPr id="4" name="Content Placeholder 3">
+            <a:extLst>
+              <a:ext uri="{FF2B5EF4-FFF2-40B4-BE49-F238E27FC236}">
+                <a16:creationId xmlns:a16="http://schemas.microsoft.com/office/drawing/2014/main" id="{F58841C8-1090-73BD-8612-E494B8001B15}"/>
+              </a:ext>
+            </a:extLst>
+          </p:cNvPr>
+          <p:cNvSpPr>
+            <a:spLocks noGrp="1"/>
+          </p:cNvSpPr>
+          <p:nvPr>
+            <p:ph sz="half" idx="2"/>
+          </p:nvPr>
+        </p:nvSpPr>
+        <p:spPr/>
+        <p:txBody>
+          <a:bodyPr/>
+          <a:lstStyle/>
+          <a:p>
+            <a:endParaRPr lang="en-CH"/>
+          </a:p>
+        </p:txBody>
+      </p:sp>
+      <p:sp>
+        <p:nvSpPr>
+          <p:cNvPr id="5" name="Date Placeholder 4">
+            <a:extLst>
+              <a:ext uri="{FF2B5EF4-FFF2-40B4-BE49-F238E27FC236}">
+                <a16:creationId xmlns:a16="http://schemas.microsoft.com/office/drawing/2014/main" id="{3EEC5EDA-4793-93D4-A820-F643F2D6FDF9}"/>
+              </a:ext>
+            </a:extLst>
+          </p:cNvPr>
+          <p:cNvSpPr>
+            <a:spLocks noGrp="1"/>
+          </p:cNvSpPr>
+          <p:nvPr>
+            <p:ph type="dt" sz="half" idx="10"/>
+          </p:nvPr>
+        </p:nvSpPr>
+        <p:spPr/>
+        <p:txBody>
+          <a:bodyPr/>
+          <a:lstStyle/>
+          <a:p>
+            <a:r>
+              <a:rPr lang="en-CH"/>
+              <a:t>30/03/2026</a:t>
+            </a:r>
+          </a:p>
+        </p:txBody>
+      </p:sp>
+      <p:sp>
+        <p:nvSpPr>
+          <p:cNvPr id="6" name="Footer Placeholder 5">
+            <a:extLst>
+              <a:ext uri="{FF2B5EF4-FFF2-40B4-BE49-F238E27FC236}">
+                <a16:creationId xmlns:a16="http://schemas.microsoft.com/office/drawing/2014/main" id="{DF860437-8E73-31B9-4ABA-36AA6E6E72AD}"/>
+              </a:ext>
+            </a:extLst>
+          </p:cNvPr>
+          <p:cNvSpPr>
+            <a:spLocks noGrp="1"/>
+          </p:cNvSpPr>
+          <p:nvPr>
+            <p:ph type="ftr" sz="quarter" idx="11"/>
+          </p:nvPr>
+        </p:nvSpPr>
+        <p:spPr/>
+        <p:txBody>
+          <a:bodyPr/>
+          <a:lstStyle/>
+          <a:p>
+            <a:endParaRPr lang="en-CH"/>
+          </a:p>
+        </p:txBody>
+      </p:sp>
+      <p:sp>
+        <p:nvSpPr>
+          <p:cNvPr id="7" name="Slide Number Placeholder 6">
+            <a:extLst>
+              <a:ext uri="{FF2B5EF4-FFF2-40B4-BE49-F238E27FC236}">
+                <a16:creationId xmlns:a16="http://schemas.microsoft.com/office/drawing/2014/main" id="{D8C406F5-71EE-FBE8-90CF-182F580B400A}"/>
+              </a:ext>
+            </a:extLst>
+          </p:cNvPr>
+          <p:cNvSpPr>
+            <a:spLocks noGrp="1"/>
+          </p:cNvSpPr>
+          <p:nvPr>
+            <p:ph type="sldNum" sz="quarter" idx="12"/>
+          </p:nvPr>
+        </p:nvSpPr>
+        <p:spPr/>
+        <p:txBody>
+          <a:bodyPr/>
+          <a:lstStyle/>
+          <a:p>
+            <a:fld id="{1013ED95-016C-42D7-B550-5C99AA40E4D5}" type="slidenum">
+              <a:rPr lang="en-CH" smtClean="0"/>
+              <a:pPr/>
+              <a:t>44</a:t>
+            </a:fld>
+            <a:r>
+              <a:rPr lang="en-CH"/>
+              <a:t> / XX</a:t>
+            </a:r>
+            <a:endParaRPr lang="en-CH" dirty="0"/>
+          </a:p>
+        </p:txBody>
+      </p:sp>
+    </p:spTree>
+    <p:extLst>
+      <p:ext uri="{BB962C8B-B14F-4D97-AF65-F5344CB8AC3E}">
+        <p14:creationId xmlns:p14="http://schemas.microsoft.com/office/powerpoint/2010/main" val="101902366"/>
+      </p:ext>
+    </p:extLst>
+  </p:cSld>
+  <p:clrMapOvr>
+    <a:masterClrMapping/>
+  </p:clrMapOvr>
+</p:sld>
+</file>
+
+<file path=ppt/slides/slide45.xml><?xml version="1.0" encoding="utf-8"?>
+<p:sld xmlns:a="http://schemas.openxmlformats.org/drawingml/2006/main" xmlns:r="http://schemas.openxmlformats.org/officeDocument/2006/relationships" xmlns:p="http://schemas.openxmlformats.org/presentationml/2006/main">
+  <p:cSld>
+    <p:spTree>
+      <p:nvGrpSpPr>
+        <p:cNvPr id="1" name="">
+          <a:extLst>
+            <a:ext uri="{FF2B5EF4-FFF2-40B4-BE49-F238E27FC236}">
+              <a16:creationId xmlns:a16="http://schemas.microsoft.com/office/drawing/2014/main" id="{657A24B2-0BCB-536E-3C94-3974987D0DFD}"/>
+            </a:ext>
+          </a:extLst>
+        </p:cNvPr>
+        <p:cNvGrpSpPr/>
+        <p:nvPr/>
+      </p:nvGrpSpPr>
+      <p:grpSpPr>
+        <a:xfrm>
+          <a:off x="0" y="0"/>
+          <a:ext cx="0" cy="0"/>
+          <a:chOff x="0" y="0"/>
+          <a:chExt cx="0" cy="0"/>
+        </a:xfrm>
+      </p:grpSpPr>
+      <p:sp>
+        <p:nvSpPr>
+          <p:cNvPr id="2" name="Title 1">
+            <a:extLst>
+              <a:ext uri="{FF2B5EF4-FFF2-40B4-BE49-F238E27FC236}">
+                <a16:creationId xmlns:a16="http://schemas.microsoft.com/office/drawing/2014/main" id="{8EA1BC9C-2DBC-4906-EEF7-0EAE2FD8F8FE}"/>
+              </a:ext>
+            </a:extLst>
+          </p:cNvPr>
+          <p:cNvSpPr>
+            <a:spLocks noGrp="1"/>
+          </p:cNvSpPr>
+          <p:nvPr>
+            <p:ph type="title"/>
+          </p:nvPr>
+        </p:nvSpPr>
+        <p:spPr/>
+        <p:txBody>
+          <a:bodyPr/>
+          <a:lstStyle/>
+          <a:p>
+            <a:r>
+              <a:rPr lang="en-CH" dirty="0"/>
+              <a:t>Q&amp;A</a:t>
+            </a:r>
+          </a:p>
+        </p:txBody>
+      </p:sp>
+      <p:sp>
+        <p:nvSpPr>
+          <p:cNvPr id="3" name="Content Placeholder 2">
+            <a:extLst>
+              <a:ext uri="{FF2B5EF4-FFF2-40B4-BE49-F238E27FC236}">
+                <a16:creationId xmlns:a16="http://schemas.microsoft.com/office/drawing/2014/main" id="{00564DF2-C902-80E3-AA11-7B92E60D3461}"/>
+              </a:ext>
+            </a:extLst>
+          </p:cNvPr>
+          <p:cNvSpPr>
+            <a:spLocks noGrp="1"/>
+          </p:cNvSpPr>
+          <p:nvPr>
+            <p:ph idx="1"/>
+          </p:nvPr>
+        </p:nvSpPr>
+        <p:spPr/>
+        <p:txBody>
+          <a:bodyPr/>
+          <a:lstStyle/>
+          <a:p>
+            <a:r>
+              <a:rPr lang="en-CH" dirty="0"/>
+              <a:t>A clean slide thanking the audience and opening the floor for questions.</a:t>
+            </a:r>
+          </a:p>
+        </p:txBody>
+      </p:sp>
+      <p:sp>
+        <p:nvSpPr>
+          <p:cNvPr id="10" name="Date Placeholder 9">
+            <a:extLst>
+              <a:ext uri="{FF2B5EF4-FFF2-40B4-BE49-F238E27FC236}">
+                <a16:creationId xmlns:a16="http://schemas.microsoft.com/office/drawing/2014/main" id="{CFDCC38E-1A4D-CEFF-E68B-F5C34D78885B}"/>
+              </a:ext>
+            </a:extLst>
+          </p:cNvPr>
+          <p:cNvSpPr>
+            <a:spLocks noGrp="1"/>
+          </p:cNvSpPr>
+          <p:nvPr>
+            <p:ph type="dt" sz="half" idx="10"/>
+          </p:nvPr>
+        </p:nvSpPr>
+        <p:spPr/>
+        <p:txBody>
+          <a:bodyPr/>
+          <a:lstStyle/>
+          <a:p>
+            <a:r>
+              <a:rPr lang="en-CH"/>
+              <a:t>30/03/2026</a:t>
+            </a:r>
+          </a:p>
+        </p:txBody>
+      </p:sp>
+      <p:sp>
+        <p:nvSpPr>
+          <p:cNvPr id="11" name="Footer Placeholder 10">
+            <a:extLst>
+              <a:ext uri="{FF2B5EF4-FFF2-40B4-BE49-F238E27FC236}">
+                <a16:creationId xmlns:a16="http://schemas.microsoft.com/office/drawing/2014/main" id="{C39B10B4-FBCE-956E-8150-5A75B99DD836}"/>
+              </a:ext>
+            </a:extLst>
+          </p:cNvPr>
+          <p:cNvSpPr>
+            <a:spLocks noGrp="1"/>
+          </p:cNvSpPr>
+          <p:nvPr>
+            <p:ph type="ftr" sz="quarter" idx="11"/>
+          </p:nvPr>
+        </p:nvSpPr>
+        <p:spPr/>
+        <p:txBody>
+          <a:bodyPr/>
+          <a:lstStyle/>
+          <a:p>
+            <a:endParaRPr lang="en-CH"/>
+          </a:p>
+        </p:txBody>
+      </p:sp>
+      <p:sp>
+        <p:nvSpPr>
+          <p:cNvPr id="12" name="Slide Number Placeholder 11">
+            <a:extLst>
+              <a:ext uri="{FF2B5EF4-FFF2-40B4-BE49-F238E27FC236}">
+                <a16:creationId xmlns:a16="http://schemas.microsoft.com/office/drawing/2014/main" id="{FFFFC763-946A-9599-2042-7EA94017D011}"/>
+              </a:ext>
+            </a:extLst>
+          </p:cNvPr>
+          <p:cNvSpPr>
+            <a:spLocks noGrp="1"/>
+          </p:cNvSpPr>
+          <p:nvPr>
+            <p:ph type="sldNum" sz="quarter" idx="12"/>
+          </p:nvPr>
+        </p:nvSpPr>
+        <p:spPr/>
+        <p:txBody>
+          <a:bodyPr/>
+          <a:lstStyle/>
+          <a:p>
+            <a:fld id="{1013ED95-016C-42D7-B550-5C99AA40E4D5}" type="slidenum">
+              <a:rPr lang="en-CH" smtClean="0"/>
+              <a:pPr/>
+              <a:t>45</a:t>
+            </a:fld>
+            <a:r>
+              <a:rPr lang="en-CH"/>
+              <a:t> / XX</a:t>
+            </a:r>
+            <a:endParaRPr lang="en-CH" dirty="0"/>
+          </a:p>
+        </p:txBody>
+      </p:sp>
+    </p:spTree>
+    <p:extLst>
+      <p:ext uri="{BB962C8B-B14F-4D97-AF65-F5344CB8AC3E}">
+        <p14:creationId xmlns:p14="http://schemas.microsoft.com/office/powerpoint/2010/main" val="4071451834"/>
+      </p:ext>
+    </p:extLst>
+  </p:cSld>
+  <p:clrMapOvr>
+    <a:masterClrMapping/>
+  </p:clrMapOvr>
+</p:sld>
+</file>
+
+<file path=ppt/slides/slide46.xml><?xml version="1.0" encoding="utf-8"?>
+<p:sld xmlns:a="http://schemas.openxmlformats.org/drawingml/2006/main" xmlns:r="http://schemas.openxmlformats.org/officeDocument/2006/relationships" xmlns:p="http://schemas.openxmlformats.org/presentationml/2006/main">
+  <p:cSld>
+    <p:spTree>
+      <p:nvGrpSpPr>
         <p:cNvPr id="1" name="">
           <a:extLst>
             <a:ext uri="{FF2B5EF4-FFF2-40B4-BE49-F238E27FC236}">
@@ -37983,7 +43097,7 @@
             <a:fld id="{1013ED95-016C-42D7-B550-5C99AA40E4D5}" type="slidenum">
               <a:rPr lang="en-CH" smtClean="0"/>
               <a:pPr/>
-              <a:t>40</a:t>
+              <a:t>46</a:t>
             </a:fld>
             <a:r>
               <a:rPr lang="en-CH"/>
@@ -38006,7 +43120,7 @@
 </p:sld>
 </file>
 
-<file path=ppt/slides/slide41.xml><?xml version="1.0" encoding="utf-8"?>
+<file path=ppt/slides/slide47.xml><?xml version="1.0" encoding="utf-8"?>
 <p:sld xmlns:a="http://schemas.openxmlformats.org/drawingml/2006/main" xmlns:r="http://schemas.openxmlformats.org/officeDocument/2006/relationships" xmlns:p="http://schemas.openxmlformats.org/presentationml/2006/main">
   <p:cSld>
     <p:spTree>
@@ -39298,7 +44412,7 @@
             <a:fld id="{1013ED95-016C-42D7-B550-5C99AA40E4D5}" type="slidenum">
               <a:rPr lang="en-CH" smtClean="0"/>
               <a:pPr/>
-              <a:t>41</a:t>
+              <a:t>47</a:t>
             </a:fld>
             <a:r>
               <a:rPr lang="en-CH"/>
@@ -39321,7 +44435,7 @@
 </p:sld>
 </file>
 
-<file path=ppt/slides/slide42.xml><?xml version="1.0" encoding="utf-8"?>
+<file path=ppt/slides/slide48.xml><?xml version="1.0" encoding="utf-8"?>
 <p:sld xmlns:a="http://schemas.openxmlformats.org/drawingml/2006/main" xmlns:r="http://schemas.openxmlformats.org/officeDocument/2006/relationships" xmlns:p="http://schemas.openxmlformats.org/presentationml/2006/main">
   <p:cSld>
     <p:spTree>
@@ -39471,7 +44585,7 @@
             <a:fld id="{1013ED95-016C-42D7-B550-5C99AA40E4D5}" type="slidenum">
               <a:rPr lang="en-CH" smtClean="0"/>
               <a:pPr/>
-              <a:t>42</a:t>
+              <a:t>48</a:t>
             </a:fld>
             <a:r>
               <a:rPr lang="en-CH"/>
@@ -39494,7 +44608,7 @@
 </p:sld>
 </file>
 
-<file path=ppt/slides/slide43.xml><?xml version="1.0" encoding="utf-8"?>
+<file path=ppt/slides/slide49.xml><?xml version="1.0" encoding="utf-8"?>
 <p:sld xmlns:a="http://schemas.openxmlformats.org/drawingml/2006/main" xmlns:r="http://schemas.openxmlformats.org/officeDocument/2006/relationships" xmlns:p="http://schemas.openxmlformats.org/presentationml/2006/main">
   <p:cSld>
     <p:spTree>
@@ -39847,7 +44961,7 @@
             <a:fld id="{1013ED95-016C-42D7-B550-5C99AA40E4D5}" type="slidenum">
               <a:rPr lang="en-CH" smtClean="0"/>
               <a:pPr/>
-              <a:t>43</a:t>
+              <a:t>49</a:t>
             </a:fld>
             <a:r>
               <a:rPr lang="en-CH"/>
@@ -39913,7 +45027,238 @@
 </p:sld>
 </file>
 
-<file path=ppt/slides/slide44.xml><?xml version="1.0" encoding="utf-8"?>
+<file path=ppt/slides/slide5.xml><?xml version="1.0" encoding="utf-8"?>
+<p:sld xmlns:a="http://schemas.openxmlformats.org/drawingml/2006/main" xmlns:r="http://schemas.openxmlformats.org/officeDocument/2006/relationships" xmlns:p="http://schemas.openxmlformats.org/presentationml/2006/main">
+  <p:cSld>
+    <p:spTree>
+      <p:nvGrpSpPr>
+        <p:cNvPr id="1" name=""/>
+        <p:cNvGrpSpPr/>
+        <p:nvPr/>
+      </p:nvGrpSpPr>
+      <p:grpSpPr>
+        <a:xfrm>
+          <a:off x="0" y="0"/>
+          <a:ext cx="0" cy="0"/>
+          <a:chOff x="0" y="0"/>
+          <a:chExt cx="0" cy="0"/>
+        </a:xfrm>
+      </p:grpSpPr>
+      <p:sp>
+        <p:nvSpPr>
+          <p:cNvPr id="2" name="Title 1">
+            <a:extLst>
+              <a:ext uri="{FF2B5EF4-FFF2-40B4-BE49-F238E27FC236}">
+                <a16:creationId xmlns:a16="http://schemas.microsoft.com/office/drawing/2014/main" id="{92FF9A32-A8EA-9746-7C0E-86807228BEDC}"/>
+              </a:ext>
+            </a:extLst>
+          </p:cNvPr>
+          <p:cNvSpPr>
+            <a:spLocks noGrp="1"/>
+          </p:cNvSpPr>
+          <p:nvPr>
+            <p:ph type="title"/>
+          </p:nvPr>
+        </p:nvSpPr>
+        <p:spPr/>
+        <p:txBody>
+          <a:bodyPr/>
+          <a:lstStyle/>
+          <a:p>
+            <a:r>
+              <a:rPr lang="en-CH" dirty="0"/>
+              <a:t>Smart Contract</a:t>
+            </a:r>
+          </a:p>
+        </p:txBody>
+      </p:sp>
+      <p:sp>
+        <p:nvSpPr>
+          <p:cNvPr id="3" name="Content Placeholder 2">
+            <a:extLst>
+              <a:ext uri="{FF2B5EF4-FFF2-40B4-BE49-F238E27FC236}">
+                <a16:creationId xmlns:a16="http://schemas.microsoft.com/office/drawing/2014/main" id="{6814A6EB-51BF-8ADC-967E-230DF8EAF4FD}"/>
+              </a:ext>
+            </a:extLst>
+          </p:cNvPr>
+          <p:cNvSpPr>
+            <a:spLocks noGrp="1"/>
+          </p:cNvSpPr>
+          <p:nvPr>
+            <p:ph idx="1"/>
+          </p:nvPr>
+        </p:nvSpPr>
+        <p:spPr/>
+        <p:txBody>
+          <a:bodyPr/>
+          <a:lstStyle/>
+          <a:p>
+            <a:r>
+              <a:rPr lang="en-CH" dirty="0"/>
+              <a:t>A “program” that runs on the blockchain</a:t>
+            </a:r>
+          </a:p>
+          <a:p>
+            <a:r>
+              <a:rPr lang="en-CH" dirty="0"/>
+              <a:t>Consists of:</a:t>
+            </a:r>
+          </a:p>
+          <a:p>
+            <a:pPr lvl="1"/>
+            <a:r>
+              <a:rPr lang="en-CH" dirty="0"/>
+              <a:t>Address (20-byte unique identifier)</a:t>
+            </a:r>
+          </a:p>
+          <a:p>
+            <a:pPr lvl="1"/>
+            <a:r>
+              <a:rPr lang="en-CH" dirty="0"/>
+              <a:t>Balance (of the native ETH currency)</a:t>
+            </a:r>
+          </a:p>
+          <a:p>
+            <a:pPr lvl="1"/>
+            <a:r>
+              <a:rPr lang="en-CH" dirty="0"/>
+              <a:t>Bytecode (max. 24’576 bytes)</a:t>
+            </a:r>
+          </a:p>
+          <a:p>
+            <a:pPr lvl="1"/>
+            <a:r>
+              <a:rPr lang="en-CH" dirty="0"/>
+              <a:t>Storage (uint256 </a:t>
+            </a:r>
+            <a:r>
+              <a:rPr lang="en-CH" dirty="0">
+                <a:latin typeface="Calibri" panose="020F0502020204030204" pitchFamily="34" charset="0"/>
+                <a:cs typeface="Calibri" panose="020F0502020204030204" pitchFamily="34" charset="0"/>
+              </a:rPr>
+              <a:t>→</a:t>
+            </a:r>
+            <a:r>
+              <a:rPr lang="en-CH" dirty="0"/>
+              <a:t> uint256 hash map)</a:t>
+            </a:r>
+          </a:p>
+          <a:p>
+            <a:endParaRPr lang="en-CH" dirty="0"/>
+          </a:p>
+          <a:p>
+            <a:r>
+              <a:rPr lang="en-CH" dirty="0"/>
+              <a:t>Executed by the Ethereum Virtual Machine</a:t>
+            </a:r>
+          </a:p>
+          <a:p>
+            <a:pPr lvl="1"/>
+            <a:endParaRPr lang="en-CH" dirty="0"/>
+          </a:p>
+        </p:txBody>
+      </p:sp>
+      <p:sp>
+        <p:nvSpPr>
+          <p:cNvPr id="4" name="Date Placeholder 3">
+            <a:extLst>
+              <a:ext uri="{FF2B5EF4-FFF2-40B4-BE49-F238E27FC236}">
+                <a16:creationId xmlns:a16="http://schemas.microsoft.com/office/drawing/2014/main" id="{DEA632C9-2054-2726-9B90-8F6B59A2D639}"/>
+              </a:ext>
+            </a:extLst>
+          </p:cNvPr>
+          <p:cNvSpPr>
+            <a:spLocks noGrp="1"/>
+          </p:cNvSpPr>
+          <p:nvPr>
+            <p:ph type="dt" sz="half" idx="10"/>
+          </p:nvPr>
+        </p:nvSpPr>
+        <p:spPr/>
+        <p:txBody>
+          <a:bodyPr/>
+          <a:lstStyle/>
+          <a:p>
+            <a:r>
+              <a:rPr lang="en-CH"/>
+              <a:t>30/03/2026</a:t>
+            </a:r>
+          </a:p>
+        </p:txBody>
+      </p:sp>
+      <p:sp>
+        <p:nvSpPr>
+          <p:cNvPr id="5" name="Footer Placeholder 4">
+            <a:extLst>
+              <a:ext uri="{FF2B5EF4-FFF2-40B4-BE49-F238E27FC236}">
+                <a16:creationId xmlns:a16="http://schemas.microsoft.com/office/drawing/2014/main" id="{947844DF-6BF6-B034-AB0D-BBFC998F1A91}"/>
+              </a:ext>
+            </a:extLst>
+          </p:cNvPr>
+          <p:cNvSpPr>
+            <a:spLocks noGrp="1"/>
+          </p:cNvSpPr>
+          <p:nvPr>
+            <p:ph type="ftr" sz="quarter" idx="11"/>
+          </p:nvPr>
+        </p:nvSpPr>
+        <p:spPr/>
+        <p:txBody>
+          <a:bodyPr/>
+          <a:lstStyle/>
+          <a:p>
+            <a:endParaRPr lang="en-CH"/>
+          </a:p>
+        </p:txBody>
+      </p:sp>
+      <p:sp>
+        <p:nvSpPr>
+          <p:cNvPr id="6" name="Slide Number Placeholder 5">
+            <a:extLst>
+              <a:ext uri="{FF2B5EF4-FFF2-40B4-BE49-F238E27FC236}">
+                <a16:creationId xmlns:a16="http://schemas.microsoft.com/office/drawing/2014/main" id="{D2E860A5-75AF-C811-25F7-D9545A9B9437}"/>
+              </a:ext>
+            </a:extLst>
+          </p:cNvPr>
+          <p:cNvSpPr>
+            <a:spLocks noGrp="1"/>
+          </p:cNvSpPr>
+          <p:nvPr>
+            <p:ph type="sldNum" sz="quarter" idx="12"/>
+          </p:nvPr>
+        </p:nvSpPr>
+        <p:spPr/>
+        <p:txBody>
+          <a:bodyPr/>
+          <a:lstStyle/>
+          <a:p>
+            <a:fld id="{1013ED95-016C-42D7-B550-5C99AA40E4D5}" type="slidenum">
+              <a:rPr lang="en-CH" smtClean="0"/>
+              <a:pPr/>
+              <a:t>5</a:t>
+            </a:fld>
+            <a:r>
+              <a:rPr lang="en-CH"/>
+              <a:t> / XX</a:t>
+            </a:r>
+            <a:endParaRPr lang="en-CH" dirty="0"/>
+          </a:p>
+        </p:txBody>
+      </p:sp>
+    </p:spTree>
+    <p:extLst>
+      <p:ext uri="{BB962C8B-B14F-4D97-AF65-F5344CB8AC3E}">
+        <p14:creationId xmlns:p14="http://schemas.microsoft.com/office/powerpoint/2010/main" val="2220935303"/>
+      </p:ext>
+    </p:extLst>
+  </p:cSld>
+  <p:clrMapOvr>
+    <a:masterClrMapping/>
+  </p:clrMapOvr>
+</p:sld>
+</file>
+
+<file path=ppt/slides/slide50.xml><?xml version="1.0" encoding="utf-8"?>
 <p:sld xmlns:a="http://schemas.openxmlformats.org/drawingml/2006/main" xmlns:r="http://schemas.openxmlformats.org/officeDocument/2006/relationships" xmlns:p="http://schemas.openxmlformats.org/presentationml/2006/main">
   <p:cSld>
     <p:spTree>
@@ -40267,7 +45612,7 @@
             <a:fld id="{1013ED95-016C-42D7-B550-5C99AA40E4D5}" type="slidenum">
               <a:rPr lang="en-CH" smtClean="0"/>
               <a:pPr/>
-              <a:t>44</a:t>
+              <a:t>50</a:t>
             </a:fld>
             <a:r>
               <a:rPr lang="en-CH"/>
@@ -40358,7 +45703,7 @@
 </p:sld>
 </file>
 
-<file path=ppt/slides/slide45.xml><?xml version="1.0" encoding="utf-8"?>
+<file path=ppt/slides/slide51.xml><?xml version="1.0" encoding="utf-8"?>
 <p:sld xmlns:a="http://schemas.openxmlformats.org/drawingml/2006/main" xmlns:r="http://schemas.openxmlformats.org/officeDocument/2006/relationships" xmlns:p="http://schemas.openxmlformats.org/presentationml/2006/main">
   <p:cSld>
     <p:spTree>
@@ -40889,7 +46234,7 @@
             <a:fld id="{1013ED95-016C-42D7-B550-5C99AA40E4D5}" type="slidenum">
               <a:rPr lang="en-CH" smtClean="0"/>
               <a:pPr/>
-              <a:t>45</a:t>
+              <a:t>51</a:t>
             </a:fld>
             <a:r>
               <a:rPr lang="en-CH"/>
@@ -40998,7 +46343,7 @@
 </p:sld>
 </file>
 
-<file path=ppt/slides/slide46.xml><?xml version="1.0" encoding="utf-8"?>
+<file path=ppt/slides/slide52.xml><?xml version="1.0" encoding="utf-8"?>
 <p:sld xmlns:a="http://schemas.openxmlformats.org/drawingml/2006/main" xmlns:r="http://schemas.openxmlformats.org/officeDocument/2006/relationships" xmlns:p="http://schemas.openxmlformats.org/presentationml/2006/main">
   <p:cSld>
     <p:spTree>
@@ -41435,7 +46780,7 @@
             <a:fld id="{1013ED95-016C-42D7-B550-5C99AA40E4D5}" type="slidenum">
               <a:rPr lang="en-CH" smtClean="0"/>
               <a:pPr/>
-              <a:t>46</a:t>
+              <a:t>52</a:t>
             </a:fld>
             <a:r>
               <a:rPr lang="en-CH"/>
@@ -41501,237 +46846,6 @@
 </p:sld>
 </file>
 
-<file path=ppt/slides/slide5.xml><?xml version="1.0" encoding="utf-8"?>
-<p:sld xmlns:a="http://schemas.openxmlformats.org/drawingml/2006/main" xmlns:r="http://schemas.openxmlformats.org/officeDocument/2006/relationships" xmlns:p="http://schemas.openxmlformats.org/presentationml/2006/main">
-  <p:cSld>
-    <p:spTree>
-      <p:nvGrpSpPr>
-        <p:cNvPr id="1" name=""/>
-        <p:cNvGrpSpPr/>
-        <p:nvPr/>
-      </p:nvGrpSpPr>
-      <p:grpSpPr>
-        <a:xfrm>
-          <a:off x="0" y="0"/>
-          <a:ext cx="0" cy="0"/>
-          <a:chOff x="0" y="0"/>
-          <a:chExt cx="0" cy="0"/>
-        </a:xfrm>
-      </p:grpSpPr>
-      <p:sp>
-        <p:nvSpPr>
-          <p:cNvPr id="2" name="Title 1">
-            <a:extLst>
-              <a:ext uri="{FF2B5EF4-FFF2-40B4-BE49-F238E27FC236}">
-                <a16:creationId xmlns:a16="http://schemas.microsoft.com/office/drawing/2014/main" id="{92FF9A32-A8EA-9746-7C0E-86807228BEDC}"/>
-              </a:ext>
-            </a:extLst>
-          </p:cNvPr>
-          <p:cNvSpPr>
-            <a:spLocks noGrp="1"/>
-          </p:cNvSpPr>
-          <p:nvPr>
-            <p:ph type="title"/>
-          </p:nvPr>
-        </p:nvSpPr>
-        <p:spPr/>
-        <p:txBody>
-          <a:bodyPr/>
-          <a:lstStyle/>
-          <a:p>
-            <a:r>
-              <a:rPr lang="en-CH" dirty="0"/>
-              <a:t>Smart Contract</a:t>
-            </a:r>
-          </a:p>
-        </p:txBody>
-      </p:sp>
-      <p:sp>
-        <p:nvSpPr>
-          <p:cNvPr id="3" name="Content Placeholder 2">
-            <a:extLst>
-              <a:ext uri="{FF2B5EF4-FFF2-40B4-BE49-F238E27FC236}">
-                <a16:creationId xmlns:a16="http://schemas.microsoft.com/office/drawing/2014/main" id="{6814A6EB-51BF-8ADC-967E-230DF8EAF4FD}"/>
-              </a:ext>
-            </a:extLst>
-          </p:cNvPr>
-          <p:cNvSpPr>
-            <a:spLocks noGrp="1"/>
-          </p:cNvSpPr>
-          <p:nvPr>
-            <p:ph idx="1"/>
-          </p:nvPr>
-        </p:nvSpPr>
-        <p:spPr/>
-        <p:txBody>
-          <a:bodyPr/>
-          <a:lstStyle/>
-          <a:p>
-            <a:r>
-              <a:rPr lang="en-CH" dirty="0"/>
-              <a:t>A “program” that runs on the blockchain</a:t>
-            </a:r>
-          </a:p>
-          <a:p>
-            <a:r>
-              <a:rPr lang="en-CH" dirty="0"/>
-              <a:t>Consists of:</a:t>
-            </a:r>
-          </a:p>
-          <a:p>
-            <a:pPr lvl="1"/>
-            <a:r>
-              <a:rPr lang="en-CH" dirty="0"/>
-              <a:t>Address (20-byte unique identifier)</a:t>
-            </a:r>
-          </a:p>
-          <a:p>
-            <a:pPr lvl="1"/>
-            <a:r>
-              <a:rPr lang="en-CH" dirty="0"/>
-              <a:t>Balance (of the native ETH currency)</a:t>
-            </a:r>
-          </a:p>
-          <a:p>
-            <a:pPr lvl="1"/>
-            <a:r>
-              <a:rPr lang="en-CH" dirty="0"/>
-              <a:t>Bytecode (max. 24’576 bytes)</a:t>
-            </a:r>
-          </a:p>
-          <a:p>
-            <a:pPr lvl="1"/>
-            <a:r>
-              <a:rPr lang="en-CH" dirty="0"/>
-              <a:t>Storage (uint256 </a:t>
-            </a:r>
-            <a:r>
-              <a:rPr lang="en-CH" dirty="0">
-                <a:latin typeface="Calibri" panose="020F0502020204030204" pitchFamily="34" charset="0"/>
-                <a:cs typeface="Calibri" panose="020F0502020204030204" pitchFamily="34" charset="0"/>
-              </a:rPr>
-              <a:t>→</a:t>
-            </a:r>
-            <a:r>
-              <a:rPr lang="en-CH" dirty="0"/>
-              <a:t> uint256 hash map)</a:t>
-            </a:r>
-          </a:p>
-          <a:p>
-            <a:endParaRPr lang="en-CH" dirty="0"/>
-          </a:p>
-          <a:p>
-            <a:r>
-              <a:rPr lang="en-CH" dirty="0"/>
-              <a:t>Executed by the Ethereum Virtual Machine</a:t>
-            </a:r>
-          </a:p>
-          <a:p>
-            <a:pPr lvl="1"/>
-            <a:endParaRPr lang="en-CH" dirty="0"/>
-          </a:p>
-        </p:txBody>
-      </p:sp>
-      <p:sp>
-        <p:nvSpPr>
-          <p:cNvPr id="4" name="Date Placeholder 3">
-            <a:extLst>
-              <a:ext uri="{FF2B5EF4-FFF2-40B4-BE49-F238E27FC236}">
-                <a16:creationId xmlns:a16="http://schemas.microsoft.com/office/drawing/2014/main" id="{DEA632C9-2054-2726-9B90-8F6B59A2D639}"/>
-              </a:ext>
-            </a:extLst>
-          </p:cNvPr>
-          <p:cNvSpPr>
-            <a:spLocks noGrp="1"/>
-          </p:cNvSpPr>
-          <p:nvPr>
-            <p:ph type="dt" sz="half" idx="10"/>
-          </p:nvPr>
-        </p:nvSpPr>
-        <p:spPr/>
-        <p:txBody>
-          <a:bodyPr/>
-          <a:lstStyle/>
-          <a:p>
-            <a:r>
-              <a:rPr lang="en-CH"/>
-              <a:t>30/03/2026</a:t>
-            </a:r>
-          </a:p>
-        </p:txBody>
-      </p:sp>
-      <p:sp>
-        <p:nvSpPr>
-          <p:cNvPr id="5" name="Footer Placeholder 4">
-            <a:extLst>
-              <a:ext uri="{FF2B5EF4-FFF2-40B4-BE49-F238E27FC236}">
-                <a16:creationId xmlns:a16="http://schemas.microsoft.com/office/drawing/2014/main" id="{947844DF-6BF6-B034-AB0D-BBFC998F1A91}"/>
-              </a:ext>
-            </a:extLst>
-          </p:cNvPr>
-          <p:cNvSpPr>
-            <a:spLocks noGrp="1"/>
-          </p:cNvSpPr>
-          <p:nvPr>
-            <p:ph type="ftr" sz="quarter" idx="11"/>
-          </p:nvPr>
-        </p:nvSpPr>
-        <p:spPr/>
-        <p:txBody>
-          <a:bodyPr/>
-          <a:lstStyle/>
-          <a:p>
-            <a:endParaRPr lang="en-CH"/>
-          </a:p>
-        </p:txBody>
-      </p:sp>
-      <p:sp>
-        <p:nvSpPr>
-          <p:cNvPr id="6" name="Slide Number Placeholder 5">
-            <a:extLst>
-              <a:ext uri="{FF2B5EF4-FFF2-40B4-BE49-F238E27FC236}">
-                <a16:creationId xmlns:a16="http://schemas.microsoft.com/office/drawing/2014/main" id="{D2E860A5-75AF-C811-25F7-D9545A9B9437}"/>
-              </a:ext>
-            </a:extLst>
-          </p:cNvPr>
-          <p:cNvSpPr>
-            <a:spLocks noGrp="1"/>
-          </p:cNvSpPr>
-          <p:nvPr>
-            <p:ph type="sldNum" sz="quarter" idx="12"/>
-          </p:nvPr>
-        </p:nvSpPr>
-        <p:spPr/>
-        <p:txBody>
-          <a:bodyPr/>
-          <a:lstStyle/>
-          <a:p>
-            <a:fld id="{1013ED95-016C-42D7-B550-5C99AA40E4D5}" type="slidenum">
-              <a:rPr lang="en-CH" smtClean="0"/>
-              <a:pPr/>
-              <a:t>5</a:t>
-            </a:fld>
-            <a:r>
-              <a:rPr lang="en-CH"/>
-              <a:t> / XX</a:t>
-            </a:r>
-            <a:endParaRPr lang="en-CH" dirty="0"/>
-          </a:p>
-        </p:txBody>
-      </p:sp>
-    </p:spTree>
-    <p:extLst>
-      <p:ext uri="{BB962C8B-B14F-4D97-AF65-F5344CB8AC3E}">
-        <p14:creationId xmlns:p14="http://schemas.microsoft.com/office/powerpoint/2010/main" val="2220935303"/>
-      </p:ext>
-    </p:extLst>
-  </p:cSld>
-  <p:clrMapOvr>
-    <a:masterClrMapping/>
-  </p:clrMapOvr>
-</p:sld>
-</file>
-
 <file path=ppt/slides/slide6.xml><?xml version="1.0" encoding="utf-8"?>
 <p:sld xmlns:a="http://schemas.openxmlformats.org/drawingml/2006/main" xmlns:r="http://schemas.openxmlformats.org/officeDocument/2006/relationships" xmlns:p="http://schemas.openxmlformats.org/presentationml/2006/main">
   <p:cSld>
@@ -41851,8 +46965,27 @@
             </a:pPr>
             <a:r>
               <a:rPr lang="en-CH" dirty="0"/>
-              <a:t> uint256 is “default” integer type</a:t>
-            </a:r>
+              <a:t> uint256 is “default” integer type  </a:t>
+            </a:r>
+            <a:r>
+              <a:rPr lang="en-CH" sz="1600" dirty="0">
+                <a:solidFill>
+                  <a:schemeClr val="tx2">
+                    <a:lumMod val="60000"/>
+                    <a:lumOff val="40000"/>
+                  </a:schemeClr>
+                </a:solidFill>
+              </a:rPr>
+              <a:t>(no floating-point!)</a:t>
+            </a:r>
+            <a:endParaRPr lang="en-CH" sz="1800" dirty="0">
+              <a:solidFill>
+                <a:schemeClr val="tx2">
+                  <a:lumMod val="60000"/>
+                  <a:lumOff val="40000"/>
+                </a:schemeClr>
+              </a:solidFill>
+            </a:endParaRPr>
           </a:p>
           <a:p>
             <a:r>

--- a/doc/presentation/Thesis.pptx
+++ b/doc/presentation/Thesis.pptx
@@ -5,7 +5,7 @@
     <p:sldMasterId id="2147483648" r:id="rId1"/>
   </p:sldMasterIdLst>
   <p:notesMasterIdLst>
-    <p:notesMasterId r:id="rId55"/>
+    <p:notesMasterId r:id="rId56"/>
   </p:notesMasterIdLst>
   <p:sldIdLst>
     <p:sldId id="256" r:id="rId2"/>
@@ -50,17 +50,18 @@
     <p:sldId id="329" r:id="rId41"/>
     <p:sldId id="319" r:id="rId42"/>
     <p:sldId id="268" r:id="rId43"/>
-    <p:sldId id="277" r:id="rId44"/>
-    <p:sldId id="269" r:id="rId45"/>
-    <p:sldId id="328" r:id="rId46"/>
-    <p:sldId id="317" r:id="rId47"/>
-    <p:sldId id="258" r:id="rId48"/>
-    <p:sldId id="326" r:id="rId49"/>
-    <p:sldId id="320" r:id="rId50"/>
-    <p:sldId id="327" r:id="rId51"/>
-    <p:sldId id="274" r:id="rId52"/>
-    <p:sldId id="259" r:id="rId53"/>
-    <p:sldId id="260" r:id="rId54"/>
+    <p:sldId id="330" r:id="rId44"/>
+    <p:sldId id="277" r:id="rId45"/>
+    <p:sldId id="269" r:id="rId46"/>
+    <p:sldId id="328" r:id="rId47"/>
+    <p:sldId id="317" r:id="rId48"/>
+    <p:sldId id="258" r:id="rId49"/>
+    <p:sldId id="326" r:id="rId50"/>
+    <p:sldId id="320" r:id="rId51"/>
+    <p:sldId id="327" r:id="rId52"/>
+    <p:sldId id="274" r:id="rId53"/>
+    <p:sldId id="259" r:id="rId54"/>
+    <p:sldId id="260" r:id="rId55"/>
   </p:sldIdLst>
   <p:sldSz cx="12192000" cy="6858000"/>
   <p:notesSz cx="6858000" cy="9144000"/>
@@ -234,6 +235,7 @@
         <p14:section name="Q&amp;A" id="{4132604F-A5FF-4E6F-A51C-CD14EC1306E2}">
           <p14:sldIdLst>
             <p14:sldId id="268"/>
+            <p14:sldId id="330"/>
           </p14:sldIdLst>
         </p14:section>
         <p14:section name="Backup / Extra Examples" id="{274778F2-46BC-4298-9911-D5D9332C2A83}">
@@ -4036,6 +4038,93 @@
           </p:nvPr>
         </p:nvSpPr>
         <p:spPr/>
+      </p:sp>
+      <p:sp>
+        <p:nvSpPr>
+          <p:cNvPr id="3" name="Notes Placeholder 2"/>
+          <p:cNvSpPr>
+            <a:spLocks noGrp="1"/>
+          </p:cNvSpPr>
+          <p:nvPr>
+            <p:ph type="body" idx="1"/>
+          </p:nvPr>
+        </p:nvSpPr>
+        <p:spPr/>
+        <p:txBody>
+          <a:bodyPr/>
+          <a:lstStyle/>
+          <a:p>
+            <a:r>
+              <a:rPr lang="en-CH" dirty="0"/>
+              <a:t>market share is really % of TVL</a:t>
+            </a:r>
+          </a:p>
+        </p:txBody>
+      </p:sp>
+      <p:sp>
+        <p:nvSpPr>
+          <p:cNvPr id="4" name="Slide Number Placeholder 3"/>
+          <p:cNvSpPr>
+            <a:spLocks noGrp="1"/>
+          </p:cNvSpPr>
+          <p:nvPr>
+            <p:ph type="sldNum" sz="quarter" idx="5"/>
+          </p:nvPr>
+        </p:nvSpPr>
+        <p:spPr/>
+        <p:txBody>
+          <a:bodyPr/>
+          <a:lstStyle/>
+          <a:p>
+            <a:fld id="{ADB26BFD-26FA-41FF-A418-AE5D5C01BD91}" type="slidenum">
+              <a:rPr lang="en-CH" smtClean="0"/>
+              <a:t>7</a:t>
+            </a:fld>
+            <a:endParaRPr lang="en-CH"/>
+          </a:p>
+        </p:txBody>
+      </p:sp>
+    </p:spTree>
+    <p:extLst>
+      <p:ext uri="{BB962C8B-B14F-4D97-AF65-F5344CB8AC3E}">
+        <p14:creationId xmlns:p14="http://schemas.microsoft.com/office/powerpoint/2010/main" val="1272181008"/>
+      </p:ext>
+    </p:extLst>
+  </p:cSld>
+  <p:clrMapOvr>
+    <a:masterClrMapping/>
+  </p:clrMapOvr>
+</p:notes>
+</file>
+
+<file path=ppt/notesSlides/notesSlide2.xml><?xml version="1.0" encoding="utf-8"?>
+<p:notes xmlns:a="http://schemas.openxmlformats.org/drawingml/2006/main" xmlns:r="http://schemas.openxmlformats.org/officeDocument/2006/relationships" xmlns:p="http://schemas.openxmlformats.org/presentationml/2006/main">
+  <p:cSld>
+    <p:spTree>
+      <p:nvGrpSpPr>
+        <p:cNvPr id="1" name=""/>
+        <p:cNvGrpSpPr/>
+        <p:nvPr/>
+      </p:nvGrpSpPr>
+      <p:grpSpPr>
+        <a:xfrm>
+          <a:off x="0" y="0"/>
+          <a:ext cx="0" cy="0"/>
+          <a:chOff x="0" y="0"/>
+          <a:chExt cx="0" cy="0"/>
+        </a:xfrm>
+      </p:grpSpPr>
+      <p:sp>
+        <p:nvSpPr>
+          <p:cNvPr id="2" name="Slide Image Placeholder 1"/>
+          <p:cNvSpPr>
+            <a:spLocks noGrp="1" noRot="1" noChangeAspect="1"/>
+          </p:cNvSpPr>
+          <p:nvPr>
+            <p:ph type="sldImg"/>
+          </p:nvPr>
+        </p:nvSpPr>
+        <p:spPr/>
         <p:txBody>
           <a:bodyPr/>
           <a:lstStyle/>
@@ -4102,7 +4191,7 @@
 </p:notes>
 </file>
 
-<file path=ppt/notesSlides/notesSlide2.xml><?xml version="1.0" encoding="utf-8"?>
+<file path=ppt/notesSlides/notesSlide3.xml><?xml version="1.0" encoding="utf-8"?>
 <p:notes xmlns:a="http://schemas.openxmlformats.org/drawingml/2006/main" xmlns:r="http://schemas.openxmlformats.org/officeDocument/2006/relationships" xmlns:p="http://schemas.openxmlformats.org/presentationml/2006/main">
   <p:cSld>
     <p:spTree>
@@ -4220,116 +4309,6 @@
 </p:notes>
 </file>
 
-<file path=ppt/notesSlides/notesSlide3.xml><?xml version="1.0" encoding="utf-8"?>
-<p:notes xmlns:a="http://schemas.openxmlformats.org/drawingml/2006/main" xmlns:r="http://schemas.openxmlformats.org/officeDocument/2006/relationships" xmlns:p="http://schemas.openxmlformats.org/presentationml/2006/main">
-  <p:cSld>
-    <p:spTree>
-      <p:nvGrpSpPr>
-        <p:cNvPr id="1" name=""/>
-        <p:cNvGrpSpPr/>
-        <p:nvPr/>
-      </p:nvGrpSpPr>
-      <p:grpSpPr>
-        <a:xfrm>
-          <a:off x="0" y="0"/>
-          <a:ext cx="0" cy="0"/>
-          <a:chOff x="0" y="0"/>
-          <a:chExt cx="0" cy="0"/>
-        </a:xfrm>
-      </p:grpSpPr>
-      <p:sp>
-        <p:nvSpPr>
-          <p:cNvPr id="2" name="Slide Image Placeholder 1"/>
-          <p:cNvSpPr>
-            <a:spLocks noGrp="1" noRot="1" noChangeAspect="1"/>
-          </p:cNvSpPr>
-          <p:nvPr>
-            <p:ph type="sldImg"/>
-          </p:nvPr>
-        </p:nvSpPr>
-        <p:spPr/>
-        <p:txBody>
-          <a:bodyPr/>
-          <a:lstStyle/>
-          <a:p>
-            <a:endParaRPr lang="en-CH"/>
-          </a:p>
-        </p:txBody>
-      </p:sp>
-      <p:sp>
-        <p:nvSpPr>
-          <p:cNvPr id="3" name="Notes Placeholder 2"/>
-          <p:cNvSpPr>
-            <a:spLocks noGrp="1"/>
-          </p:cNvSpPr>
-          <p:nvPr>
-            <p:ph type="body" idx="1"/>
-          </p:nvPr>
-        </p:nvSpPr>
-        <p:spPr/>
-        <p:txBody>
-          <a:bodyPr/>
-          <a:lstStyle/>
-          <a:p>
-            <a:r>
-              <a:rPr lang="en-CH" dirty="0"/>
-              <a:t>actually, it’s even worse – the </a:t>
-            </a:r>
-            <a:r>
-              <a:rPr lang="en-CH" dirty="0" err="1"/>
-              <a:t>reentrancies</a:t>
-            </a:r>
-            <a:r>
-              <a:rPr lang="en-CH" dirty="0"/>
-              <a:t> are only guarded against if we entered the contract through one of the @nonReentrant </a:t>
-            </a:r>
-            <a:r>
-              <a:rPr lang="en-CH" dirty="0" err="1"/>
-              <a:t>entrypoints</a:t>
-            </a:r>
-            <a:r>
-              <a:rPr lang="en-CH" dirty="0"/>
-              <a:t>. but I’m not sure how to concisely explain that...</a:t>
-            </a:r>
-          </a:p>
-        </p:txBody>
-      </p:sp>
-      <p:sp>
-        <p:nvSpPr>
-          <p:cNvPr id="4" name="Slide Number Placeholder 3"/>
-          <p:cNvSpPr>
-            <a:spLocks noGrp="1"/>
-          </p:cNvSpPr>
-          <p:nvPr>
-            <p:ph type="sldNum" sz="quarter" idx="5"/>
-          </p:nvPr>
-        </p:nvSpPr>
-        <p:spPr/>
-        <p:txBody>
-          <a:bodyPr/>
-          <a:lstStyle/>
-          <a:p>
-            <a:fld id="{ADB26BFD-26FA-41FF-A418-AE5D5C01BD91}" type="slidenum">
-              <a:rPr lang="en-CH" smtClean="0"/>
-              <a:t>21</a:t>
-            </a:fld>
-            <a:endParaRPr lang="en-CH"/>
-          </a:p>
-        </p:txBody>
-      </p:sp>
-    </p:spTree>
-    <p:extLst>
-      <p:ext uri="{BB962C8B-B14F-4D97-AF65-F5344CB8AC3E}">
-        <p14:creationId xmlns:p14="http://schemas.microsoft.com/office/powerpoint/2010/main" val="131999998"/>
-      </p:ext>
-    </p:extLst>
-  </p:cSld>
-  <p:clrMapOvr>
-    <a:masterClrMapping/>
-  </p:clrMapOvr>
-</p:notes>
-</file>
-
 <file path=ppt/notesSlides/notesSlide4.xml><?xml version="1.0" encoding="utf-8"?>
 <p:notes xmlns:a="http://schemas.openxmlformats.org/drawingml/2006/main" xmlns:r="http://schemas.openxmlformats.org/officeDocument/2006/relationships" xmlns:p="http://schemas.openxmlformats.org/presentationml/2006/main">
   <p:cSld>
@@ -4383,7 +4362,23 @@
           <a:p>
             <a:r>
               <a:rPr lang="en-CH" dirty="0"/>
-              <a:t>mention that there are actual cases where order is not left to right</a:t>
+              <a:t>actually, it’s even worse – the </a:t>
+            </a:r>
+            <a:r>
+              <a:rPr lang="en-CH" dirty="0" err="1"/>
+              <a:t>reentrancies</a:t>
+            </a:r>
+            <a:r>
+              <a:rPr lang="en-CH" dirty="0"/>
+              <a:t> are only guarded against if we entered the contract through one of the @nonReentrant </a:t>
+            </a:r>
+            <a:r>
+              <a:rPr lang="en-CH" dirty="0" err="1"/>
+              <a:t>entrypoints</a:t>
+            </a:r>
+            <a:r>
+              <a:rPr lang="en-CH" dirty="0"/>
+              <a:t>. but I’m not sure how to concisely explain that...</a:t>
             </a:r>
           </a:p>
         </p:txBody>
@@ -4405,7 +4400,7 @@
           <a:p>
             <a:fld id="{ADB26BFD-26FA-41FF-A418-AE5D5C01BD91}" type="slidenum">
               <a:rPr lang="en-CH" smtClean="0"/>
-              <a:t>24</a:t>
+              <a:t>21</a:t>
             </a:fld>
             <a:endParaRPr lang="en-CH"/>
           </a:p>
@@ -4414,7 +4409,7 @@
     </p:spTree>
     <p:extLst>
       <p:ext uri="{BB962C8B-B14F-4D97-AF65-F5344CB8AC3E}">
-        <p14:creationId xmlns:p14="http://schemas.microsoft.com/office/powerpoint/2010/main" val="4148305803"/>
+        <p14:creationId xmlns:p14="http://schemas.microsoft.com/office/powerpoint/2010/main" val="131999998"/>
       </p:ext>
     </p:extLst>
   </p:cSld>
@@ -4475,7 +4470,10 @@
           <a:bodyPr/>
           <a:lstStyle/>
           <a:p>
-            <a:endParaRPr lang="en-CH" dirty="0"/>
+            <a:r>
+              <a:rPr lang="en-CH" dirty="0"/>
+              <a:t>mention that there are actual cases where order is not left to right</a:t>
+            </a:r>
           </a:p>
         </p:txBody>
       </p:sp>
@@ -4496,7 +4494,98 @@
           <a:p>
             <a:fld id="{ADB26BFD-26FA-41FF-A418-AE5D5C01BD91}" type="slidenum">
               <a:rPr lang="en-CH" smtClean="0"/>
-              <a:t>48</a:t>
+              <a:t>24</a:t>
+            </a:fld>
+            <a:endParaRPr lang="en-CH"/>
+          </a:p>
+        </p:txBody>
+      </p:sp>
+    </p:spTree>
+    <p:extLst>
+      <p:ext uri="{BB962C8B-B14F-4D97-AF65-F5344CB8AC3E}">
+        <p14:creationId xmlns:p14="http://schemas.microsoft.com/office/powerpoint/2010/main" val="4148305803"/>
+      </p:ext>
+    </p:extLst>
+  </p:cSld>
+  <p:clrMapOvr>
+    <a:masterClrMapping/>
+  </p:clrMapOvr>
+</p:notes>
+</file>
+
+<file path=ppt/notesSlides/notesSlide6.xml><?xml version="1.0" encoding="utf-8"?>
+<p:notes xmlns:a="http://schemas.openxmlformats.org/drawingml/2006/main" xmlns:r="http://schemas.openxmlformats.org/officeDocument/2006/relationships" xmlns:p="http://schemas.openxmlformats.org/presentationml/2006/main">
+  <p:cSld>
+    <p:spTree>
+      <p:nvGrpSpPr>
+        <p:cNvPr id="1" name=""/>
+        <p:cNvGrpSpPr/>
+        <p:nvPr/>
+      </p:nvGrpSpPr>
+      <p:grpSpPr>
+        <a:xfrm>
+          <a:off x="0" y="0"/>
+          <a:ext cx="0" cy="0"/>
+          <a:chOff x="0" y="0"/>
+          <a:chExt cx="0" cy="0"/>
+        </a:xfrm>
+      </p:grpSpPr>
+      <p:sp>
+        <p:nvSpPr>
+          <p:cNvPr id="2" name="Slide Image Placeholder 1"/>
+          <p:cNvSpPr>
+            <a:spLocks noGrp="1" noRot="1" noChangeAspect="1"/>
+          </p:cNvSpPr>
+          <p:nvPr>
+            <p:ph type="sldImg"/>
+          </p:nvPr>
+        </p:nvSpPr>
+        <p:spPr/>
+        <p:txBody>
+          <a:bodyPr/>
+          <a:lstStyle/>
+          <a:p>
+            <a:endParaRPr lang="en-CH"/>
+          </a:p>
+        </p:txBody>
+      </p:sp>
+      <p:sp>
+        <p:nvSpPr>
+          <p:cNvPr id="3" name="Notes Placeholder 2"/>
+          <p:cNvSpPr>
+            <a:spLocks noGrp="1"/>
+          </p:cNvSpPr>
+          <p:nvPr>
+            <p:ph type="body" idx="1"/>
+          </p:nvPr>
+        </p:nvSpPr>
+        <p:spPr/>
+        <p:txBody>
+          <a:bodyPr/>
+          <a:lstStyle/>
+          <a:p>
+            <a:endParaRPr lang="en-CH" dirty="0"/>
+          </a:p>
+        </p:txBody>
+      </p:sp>
+      <p:sp>
+        <p:nvSpPr>
+          <p:cNvPr id="4" name="Slide Number Placeholder 3"/>
+          <p:cNvSpPr>
+            <a:spLocks noGrp="1"/>
+          </p:cNvSpPr>
+          <p:nvPr>
+            <p:ph type="sldNum" sz="quarter" idx="5"/>
+          </p:nvPr>
+        </p:nvSpPr>
+        <p:spPr/>
+        <p:txBody>
+          <a:bodyPr/>
+          <a:lstStyle/>
+          <a:p>
+            <a:fld id="{ADB26BFD-26FA-41FF-A418-AE5D5C01BD91}" type="slidenum">
+              <a:rPr lang="en-CH" smtClean="0"/>
+              <a:t>49</a:t>
             </a:fld>
             <a:endParaRPr lang="en-CH"/>
           </a:p>
@@ -10696,7 +10785,15 @@
             <a:pPr lvl="2"/>
             <a:r>
               <a:rPr lang="en-CH" dirty="0"/>
-              <a:t>expensive, &gt;2000$ per auditor per day</a:t>
+              <a:t>Expensive </a:t>
+            </a:r>
+            <a:r>
+              <a:rPr lang="en-CH" dirty="0">
+                <a:solidFill>
+                  <a:schemeClr val="tx2"/>
+                </a:solidFill>
+              </a:rPr>
+              <a:t>(&gt;2000$ per auditor per day)</a:t>
             </a:r>
           </a:p>
           <a:p>
@@ -10925,7 +11022,7 @@
           <a:p>
             <a:r>
               <a:rPr lang="en-CH" dirty="0"/>
-              <a:t>Common Vulnerabilities</a:t>
+              <a:t>Common Vulnerabilities (2021-2024)</a:t>
             </a:r>
           </a:p>
         </p:txBody>
@@ -11349,7 +11446,7 @@
                   <a:schemeClr val="tx2"/>
                 </a:solidFill>
               </a:rPr>
-              <a:t>Common Vulnerabilities</a:t>
+              <a:t>Common Vulnerabilities (2021-2024)</a:t>
             </a:r>
           </a:p>
         </p:txBody>
@@ -18015,7 +18112,15 @@
           <a:p>
             <a:r>
               <a:rPr lang="en-GB" dirty="0"/>
-              <a:t>First appearance: June 17, 2016</a:t>
+              <a:t>First </a:t>
+            </a:r>
+            <a:r>
+              <a:rPr lang="en-CH" dirty="0"/>
+              <a:t>occurrence</a:t>
+            </a:r>
+            <a:r>
+              <a:rPr lang="en-GB" dirty="0"/>
+              <a:t>: June 17, 2016</a:t>
             </a:r>
           </a:p>
           <a:p>
@@ -18272,8 +18377,12 @@
           <a:p>
             <a:pPr lvl="1"/>
             <a:r>
+              <a:rPr lang="en-CH" dirty="0"/>
+              <a:t>There is no</a:t>
+            </a:r>
+            <a:r>
               <a:rPr lang="en-GB" dirty="0"/>
-              <a:t>No “safety by default”</a:t>
+              <a:t> “safety by default”</a:t>
             </a:r>
           </a:p>
           <a:p>
@@ -18281,8 +18390,12 @@
           </a:p>
           <a:p>
             <a:r>
+              <a:rPr lang="en-CH" dirty="0"/>
+              <a:t>But w</a:t>
+            </a:r>
+            <a:r>
               <a:rPr lang="en-GB" dirty="0"/>
-              <a:t>But when they do…</a:t>
+              <a:t>hen they do…</a:t>
             </a:r>
           </a:p>
           <a:p>
@@ -42442,7 +42555,7 @@
           <a:p>
             <a:r>
               <a:rPr lang="en-CH" dirty="0"/>
-              <a:t>The “blockchain” is not relevant for us</a:t>
+              <a:t>The “blockchain” part is not relevant for us</a:t>
             </a:r>
           </a:p>
           <a:p>
@@ -42461,7 +42574,7 @@
           <a:p>
             <a:r>
               <a:rPr lang="en-CH" dirty="0"/>
-              <a:t>“State”: hash map Address </a:t>
+              <a:t>“State”: Hash Map  Address </a:t>
             </a:r>
             <a:r>
               <a:rPr lang="en-CH" dirty="0">
@@ -42516,7 +42629,7 @@
             <a:pPr lvl="1"/>
             <a:r>
               <a:rPr lang="en-CH" dirty="0"/>
-              <a:t>Smart Contract: Program, may be executed by transactions</a:t>
+              <a:t>Smart Contract: “Program”, may be executed by transactions</a:t>
             </a:r>
           </a:p>
           <a:p>
@@ -43214,7 +43327,7 @@
 </file>
 
 <file path=ppt/slides/slide42.xml><?xml version="1.0" encoding="utf-8"?>
-<p:sld xmlns:a="http://schemas.openxmlformats.org/drawingml/2006/main" xmlns:r="http://schemas.openxmlformats.org/officeDocument/2006/relationships" xmlns:p="http://schemas.openxmlformats.org/presentationml/2006/main">
+<p:sld xmlns:a="http://schemas.openxmlformats.org/drawingml/2006/main" xmlns:r="http://schemas.openxmlformats.org/officeDocument/2006/relationships" xmlns:p="http://schemas.openxmlformats.org/presentationml/2006/main" show="0">
   <p:cSld>
     <p:spTree>
       <p:nvGrpSpPr>
@@ -43412,6 +43525,185 @@
 </file>
 
 <file path=ppt/slides/slide43.xml><?xml version="1.0" encoding="utf-8"?>
+<p:sld xmlns:a="http://schemas.openxmlformats.org/drawingml/2006/main" xmlns:r="http://schemas.openxmlformats.org/officeDocument/2006/relationships" xmlns:p="http://schemas.openxmlformats.org/presentationml/2006/main">
+  <p:cSld>
+    <p:spTree>
+      <p:nvGrpSpPr>
+        <p:cNvPr id="1" name=""/>
+        <p:cNvGrpSpPr/>
+        <p:nvPr/>
+      </p:nvGrpSpPr>
+      <p:grpSpPr>
+        <a:xfrm>
+          <a:off x="0" y="0"/>
+          <a:ext cx="0" cy="0"/>
+          <a:chOff x="0" y="0"/>
+          <a:chExt cx="0" cy="0"/>
+        </a:xfrm>
+      </p:grpSpPr>
+      <p:sp>
+        <p:nvSpPr>
+          <p:cNvPr id="2" name="Title 1">
+            <a:extLst>
+              <a:ext uri="{FF2B5EF4-FFF2-40B4-BE49-F238E27FC236}">
+                <a16:creationId xmlns:a16="http://schemas.microsoft.com/office/drawing/2014/main" id="{F8842AB2-2ADC-F734-0542-7602AB1E0E68}"/>
+              </a:ext>
+            </a:extLst>
+          </p:cNvPr>
+          <p:cNvSpPr>
+            <a:spLocks noGrp="1"/>
+          </p:cNvSpPr>
+          <p:nvPr>
+            <p:ph type="title"/>
+          </p:nvPr>
+        </p:nvSpPr>
+        <p:spPr/>
+        <p:txBody>
+          <a:bodyPr/>
+          <a:lstStyle/>
+          <a:p>
+            <a:r>
+              <a:rPr lang="en-CH" dirty="0"/>
+              <a:t>Q&amp;A</a:t>
+            </a:r>
+          </a:p>
+        </p:txBody>
+      </p:sp>
+      <p:sp>
+        <p:nvSpPr>
+          <p:cNvPr id="3" name="Content Placeholder 2">
+            <a:extLst>
+              <a:ext uri="{FF2B5EF4-FFF2-40B4-BE49-F238E27FC236}">
+                <a16:creationId xmlns:a16="http://schemas.microsoft.com/office/drawing/2014/main" id="{9D11AF25-A2E8-B876-B465-B0D8781F2AF8}"/>
+              </a:ext>
+            </a:extLst>
+          </p:cNvPr>
+          <p:cNvSpPr>
+            <a:spLocks noGrp="1"/>
+          </p:cNvSpPr>
+          <p:nvPr>
+            <p:ph idx="1"/>
+          </p:nvPr>
+        </p:nvSpPr>
+        <p:spPr/>
+        <p:txBody>
+          <a:bodyPr/>
+          <a:lstStyle/>
+          <a:p>
+            <a:endParaRPr lang="en-CH"/>
+          </a:p>
+        </p:txBody>
+      </p:sp>
+      <p:sp>
+        <p:nvSpPr>
+          <p:cNvPr id="4" name="Date Placeholder 3">
+            <a:extLst>
+              <a:ext uri="{FF2B5EF4-FFF2-40B4-BE49-F238E27FC236}">
+                <a16:creationId xmlns:a16="http://schemas.microsoft.com/office/drawing/2014/main" id="{AC25CF91-966D-8DA4-7E89-E83949178788}"/>
+              </a:ext>
+            </a:extLst>
+          </p:cNvPr>
+          <p:cNvSpPr>
+            <a:spLocks noGrp="1"/>
+          </p:cNvSpPr>
+          <p:nvPr>
+            <p:ph type="dt" sz="half" idx="10"/>
+          </p:nvPr>
+        </p:nvSpPr>
+        <p:spPr/>
+        <p:txBody>
+          <a:bodyPr/>
+          <a:lstStyle/>
+          <a:p>
+            <a:r>
+              <a:rPr lang="en-CH"/>
+              <a:t>30/03/2026</a:t>
+            </a:r>
+            <a:endParaRPr lang="en-CH" dirty="0"/>
+          </a:p>
+        </p:txBody>
+      </p:sp>
+      <p:sp>
+        <p:nvSpPr>
+          <p:cNvPr id="5" name="Footer Placeholder 4">
+            <a:extLst>
+              <a:ext uri="{FF2B5EF4-FFF2-40B4-BE49-F238E27FC236}">
+                <a16:creationId xmlns:a16="http://schemas.microsoft.com/office/drawing/2014/main" id="{FB4062E1-FC84-D62B-00E2-D6660204035F}"/>
+              </a:ext>
+            </a:extLst>
+          </p:cNvPr>
+          <p:cNvSpPr>
+            <a:spLocks noGrp="1"/>
+          </p:cNvSpPr>
+          <p:nvPr>
+            <p:ph type="ftr" sz="quarter" idx="11"/>
+          </p:nvPr>
+        </p:nvSpPr>
+        <p:spPr/>
+        <p:txBody>
+          <a:bodyPr/>
+          <a:lstStyle/>
+          <a:p>
+            <a:r>
+              <a:rPr lang="en-CH"/>
+              <a:t>Eliminating Reentrancy through Language Design</a:t>
+            </a:r>
+            <a:endParaRPr lang="en-CH" dirty="0">
+              <a:solidFill>
+                <a:schemeClr val="tx2"/>
+              </a:solidFill>
+            </a:endParaRPr>
+          </a:p>
+        </p:txBody>
+      </p:sp>
+      <p:sp>
+        <p:nvSpPr>
+          <p:cNvPr id="6" name="Slide Number Placeholder 5">
+            <a:extLst>
+              <a:ext uri="{FF2B5EF4-FFF2-40B4-BE49-F238E27FC236}">
+                <a16:creationId xmlns:a16="http://schemas.microsoft.com/office/drawing/2014/main" id="{F544F9FC-F5DA-F0F7-3A75-E922447E77A6}"/>
+              </a:ext>
+            </a:extLst>
+          </p:cNvPr>
+          <p:cNvSpPr>
+            <a:spLocks noGrp="1"/>
+          </p:cNvSpPr>
+          <p:nvPr>
+            <p:ph type="sldNum" sz="quarter" idx="12"/>
+          </p:nvPr>
+        </p:nvSpPr>
+        <p:spPr/>
+        <p:txBody>
+          <a:bodyPr/>
+          <a:lstStyle/>
+          <a:p>
+            <a:fld id="{1013ED95-016C-42D7-B550-5C99AA40E4D5}" type="slidenum">
+              <a:rPr lang="en-CH" smtClean="0"/>
+              <a:pPr/>
+              <a:t>43</a:t>
+            </a:fld>
+            <a:r>
+              <a:rPr lang="en-CH"/>
+              <a:t> / XX</a:t>
+            </a:r>
+            <a:endParaRPr lang="en-CH" dirty="0"/>
+          </a:p>
+        </p:txBody>
+      </p:sp>
+    </p:spTree>
+    <p:extLst>
+      <p:ext uri="{BB962C8B-B14F-4D97-AF65-F5344CB8AC3E}">
+        <p14:creationId xmlns:p14="http://schemas.microsoft.com/office/powerpoint/2010/main" val="2083579794"/>
+      </p:ext>
+    </p:extLst>
+  </p:cSld>
+  <p:clrMapOvr>
+    <a:masterClrMapping/>
+  </p:clrMapOvr>
+</p:sld>
+</file>
+
+<file path=ppt/slides/slide44.xml><?xml version="1.0" encoding="utf-8"?>
 <p:sld xmlns:a="http://schemas.openxmlformats.org/drawingml/2006/main" xmlns:r="http://schemas.openxmlformats.org/officeDocument/2006/relationships" xmlns:p="http://schemas.openxmlformats.org/presentationml/2006/main" show="0">
   <p:cSld>
     <p:spTree>
@@ -43586,7 +43878,7 @@
             <a:fld id="{1013ED95-016C-42D7-B550-5C99AA40E4D5}" type="slidenum">
               <a:rPr lang="en-CH" smtClean="0"/>
               <a:pPr/>
-              <a:t>43</a:t>
+              <a:t>44</a:t>
             </a:fld>
             <a:r>
               <a:rPr lang="en-CH"/>
@@ -43609,7 +43901,7 @@
 </p:sld>
 </file>
 
-<file path=ppt/slides/slide44.xml><?xml version="1.0" encoding="utf-8"?>
+<file path=ppt/slides/slide45.xml><?xml version="1.0" encoding="utf-8"?>
 <p:sld xmlns:a="http://schemas.openxmlformats.org/drawingml/2006/main" xmlns:r="http://schemas.openxmlformats.org/officeDocument/2006/relationships" xmlns:p="http://schemas.openxmlformats.org/presentationml/2006/main">
   <p:cSld>
     <p:spTree>
@@ -45556,7 +45848,7 @@
             <a:fld id="{1013ED95-016C-42D7-B550-5C99AA40E4D5}" type="slidenum">
               <a:rPr lang="en-CH" smtClean="0"/>
               <a:pPr/>
-              <a:t>44</a:t>
+              <a:t>45</a:t>
             </a:fld>
             <a:r>
               <a:rPr lang="en-CH"/>
@@ -45579,7 +45871,7 @@
 </p:sld>
 </file>
 
-<file path=ppt/slides/slide45.xml><?xml version="1.0" encoding="utf-8"?>
+<file path=ppt/slides/slide46.xml><?xml version="1.0" encoding="utf-8"?>
 <p:sld xmlns:a="http://schemas.openxmlformats.org/drawingml/2006/main" xmlns:r="http://schemas.openxmlformats.org/officeDocument/2006/relationships" xmlns:p="http://schemas.openxmlformats.org/presentationml/2006/main">
   <p:cSld>
     <p:spTree>
@@ -47526,7 +47818,7 @@
             <a:fld id="{1013ED95-016C-42D7-B550-5C99AA40E4D5}" type="slidenum">
               <a:rPr lang="en-CH" smtClean="0"/>
               <a:pPr/>
-              <a:t>45</a:t>
+              <a:t>46</a:t>
             </a:fld>
             <a:r>
               <a:rPr lang="en-CH"/>
@@ -47549,7 +47841,7 @@
 </p:sld>
 </file>
 
-<file path=ppt/slides/slide46.xml><?xml version="1.0" encoding="utf-8"?>
+<file path=ppt/slides/slide47.xml><?xml version="1.0" encoding="utf-8"?>
 <p:sld xmlns:a="http://schemas.openxmlformats.org/drawingml/2006/main" xmlns:r="http://schemas.openxmlformats.org/officeDocument/2006/relationships" xmlns:p="http://schemas.openxmlformats.org/presentationml/2006/main" show="0">
   <p:cSld>
     <p:spTree>
@@ -47718,7 +48010,7 @@
             <a:fld id="{1013ED95-016C-42D7-B550-5C99AA40E4D5}" type="slidenum">
               <a:rPr lang="en-CH" smtClean="0"/>
               <a:pPr/>
-              <a:t>46</a:t>
+              <a:t>47</a:t>
             </a:fld>
             <a:r>
               <a:rPr lang="en-CH"/>
@@ -47741,7 +48033,7 @@
 </p:sld>
 </file>
 
-<file path=ppt/slides/slide47.xml><?xml version="1.0" encoding="utf-8"?>
+<file path=ppt/slides/slide48.xml><?xml version="1.0" encoding="utf-8"?>
 <p:sld xmlns:a="http://schemas.openxmlformats.org/drawingml/2006/main" xmlns:r="http://schemas.openxmlformats.org/officeDocument/2006/relationships" xmlns:p="http://schemas.openxmlformats.org/presentationml/2006/main">
   <p:cSld>
     <p:spTree>
@@ -48607,7 +48899,7 @@
             <a:fld id="{1013ED95-016C-42D7-B550-5C99AA40E4D5}" type="slidenum">
               <a:rPr lang="en-CH" smtClean="0"/>
               <a:pPr/>
-              <a:t>47</a:t>
+              <a:t>48</a:t>
             </a:fld>
             <a:r>
               <a:rPr lang="en-CH"/>
@@ -48673,7 +48965,7 @@
 </p:sld>
 </file>
 
-<file path=ppt/slides/slide48.xml><?xml version="1.0" encoding="utf-8"?>
+<file path=ppt/slides/slide49.xml><?xml version="1.0" encoding="utf-8"?>
 <p:sld xmlns:a="http://schemas.openxmlformats.org/drawingml/2006/main" xmlns:r="http://schemas.openxmlformats.org/officeDocument/2006/relationships" xmlns:p="http://schemas.openxmlformats.org/presentationml/2006/main">
   <p:cSld>
     <p:spTree>
@@ -50107,7 +50399,7 @@
             <a:fld id="{1013ED95-016C-42D7-B550-5C99AA40E4D5}" type="slidenum">
               <a:rPr lang="en-CH" smtClean="0"/>
               <a:pPr/>
-              <a:t>48</a:t>
+              <a:t>49</a:t>
             </a:fld>
             <a:r>
               <a:rPr lang="en-CH"/>
@@ -50692,249 +50984,6 @@
 </p:sld>
 </file>
 
-<file path=ppt/slides/slide49.xml><?xml version="1.0" encoding="utf-8"?>
-<p:sld xmlns:a="http://schemas.openxmlformats.org/drawingml/2006/main" xmlns:r="http://schemas.openxmlformats.org/officeDocument/2006/relationships" xmlns:p="http://schemas.openxmlformats.org/presentationml/2006/main">
-  <p:cSld>
-    <p:spTree>
-      <p:nvGrpSpPr>
-        <p:cNvPr id="1" name=""/>
-        <p:cNvGrpSpPr/>
-        <p:nvPr/>
-      </p:nvGrpSpPr>
-      <p:grpSpPr>
-        <a:xfrm>
-          <a:off x="0" y="0"/>
-          <a:ext cx="0" cy="0"/>
-          <a:chOff x="0" y="0"/>
-          <a:chExt cx="0" cy="0"/>
-        </a:xfrm>
-      </p:grpSpPr>
-      <p:sp>
-        <p:nvSpPr>
-          <p:cNvPr id="2" name="Title 1">
-            <a:extLst>
-              <a:ext uri="{FF2B5EF4-FFF2-40B4-BE49-F238E27FC236}">
-                <a16:creationId xmlns:a16="http://schemas.microsoft.com/office/drawing/2014/main" id="{4E71206B-7346-72AF-4514-E2F5B0E0723A}"/>
-              </a:ext>
-            </a:extLst>
-          </p:cNvPr>
-          <p:cNvSpPr>
-            <a:spLocks noGrp="1"/>
-          </p:cNvSpPr>
-          <p:nvPr>
-            <p:ph type="title"/>
-          </p:nvPr>
-        </p:nvSpPr>
-        <p:spPr/>
-        <p:txBody>
-          <a:bodyPr/>
-          <a:lstStyle/>
-          <a:p>
-            <a:r>
-              <a:rPr lang="en-CH" dirty="0"/>
-              <a:t>Future Work: Tooling</a:t>
-            </a:r>
-          </a:p>
-        </p:txBody>
-      </p:sp>
-      <p:sp>
-        <p:nvSpPr>
-          <p:cNvPr id="3" name="Content Placeholder 2">
-            <a:extLst>
-              <a:ext uri="{FF2B5EF4-FFF2-40B4-BE49-F238E27FC236}">
-                <a16:creationId xmlns:a16="http://schemas.microsoft.com/office/drawing/2014/main" id="{85B406FC-A085-DB12-6D86-EB47A829326C}"/>
-              </a:ext>
-            </a:extLst>
-          </p:cNvPr>
-          <p:cNvSpPr>
-            <a:spLocks noGrp="1"/>
-          </p:cNvSpPr>
-          <p:nvPr>
-            <p:ph sz="half" idx="1"/>
-          </p:nvPr>
-        </p:nvSpPr>
-        <p:spPr/>
-        <p:txBody>
-          <a:bodyPr/>
-          <a:lstStyle/>
-          <a:p>
-            <a:r>
-              <a:rPr lang="en-CH" dirty="0"/>
-              <a:t>Interpreter:</a:t>
-            </a:r>
-          </a:p>
-          <a:p>
-            <a:pPr lvl="1"/>
-            <a:r>
-              <a:rPr lang="en-CH" dirty="0"/>
-              <a:t>Testing tools deploy mock blockchain, simulate full VM execution</a:t>
-            </a:r>
-          </a:p>
-          <a:p>
-            <a:pPr lvl="2">
-              <a:buFont typeface="Aptos" panose="020B0004020202020204" pitchFamily="34" charset="0"/>
-              <a:buChar char="→"/>
-            </a:pPr>
-            <a:r>
-              <a:rPr lang="en-CH" dirty="0"/>
-              <a:t>huge overhead, bad performance</a:t>
-            </a:r>
-          </a:p>
-          <a:p>
-            <a:pPr lvl="2">
-              <a:buFont typeface="Aptos" panose="020B0004020202020204" pitchFamily="34" charset="0"/>
-              <a:buChar char="→"/>
-            </a:pPr>
-            <a:r>
-              <a:rPr lang="en-CH" dirty="0"/>
-              <a:t>debugging tools are not great</a:t>
-            </a:r>
-          </a:p>
-          <a:p>
-            <a:pPr lvl="1"/>
-            <a:r>
-              <a:rPr lang="en-CH" dirty="0"/>
-              <a:t>Performance greatly impacts fuzz testing</a:t>
-            </a:r>
-          </a:p>
-          <a:p>
-            <a:pPr lvl="1"/>
-            <a:r>
-              <a:rPr lang="en-CH" dirty="0"/>
-              <a:t>Unit tests, step-by-step debugging for internal functions</a:t>
-            </a:r>
-          </a:p>
-        </p:txBody>
-      </p:sp>
-      <p:sp>
-        <p:nvSpPr>
-          <p:cNvPr id="4" name="Content Placeholder 3">
-            <a:extLst>
-              <a:ext uri="{FF2B5EF4-FFF2-40B4-BE49-F238E27FC236}">
-                <a16:creationId xmlns:a16="http://schemas.microsoft.com/office/drawing/2014/main" id="{F58841C8-1090-73BD-8612-E494B8001B15}"/>
-              </a:ext>
-            </a:extLst>
-          </p:cNvPr>
-          <p:cNvSpPr>
-            <a:spLocks noGrp="1"/>
-          </p:cNvSpPr>
-          <p:nvPr>
-            <p:ph sz="half" idx="2"/>
-          </p:nvPr>
-        </p:nvSpPr>
-        <p:spPr/>
-        <p:txBody>
-          <a:bodyPr/>
-          <a:lstStyle/>
-          <a:p>
-            <a:endParaRPr lang="en-CH"/>
-          </a:p>
-        </p:txBody>
-      </p:sp>
-      <p:sp>
-        <p:nvSpPr>
-          <p:cNvPr id="5" name="Date Placeholder 4">
-            <a:extLst>
-              <a:ext uri="{FF2B5EF4-FFF2-40B4-BE49-F238E27FC236}">
-                <a16:creationId xmlns:a16="http://schemas.microsoft.com/office/drawing/2014/main" id="{3EEC5EDA-4793-93D4-A820-F643F2D6FDF9}"/>
-              </a:ext>
-            </a:extLst>
-          </p:cNvPr>
-          <p:cNvSpPr>
-            <a:spLocks noGrp="1"/>
-          </p:cNvSpPr>
-          <p:nvPr>
-            <p:ph type="dt" sz="half" idx="10"/>
-          </p:nvPr>
-        </p:nvSpPr>
-        <p:spPr/>
-        <p:txBody>
-          <a:bodyPr/>
-          <a:lstStyle/>
-          <a:p>
-            <a:r>
-              <a:rPr lang="en-CH"/>
-              <a:t>30/03/2026</a:t>
-            </a:r>
-          </a:p>
-        </p:txBody>
-      </p:sp>
-      <p:sp>
-        <p:nvSpPr>
-          <p:cNvPr id="6" name="Footer Placeholder 5">
-            <a:extLst>
-              <a:ext uri="{FF2B5EF4-FFF2-40B4-BE49-F238E27FC236}">
-                <a16:creationId xmlns:a16="http://schemas.microsoft.com/office/drawing/2014/main" id="{DF860437-8E73-31B9-4ABA-36AA6E6E72AD}"/>
-              </a:ext>
-            </a:extLst>
-          </p:cNvPr>
-          <p:cNvSpPr>
-            <a:spLocks noGrp="1"/>
-          </p:cNvSpPr>
-          <p:nvPr>
-            <p:ph type="ftr" sz="quarter" idx="11"/>
-          </p:nvPr>
-        </p:nvSpPr>
-        <p:spPr/>
-        <p:txBody>
-          <a:bodyPr/>
-          <a:lstStyle/>
-          <a:p>
-            <a:r>
-              <a:rPr lang="en-US"/>
-              <a:t>Eliminating Reentrancy through Language Design</a:t>
-            </a:r>
-            <a:endParaRPr lang="en-CH"/>
-          </a:p>
-        </p:txBody>
-      </p:sp>
-      <p:sp>
-        <p:nvSpPr>
-          <p:cNvPr id="7" name="Slide Number Placeholder 6">
-            <a:extLst>
-              <a:ext uri="{FF2B5EF4-FFF2-40B4-BE49-F238E27FC236}">
-                <a16:creationId xmlns:a16="http://schemas.microsoft.com/office/drawing/2014/main" id="{D8C406F5-71EE-FBE8-90CF-182F580B400A}"/>
-              </a:ext>
-            </a:extLst>
-          </p:cNvPr>
-          <p:cNvSpPr>
-            <a:spLocks noGrp="1"/>
-          </p:cNvSpPr>
-          <p:nvPr>
-            <p:ph type="sldNum" sz="quarter" idx="12"/>
-          </p:nvPr>
-        </p:nvSpPr>
-        <p:spPr/>
-        <p:txBody>
-          <a:bodyPr/>
-          <a:lstStyle/>
-          <a:p>
-            <a:fld id="{1013ED95-016C-42D7-B550-5C99AA40E4D5}" type="slidenum">
-              <a:rPr lang="en-CH" smtClean="0"/>
-              <a:pPr/>
-              <a:t>49</a:t>
-            </a:fld>
-            <a:r>
-              <a:rPr lang="en-CH"/>
-              <a:t> / XX</a:t>
-            </a:r>
-            <a:endParaRPr lang="en-CH" dirty="0"/>
-          </a:p>
-        </p:txBody>
-      </p:sp>
-    </p:spTree>
-    <p:extLst>
-      <p:ext uri="{BB962C8B-B14F-4D97-AF65-F5344CB8AC3E}">
-        <p14:creationId xmlns:p14="http://schemas.microsoft.com/office/powerpoint/2010/main" val="101902366"/>
-      </p:ext>
-    </p:extLst>
-  </p:cSld>
-  <p:clrMapOvr>
-    <a:masterClrMapping/>
-  </p:clrMapOvr>
-</p:sld>
-</file>
-
 <file path=ppt/slides/slide5.xml><?xml version="1.0" encoding="utf-8"?>
 <p:sld xmlns:a="http://schemas.openxmlformats.org/drawingml/2006/main" xmlns:r="http://schemas.openxmlformats.org/officeDocument/2006/relationships" xmlns:p="http://schemas.openxmlformats.org/presentationml/2006/main">
   <p:cSld>
@@ -51048,7 +51097,7 @@
             </a:r>
             <a:r>
               <a:rPr lang="en-CH" dirty="0"/>
-              <a:t> uint256 hash map)</a:t>
+              <a:t> uint256 Hash Map)</a:t>
             </a:r>
           </a:p>
           <a:p>
@@ -51186,6 +51235,249 @@
 </file>
 
 <file path=ppt/slides/slide50.xml><?xml version="1.0" encoding="utf-8"?>
+<p:sld xmlns:a="http://schemas.openxmlformats.org/drawingml/2006/main" xmlns:r="http://schemas.openxmlformats.org/officeDocument/2006/relationships" xmlns:p="http://schemas.openxmlformats.org/presentationml/2006/main">
+  <p:cSld>
+    <p:spTree>
+      <p:nvGrpSpPr>
+        <p:cNvPr id="1" name=""/>
+        <p:cNvGrpSpPr/>
+        <p:nvPr/>
+      </p:nvGrpSpPr>
+      <p:grpSpPr>
+        <a:xfrm>
+          <a:off x="0" y="0"/>
+          <a:ext cx="0" cy="0"/>
+          <a:chOff x="0" y="0"/>
+          <a:chExt cx="0" cy="0"/>
+        </a:xfrm>
+      </p:grpSpPr>
+      <p:sp>
+        <p:nvSpPr>
+          <p:cNvPr id="2" name="Title 1">
+            <a:extLst>
+              <a:ext uri="{FF2B5EF4-FFF2-40B4-BE49-F238E27FC236}">
+                <a16:creationId xmlns:a16="http://schemas.microsoft.com/office/drawing/2014/main" id="{4E71206B-7346-72AF-4514-E2F5B0E0723A}"/>
+              </a:ext>
+            </a:extLst>
+          </p:cNvPr>
+          <p:cNvSpPr>
+            <a:spLocks noGrp="1"/>
+          </p:cNvSpPr>
+          <p:nvPr>
+            <p:ph type="title"/>
+          </p:nvPr>
+        </p:nvSpPr>
+        <p:spPr/>
+        <p:txBody>
+          <a:bodyPr/>
+          <a:lstStyle/>
+          <a:p>
+            <a:r>
+              <a:rPr lang="en-CH" dirty="0"/>
+              <a:t>Future Work: Tooling</a:t>
+            </a:r>
+          </a:p>
+        </p:txBody>
+      </p:sp>
+      <p:sp>
+        <p:nvSpPr>
+          <p:cNvPr id="3" name="Content Placeholder 2">
+            <a:extLst>
+              <a:ext uri="{FF2B5EF4-FFF2-40B4-BE49-F238E27FC236}">
+                <a16:creationId xmlns:a16="http://schemas.microsoft.com/office/drawing/2014/main" id="{85B406FC-A085-DB12-6D86-EB47A829326C}"/>
+              </a:ext>
+            </a:extLst>
+          </p:cNvPr>
+          <p:cNvSpPr>
+            <a:spLocks noGrp="1"/>
+          </p:cNvSpPr>
+          <p:nvPr>
+            <p:ph sz="half" idx="1"/>
+          </p:nvPr>
+        </p:nvSpPr>
+        <p:spPr/>
+        <p:txBody>
+          <a:bodyPr/>
+          <a:lstStyle/>
+          <a:p>
+            <a:r>
+              <a:rPr lang="en-CH" dirty="0"/>
+              <a:t>Interpreter:</a:t>
+            </a:r>
+          </a:p>
+          <a:p>
+            <a:pPr lvl="1"/>
+            <a:r>
+              <a:rPr lang="en-CH" dirty="0"/>
+              <a:t>Testing tools deploy mock blockchain, simulate full VM execution</a:t>
+            </a:r>
+          </a:p>
+          <a:p>
+            <a:pPr lvl="2">
+              <a:buFont typeface="Aptos" panose="020B0004020202020204" pitchFamily="34" charset="0"/>
+              <a:buChar char="→"/>
+            </a:pPr>
+            <a:r>
+              <a:rPr lang="en-CH" dirty="0"/>
+              <a:t>huge overhead, bad performance</a:t>
+            </a:r>
+          </a:p>
+          <a:p>
+            <a:pPr lvl="2">
+              <a:buFont typeface="Aptos" panose="020B0004020202020204" pitchFamily="34" charset="0"/>
+              <a:buChar char="→"/>
+            </a:pPr>
+            <a:r>
+              <a:rPr lang="en-CH" dirty="0"/>
+              <a:t>debugging tools are not great</a:t>
+            </a:r>
+          </a:p>
+          <a:p>
+            <a:pPr lvl="1"/>
+            <a:r>
+              <a:rPr lang="en-CH" dirty="0"/>
+              <a:t>Performance greatly impacts fuzz testing</a:t>
+            </a:r>
+          </a:p>
+          <a:p>
+            <a:pPr lvl="1"/>
+            <a:r>
+              <a:rPr lang="en-CH" dirty="0"/>
+              <a:t>Unit tests, step-by-step debugging for internal functions</a:t>
+            </a:r>
+          </a:p>
+        </p:txBody>
+      </p:sp>
+      <p:sp>
+        <p:nvSpPr>
+          <p:cNvPr id="4" name="Content Placeholder 3">
+            <a:extLst>
+              <a:ext uri="{FF2B5EF4-FFF2-40B4-BE49-F238E27FC236}">
+                <a16:creationId xmlns:a16="http://schemas.microsoft.com/office/drawing/2014/main" id="{F58841C8-1090-73BD-8612-E494B8001B15}"/>
+              </a:ext>
+            </a:extLst>
+          </p:cNvPr>
+          <p:cNvSpPr>
+            <a:spLocks noGrp="1"/>
+          </p:cNvSpPr>
+          <p:nvPr>
+            <p:ph sz="half" idx="2"/>
+          </p:nvPr>
+        </p:nvSpPr>
+        <p:spPr/>
+        <p:txBody>
+          <a:bodyPr/>
+          <a:lstStyle/>
+          <a:p>
+            <a:endParaRPr lang="en-CH"/>
+          </a:p>
+        </p:txBody>
+      </p:sp>
+      <p:sp>
+        <p:nvSpPr>
+          <p:cNvPr id="5" name="Date Placeholder 4">
+            <a:extLst>
+              <a:ext uri="{FF2B5EF4-FFF2-40B4-BE49-F238E27FC236}">
+                <a16:creationId xmlns:a16="http://schemas.microsoft.com/office/drawing/2014/main" id="{3EEC5EDA-4793-93D4-A820-F643F2D6FDF9}"/>
+              </a:ext>
+            </a:extLst>
+          </p:cNvPr>
+          <p:cNvSpPr>
+            <a:spLocks noGrp="1"/>
+          </p:cNvSpPr>
+          <p:nvPr>
+            <p:ph type="dt" sz="half" idx="10"/>
+          </p:nvPr>
+        </p:nvSpPr>
+        <p:spPr/>
+        <p:txBody>
+          <a:bodyPr/>
+          <a:lstStyle/>
+          <a:p>
+            <a:r>
+              <a:rPr lang="en-CH"/>
+              <a:t>30/03/2026</a:t>
+            </a:r>
+          </a:p>
+        </p:txBody>
+      </p:sp>
+      <p:sp>
+        <p:nvSpPr>
+          <p:cNvPr id="6" name="Footer Placeholder 5">
+            <a:extLst>
+              <a:ext uri="{FF2B5EF4-FFF2-40B4-BE49-F238E27FC236}">
+                <a16:creationId xmlns:a16="http://schemas.microsoft.com/office/drawing/2014/main" id="{DF860437-8E73-31B9-4ABA-36AA6E6E72AD}"/>
+              </a:ext>
+            </a:extLst>
+          </p:cNvPr>
+          <p:cNvSpPr>
+            <a:spLocks noGrp="1"/>
+          </p:cNvSpPr>
+          <p:nvPr>
+            <p:ph type="ftr" sz="quarter" idx="11"/>
+          </p:nvPr>
+        </p:nvSpPr>
+        <p:spPr/>
+        <p:txBody>
+          <a:bodyPr/>
+          <a:lstStyle/>
+          <a:p>
+            <a:r>
+              <a:rPr lang="en-US"/>
+              <a:t>Eliminating Reentrancy through Language Design</a:t>
+            </a:r>
+            <a:endParaRPr lang="en-CH"/>
+          </a:p>
+        </p:txBody>
+      </p:sp>
+      <p:sp>
+        <p:nvSpPr>
+          <p:cNvPr id="7" name="Slide Number Placeholder 6">
+            <a:extLst>
+              <a:ext uri="{FF2B5EF4-FFF2-40B4-BE49-F238E27FC236}">
+                <a16:creationId xmlns:a16="http://schemas.microsoft.com/office/drawing/2014/main" id="{D8C406F5-71EE-FBE8-90CF-182F580B400A}"/>
+              </a:ext>
+            </a:extLst>
+          </p:cNvPr>
+          <p:cNvSpPr>
+            <a:spLocks noGrp="1"/>
+          </p:cNvSpPr>
+          <p:nvPr>
+            <p:ph type="sldNum" sz="quarter" idx="12"/>
+          </p:nvPr>
+        </p:nvSpPr>
+        <p:spPr/>
+        <p:txBody>
+          <a:bodyPr/>
+          <a:lstStyle/>
+          <a:p>
+            <a:fld id="{1013ED95-016C-42D7-B550-5C99AA40E4D5}" type="slidenum">
+              <a:rPr lang="en-CH" smtClean="0"/>
+              <a:pPr/>
+              <a:t>50</a:t>
+            </a:fld>
+            <a:r>
+              <a:rPr lang="en-CH"/>
+              <a:t> / XX</a:t>
+            </a:r>
+            <a:endParaRPr lang="en-CH" dirty="0"/>
+          </a:p>
+        </p:txBody>
+      </p:sp>
+    </p:spTree>
+    <p:extLst>
+      <p:ext uri="{BB962C8B-B14F-4D97-AF65-F5344CB8AC3E}">
+        <p14:creationId xmlns:p14="http://schemas.microsoft.com/office/powerpoint/2010/main" val="101902366"/>
+      </p:ext>
+    </p:extLst>
+  </p:cSld>
+  <p:clrMapOvr>
+    <a:masterClrMapping/>
+  </p:clrMapOvr>
+</p:sld>
+</file>
+
+<file path=ppt/slides/slide51.xml><?xml version="1.0" encoding="utf-8"?>
 <p:sld xmlns:a="http://schemas.openxmlformats.org/drawingml/2006/main" xmlns:r="http://schemas.openxmlformats.org/officeDocument/2006/relationships" xmlns:p="http://schemas.openxmlformats.org/presentationml/2006/main" show="0">
   <p:cSld>
     <p:spTree>
@@ -51552,7 +51844,7 @@
             <a:fld id="{1013ED95-016C-42D7-B550-5C99AA40E4D5}" type="slidenum">
               <a:rPr lang="en-CH" smtClean="0"/>
               <a:pPr/>
-              <a:t>50</a:t>
+              <a:t>51</a:t>
             </a:fld>
             <a:r>
               <a:rPr lang="en-CH"/>
@@ -51618,7 +51910,7 @@
 </p:sld>
 </file>
 
-<file path=ppt/slides/slide51.xml><?xml version="1.0" encoding="utf-8"?>
+<file path=ppt/slides/slide52.xml><?xml version="1.0" encoding="utf-8"?>
 <p:sld xmlns:a="http://schemas.openxmlformats.org/drawingml/2006/main" xmlns:r="http://schemas.openxmlformats.org/officeDocument/2006/relationships" xmlns:p="http://schemas.openxmlformats.org/presentationml/2006/main" show="0">
   <p:cSld>
     <p:spTree>
@@ -51980,7 +52272,7 @@
             <a:fld id="{1013ED95-016C-42D7-B550-5C99AA40E4D5}" type="slidenum">
               <a:rPr lang="en-CH" smtClean="0"/>
               <a:pPr/>
-              <a:t>51</a:t>
+              <a:t>52</a:t>
             </a:fld>
             <a:r>
               <a:rPr lang="en-CH"/>
@@ -52071,7 +52363,7 @@
 </p:sld>
 </file>
 
-<file path=ppt/slides/slide52.xml><?xml version="1.0" encoding="utf-8"?>
+<file path=ppt/slides/slide53.xml><?xml version="1.0" encoding="utf-8"?>
 <p:sld xmlns:a="http://schemas.openxmlformats.org/drawingml/2006/main" xmlns:r="http://schemas.openxmlformats.org/officeDocument/2006/relationships" xmlns:p="http://schemas.openxmlformats.org/presentationml/2006/main" show="0">
   <p:cSld>
     <p:spTree>
@@ -52610,7 +52902,7 @@
             <a:fld id="{1013ED95-016C-42D7-B550-5C99AA40E4D5}" type="slidenum">
               <a:rPr lang="en-CH" smtClean="0"/>
               <a:pPr/>
-              <a:t>52</a:t>
+              <a:t>53</a:t>
             </a:fld>
             <a:r>
               <a:rPr lang="en-CH"/>
@@ -52719,7 +53011,7 @@
 </p:sld>
 </file>
 
-<file path=ppt/slides/slide53.xml><?xml version="1.0" encoding="utf-8"?>
+<file path=ppt/slides/slide54.xml><?xml version="1.0" encoding="utf-8"?>
 <p:sld xmlns:a="http://schemas.openxmlformats.org/drawingml/2006/main" xmlns:r="http://schemas.openxmlformats.org/officeDocument/2006/relationships" xmlns:p="http://schemas.openxmlformats.org/presentationml/2006/main" show="0">
   <p:cSld>
     <p:spTree>
@@ -53164,7 +53456,7 @@
             <a:fld id="{1013ED95-016C-42D7-B550-5C99AA40E4D5}" type="slidenum">
               <a:rPr lang="en-CH" smtClean="0"/>
               <a:pPr/>
-              <a:t>53</a:t>
+              <a:t>54</a:t>
             </a:fld>
             <a:r>
               <a:rPr lang="en-CH"/>

--- a/doc/presentation/Thesis.pptx
+++ b/doc/presentation/Thesis.pptx
@@ -34133,7 +34133,10 @@
           <a:bodyPr/>
           <a:lstStyle/>
           <a:p>
-            <a:endParaRPr lang="en-CH" dirty="0"/>
+            <a:r>
+              <a:rPr lang="en-CH" dirty="0"/>
+              <a:t>Motivation (WIP)</a:t>
+            </a:r>
           </a:p>
         </p:txBody>
       </p:sp>
@@ -34158,7 +34161,16 @@
           <a:bodyPr/>
           <a:lstStyle/>
           <a:p>
-            <a:endParaRPr lang="en-CH"/>
+            <a:r>
+              <a:rPr lang="en-CH" dirty="0"/>
+              <a:t>bugs expensive</a:t>
+            </a:r>
+          </a:p>
+          <a:p>
+            <a:r>
+              <a:rPr lang="en-CH" dirty="0"/>
+              <a:t>safety good</a:t>
+            </a:r>
           </a:p>
         </p:txBody>
       </p:sp>
@@ -39467,6 +39479,9 @@
             </a:r>
           </a:p>
           <a:p>
+            <a:pPr marL="0" indent="0">
+              <a:buNone/>
+            </a:pPr>
             <a:endParaRPr lang="en-CH" sz="1800" dirty="0"/>
           </a:p>
           <a:p>
@@ -39824,6 +39839,13 @@
             <a:pPr lvl="1"/>
             <a:r>
               <a:rPr lang="en-CH" dirty="0"/>
+              <a:t>Primary goal: enhance auditability</a:t>
+            </a:r>
+          </a:p>
+          <a:p>
+            <a:pPr lvl="1"/>
+            <a:r>
+              <a:rPr lang="en-CH" dirty="0"/>
               <a:t>Difficult to quantify</a:t>
             </a:r>
           </a:p>
@@ -39838,7 +39860,7 @@
             <a:pPr lvl="1"/>
             <a:r>
               <a:rPr lang="en-CH" dirty="0"/>
-              <a:t>Reduces auditing workload</a:t>
+              <a:t>Can be propagated across reentrant calls</a:t>
             </a:r>
           </a:p>
         </p:txBody>
@@ -42097,7 +42119,7 @@
           <a:p>
             <a:r>
               <a:rPr lang="en-CH" dirty="0"/>
-              <a:t>Performance Comparison</a:t>
+              <a:t>Performance Comparison (WIP)</a:t>
             </a:r>
           </a:p>
         </p:txBody>
@@ -42126,6 +42148,13 @@
             <a:r>
               <a:rPr lang="en-CH" dirty="0"/>
               <a:t>mostly in terms of memory usage</a:t>
+            </a:r>
+          </a:p>
+          <a:p>
+            <a:pPr lvl="1"/>
+            <a:r>
+              <a:rPr lang="en-CH" dirty="0"/>
+              <a:t>since my ADTs are garbage</a:t>
             </a:r>
           </a:p>
           <a:p>
@@ -42321,7 +42350,7 @@
           <a:p>
             <a:r>
               <a:rPr lang="en-CH" dirty="0"/>
-              <a:t>Code Overhead</a:t>
+              <a:t>Code Overhead (WIP)</a:t>
             </a:r>
           </a:p>
         </p:txBody>
@@ -43590,7 +43619,7 @@
           <a:bodyPr/>
           <a:lstStyle/>
           <a:p>
-            <a:endParaRPr lang="en-CH"/>
+            <a:endParaRPr lang="en-CH" dirty="0"/>
           </a:p>
         </p:txBody>
       </p:sp>

--- a/doc/presentation/Thesis.pptx
+++ b/doc/presentation/Thesis.pptx
@@ -5,7 +5,7 @@
     <p:sldMasterId id="2147483648" r:id="rId1"/>
   </p:sldMasterIdLst>
   <p:notesMasterIdLst>
-    <p:notesMasterId r:id="rId56"/>
+    <p:notesMasterId r:id="rId57"/>
   </p:notesMasterIdLst>
   <p:sldIdLst>
     <p:sldId id="256" r:id="rId2"/>
@@ -45,23 +45,24 @@
     <p:sldId id="316" r:id="rId36"/>
     <p:sldId id="321" r:id="rId37"/>
     <p:sldId id="322" r:id="rId38"/>
-    <p:sldId id="318" r:id="rId39"/>
-    <p:sldId id="323" r:id="rId40"/>
-    <p:sldId id="329" r:id="rId41"/>
-    <p:sldId id="319" r:id="rId42"/>
-    <p:sldId id="268" r:id="rId43"/>
-    <p:sldId id="330" r:id="rId44"/>
-    <p:sldId id="277" r:id="rId45"/>
-    <p:sldId id="269" r:id="rId46"/>
-    <p:sldId id="328" r:id="rId47"/>
-    <p:sldId id="317" r:id="rId48"/>
-    <p:sldId id="258" r:id="rId49"/>
-    <p:sldId id="326" r:id="rId50"/>
-    <p:sldId id="320" r:id="rId51"/>
-    <p:sldId id="327" r:id="rId52"/>
-    <p:sldId id="274" r:id="rId53"/>
-    <p:sldId id="259" r:id="rId54"/>
-    <p:sldId id="260" r:id="rId55"/>
+    <p:sldId id="323" r:id="rId39"/>
+    <p:sldId id="332" r:id="rId40"/>
+    <p:sldId id="331" r:id="rId41"/>
+    <p:sldId id="329" r:id="rId42"/>
+    <p:sldId id="319" r:id="rId43"/>
+    <p:sldId id="268" r:id="rId44"/>
+    <p:sldId id="330" r:id="rId45"/>
+    <p:sldId id="277" r:id="rId46"/>
+    <p:sldId id="269" r:id="rId47"/>
+    <p:sldId id="328" r:id="rId48"/>
+    <p:sldId id="317" r:id="rId49"/>
+    <p:sldId id="258" r:id="rId50"/>
+    <p:sldId id="326" r:id="rId51"/>
+    <p:sldId id="320" r:id="rId52"/>
+    <p:sldId id="327" r:id="rId53"/>
+    <p:sldId id="274" r:id="rId54"/>
+    <p:sldId id="259" r:id="rId55"/>
+    <p:sldId id="260" r:id="rId56"/>
   </p:sldIdLst>
   <p:sldSz cx="12192000" cy="6858000"/>
   <p:notesSz cx="6858000" cy="9144000"/>
@@ -222,8 +223,9 @@
           <p14:sldIdLst>
             <p14:sldId id="321"/>
             <p14:sldId id="322"/>
-            <p14:sldId id="318"/>
             <p14:sldId id="323"/>
+            <p14:sldId id="332"/>
+            <p14:sldId id="331"/>
           </p14:sldIdLst>
         </p14:section>
         <p14:section name="Conclusion &amp; Future Work" id="{803E403D-1B92-466A-BE97-26C9AB7892A5}">
@@ -3742,7 +3744,7 @@
           <a:p>
             <a:fld id="{A1478CE3-0542-442B-AF7E-6DC0ED069798}" type="datetimeFigureOut">
               <a:rPr lang="en-CH" smtClean="0"/>
-              <a:t>26/03/2026</a:t>
+              <a:t>27/03/2026</a:t>
             </a:fld>
             <a:endParaRPr lang="en-CH"/>
           </a:p>
@@ -4038,6 +4040,13 @@
           </p:nvPr>
         </p:nvSpPr>
         <p:spPr/>
+        <p:txBody>
+          <a:bodyPr/>
+          <a:lstStyle/>
+          <a:p>
+            <a:endParaRPr lang="en-CH"/>
+          </a:p>
+        </p:txBody>
       </p:sp>
       <p:sp>
         <p:nvSpPr>
@@ -4585,7 +4594,7 @@
           <a:p>
             <a:fld id="{ADB26BFD-26FA-41FF-A418-AE5D5C01BD91}" type="slidenum">
               <a:rPr lang="en-CH" smtClean="0"/>
-              <a:t>49</a:t>
+              <a:t>50</a:t>
             </a:fld>
             <a:endParaRPr lang="en-CH"/>
           </a:p>
@@ -40072,14 +40081,14 @@
           <p:nvPr>
             <p:extLst>
               <p:ext uri="{D42A27DB-BD31-4B8C-83A1-F6EECF244321}">
-                <p14:modId xmlns:p14="http://schemas.microsoft.com/office/powerpoint/2010/main" val="196030229"/>
+                <p14:modId xmlns:p14="http://schemas.microsoft.com/office/powerpoint/2010/main" val="502059649"/>
               </p:ext>
             </p:extLst>
           </p:nvPr>
         </p:nvGraphicFramePr>
         <p:xfrm>
-          <a:off x="838200" y="2431574"/>
-          <a:ext cx="7942606" cy="3510280"/>
+          <a:off x="838198" y="2431574"/>
+          <a:ext cx="8603974" cy="3561080"/>
         </p:xfrm>
         <a:graphic>
           <a:graphicData uri="http://schemas.openxmlformats.org/drawingml/2006/table">
@@ -40088,35 +40097,35 @@
                 <a:tableStyleId>{073A0DAA-6AF3-43AB-8588-CEC1D06C72B9}</a:tableStyleId>
               </a:tblPr>
               <a:tblGrid>
-                <a:gridCol w="1663886">
+                <a:gridCol w="1802435">
                   <a:extLst>
                     <a:ext uri="{9D8B030D-6E8A-4147-A177-3AD203B41FA5}">
                       <a16:colId xmlns:a16="http://schemas.microsoft.com/office/drawing/2014/main" val="894599600"/>
                     </a:ext>
                   </a:extLst>
                 </a:gridCol>
-                <a:gridCol w="782558">
+                <a:gridCol w="847720">
                   <a:extLst>
                     <a:ext uri="{9D8B030D-6E8A-4147-A177-3AD203B41FA5}">
                       <a16:colId xmlns:a16="http://schemas.microsoft.com/office/drawing/2014/main" val="203540333"/>
                     </a:ext>
                   </a:extLst>
                 </a:gridCol>
-                <a:gridCol w="1397968">
+                <a:gridCol w="1514375">
                   <a:extLst>
                     <a:ext uri="{9D8B030D-6E8A-4147-A177-3AD203B41FA5}">
                       <a16:colId xmlns:a16="http://schemas.microsoft.com/office/drawing/2014/main" val="1149094040"/>
                     </a:ext>
                   </a:extLst>
                 </a:gridCol>
-                <a:gridCol w="2124000">
+                <a:gridCol w="2300862">
                   <a:extLst>
                     <a:ext uri="{9D8B030D-6E8A-4147-A177-3AD203B41FA5}">
                       <a16:colId xmlns:a16="http://schemas.microsoft.com/office/drawing/2014/main" val="733630150"/>
                     </a:ext>
                   </a:extLst>
                 </a:gridCol>
-                <a:gridCol w="1974194">
+                <a:gridCol w="2138582">
                   <a:extLst>
                     <a:ext uri="{9D8B030D-6E8A-4147-A177-3AD203B41FA5}">
                       <a16:colId xmlns:a16="http://schemas.microsoft.com/office/drawing/2014/main" val="2522803025"/>
@@ -40132,7 +40141,7 @@
                     <a:p>
                       <a:pPr algn="r"/>
                       <a:r>
-                        <a:rPr lang="en-CH" dirty="0"/>
+                        <a:rPr lang="en-CH" sz="2000" dirty="0"/>
                         <a:t>Category</a:t>
                       </a:r>
                     </a:p>
@@ -40175,7 +40184,7 @@
                     <a:p>
                       <a:pPr algn="ctr"/>
                       <a:r>
-                        <a:rPr lang="en-CH" dirty="0"/>
+                        <a:rPr lang="en-CH" sz="2000" dirty="0"/>
                         <a:t>Count</a:t>
                       </a:r>
                     </a:p>
@@ -40218,7 +40227,7 @@
                     <a:p>
                       <a:pPr algn="ctr"/>
                       <a:r>
-                        <a:rPr lang="en-CH" dirty="0"/>
+                        <a:rPr lang="en-CH" sz="2000" dirty="0"/>
                         <a:t>Funds Lost</a:t>
                       </a:r>
                     </a:p>
@@ -40261,7 +40270,7 @@
                     <a:p>
                       <a:pPr algn="ctr"/>
                       <a:r>
-                        <a:rPr lang="en-CH" dirty="0"/>
+                        <a:rPr lang="en-CH" sz="2000" dirty="0"/>
                         <a:t>No Reentrancies</a:t>
                       </a:r>
                     </a:p>
@@ -40304,7 +40313,7 @@
                     <a:p>
                       <a:pPr algn="ctr"/>
                       <a:r>
-                        <a:rPr lang="en-CH" dirty="0"/>
+                        <a:rPr lang="en-CH" sz="2000" dirty="0"/>
                         <a:t>Path-Specific</a:t>
                       </a:r>
                     </a:p>
@@ -40354,7 +40363,7 @@
                     <a:p>
                       <a:pPr algn="r"/>
                       <a:r>
-                        <a:rPr lang="en-CH" dirty="0"/>
+                        <a:rPr lang="en-CH" b="1" dirty="0"/>
                         <a:t>Missing Guard</a:t>
                       </a:r>
                     </a:p>
@@ -40403,7 +40412,7 @@
                     <a:p>
                       <a:pPr algn="r"/>
                       <a:r>
-                        <a:rPr lang="en-CH" dirty="0"/>
+                        <a:rPr lang="en-CH" b="1" dirty="0"/>
                         <a:t>37</a:t>
                       </a:r>
                     </a:p>
@@ -40452,7 +40461,7 @@
                     <a:p>
                       <a:pPr algn="ctr"/>
                       <a:r>
-                        <a:rPr lang="en-CH" dirty="0"/>
+                        <a:rPr lang="en-CH" b="1" dirty="0"/>
                         <a:t>$141 million</a:t>
                       </a:r>
                     </a:p>
@@ -40501,7 +40510,7 @@
                     <a:p>
                       <a:pPr algn="ctr"/>
                       <a:r>
-                        <a:rPr lang="en-CH" dirty="0"/>
+                        <a:rPr lang="en-CH" b="1" dirty="0"/>
                         <a:t>Yes</a:t>
                       </a:r>
                     </a:p>
@@ -40573,7 +40582,7 @@
                     <a:p>
                       <a:pPr algn="r"/>
                       <a:r>
-                        <a:rPr lang="en-CH" dirty="0"/>
+                        <a:rPr lang="en-CH" b="1" dirty="0"/>
                         <a:t>Cross-Protocol</a:t>
                       </a:r>
                     </a:p>
@@ -40624,7 +40633,7 @@
                     <a:p>
                       <a:pPr algn="r"/>
                       <a:r>
-                        <a:rPr lang="en-CH" dirty="0"/>
+                        <a:rPr lang="en-CH" b="1" dirty="0"/>
                         <a:t>6</a:t>
                       </a:r>
                     </a:p>
@@ -40675,7 +40684,7 @@
                     <a:p>
                       <a:pPr algn="ctr"/>
                       <a:r>
-                        <a:rPr lang="en-CH" dirty="0"/>
+                        <a:rPr lang="en-CH" b="1" dirty="0"/>
                         <a:t>$9.6 million</a:t>
                       </a:r>
                     </a:p>
@@ -40726,7 +40735,7 @@
                     <a:p>
                       <a:pPr algn="ctr"/>
                       <a:r>
-                        <a:rPr lang="en-CH" dirty="0"/>
+                        <a:rPr lang="en-CH" b="1" dirty="0"/>
                         <a:t>If upstream protocol uses this compiler</a:t>
                       </a:r>
                     </a:p>
@@ -40800,7 +40809,7 @@
                     <a:p>
                       <a:pPr algn="r"/>
                       <a:r>
-                        <a:rPr lang="en-CH" dirty="0"/>
+                        <a:rPr lang="en-CH" b="1" dirty="0"/>
                         <a:t>Callback Token</a:t>
                       </a:r>
                     </a:p>
@@ -40851,7 +40860,7 @@
                     <a:p>
                       <a:pPr algn="r"/>
                       <a:r>
-                        <a:rPr lang="en-CH" dirty="0"/>
+                        <a:rPr lang="en-CH" b="1" dirty="0"/>
                         <a:t>6</a:t>
                       </a:r>
                     </a:p>
@@ -40902,7 +40911,7 @@
                     <a:p>
                       <a:pPr algn="ctr"/>
                       <a:r>
-                        <a:rPr lang="en-CH" dirty="0"/>
+                        <a:rPr lang="en-CH" b="1" dirty="0"/>
                         <a:t>$57.6 million</a:t>
                       </a:r>
                     </a:p>
@@ -40953,14 +40962,14 @@
                     <a:p>
                       <a:pPr algn="ctr"/>
                       <a:r>
-                        <a:rPr lang="en-CH" dirty="0"/>
+                        <a:rPr lang="en-CH" b="1" dirty="0"/>
                         <a:t>Yes</a:t>
                       </a:r>
                     </a:p>
                     <a:p>
                       <a:pPr algn="ctr"/>
                       <a:r>
-                        <a:rPr lang="en-CH" dirty="0"/>
+                        <a:rPr lang="en-CH" b="1" dirty="0"/>
                         <a:t>(incompatible with the token standard)</a:t>
                       </a:r>
                     </a:p>
@@ -41017,7 +41026,7 @@
                     <a:p>
                       <a:pPr algn="ctr"/>
                       <a:r>
-                        <a:rPr lang="en-CH" dirty="0"/>
+                        <a:rPr lang="en-CH" b="1" dirty="0"/>
                         <a:t>Yes</a:t>
                       </a:r>
                     </a:p>
@@ -41081,7 +41090,7 @@
                     <a:p>
                       <a:pPr algn="r"/>
                       <a:r>
-                        <a:rPr lang="en-CH" dirty="0"/>
+                        <a:rPr lang="en-CH" b="1" dirty="0"/>
                         <a:t>Cross-Function</a:t>
                       </a:r>
                     </a:p>
@@ -41132,7 +41141,7 @@
                     <a:p>
                       <a:pPr algn="r"/>
                       <a:r>
-                        <a:rPr lang="en-CH" dirty="0"/>
+                        <a:rPr lang="en-CH" b="1" dirty="0"/>
                         <a:t>2</a:t>
                       </a:r>
                     </a:p>
@@ -41183,7 +41192,7 @@
                     <a:p>
                       <a:pPr algn="ctr"/>
                       <a:r>
-                        <a:rPr lang="en-CH" dirty="0"/>
+                        <a:rPr lang="en-CH" b="1" dirty="0"/>
                         <a:t>$27.7 million</a:t>
                       </a:r>
                     </a:p>
@@ -41234,7 +41243,7 @@
                     <a:p>
                       <a:pPr algn="ctr"/>
                       <a:r>
-                        <a:rPr lang="en-CH" dirty="0"/>
+                        <a:rPr lang="en-CH" b="1" dirty="0"/>
                         <a:t>No</a:t>
                       </a:r>
                     </a:p>
@@ -41291,7 +41300,7 @@
                     <a:p>
                       <a:pPr algn="ctr"/>
                       <a:r>
-                        <a:rPr lang="en-CH" dirty="0"/>
+                        <a:rPr lang="en-CH" b="1" dirty="0"/>
                         <a:t>Yes</a:t>
                       </a:r>
                     </a:p>
@@ -41355,7 +41364,7 @@
                     <a:p>
                       <a:pPr algn="r"/>
                       <a:r>
-                        <a:rPr lang="en-CH" dirty="0"/>
+                        <a:rPr lang="en-CH" b="1" dirty="0"/>
                         <a:t>Flash Loan</a:t>
                       </a:r>
                     </a:p>
@@ -41406,7 +41415,7 @@
                     <a:p>
                       <a:pPr algn="r"/>
                       <a:r>
-                        <a:rPr lang="en-CH" dirty="0"/>
+                        <a:rPr lang="en-CH" b="1" dirty="0"/>
                         <a:t>2</a:t>
                       </a:r>
                     </a:p>
@@ -41457,7 +41466,7 @@
                     <a:p>
                       <a:pPr algn="ctr"/>
                       <a:r>
-                        <a:rPr lang="en-CH" dirty="0"/>
+                        <a:rPr lang="en-CH" b="1" dirty="0"/>
                         <a:t>$5.7 million</a:t>
                       </a:r>
                     </a:p>
@@ -41508,7 +41517,7 @@
                     <a:p>
                       <a:pPr algn="ctr"/>
                       <a:r>
-                        <a:rPr lang="en-CH" dirty="0"/>
+                        <a:rPr lang="en-CH" b="1" dirty="0"/>
                         <a:t>No</a:t>
                       </a:r>
                     </a:p>
@@ -41565,7 +41574,7 @@
                     <a:p>
                       <a:pPr algn="ctr"/>
                       <a:r>
-                        <a:rPr lang="en-CH" dirty="0"/>
+                        <a:rPr lang="en-CH" b="1" dirty="0"/>
                         <a:t>Yes</a:t>
                       </a:r>
                     </a:p>
@@ -41629,7 +41638,7 @@
                     <a:p>
                       <a:pPr algn="r"/>
                       <a:r>
-                        <a:rPr lang="en-CH" dirty="0"/>
+                        <a:rPr lang="en-CH" b="1" dirty="0"/>
                         <a:t>Compiler Bug</a:t>
                       </a:r>
                     </a:p>
@@ -41678,7 +41687,7 @@
                     <a:p>
                       <a:pPr algn="r"/>
                       <a:r>
-                        <a:rPr lang="en-CH" dirty="0"/>
+                        <a:rPr lang="en-CH" b="1" dirty="0"/>
                         <a:t>1</a:t>
                       </a:r>
                     </a:p>
@@ -41727,7 +41736,7 @@
                     <a:p>
                       <a:pPr algn="ctr"/>
                       <a:r>
-                        <a:rPr lang="en-CH" dirty="0"/>
+                        <a:rPr lang="en-CH" b="1" dirty="0"/>
                         <a:t>$41 million</a:t>
                       </a:r>
                     </a:p>
@@ -41776,7 +41785,7 @@
                     <a:p>
                       <a:pPr algn="ctr"/>
                       <a:r>
-                        <a:rPr lang="en-CH" dirty="0"/>
+                        <a:rPr lang="en-CH" b="1" dirty="0"/>
                         <a:t>Unclear</a:t>
                       </a:r>
                     </a:p>
@@ -41848,7 +41857,7 @@
                     <a:p>
                       <a:pPr algn="r"/>
                       <a:r>
-                        <a:rPr lang="en-CH" dirty="0"/>
+                        <a:rPr lang="en-CH" sz="2000" dirty="0"/>
                         <a:t>Total</a:t>
                       </a:r>
                     </a:p>
@@ -41891,7 +41900,7 @@
                     <a:p>
                       <a:pPr algn="r"/>
                       <a:r>
-                        <a:rPr lang="en-CH" dirty="0"/>
+                        <a:rPr lang="en-CH" sz="2000" dirty="0"/>
                         <a:t>54</a:t>
                       </a:r>
                     </a:p>
@@ -41934,7 +41943,7 @@
                     <a:p>
                       <a:pPr algn="r"/>
                       <a:r>
-                        <a:rPr lang="en-CH" dirty="0"/>
+                        <a:rPr lang="en-CH" sz="2000" dirty="0"/>
                         <a:t>$187 million</a:t>
                       </a:r>
                     </a:p>
@@ -41977,7 +41986,7 @@
                     <a:p>
                       <a:pPr algn="ctr"/>
                       <a:r>
-                        <a:rPr lang="en-CH" dirty="0"/>
+                        <a:rPr lang="en-CH" sz="2000" dirty="0"/>
                         <a:t>49/54</a:t>
                       </a:r>
                     </a:p>
@@ -42020,7 +42029,7 @@
                     <a:p>
                       <a:pPr algn="ctr"/>
                       <a:r>
-                        <a:rPr lang="en-CH" dirty="0"/>
+                        <a:rPr lang="en-CH" sz="2000" dirty="0"/>
                         <a:t>53/54</a:t>
                       </a:r>
                     </a:p>
@@ -42101,237 +42110,6 @@
           <p:cNvPr id="2" name="Title 1">
             <a:extLst>
               <a:ext uri="{FF2B5EF4-FFF2-40B4-BE49-F238E27FC236}">
-                <a16:creationId xmlns:a16="http://schemas.microsoft.com/office/drawing/2014/main" id="{AF9BC46B-551E-AB41-F6BD-AD90740DD9EE}"/>
-              </a:ext>
-            </a:extLst>
-          </p:cNvPr>
-          <p:cNvSpPr>
-            <a:spLocks noGrp="1"/>
-          </p:cNvSpPr>
-          <p:nvPr>
-            <p:ph type="title"/>
-          </p:nvPr>
-        </p:nvSpPr>
-        <p:spPr/>
-        <p:txBody>
-          <a:bodyPr/>
-          <a:lstStyle/>
-          <a:p>
-            <a:r>
-              <a:rPr lang="en-CH" dirty="0"/>
-              <a:t>Performance Comparison (WIP)</a:t>
-            </a:r>
-          </a:p>
-        </p:txBody>
-      </p:sp>
-      <p:sp>
-        <p:nvSpPr>
-          <p:cNvPr id="3" name="Content Placeholder 2">
-            <a:extLst>
-              <a:ext uri="{FF2B5EF4-FFF2-40B4-BE49-F238E27FC236}">
-                <a16:creationId xmlns:a16="http://schemas.microsoft.com/office/drawing/2014/main" id="{B5DF9B8A-D3FB-DCE7-91C8-0078921B07EE}"/>
-              </a:ext>
-            </a:extLst>
-          </p:cNvPr>
-          <p:cNvSpPr>
-            <a:spLocks noGrp="1"/>
-          </p:cNvSpPr>
-          <p:nvPr>
-            <p:ph idx="1"/>
-          </p:nvPr>
-        </p:nvSpPr>
-        <p:spPr/>
-        <p:txBody>
-          <a:bodyPr/>
-          <a:lstStyle/>
-          <a:p>
-            <a:r>
-              <a:rPr lang="en-CH" dirty="0"/>
-              <a:t>mostly in terms of memory usage</a:t>
-            </a:r>
-          </a:p>
-          <a:p>
-            <a:pPr lvl="1"/>
-            <a:r>
-              <a:rPr lang="en-CH" dirty="0"/>
-              <a:t>since my ADTs are garbage</a:t>
-            </a:r>
-          </a:p>
-          <a:p>
-            <a:r>
-              <a:rPr lang="en-CH" dirty="0"/>
-              <a:t>how much do reentrancy checks cost?</a:t>
-            </a:r>
-          </a:p>
-          <a:p>
-            <a:pPr lvl="1"/>
-            <a:r>
-              <a:rPr lang="en-CH" dirty="0"/>
-              <a:t>difficult to quantify, since storage &gt;&gt; memory so it’s not really comparable</a:t>
-            </a:r>
-          </a:p>
-          <a:p>
-            <a:pPr lvl="1"/>
-            <a:r>
-              <a:rPr lang="en-CH" dirty="0"/>
-              <a:t>but can actually perform better than existing tools -&gt; </a:t>
-            </a:r>
-            <a:r>
-              <a:rPr lang="en-CH" dirty="0" err="1"/>
-              <a:t>compi</a:t>
-            </a:r>
-            <a:r>
-              <a:rPr lang="en-US" dirty="0"/>
-              <a:t>le</a:t>
-            </a:r>
-            <a:r>
-              <a:rPr lang="en-CH" dirty="0"/>
-              <a:t>r could choose cheapest sufficient check (i.e. not writing reentrancy guard to storage if no external calls are made)</a:t>
-            </a:r>
-          </a:p>
-        </p:txBody>
-      </p:sp>
-      <p:sp>
-        <p:nvSpPr>
-          <p:cNvPr id="4" name="Date Placeholder 3">
-            <a:extLst>
-              <a:ext uri="{FF2B5EF4-FFF2-40B4-BE49-F238E27FC236}">
-                <a16:creationId xmlns:a16="http://schemas.microsoft.com/office/drawing/2014/main" id="{EF92E660-6274-CAB3-1E76-E66D6392CD9C}"/>
-              </a:ext>
-            </a:extLst>
-          </p:cNvPr>
-          <p:cNvSpPr>
-            <a:spLocks noGrp="1"/>
-          </p:cNvSpPr>
-          <p:nvPr>
-            <p:ph type="dt" sz="half" idx="10"/>
-          </p:nvPr>
-        </p:nvSpPr>
-        <p:spPr>
-          <a:xfrm>
-            <a:off x="838200" y="6356350"/>
-            <a:ext cx="2743200" cy="365125"/>
-          </a:xfrm>
-        </p:spPr>
-        <p:txBody>
-          <a:bodyPr/>
-          <a:lstStyle/>
-          <a:p>
-            <a:r>
-              <a:rPr lang="en-CH"/>
-              <a:t>30/03/2026</a:t>
-            </a:r>
-          </a:p>
-        </p:txBody>
-      </p:sp>
-      <p:sp>
-        <p:nvSpPr>
-          <p:cNvPr id="5" name="Footer Placeholder 4">
-            <a:extLst>
-              <a:ext uri="{FF2B5EF4-FFF2-40B4-BE49-F238E27FC236}">
-                <a16:creationId xmlns:a16="http://schemas.microsoft.com/office/drawing/2014/main" id="{B688E735-1875-850E-7082-26F73F6C97B4}"/>
-              </a:ext>
-            </a:extLst>
-          </p:cNvPr>
-          <p:cNvSpPr>
-            <a:spLocks noGrp="1"/>
-          </p:cNvSpPr>
-          <p:nvPr>
-            <p:ph type="ftr" sz="quarter" idx="11"/>
-          </p:nvPr>
-        </p:nvSpPr>
-        <p:spPr>
-          <a:xfrm>
-            <a:off x="4038600" y="6356350"/>
-            <a:ext cx="4114800" cy="365125"/>
-          </a:xfrm>
-        </p:spPr>
-        <p:txBody>
-          <a:bodyPr/>
-          <a:lstStyle/>
-          <a:p>
-            <a:r>
-              <a:rPr lang="en-US"/>
-              <a:t>Eliminating Reentrancy through Language Design</a:t>
-            </a:r>
-            <a:endParaRPr lang="en-CH"/>
-          </a:p>
-        </p:txBody>
-      </p:sp>
-      <p:sp>
-        <p:nvSpPr>
-          <p:cNvPr id="6" name="Slide Number Placeholder 5">
-            <a:extLst>
-              <a:ext uri="{FF2B5EF4-FFF2-40B4-BE49-F238E27FC236}">
-                <a16:creationId xmlns:a16="http://schemas.microsoft.com/office/drawing/2014/main" id="{B6D2D1F0-66B8-C97A-37DE-4CEB717B674C}"/>
-              </a:ext>
-            </a:extLst>
-          </p:cNvPr>
-          <p:cNvSpPr>
-            <a:spLocks noGrp="1"/>
-          </p:cNvSpPr>
-          <p:nvPr>
-            <p:ph type="sldNum" sz="quarter" idx="12"/>
-          </p:nvPr>
-        </p:nvSpPr>
-        <p:spPr>
-          <a:xfrm>
-            <a:off x="8610600" y="6356350"/>
-            <a:ext cx="2743200" cy="365125"/>
-          </a:xfrm>
-        </p:spPr>
-        <p:txBody>
-          <a:bodyPr/>
-          <a:lstStyle/>
-          <a:p>
-            <a:fld id="{1013ED95-016C-42D7-B550-5C99AA40E4D5}" type="slidenum">
-              <a:rPr lang="en-CH" smtClean="0"/>
-              <a:pPr/>
-              <a:t>38</a:t>
-            </a:fld>
-            <a:r>
-              <a:rPr lang="en-CH"/>
-              <a:t> / XX</a:t>
-            </a:r>
-            <a:endParaRPr lang="en-CH" dirty="0"/>
-          </a:p>
-        </p:txBody>
-      </p:sp>
-    </p:spTree>
-    <p:extLst>
-      <p:ext uri="{BB962C8B-B14F-4D97-AF65-F5344CB8AC3E}">
-        <p14:creationId xmlns:p14="http://schemas.microsoft.com/office/powerpoint/2010/main" val="3913272762"/>
-      </p:ext>
-    </p:extLst>
-  </p:cSld>
-  <p:clrMapOvr>
-    <a:masterClrMapping/>
-  </p:clrMapOvr>
-</p:sld>
-</file>
-
-<file path=ppt/slides/slide39.xml><?xml version="1.0" encoding="utf-8"?>
-<p:sld xmlns:a="http://schemas.openxmlformats.org/drawingml/2006/main" xmlns:r="http://schemas.openxmlformats.org/officeDocument/2006/relationships" xmlns:p="http://schemas.openxmlformats.org/presentationml/2006/main">
-  <p:cSld>
-    <p:spTree>
-      <p:nvGrpSpPr>
-        <p:cNvPr id="1" name=""/>
-        <p:cNvGrpSpPr/>
-        <p:nvPr/>
-      </p:nvGrpSpPr>
-      <p:grpSpPr>
-        <a:xfrm>
-          <a:off x="0" y="0"/>
-          <a:ext cx="0" cy="0"/>
-          <a:chOff x="0" y="0"/>
-          <a:chExt cx="0" cy="0"/>
-        </a:xfrm>
-      </p:grpSpPr>
-      <p:sp>
-        <p:nvSpPr>
-          <p:cNvPr id="2" name="Title 1">
-            <a:extLst>
-              <a:ext uri="{FF2B5EF4-FFF2-40B4-BE49-F238E27FC236}">
                 <a16:creationId xmlns:a16="http://schemas.microsoft.com/office/drawing/2014/main" id="{7F88D1DC-16BA-AC15-FD23-2C9971E3498B}"/>
               </a:ext>
             </a:extLst>
@@ -42350,7 +42128,7 @@
           <a:p>
             <a:r>
               <a:rPr lang="en-CH" dirty="0"/>
-              <a:t>Code Overhead (WIP)</a:t>
+              <a:t>Overhead Comparison</a:t>
             </a:r>
           </a:p>
         </p:txBody>
@@ -42373,27 +42151,64 @@
         </p:nvSpPr>
         <p:spPr/>
         <p:txBody>
-          <a:bodyPr/>
+          <a:bodyPr>
+            <a:normAutofit/>
+          </a:bodyPr>
           <a:lstStyle/>
           <a:p>
-            <a:r>
-              <a:rPr lang="en-CH" dirty="0"/>
-              <a:t>how many additional lines of code, etc?</a:t>
-            </a:r>
-          </a:p>
-          <a:p>
-            <a:pPr lvl="1"/>
-            <a:r>
-              <a:rPr lang="en-CH" dirty="0"/>
-              <a:t>kind of need a full rewrite of a real-world protocol to compare</a:t>
-            </a:r>
-          </a:p>
-          <a:p>
-            <a:pPr lvl="1"/>
-            <a:r>
-              <a:rPr lang="en-CH" dirty="0"/>
-              <a:t>that sounds like fun</a:t>
-            </a:r>
+            <a:pPr marL="0" indent="0">
+              <a:buNone/>
+            </a:pPr>
+            <a:r>
+              <a:rPr lang="en-CH" b="1" dirty="0"/>
+              <a:t>Performance:</a:t>
+            </a:r>
+          </a:p>
+          <a:p>
+            <a:r>
+              <a:rPr lang="en-CH" dirty="0"/>
+              <a:t>Main performance difference: Reentrancy guards </a:t>
+            </a:r>
+            <a:r>
+              <a:rPr lang="en-CH" sz="2400" dirty="0">
+                <a:solidFill>
+                  <a:schemeClr val="tx2"/>
+                </a:solidFill>
+              </a:rPr>
+              <a:t>(see next slide)</a:t>
+            </a:r>
+            <a:endParaRPr lang="en-CH" dirty="0">
+              <a:solidFill>
+                <a:schemeClr val="tx2"/>
+              </a:solidFill>
+            </a:endParaRPr>
+          </a:p>
+          <a:p>
+            <a:r>
+              <a:rPr lang="en-CH" dirty="0"/>
+              <a:t>Significant potential savings in ADT-heavy code</a:t>
+            </a:r>
+          </a:p>
+          <a:p>
+            <a:pPr marL="0" indent="0">
+              <a:buNone/>
+            </a:pPr>
+            <a:endParaRPr lang="en-CH" sz="2400" dirty="0"/>
+          </a:p>
+          <a:p>
+            <a:pPr marL="0" indent="0">
+              <a:buNone/>
+            </a:pPr>
+            <a:r>
+              <a:rPr lang="en-CH" b="1" dirty="0"/>
+              <a:t>Coding:</a:t>
+            </a:r>
+          </a:p>
+          <a:p>
+            <a:pPr marL="0" indent="0">
+              <a:buNone/>
+            </a:pPr>
+            <a:endParaRPr lang="en-CH" dirty="0"/>
           </a:p>
         </p:txBody>
       </p:sp>
@@ -42493,7 +42308,7 @@
             <a:fld id="{1013ED95-016C-42D7-B550-5C99AA40E4D5}" type="slidenum">
               <a:rPr lang="en-CH" smtClean="0"/>
               <a:pPr/>
-              <a:t>39</a:t>
+              <a:t>38</a:t>
             </a:fld>
             <a:r>
               <a:rPr lang="en-CH"/>
@@ -42503,10 +42318,1930 @@
           </a:p>
         </p:txBody>
       </p:sp>
+      <p:graphicFrame>
+        <p:nvGraphicFramePr>
+          <p:cNvPr id="7" name="Table 6">
+            <a:extLst>
+              <a:ext uri="{FF2B5EF4-FFF2-40B4-BE49-F238E27FC236}">
+                <a16:creationId xmlns:a16="http://schemas.microsoft.com/office/drawing/2014/main" id="{7A2B1DDB-C8AC-1FC3-F363-6730D34CB74A}"/>
+              </a:ext>
+            </a:extLst>
+          </p:cNvPr>
+          <p:cNvGraphicFramePr>
+            <a:graphicFrameLocks noGrp="1"/>
+          </p:cNvGraphicFramePr>
+          <p:nvPr>
+            <p:extLst>
+              <p:ext uri="{D42A27DB-BD31-4B8C-83A1-F6EECF244321}">
+                <p14:modId xmlns:p14="http://schemas.microsoft.com/office/powerpoint/2010/main" val="3375629787"/>
+              </p:ext>
+            </p:extLst>
+          </p:nvPr>
+        </p:nvGraphicFramePr>
+        <p:xfrm>
+          <a:off x="5614622" y="3682683"/>
+          <a:ext cx="5739178" cy="2494280"/>
+        </p:xfrm>
+        <a:graphic>
+          <a:graphicData uri="http://schemas.openxmlformats.org/drawingml/2006/table">
+            <a:tbl>
+              <a:tblPr firstRow="1" firstCol="1" bandRow="1">
+                <a:tableStyleId>{073A0DAA-6AF3-43AB-8588-CEC1D06C72B9}</a:tableStyleId>
+              </a:tblPr>
+              <a:tblGrid>
+                <a:gridCol w="1800000">
+                  <a:extLst>
+                    <a:ext uri="{9D8B030D-6E8A-4147-A177-3AD203B41FA5}">
+                      <a16:colId xmlns:a16="http://schemas.microsoft.com/office/drawing/2014/main" val="2755551792"/>
+                    </a:ext>
+                  </a:extLst>
+                </a:gridCol>
+                <a:gridCol w="770213">
+                  <a:extLst>
+                    <a:ext uri="{9D8B030D-6E8A-4147-A177-3AD203B41FA5}">
+                      <a16:colId xmlns:a16="http://schemas.microsoft.com/office/drawing/2014/main" val="1949588284"/>
+                    </a:ext>
+                  </a:extLst>
+                </a:gridCol>
+                <a:gridCol w="847659">
+                  <a:extLst>
+                    <a:ext uri="{9D8B030D-6E8A-4147-A177-3AD203B41FA5}">
+                      <a16:colId xmlns:a16="http://schemas.microsoft.com/office/drawing/2014/main" val="2857384281"/>
+                    </a:ext>
+                  </a:extLst>
+                </a:gridCol>
+                <a:gridCol w="1317461">
+                  <a:extLst>
+                    <a:ext uri="{9D8B030D-6E8A-4147-A177-3AD203B41FA5}">
+                      <a16:colId xmlns:a16="http://schemas.microsoft.com/office/drawing/2014/main" val="2320543094"/>
+                    </a:ext>
+                  </a:extLst>
+                </a:gridCol>
+                <a:gridCol w="1003845">
+                  <a:extLst>
+                    <a:ext uri="{9D8B030D-6E8A-4147-A177-3AD203B41FA5}">
+                      <a16:colId xmlns:a16="http://schemas.microsoft.com/office/drawing/2014/main" val="2674435153"/>
+                    </a:ext>
+                  </a:extLst>
+                </a:gridCol>
+              </a:tblGrid>
+              <a:tr h="370840">
+                <a:tc>
+                  <a:txBody>
+                    <a:bodyPr/>
+                    <a:lstStyle/>
+                    <a:p>
+                      <a:r>
+                        <a:rPr lang="en-CH" dirty="0"/>
+                        <a:t>Contract</a:t>
+                      </a:r>
+                    </a:p>
+                  </a:txBody>
+                  <a:tcPr>
+                    <a:lnL w="12700" cmpd="sng">
+                      <a:noFill/>
+                    </a:lnL>
+                    <a:lnR w="12700" cmpd="sng">
+                      <a:noFill/>
+                    </a:lnR>
+                    <a:lnT w="12700" cmpd="sng">
+                      <a:noFill/>
+                    </a:lnT>
+                    <a:lnB w="38100" cmpd="sng">
+                      <a:noFill/>
+                    </a:lnB>
+                    <a:lnTlToBr w="12700" cmpd="sng">
+                      <a:noFill/>
+                      <a:prstDash val="solid"/>
+                    </a:lnTlToBr>
+                    <a:lnBlToTr w="12700" cmpd="sng">
+                      <a:noFill/>
+                      <a:prstDash val="solid"/>
+                    </a:lnBlToTr>
+                  </a:tcPr>
+                </a:tc>
+                <a:tc>
+                  <a:txBody>
+                    <a:bodyPr/>
+                    <a:lstStyle/>
+                    <a:p>
+                      <a:pPr algn="ctr"/>
+                      <a:r>
+                        <a:rPr lang="en-CH" dirty="0"/>
+                        <a:t>State vars</a:t>
+                      </a:r>
+                    </a:p>
+                  </a:txBody>
+                  <a:tcPr>
+                    <a:lnL w="12700" cmpd="sng">
+                      <a:noFill/>
+                    </a:lnL>
+                    <a:lnR w="12700" cmpd="sng">
+                      <a:noFill/>
+                    </a:lnR>
+                    <a:lnT w="12700" cmpd="sng">
+                      <a:noFill/>
+                    </a:lnT>
+                    <a:lnB w="38100" cmpd="sng">
+                      <a:noFill/>
+                    </a:lnB>
+                    <a:lnTlToBr w="12700" cmpd="sng">
+                      <a:noFill/>
+                      <a:prstDash val="solid"/>
+                    </a:lnTlToBr>
+                    <a:lnBlToTr w="12700" cmpd="sng">
+                      <a:noFill/>
+                      <a:prstDash val="solid"/>
+                    </a:lnBlToTr>
+                  </a:tcPr>
+                </a:tc>
+                <a:tc>
+                  <a:txBody>
+                    <a:bodyPr/>
+                    <a:lstStyle/>
+                    <a:p>
+                      <a:pPr algn="ctr"/>
+                      <a:r>
+                        <a:rPr lang="en-CH" dirty="0"/>
+                        <a:t>LoC</a:t>
+                      </a:r>
+                    </a:p>
+                  </a:txBody>
+                  <a:tcPr>
+                    <a:lnL w="12700" cmpd="sng">
+                      <a:noFill/>
+                    </a:lnL>
+                    <a:lnR w="12700" cmpd="sng">
+                      <a:noFill/>
+                    </a:lnR>
+                    <a:lnT w="12700" cmpd="sng">
+                      <a:noFill/>
+                    </a:lnT>
+                    <a:lnB w="38100" cmpd="sng">
+                      <a:noFill/>
+                    </a:lnB>
+                    <a:lnTlToBr w="12700" cmpd="sng">
+                      <a:noFill/>
+                      <a:prstDash val="solid"/>
+                    </a:lnTlToBr>
+                    <a:lnBlToTr w="12700" cmpd="sng">
+                      <a:noFill/>
+                      <a:prstDash val="solid"/>
+                    </a:lnBlToTr>
+                  </a:tcPr>
+                </a:tc>
+                <a:tc>
+                  <a:txBody>
+                    <a:bodyPr/>
+                    <a:lstStyle/>
+                    <a:p>
+                      <a:pPr algn="ctr"/>
+                      <a:r>
+                        <a:rPr lang="en-CH" dirty="0"/>
+                        <a:t>Function signatures</a:t>
+                      </a:r>
+                    </a:p>
+                  </a:txBody>
+                  <a:tcPr>
+                    <a:lnL w="12700" cmpd="sng">
+                      <a:noFill/>
+                    </a:lnL>
+                    <a:lnR w="12700" cmpd="sng">
+                      <a:noFill/>
+                    </a:lnR>
+                    <a:lnT w="12700" cmpd="sng">
+                      <a:noFill/>
+                    </a:lnT>
+                    <a:lnB w="38100" cmpd="sng">
+                      <a:noFill/>
+                    </a:lnB>
+                    <a:lnTlToBr w="12700" cmpd="sng">
+                      <a:noFill/>
+                      <a:prstDash val="solid"/>
+                    </a:lnTlToBr>
+                    <a:lnBlToTr w="12700" cmpd="sng">
+                      <a:noFill/>
+                      <a:prstDash val="solid"/>
+                    </a:lnBlToTr>
+                  </a:tcPr>
+                </a:tc>
+                <a:tc>
+                  <a:txBody>
+                    <a:bodyPr/>
+                    <a:lstStyle/>
+                    <a:p>
+                      <a:pPr algn="ctr"/>
+                      <a:r>
+                        <a:rPr lang="en-CH" dirty="0"/>
+                        <a:t>Inline effects</a:t>
+                      </a:r>
+                    </a:p>
+                  </a:txBody>
+                  <a:tcPr>
+                    <a:lnL w="12700" cmpd="sng">
+                      <a:noFill/>
+                    </a:lnL>
+                    <a:lnR w="12700" cmpd="sng">
+                      <a:noFill/>
+                    </a:lnR>
+                    <a:lnT w="12700" cmpd="sng">
+                      <a:noFill/>
+                    </a:lnT>
+                    <a:lnB w="38100" cmpd="sng">
+                      <a:noFill/>
+                    </a:lnB>
+                    <a:lnTlToBr w="12700" cmpd="sng">
+                      <a:noFill/>
+                      <a:prstDash val="solid"/>
+                    </a:lnTlToBr>
+                    <a:lnBlToTr w="12700" cmpd="sng">
+                      <a:noFill/>
+                      <a:prstDash val="solid"/>
+                    </a:lnBlToTr>
+                  </a:tcPr>
+                </a:tc>
+                <a:extLst>
+                  <a:ext uri="{0D108BD9-81ED-4DB2-BD59-A6C34878D82A}">
+                    <a16:rowId xmlns:a16="http://schemas.microsoft.com/office/drawing/2014/main" val="3008876423"/>
+                  </a:ext>
+                </a:extLst>
+              </a:tr>
+              <a:tr h="370840">
+                <a:tc>
+                  <a:txBody>
+                    <a:bodyPr/>
+                    <a:lstStyle/>
+                    <a:p>
+                      <a:r>
+                        <a:rPr lang="en-CH" dirty="0"/>
+                        <a:t>ERC20</a:t>
+                      </a:r>
+                    </a:p>
+                  </a:txBody>
+                  <a:tcPr>
+                    <a:lnL w="12700" cmpd="sng">
+                      <a:noFill/>
+                    </a:lnL>
+                    <a:lnR w="12700" cmpd="sng">
+                      <a:noFill/>
+                    </a:lnR>
+                    <a:lnT w="38100" cmpd="sng">
+                      <a:noFill/>
+                    </a:lnT>
+                    <a:lnB w="12700" cmpd="sng">
+                      <a:noFill/>
+                    </a:lnB>
+                    <a:lnTlToBr w="12700" cmpd="sng">
+                      <a:noFill/>
+                      <a:prstDash val="solid"/>
+                    </a:lnTlToBr>
+                    <a:lnBlToTr w="12700" cmpd="sng">
+                      <a:noFill/>
+                      <a:prstDash val="solid"/>
+                    </a:lnBlToTr>
+                  </a:tcPr>
+                </a:tc>
+                <a:tc>
+                  <a:txBody>
+                    <a:bodyPr/>
+                    <a:lstStyle/>
+                    <a:p>
+                      <a:pPr algn="r"/>
+                      <a:r>
+                        <a:rPr lang="en-CH" dirty="0"/>
+                        <a:t>6</a:t>
+                      </a:r>
+                    </a:p>
+                  </a:txBody>
+                  <a:tcPr>
+                    <a:lnL w="12700" cmpd="sng">
+                      <a:noFill/>
+                    </a:lnL>
+                    <a:lnR w="12700" cmpd="sng">
+                      <a:noFill/>
+                    </a:lnR>
+                    <a:lnT w="38100" cmpd="sng">
+                      <a:noFill/>
+                    </a:lnT>
+                    <a:lnB w="12700" cmpd="sng">
+                      <a:noFill/>
+                    </a:lnB>
+                    <a:lnTlToBr w="12700" cmpd="sng">
+                      <a:noFill/>
+                      <a:prstDash val="solid"/>
+                    </a:lnTlToBr>
+                    <a:lnBlToTr w="12700" cmpd="sng">
+                      <a:noFill/>
+                      <a:prstDash val="solid"/>
+                    </a:lnBlToTr>
+                  </a:tcPr>
+                </a:tc>
+                <a:tc>
+                  <a:txBody>
+                    <a:bodyPr/>
+                    <a:lstStyle/>
+                    <a:p>
+                      <a:pPr algn="r"/>
+                      <a:r>
+                        <a:rPr lang="en-CH" dirty="0"/>
+                        <a:t>~50</a:t>
+                      </a:r>
+                    </a:p>
+                  </a:txBody>
+                  <a:tcPr>
+                    <a:lnL w="12700" cmpd="sng">
+                      <a:noFill/>
+                    </a:lnL>
+                    <a:lnR w="12700" cmpd="sng">
+                      <a:noFill/>
+                    </a:lnR>
+                    <a:lnT w="38100" cmpd="sng">
+                      <a:noFill/>
+                    </a:lnT>
+                    <a:lnB w="12700" cmpd="sng">
+                      <a:noFill/>
+                    </a:lnB>
+                    <a:lnTlToBr w="12700" cmpd="sng">
+                      <a:noFill/>
+                      <a:prstDash val="solid"/>
+                    </a:lnTlToBr>
+                    <a:lnBlToTr w="12700" cmpd="sng">
+                      <a:noFill/>
+                      <a:prstDash val="solid"/>
+                    </a:lnBlToTr>
+                  </a:tcPr>
+                </a:tc>
+                <a:tc>
+                  <a:txBody>
+                    <a:bodyPr/>
+                    <a:lstStyle/>
+                    <a:p>
+                      <a:pPr algn="r"/>
+                      <a:r>
+                        <a:rPr lang="en-CH" dirty="0"/>
+                        <a:t>6 (12)</a:t>
+                      </a:r>
+                    </a:p>
+                  </a:txBody>
+                  <a:tcPr>
+                    <a:lnL w="12700" cmpd="sng">
+                      <a:noFill/>
+                    </a:lnL>
+                    <a:lnR w="12700" cmpd="sng">
+                      <a:noFill/>
+                    </a:lnR>
+                    <a:lnT w="38100" cmpd="sng">
+                      <a:noFill/>
+                    </a:lnT>
+                    <a:lnB w="12700" cmpd="sng">
+                      <a:noFill/>
+                    </a:lnB>
+                    <a:lnTlToBr w="12700" cmpd="sng">
+                      <a:noFill/>
+                      <a:prstDash val="solid"/>
+                    </a:lnTlToBr>
+                    <a:lnBlToTr w="12700" cmpd="sng">
+                      <a:noFill/>
+                      <a:prstDash val="solid"/>
+                    </a:lnBlToTr>
+                  </a:tcPr>
+                </a:tc>
+                <a:tc>
+                  <a:txBody>
+                    <a:bodyPr/>
+                    <a:lstStyle/>
+                    <a:p>
+                      <a:pPr algn="r"/>
+                      <a:r>
+                        <a:rPr lang="en-CH" dirty="0"/>
+                        <a:t>2 (4)</a:t>
+                      </a:r>
+                    </a:p>
+                  </a:txBody>
+                  <a:tcPr>
+                    <a:lnL w="12700" cmpd="sng">
+                      <a:noFill/>
+                    </a:lnL>
+                    <a:lnR w="12700" cmpd="sng">
+                      <a:noFill/>
+                    </a:lnR>
+                    <a:lnT w="38100" cmpd="sng">
+                      <a:noFill/>
+                    </a:lnT>
+                    <a:lnB w="12700" cmpd="sng">
+                      <a:noFill/>
+                    </a:lnB>
+                    <a:lnTlToBr w="12700" cmpd="sng">
+                      <a:noFill/>
+                      <a:prstDash val="solid"/>
+                    </a:lnTlToBr>
+                    <a:lnBlToTr w="12700" cmpd="sng">
+                      <a:noFill/>
+                      <a:prstDash val="solid"/>
+                    </a:lnBlToTr>
+                  </a:tcPr>
+                </a:tc>
+                <a:extLst>
+                  <a:ext uri="{0D108BD9-81ED-4DB2-BD59-A6C34878D82A}">
+                    <a16:rowId xmlns:a16="http://schemas.microsoft.com/office/drawing/2014/main" val="1984177995"/>
+                  </a:ext>
+                </a:extLst>
+              </a:tr>
+              <a:tr h="370840">
+                <a:tc>
+                  <a:txBody>
+                    <a:bodyPr/>
+                    <a:lstStyle/>
+                    <a:p>
+                      <a:r>
+                        <a:rPr lang="en-CH" dirty="0"/>
+                        <a:t>Simple DEX</a:t>
+                      </a:r>
+                    </a:p>
+                  </a:txBody>
+                  <a:tcPr>
+                    <a:lnL w="12700" cmpd="sng">
+                      <a:noFill/>
+                    </a:lnL>
+                    <a:lnR w="12700" cmpd="sng">
+                      <a:noFill/>
+                    </a:lnR>
+                    <a:lnT w="12700" cmpd="sng">
+                      <a:noFill/>
+                    </a:lnT>
+                    <a:lnB w="12700" cmpd="sng">
+                      <a:noFill/>
+                    </a:lnB>
+                    <a:lnTlToBr w="12700" cmpd="sng">
+                      <a:noFill/>
+                      <a:prstDash val="solid"/>
+                    </a:lnTlToBr>
+                    <a:lnBlToTr w="12700" cmpd="sng">
+                      <a:noFill/>
+                      <a:prstDash val="solid"/>
+                    </a:lnBlToTr>
+                  </a:tcPr>
+                </a:tc>
+                <a:tc>
+                  <a:txBody>
+                    <a:bodyPr/>
+                    <a:lstStyle/>
+                    <a:p>
+                      <a:pPr algn="r"/>
+                      <a:r>
+                        <a:rPr lang="en-CH" dirty="0"/>
+                        <a:t>6</a:t>
+                      </a:r>
+                    </a:p>
+                  </a:txBody>
+                  <a:tcPr>
+                    <a:lnL w="12700" cmpd="sng">
+                      <a:noFill/>
+                    </a:lnL>
+                    <a:lnR w="12700" cmpd="sng">
+                      <a:noFill/>
+                    </a:lnR>
+                    <a:lnT w="12700" cmpd="sng">
+                      <a:noFill/>
+                    </a:lnT>
+                    <a:lnB w="12700" cmpd="sng">
+                      <a:noFill/>
+                    </a:lnB>
+                    <a:lnTlToBr w="12700" cmpd="sng">
+                      <a:noFill/>
+                      <a:prstDash val="solid"/>
+                    </a:lnTlToBr>
+                    <a:lnBlToTr w="12700" cmpd="sng">
+                      <a:noFill/>
+                      <a:prstDash val="solid"/>
+                    </a:lnBlToTr>
+                  </a:tcPr>
+                </a:tc>
+                <a:tc>
+                  <a:txBody>
+                    <a:bodyPr/>
+                    <a:lstStyle/>
+                    <a:p>
+                      <a:pPr algn="r"/>
+                      <a:r>
+                        <a:rPr lang="en-CH" dirty="0"/>
+                        <a:t>~100</a:t>
+                      </a:r>
+                    </a:p>
+                  </a:txBody>
+                  <a:tcPr>
+                    <a:lnL w="12700" cmpd="sng">
+                      <a:noFill/>
+                    </a:lnL>
+                    <a:lnR w="12700" cmpd="sng">
+                      <a:noFill/>
+                    </a:lnR>
+                    <a:lnT w="12700" cmpd="sng">
+                      <a:noFill/>
+                    </a:lnT>
+                    <a:lnB w="12700" cmpd="sng">
+                      <a:noFill/>
+                    </a:lnB>
+                    <a:lnTlToBr w="12700" cmpd="sng">
+                      <a:noFill/>
+                      <a:prstDash val="solid"/>
+                    </a:lnTlToBr>
+                    <a:lnBlToTr w="12700" cmpd="sng">
+                      <a:noFill/>
+                      <a:prstDash val="solid"/>
+                    </a:lnBlToTr>
+                  </a:tcPr>
+                </a:tc>
+                <a:tc>
+                  <a:txBody>
+                    <a:bodyPr/>
+                    <a:lstStyle/>
+                    <a:p>
+                      <a:pPr algn="r"/>
+                      <a:r>
+                        <a:rPr lang="en-CH" dirty="0"/>
+                        <a:t>7 (24)</a:t>
+                      </a:r>
+                    </a:p>
+                  </a:txBody>
+                  <a:tcPr>
+                    <a:lnL w="12700" cmpd="sng">
+                      <a:noFill/>
+                    </a:lnL>
+                    <a:lnR w="12700" cmpd="sng">
+                      <a:noFill/>
+                    </a:lnR>
+                    <a:lnT w="12700" cmpd="sng">
+                      <a:noFill/>
+                    </a:lnT>
+                    <a:lnB w="12700" cmpd="sng">
+                      <a:noFill/>
+                    </a:lnB>
+                    <a:lnTlToBr w="12700" cmpd="sng">
+                      <a:noFill/>
+                      <a:prstDash val="solid"/>
+                    </a:lnTlToBr>
+                    <a:lnBlToTr w="12700" cmpd="sng">
+                      <a:noFill/>
+                      <a:prstDash val="solid"/>
+                    </a:lnBlToTr>
+                  </a:tcPr>
+                </a:tc>
+                <a:tc>
+                  <a:txBody>
+                    <a:bodyPr/>
+                    <a:lstStyle/>
+                    <a:p>
+                      <a:pPr algn="r"/>
+                      <a:r>
+                        <a:rPr lang="en-CH" dirty="0"/>
+                        <a:t>2 (8)</a:t>
+                      </a:r>
+                    </a:p>
+                  </a:txBody>
+                  <a:tcPr>
+                    <a:lnL w="12700" cmpd="sng">
+                      <a:noFill/>
+                    </a:lnL>
+                    <a:lnR w="12700" cmpd="sng">
+                      <a:noFill/>
+                    </a:lnR>
+                    <a:lnT w="12700" cmpd="sng">
+                      <a:noFill/>
+                    </a:lnT>
+                    <a:lnB w="12700" cmpd="sng">
+                      <a:noFill/>
+                    </a:lnB>
+                    <a:lnTlToBr w="12700" cmpd="sng">
+                      <a:noFill/>
+                      <a:prstDash val="solid"/>
+                    </a:lnTlToBr>
+                    <a:lnBlToTr w="12700" cmpd="sng">
+                      <a:noFill/>
+                      <a:prstDash val="solid"/>
+                    </a:lnBlToTr>
+                  </a:tcPr>
+                </a:tc>
+                <a:extLst>
+                  <a:ext uri="{0D108BD9-81ED-4DB2-BD59-A6C34878D82A}">
+                    <a16:rowId xmlns:a16="http://schemas.microsoft.com/office/drawing/2014/main" val="2637189200"/>
+                  </a:ext>
+                </a:extLst>
+              </a:tr>
+              <a:tr h="370840">
+                <a:tc>
+                  <a:txBody>
+                    <a:bodyPr/>
+                    <a:lstStyle/>
+                    <a:p>
+                      <a:r>
+                        <a:rPr lang="en-CH" dirty="0"/>
+                        <a:t>Curve </a:t>
+                      </a:r>
+                      <a:r>
+                        <a:rPr lang="en-CH" dirty="0" err="1"/>
+                        <a:t>Tricrypto</a:t>
+                      </a:r>
+                      <a:endParaRPr lang="en-CH" dirty="0"/>
+                    </a:p>
+                  </a:txBody>
+                  <a:tcPr>
+                    <a:lnL w="12700" cmpd="sng">
+                      <a:noFill/>
+                    </a:lnL>
+                    <a:lnR w="12700" cmpd="sng">
+                      <a:noFill/>
+                    </a:lnR>
+                    <a:lnT w="12700" cmpd="sng">
+                      <a:noFill/>
+                    </a:lnT>
+                    <a:lnB w="12700" cmpd="sng">
+                      <a:noFill/>
+                    </a:lnB>
+                    <a:lnTlToBr w="12700" cmpd="sng">
+                      <a:noFill/>
+                      <a:prstDash val="solid"/>
+                    </a:lnTlToBr>
+                    <a:lnBlToTr w="12700" cmpd="sng">
+                      <a:noFill/>
+                      <a:prstDash val="solid"/>
+                    </a:lnBlToTr>
+                  </a:tcPr>
+                </a:tc>
+                <a:tc>
+                  <a:txBody>
+                    <a:bodyPr/>
+                    <a:lstStyle/>
+                    <a:p>
+                      <a:pPr algn="r"/>
+                      <a:r>
+                        <a:rPr lang="en-CH" dirty="0"/>
+                        <a:t>24</a:t>
+                      </a:r>
+                    </a:p>
+                  </a:txBody>
+                  <a:tcPr>
+                    <a:lnL w="12700" cmpd="sng">
+                      <a:noFill/>
+                    </a:lnL>
+                    <a:lnR w="12700" cmpd="sng">
+                      <a:noFill/>
+                    </a:lnR>
+                    <a:lnT w="12700" cmpd="sng">
+                      <a:noFill/>
+                    </a:lnT>
+                    <a:lnB w="12700" cmpd="sng">
+                      <a:noFill/>
+                    </a:lnB>
+                    <a:lnTlToBr w="12700" cmpd="sng">
+                      <a:noFill/>
+                      <a:prstDash val="solid"/>
+                    </a:lnTlToBr>
+                    <a:lnBlToTr w="12700" cmpd="sng">
+                      <a:noFill/>
+                      <a:prstDash val="solid"/>
+                    </a:lnBlToTr>
+                  </a:tcPr>
+                </a:tc>
+                <a:tc>
+                  <a:txBody>
+                    <a:bodyPr/>
+                    <a:lstStyle/>
+                    <a:p>
+                      <a:pPr algn="r"/>
+                      <a:r>
+                        <a:rPr lang="en-CH" dirty="0"/>
+                        <a:t>~1500</a:t>
+                      </a:r>
+                    </a:p>
+                  </a:txBody>
+                  <a:tcPr>
+                    <a:lnL w="12700" cmpd="sng">
+                      <a:noFill/>
+                    </a:lnL>
+                    <a:lnR w="12700" cmpd="sng">
+                      <a:noFill/>
+                    </a:lnR>
+                    <a:lnT w="12700" cmpd="sng">
+                      <a:noFill/>
+                    </a:lnT>
+                    <a:lnB w="12700" cmpd="sng">
+                      <a:noFill/>
+                    </a:lnB>
+                    <a:lnTlToBr w="12700" cmpd="sng">
+                      <a:noFill/>
+                      <a:prstDash val="solid"/>
+                    </a:lnTlToBr>
+                    <a:lnBlToTr w="12700" cmpd="sng">
+                      <a:noFill/>
+                      <a:prstDash val="solid"/>
+                    </a:lnBlToTr>
+                  </a:tcPr>
+                </a:tc>
+                <a:tc>
+                  <a:txBody>
+                    <a:bodyPr/>
+                    <a:lstStyle/>
+                    <a:p>
+                      <a:pPr algn="r"/>
+                      <a:r>
+                        <a:rPr lang="en-CH" dirty="0"/>
+                        <a:t>33 (98)</a:t>
+                      </a:r>
+                    </a:p>
+                  </a:txBody>
+                  <a:tcPr>
+                    <a:lnL w="12700" cmpd="sng">
+                      <a:noFill/>
+                    </a:lnL>
+                    <a:lnR w="12700" cmpd="sng">
+                      <a:noFill/>
+                    </a:lnR>
+                    <a:lnT w="12700" cmpd="sng">
+                      <a:noFill/>
+                    </a:lnT>
+                    <a:lnB w="12700" cmpd="sng">
+                      <a:noFill/>
+                    </a:lnB>
+                    <a:lnTlToBr w="12700" cmpd="sng">
+                      <a:noFill/>
+                      <a:prstDash val="solid"/>
+                    </a:lnTlToBr>
+                    <a:lnBlToTr w="12700" cmpd="sng">
+                      <a:noFill/>
+                      <a:prstDash val="solid"/>
+                    </a:lnBlToTr>
+                  </a:tcPr>
+                </a:tc>
+                <a:tc>
+                  <a:txBody>
+                    <a:bodyPr/>
+                    <a:lstStyle/>
+                    <a:p>
+                      <a:pPr algn="r"/>
+                      <a:r>
+                        <a:rPr lang="en-CH" dirty="0"/>
+                        <a:t>24 (73)</a:t>
+                      </a:r>
+                    </a:p>
+                  </a:txBody>
+                  <a:tcPr>
+                    <a:lnL w="12700" cmpd="sng">
+                      <a:noFill/>
+                    </a:lnL>
+                    <a:lnR w="12700" cmpd="sng">
+                      <a:noFill/>
+                    </a:lnR>
+                    <a:lnT w="12700" cmpd="sng">
+                      <a:noFill/>
+                    </a:lnT>
+                    <a:lnB w="12700" cmpd="sng">
+                      <a:noFill/>
+                    </a:lnB>
+                    <a:lnTlToBr w="12700" cmpd="sng">
+                      <a:noFill/>
+                      <a:prstDash val="solid"/>
+                    </a:lnTlToBr>
+                    <a:lnBlToTr w="12700" cmpd="sng">
+                      <a:noFill/>
+                      <a:prstDash val="solid"/>
+                    </a:lnBlToTr>
+                  </a:tcPr>
+                </a:tc>
+                <a:extLst>
+                  <a:ext uri="{0D108BD9-81ED-4DB2-BD59-A6C34878D82A}">
+                    <a16:rowId xmlns:a16="http://schemas.microsoft.com/office/drawing/2014/main" val="766182425"/>
+                  </a:ext>
+                </a:extLst>
+              </a:tr>
+              <a:tr h="370840">
+                <a:tc>
+                  <a:txBody>
+                    <a:bodyPr/>
+                    <a:lstStyle/>
+                    <a:p>
+                      <a:r>
+                        <a:rPr lang="en-CH" dirty="0" err="1"/>
+                        <a:t>todo</a:t>
+                      </a:r>
+                      <a:endParaRPr lang="en-CH" dirty="0"/>
+                    </a:p>
+                  </a:txBody>
+                  <a:tcPr>
+                    <a:lnL w="12700" cmpd="sng">
+                      <a:noFill/>
+                    </a:lnL>
+                    <a:lnR w="12700" cmpd="sng">
+                      <a:noFill/>
+                    </a:lnR>
+                    <a:lnT w="12700" cmpd="sng">
+                      <a:noFill/>
+                    </a:lnT>
+                    <a:lnB w="12700" cmpd="sng">
+                      <a:noFill/>
+                    </a:lnB>
+                    <a:lnTlToBr w="12700" cmpd="sng">
+                      <a:noFill/>
+                      <a:prstDash val="solid"/>
+                    </a:lnTlToBr>
+                    <a:lnBlToTr w="12700" cmpd="sng">
+                      <a:noFill/>
+                      <a:prstDash val="solid"/>
+                    </a:lnBlToTr>
+                  </a:tcPr>
+                </a:tc>
+                <a:tc>
+                  <a:txBody>
+                    <a:bodyPr/>
+                    <a:lstStyle/>
+                    <a:p>
+                      <a:endParaRPr lang="en-CH" dirty="0"/>
+                    </a:p>
+                  </a:txBody>
+                  <a:tcPr>
+                    <a:lnL w="12700" cmpd="sng">
+                      <a:noFill/>
+                    </a:lnL>
+                    <a:lnR w="12700" cmpd="sng">
+                      <a:noFill/>
+                    </a:lnR>
+                    <a:lnT w="12700" cmpd="sng">
+                      <a:noFill/>
+                    </a:lnT>
+                    <a:lnB w="12700" cmpd="sng">
+                      <a:noFill/>
+                    </a:lnB>
+                    <a:lnTlToBr w="12700" cmpd="sng">
+                      <a:noFill/>
+                      <a:prstDash val="solid"/>
+                    </a:lnTlToBr>
+                    <a:lnBlToTr w="12700" cmpd="sng">
+                      <a:noFill/>
+                      <a:prstDash val="solid"/>
+                    </a:lnBlToTr>
+                  </a:tcPr>
+                </a:tc>
+                <a:tc>
+                  <a:txBody>
+                    <a:bodyPr/>
+                    <a:lstStyle/>
+                    <a:p>
+                      <a:endParaRPr lang="en-CH" dirty="0"/>
+                    </a:p>
+                  </a:txBody>
+                  <a:tcPr>
+                    <a:lnL w="12700" cmpd="sng">
+                      <a:noFill/>
+                    </a:lnL>
+                    <a:lnR w="12700" cmpd="sng">
+                      <a:noFill/>
+                    </a:lnR>
+                    <a:lnT w="12700" cmpd="sng">
+                      <a:noFill/>
+                    </a:lnT>
+                    <a:lnB w="12700" cmpd="sng">
+                      <a:noFill/>
+                    </a:lnB>
+                    <a:lnTlToBr w="12700" cmpd="sng">
+                      <a:noFill/>
+                      <a:prstDash val="solid"/>
+                    </a:lnTlToBr>
+                    <a:lnBlToTr w="12700" cmpd="sng">
+                      <a:noFill/>
+                      <a:prstDash val="solid"/>
+                    </a:lnBlToTr>
+                  </a:tcPr>
+                </a:tc>
+                <a:tc>
+                  <a:txBody>
+                    <a:bodyPr/>
+                    <a:lstStyle/>
+                    <a:p>
+                      <a:endParaRPr lang="en-CH" dirty="0"/>
+                    </a:p>
+                  </a:txBody>
+                  <a:tcPr>
+                    <a:lnL w="12700" cmpd="sng">
+                      <a:noFill/>
+                    </a:lnL>
+                    <a:lnR w="12700" cmpd="sng">
+                      <a:noFill/>
+                    </a:lnR>
+                    <a:lnT w="12700" cmpd="sng">
+                      <a:noFill/>
+                    </a:lnT>
+                    <a:lnB w="12700" cmpd="sng">
+                      <a:noFill/>
+                    </a:lnB>
+                    <a:lnTlToBr w="12700" cmpd="sng">
+                      <a:noFill/>
+                      <a:prstDash val="solid"/>
+                    </a:lnTlToBr>
+                    <a:lnBlToTr w="12700" cmpd="sng">
+                      <a:noFill/>
+                      <a:prstDash val="solid"/>
+                    </a:lnBlToTr>
+                  </a:tcPr>
+                </a:tc>
+                <a:tc>
+                  <a:txBody>
+                    <a:bodyPr/>
+                    <a:lstStyle/>
+                    <a:p>
+                      <a:endParaRPr lang="en-CH"/>
+                    </a:p>
+                  </a:txBody>
+                  <a:tcPr>
+                    <a:lnL w="12700" cmpd="sng">
+                      <a:noFill/>
+                    </a:lnL>
+                    <a:lnR w="12700" cmpd="sng">
+                      <a:noFill/>
+                    </a:lnR>
+                    <a:lnT w="12700" cmpd="sng">
+                      <a:noFill/>
+                    </a:lnT>
+                    <a:lnB w="12700" cmpd="sng">
+                      <a:noFill/>
+                    </a:lnB>
+                    <a:lnTlToBr w="12700" cmpd="sng">
+                      <a:noFill/>
+                      <a:prstDash val="solid"/>
+                    </a:lnTlToBr>
+                    <a:lnBlToTr w="12700" cmpd="sng">
+                      <a:noFill/>
+                      <a:prstDash val="solid"/>
+                    </a:lnBlToTr>
+                  </a:tcPr>
+                </a:tc>
+                <a:extLst>
+                  <a:ext uri="{0D108BD9-81ED-4DB2-BD59-A6C34878D82A}">
+                    <a16:rowId xmlns:a16="http://schemas.microsoft.com/office/drawing/2014/main" val="1832668818"/>
+                  </a:ext>
+                </a:extLst>
+              </a:tr>
+              <a:tr h="370840">
+                <a:tc>
+                  <a:txBody>
+                    <a:bodyPr/>
+                    <a:lstStyle/>
+                    <a:p>
+                      <a:r>
+                        <a:rPr lang="en-CH" dirty="0" err="1"/>
+                        <a:t>todo</a:t>
+                      </a:r>
+                      <a:endParaRPr lang="en-CH" dirty="0"/>
+                    </a:p>
+                  </a:txBody>
+                  <a:tcPr>
+                    <a:lnL w="12700" cmpd="sng">
+                      <a:noFill/>
+                    </a:lnL>
+                    <a:lnR w="12700" cmpd="sng">
+                      <a:noFill/>
+                    </a:lnR>
+                    <a:lnT w="12700" cmpd="sng">
+                      <a:noFill/>
+                    </a:lnT>
+                    <a:lnB w="12700" cmpd="sng">
+                      <a:noFill/>
+                    </a:lnB>
+                    <a:lnTlToBr w="12700" cmpd="sng">
+                      <a:noFill/>
+                      <a:prstDash val="solid"/>
+                    </a:lnTlToBr>
+                    <a:lnBlToTr w="12700" cmpd="sng">
+                      <a:noFill/>
+                      <a:prstDash val="solid"/>
+                    </a:lnBlToTr>
+                  </a:tcPr>
+                </a:tc>
+                <a:tc>
+                  <a:txBody>
+                    <a:bodyPr/>
+                    <a:lstStyle/>
+                    <a:p>
+                      <a:endParaRPr lang="en-CH" dirty="0"/>
+                    </a:p>
+                  </a:txBody>
+                  <a:tcPr>
+                    <a:lnL w="12700" cmpd="sng">
+                      <a:noFill/>
+                    </a:lnL>
+                    <a:lnR w="12700" cmpd="sng">
+                      <a:noFill/>
+                    </a:lnR>
+                    <a:lnT w="12700" cmpd="sng">
+                      <a:noFill/>
+                    </a:lnT>
+                    <a:lnB w="12700" cmpd="sng">
+                      <a:noFill/>
+                    </a:lnB>
+                    <a:lnTlToBr w="12700" cmpd="sng">
+                      <a:noFill/>
+                      <a:prstDash val="solid"/>
+                    </a:lnTlToBr>
+                    <a:lnBlToTr w="12700" cmpd="sng">
+                      <a:noFill/>
+                      <a:prstDash val="solid"/>
+                    </a:lnBlToTr>
+                  </a:tcPr>
+                </a:tc>
+                <a:tc>
+                  <a:txBody>
+                    <a:bodyPr/>
+                    <a:lstStyle/>
+                    <a:p>
+                      <a:endParaRPr lang="en-CH" dirty="0"/>
+                    </a:p>
+                  </a:txBody>
+                  <a:tcPr>
+                    <a:lnL w="12700" cmpd="sng">
+                      <a:noFill/>
+                    </a:lnL>
+                    <a:lnR w="12700" cmpd="sng">
+                      <a:noFill/>
+                    </a:lnR>
+                    <a:lnT w="12700" cmpd="sng">
+                      <a:noFill/>
+                    </a:lnT>
+                    <a:lnB w="12700" cmpd="sng">
+                      <a:noFill/>
+                    </a:lnB>
+                    <a:lnTlToBr w="12700" cmpd="sng">
+                      <a:noFill/>
+                      <a:prstDash val="solid"/>
+                    </a:lnTlToBr>
+                    <a:lnBlToTr w="12700" cmpd="sng">
+                      <a:noFill/>
+                      <a:prstDash val="solid"/>
+                    </a:lnBlToTr>
+                  </a:tcPr>
+                </a:tc>
+                <a:tc>
+                  <a:txBody>
+                    <a:bodyPr/>
+                    <a:lstStyle/>
+                    <a:p>
+                      <a:endParaRPr lang="en-CH"/>
+                    </a:p>
+                  </a:txBody>
+                  <a:tcPr>
+                    <a:lnL w="12700" cmpd="sng">
+                      <a:noFill/>
+                    </a:lnL>
+                    <a:lnR w="12700" cmpd="sng">
+                      <a:noFill/>
+                    </a:lnR>
+                    <a:lnT w="12700" cmpd="sng">
+                      <a:noFill/>
+                    </a:lnT>
+                    <a:lnB w="12700" cmpd="sng">
+                      <a:noFill/>
+                    </a:lnB>
+                    <a:lnTlToBr w="12700" cmpd="sng">
+                      <a:noFill/>
+                      <a:prstDash val="solid"/>
+                    </a:lnTlToBr>
+                    <a:lnBlToTr w="12700" cmpd="sng">
+                      <a:noFill/>
+                      <a:prstDash val="solid"/>
+                    </a:lnBlToTr>
+                  </a:tcPr>
+                </a:tc>
+                <a:tc>
+                  <a:txBody>
+                    <a:bodyPr/>
+                    <a:lstStyle/>
+                    <a:p>
+                      <a:endParaRPr lang="en-CH" dirty="0"/>
+                    </a:p>
+                  </a:txBody>
+                  <a:tcPr>
+                    <a:lnL w="12700" cmpd="sng">
+                      <a:noFill/>
+                    </a:lnL>
+                    <a:lnR w="12700" cmpd="sng">
+                      <a:noFill/>
+                    </a:lnR>
+                    <a:lnT w="12700" cmpd="sng">
+                      <a:noFill/>
+                    </a:lnT>
+                    <a:lnB w="12700" cmpd="sng">
+                      <a:noFill/>
+                    </a:lnB>
+                    <a:lnTlToBr w="12700" cmpd="sng">
+                      <a:noFill/>
+                      <a:prstDash val="solid"/>
+                    </a:lnTlToBr>
+                    <a:lnBlToTr w="12700" cmpd="sng">
+                      <a:noFill/>
+                      <a:prstDash val="solid"/>
+                    </a:lnBlToTr>
+                  </a:tcPr>
+                </a:tc>
+                <a:extLst>
+                  <a:ext uri="{0D108BD9-81ED-4DB2-BD59-A6C34878D82A}">
+                    <a16:rowId xmlns:a16="http://schemas.microsoft.com/office/drawing/2014/main" val="2072819304"/>
+                  </a:ext>
+                </a:extLst>
+              </a:tr>
+            </a:tbl>
+          </a:graphicData>
+        </a:graphic>
+      </p:graphicFrame>
     </p:spTree>
     <p:extLst>
       <p:ext uri="{BB962C8B-B14F-4D97-AF65-F5344CB8AC3E}">
         <p14:creationId xmlns:p14="http://schemas.microsoft.com/office/powerpoint/2010/main" val="3880314168"/>
+      </p:ext>
+    </p:extLst>
+  </p:cSld>
+  <p:clrMapOvr>
+    <a:masterClrMapping/>
+  </p:clrMapOvr>
+</p:sld>
+</file>
+
+<file path=ppt/slides/slide39.xml><?xml version="1.0" encoding="utf-8"?>
+<p:sld xmlns:a="http://schemas.openxmlformats.org/drawingml/2006/main" xmlns:r="http://schemas.openxmlformats.org/officeDocument/2006/relationships" xmlns:p="http://schemas.openxmlformats.org/presentationml/2006/main">
+  <p:cSld>
+    <p:spTree>
+      <p:nvGrpSpPr>
+        <p:cNvPr id="1" name="">
+          <a:extLst>
+            <a:ext uri="{FF2B5EF4-FFF2-40B4-BE49-F238E27FC236}">
+              <a16:creationId xmlns:a16="http://schemas.microsoft.com/office/drawing/2014/main" id="{FA27C65E-961F-E1C5-8CA8-B90B4CEA4C93}"/>
+            </a:ext>
+          </a:extLst>
+        </p:cNvPr>
+        <p:cNvGrpSpPr/>
+        <p:nvPr/>
+      </p:nvGrpSpPr>
+      <p:grpSpPr>
+        <a:xfrm>
+          <a:off x="0" y="0"/>
+          <a:ext cx="0" cy="0"/>
+          <a:chOff x="0" y="0"/>
+          <a:chExt cx="0" cy="0"/>
+        </a:xfrm>
+      </p:grpSpPr>
+      <p:sp>
+        <p:nvSpPr>
+          <p:cNvPr id="7" name="Text Placeholder 6">
+            <a:extLst>
+              <a:ext uri="{FF2B5EF4-FFF2-40B4-BE49-F238E27FC236}">
+                <a16:creationId xmlns:a16="http://schemas.microsoft.com/office/drawing/2014/main" id="{CD747ABE-40D2-58EC-973A-5D1595145354}"/>
+              </a:ext>
+            </a:extLst>
+          </p:cNvPr>
+          <p:cNvSpPr>
+            <a:spLocks noGrp="1"/>
+          </p:cNvSpPr>
+          <p:nvPr>
+            <p:ph type="body" sz="quarter" idx="14"/>
+          </p:nvPr>
+        </p:nvSpPr>
+        <p:spPr>
+          <a:xfrm>
+            <a:off x="838200" y="1825625"/>
+            <a:ext cx="438016" cy="2853380"/>
+          </a:xfrm>
+        </p:spPr>
+        <p:txBody>
+          <a:bodyPr>
+            <a:noAutofit/>
+          </a:bodyPr>
+          <a:lstStyle/>
+          <a:p>
+            <a:r>
+              <a:rPr lang="en-CH" dirty="0"/>
+              <a:t> 1</a:t>
+            </a:r>
+          </a:p>
+          <a:p>
+            <a:r>
+              <a:rPr lang="en-CH" dirty="0"/>
+              <a:t> 2</a:t>
+            </a:r>
+          </a:p>
+          <a:p>
+            <a:r>
+              <a:rPr lang="en-CH" dirty="0"/>
+              <a:t> 3</a:t>
+            </a:r>
+          </a:p>
+          <a:p>
+            <a:r>
+              <a:rPr lang="en-CH" dirty="0"/>
+              <a:t> 4</a:t>
+            </a:r>
+          </a:p>
+          <a:p>
+            <a:r>
+              <a:rPr lang="en-CH" dirty="0"/>
+              <a:t> 5</a:t>
+            </a:r>
+          </a:p>
+          <a:p>
+            <a:r>
+              <a:rPr lang="en-CH" dirty="0"/>
+              <a:t> 6</a:t>
+            </a:r>
+          </a:p>
+          <a:p>
+            <a:r>
+              <a:rPr lang="en-CH" dirty="0"/>
+              <a:t> 7</a:t>
+            </a:r>
+          </a:p>
+          <a:p>
+            <a:r>
+              <a:rPr lang="en-CH" dirty="0"/>
+              <a:t> 8</a:t>
+            </a:r>
+          </a:p>
+          <a:p>
+            <a:r>
+              <a:rPr lang="en-CH" dirty="0"/>
+              <a:t> 9</a:t>
+            </a:r>
+          </a:p>
+        </p:txBody>
+      </p:sp>
+      <p:sp>
+        <p:nvSpPr>
+          <p:cNvPr id="19" name="Text Placeholder 18">
+            <a:extLst>
+              <a:ext uri="{FF2B5EF4-FFF2-40B4-BE49-F238E27FC236}">
+                <a16:creationId xmlns:a16="http://schemas.microsoft.com/office/drawing/2014/main" id="{CC96A26A-0CBE-11B4-E2B4-D0F22514D31D}"/>
+              </a:ext>
+            </a:extLst>
+          </p:cNvPr>
+          <p:cNvSpPr>
+            <a:spLocks noGrp="1"/>
+          </p:cNvSpPr>
+          <p:nvPr>
+            <p:ph type="body" sz="quarter" idx="13"/>
+          </p:nvPr>
+        </p:nvSpPr>
+        <p:spPr>
+          <a:xfrm>
+            <a:off x="1276215" y="1825625"/>
+            <a:ext cx="10163497" cy="2853380"/>
+          </a:xfrm>
+        </p:spPr>
+        <p:txBody>
+          <a:bodyPr/>
+          <a:lstStyle/>
+          <a:p>
+            <a:r>
+              <a:rPr lang="en-US" dirty="0">
+                <a:solidFill>
+                  <a:schemeClr val="accent5"/>
+                </a:solidFill>
+              </a:rPr>
+              <a:t># _transfer_in updates self.balances here:</a:t>
+            </a:r>
+          </a:p>
+          <a:p>
+            <a:r>
+              <a:rPr lang="en-US" dirty="0"/>
+              <a:t>dx_received</a:t>
+            </a:r>
+            <a:r>
+              <a:rPr lang="en-US" dirty="0">
+                <a:solidFill>
+                  <a:schemeClr val="accent1"/>
+                </a:solidFill>
+              </a:rPr>
+              <a:t>:</a:t>
+            </a:r>
+            <a:r>
+              <a:rPr lang="en-US" dirty="0"/>
+              <a:t> </a:t>
+            </a:r>
+            <a:r>
+              <a:rPr lang="en-US" dirty="0">
+                <a:solidFill>
+                  <a:schemeClr val="accent2"/>
+                </a:solidFill>
+              </a:rPr>
+              <a:t>uint256</a:t>
+            </a:r>
+            <a:r>
+              <a:rPr lang="en-US" dirty="0"/>
+              <a:t> </a:t>
+            </a:r>
+            <a:r>
+              <a:rPr lang="en-US" dirty="0">
+                <a:solidFill>
+                  <a:schemeClr val="accent1"/>
+                </a:solidFill>
+              </a:rPr>
+              <a:t>=</a:t>
+            </a:r>
+            <a:r>
+              <a:rPr lang="en-US" dirty="0"/>
+              <a:t> </a:t>
+            </a:r>
+            <a:r>
+              <a:rPr lang="en-US" dirty="0">
+                <a:solidFill>
+                  <a:schemeClr val="accent3"/>
+                </a:solidFill>
+              </a:rPr>
+              <a:t>self</a:t>
+            </a:r>
+            <a:r>
+              <a:rPr lang="en-US" dirty="0">
+                <a:solidFill>
+                  <a:schemeClr val="accent1"/>
+                </a:solidFill>
+              </a:rPr>
+              <a:t>.</a:t>
+            </a:r>
+            <a:r>
+              <a:rPr lang="en-US" dirty="0">
+                <a:solidFill>
+                  <a:schemeClr val="accent6"/>
+                </a:solidFill>
+              </a:rPr>
+              <a:t>_transfer_in</a:t>
+            </a:r>
+            <a:r>
+              <a:rPr lang="en-US" dirty="0">
+                <a:solidFill>
+                  <a:schemeClr val="accent1"/>
+                </a:solidFill>
+              </a:rPr>
+              <a:t>(</a:t>
+            </a:r>
+            <a:r>
+              <a:rPr lang="en-US" dirty="0"/>
+              <a:t>i</a:t>
+            </a:r>
+            <a:r>
+              <a:rPr lang="en-US" dirty="0">
+                <a:solidFill>
+                  <a:schemeClr val="tx2"/>
+                </a:solidFill>
+              </a:rPr>
+              <a:t>,</a:t>
+            </a:r>
+            <a:r>
+              <a:rPr lang="en-CH" dirty="0"/>
+              <a:t> </a:t>
+            </a:r>
+            <a:r>
+              <a:rPr lang="en-US" dirty="0"/>
+              <a:t>dx</a:t>
+            </a:r>
+            <a:r>
+              <a:rPr lang="en-US" dirty="0">
+                <a:solidFill>
+                  <a:schemeClr val="tx2"/>
+                </a:solidFill>
+              </a:rPr>
+              <a:t>,</a:t>
+            </a:r>
+            <a:r>
+              <a:rPr lang="en-CH" dirty="0"/>
+              <a:t> </a:t>
+            </a:r>
+            <a:r>
+              <a:rPr lang="en-US" dirty="0">
+                <a:solidFill>
+                  <a:schemeClr val="accent3"/>
+                </a:solidFill>
+              </a:rPr>
+              <a:t>msg</a:t>
+            </a:r>
+            <a:r>
+              <a:rPr lang="en-US" dirty="0">
+                <a:solidFill>
+                  <a:schemeClr val="accent1"/>
+                </a:solidFill>
+              </a:rPr>
+              <a:t>.</a:t>
+            </a:r>
+            <a:r>
+              <a:rPr lang="en-US" dirty="0">
+                <a:solidFill>
+                  <a:schemeClr val="accent3"/>
+                </a:solidFill>
+              </a:rPr>
+              <a:t>sender</a:t>
+            </a:r>
+            <a:r>
+              <a:rPr lang="en-US" dirty="0">
+                <a:solidFill>
+                  <a:schemeClr val="tx2"/>
+                </a:solidFill>
+              </a:rPr>
+              <a:t>,</a:t>
+            </a:r>
+            <a:r>
+              <a:rPr lang="en-CH" dirty="0"/>
+              <a:t> </a:t>
+            </a:r>
+            <a:r>
+              <a:rPr lang="en-US" dirty="0"/>
+              <a:t>False</a:t>
+            </a:r>
+            <a:r>
+              <a:rPr lang="en-CH" dirty="0">
+                <a:solidFill>
+                  <a:schemeClr val="accent1"/>
+                </a:solidFill>
+              </a:rPr>
+              <a:t>)</a:t>
+            </a:r>
+            <a:endParaRPr lang="en-US" dirty="0">
+              <a:solidFill>
+                <a:schemeClr val="accent1"/>
+              </a:solidFill>
+            </a:endParaRPr>
+          </a:p>
+          <a:p>
+            <a:endParaRPr lang="en-US" dirty="0"/>
+          </a:p>
+          <a:p>
+            <a:r>
+              <a:rPr lang="en-US" dirty="0">
+                <a:solidFill>
+                  <a:schemeClr val="accent5"/>
+                </a:solidFill>
+              </a:rPr>
+              <a:t># No ERC20 token transfers occur here:</a:t>
+            </a:r>
+          </a:p>
+          <a:p>
+            <a:r>
+              <a:rPr lang="en-US" dirty="0"/>
+              <a:t>out</a:t>
+            </a:r>
+            <a:r>
+              <a:rPr lang="en-US" dirty="0">
+                <a:solidFill>
+                  <a:schemeClr val="accent1"/>
+                </a:solidFill>
+              </a:rPr>
+              <a:t>:</a:t>
+            </a:r>
+            <a:r>
+              <a:rPr lang="en-US" dirty="0"/>
+              <a:t> </a:t>
+            </a:r>
+            <a:r>
+              <a:rPr lang="en-US" dirty="0">
+                <a:solidFill>
+                  <a:schemeClr val="accent2"/>
+                </a:solidFill>
+              </a:rPr>
+              <a:t>uint256</a:t>
+            </a:r>
+            <a:r>
+              <a:rPr lang="en-US" dirty="0">
+                <a:solidFill>
+                  <a:schemeClr val="accent1"/>
+                </a:solidFill>
+              </a:rPr>
+              <a:t>[</a:t>
+            </a:r>
+            <a:r>
+              <a:rPr lang="en-US" dirty="0">
+                <a:solidFill>
+                  <a:schemeClr val="accent4"/>
+                </a:solidFill>
+              </a:rPr>
+              <a:t>3</a:t>
+            </a:r>
+            <a:r>
+              <a:rPr lang="en-US" dirty="0">
+                <a:solidFill>
+                  <a:schemeClr val="accent1"/>
+                </a:solidFill>
+              </a:rPr>
+              <a:t>]</a:t>
+            </a:r>
+            <a:r>
+              <a:rPr lang="en-US" dirty="0"/>
+              <a:t> = </a:t>
+            </a:r>
+            <a:r>
+              <a:rPr lang="en-US" dirty="0">
+                <a:solidFill>
+                  <a:schemeClr val="accent3"/>
+                </a:solidFill>
+              </a:rPr>
+              <a:t>self</a:t>
+            </a:r>
+            <a:r>
+              <a:rPr lang="en-US" dirty="0">
+                <a:solidFill>
+                  <a:schemeClr val="accent1"/>
+                </a:solidFill>
+              </a:rPr>
+              <a:t>.</a:t>
+            </a:r>
+            <a:r>
+              <a:rPr lang="en-US" dirty="0">
+                <a:solidFill>
+                  <a:schemeClr val="accent6"/>
+                </a:solidFill>
+              </a:rPr>
+              <a:t>_exchange</a:t>
+            </a:r>
+            <a:r>
+              <a:rPr lang="en-US" dirty="0">
+                <a:solidFill>
+                  <a:schemeClr val="accent1"/>
+                </a:solidFill>
+              </a:rPr>
+              <a:t>(</a:t>
+            </a:r>
+            <a:r>
+              <a:rPr lang="en-US" dirty="0"/>
+              <a:t>i</a:t>
+            </a:r>
+            <a:r>
+              <a:rPr lang="en-US" dirty="0">
+                <a:solidFill>
+                  <a:schemeClr val="tx2"/>
+                </a:solidFill>
+              </a:rPr>
+              <a:t>,</a:t>
+            </a:r>
+            <a:r>
+              <a:rPr lang="en-CH" dirty="0"/>
+              <a:t> </a:t>
+            </a:r>
+            <a:r>
+              <a:rPr lang="en-US" dirty="0"/>
+              <a:t>j</a:t>
+            </a:r>
+            <a:r>
+              <a:rPr lang="en-US" dirty="0">
+                <a:solidFill>
+                  <a:schemeClr val="tx2"/>
+                </a:solidFill>
+              </a:rPr>
+              <a:t>,</a:t>
+            </a:r>
+            <a:r>
+              <a:rPr lang="en-US" dirty="0"/>
+              <a:t> dx_received</a:t>
+            </a:r>
+            <a:r>
+              <a:rPr lang="en-US" dirty="0">
+                <a:solidFill>
+                  <a:schemeClr val="tx2"/>
+                </a:solidFill>
+              </a:rPr>
+              <a:t>,</a:t>
+            </a:r>
+            <a:r>
+              <a:rPr lang="en-CH" dirty="0"/>
+              <a:t> </a:t>
+            </a:r>
+            <a:r>
+              <a:rPr lang="en-US" dirty="0"/>
+              <a:t>min_dy</a:t>
+            </a:r>
+            <a:r>
+              <a:rPr lang="en-US" dirty="0">
+                <a:solidFill>
+                  <a:schemeClr val="accent1"/>
+                </a:solidFill>
+              </a:rPr>
+              <a:t>)</a:t>
+            </a:r>
+            <a:br>
+              <a:rPr lang="en-US" dirty="0"/>
+            </a:br>
+            <a:endParaRPr lang="en-US" dirty="0"/>
+          </a:p>
+          <a:p>
+            <a:r>
+              <a:rPr lang="en-US" dirty="0">
+                <a:solidFill>
+                  <a:schemeClr val="accent5"/>
+                </a:solidFill>
+              </a:rPr>
+              <a:t># _transfer_out updates self.balances here.</a:t>
+            </a:r>
+            <a:endParaRPr lang="en-CH" dirty="0">
+              <a:solidFill>
+                <a:schemeClr val="accent5"/>
+              </a:solidFill>
+            </a:endParaRPr>
+          </a:p>
+          <a:p>
+            <a:r>
+              <a:rPr lang="en-CH" dirty="0">
+                <a:solidFill>
+                  <a:schemeClr val="accent5"/>
+                </a:solidFill>
+              </a:rPr>
+              <a:t># </a:t>
+            </a:r>
+            <a:r>
+              <a:rPr lang="en-US" dirty="0">
+                <a:solidFill>
+                  <a:schemeClr val="accent5"/>
+                </a:solidFill>
+              </a:rPr>
+              <a:t>Update to state occurs before</a:t>
+            </a:r>
+            <a:r>
+              <a:rPr lang="en-CH" dirty="0">
+                <a:solidFill>
+                  <a:schemeClr val="accent5"/>
+                </a:solidFill>
+              </a:rPr>
+              <a:t> </a:t>
+            </a:r>
+            <a:r>
+              <a:rPr lang="en-US" dirty="0">
+                <a:solidFill>
+                  <a:schemeClr val="accent5"/>
+                </a:solidFill>
+              </a:rPr>
+              <a:t>external calls:</a:t>
+            </a:r>
+          </a:p>
+          <a:p>
+            <a:r>
+              <a:rPr lang="en-US" dirty="0">
+                <a:solidFill>
+                  <a:schemeClr val="accent3"/>
+                </a:solidFill>
+              </a:rPr>
+              <a:t>self</a:t>
+            </a:r>
+            <a:r>
+              <a:rPr lang="en-US" dirty="0">
+                <a:solidFill>
+                  <a:schemeClr val="accent1"/>
+                </a:solidFill>
+              </a:rPr>
+              <a:t>.</a:t>
+            </a:r>
+            <a:r>
+              <a:rPr lang="en-US" dirty="0">
+                <a:solidFill>
+                  <a:schemeClr val="accent6"/>
+                </a:solidFill>
+              </a:rPr>
+              <a:t>_transfer_out</a:t>
+            </a:r>
+            <a:r>
+              <a:rPr lang="en-US" dirty="0">
+                <a:solidFill>
+                  <a:schemeClr val="accent1"/>
+                </a:solidFill>
+              </a:rPr>
+              <a:t>(</a:t>
+            </a:r>
+            <a:r>
+              <a:rPr lang="en-US" dirty="0"/>
+              <a:t>j</a:t>
+            </a:r>
+            <a:r>
+              <a:rPr lang="en-US" dirty="0">
+                <a:solidFill>
+                  <a:schemeClr val="tx2"/>
+                </a:solidFill>
+              </a:rPr>
+              <a:t>,</a:t>
+            </a:r>
+            <a:r>
+              <a:rPr lang="en-US" dirty="0"/>
+              <a:t> out</a:t>
+            </a:r>
+            <a:r>
+              <a:rPr lang="en-US" dirty="0">
+                <a:solidFill>
+                  <a:schemeClr val="accent1"/>
+                </a:solidFill>
+              </a:rPr>
+              <a:t>[</a:t>
+            </a:r>
+            <a:r>
+              <a:rPr lang="en-US" dirty="0">
+                <a:solidFill>
+                  <a:schemeClr val="accent4"/>
+                </a:solidFill>
+              </a:rPr>
+              <a:t>0</a:t>
+            </a:r>
+            <a:r>
+              <a:rPr lang="en-US" dirty="0">
+                <a:solidFill>
+                  <a:schemeClr val="accent1"/>
+                </a:solidFill>
+              </a:rPr>
+              <a:t>]</a:t>
+            </a:r>
+            <a:r>
+              <a:rPr lang="en-US" dirty="0">
+                <a:solidFill>
+                  <a:schemeClr val="tx2"/>
+                </a:solidFill>
+              </a:rPr>
+              <a:t>,</a:t>
+            </a:r>
+            <a:r>
+              <a:rPr lang="en-US" dirty="0"/>
+              <a:t> receiver</a:t>
+            </a:r>
+            <a:r>
+              <a:rPr lang="en-US" dirty="0">
+                <a:solidFill>
+                  <a:schemeClr val="accent1"/>
+                </a:solidFill>
+              </a:rPr>
+              <a:t>)</a:t>
+            </a:r>
+          </a:p>
+        </p:txBody>
+      </p:sp>
+      <p:sp>
+        <p:nvSpPr>
+          <p:cNvPr id="17" name="Title 16">
+            <a:extLst>
+              <a:ext uri="{FF2B5EF4-FFF2-40B4-BE49-F238E27FC236}">
+                <a16:creationId xmlns:a16="http://schemas.microsoft.com/office/drawing/2014/main" id="{9B42681B-3CE0-F574-738C-546374AECC4F}"/>
+              </a:ext>
+            </a:extLst>
+          </p:cNvPr>
+          <p:cNvSpPr>
+            <a:spLocks noGrp="1"/>
+          </p:cNvSpPr>
+          <p:nvPr>
+            <p:ph type="title"/>
+          </p:nvPr>
+        </p:nvSpPr>
+        <p:spPr/>
+        <p:txBody>
+          <a:bodyPr/>
+          <a:lstStyle/>
+          <a:p>
+            <a:r>
+              <a:rPr lang="en-CH" dirty="0"/>
+              <a:t>Curve comment example</a:t>
+            </a:r>
+          </a:p>
+        </p:txBody>
+      </p:sp>
+      <p:sp>
+        <p:nvSpPr>
+          <p:cNvPr id="26" name="Date Placeholder 25">
+            <a:extLst>
+              <a:ext uri="{FF2B5EF4-FFF2-40B4-BE49-F238E27FC236}">
+                <a16:creationId xmlns:a16="http://schemas.microsoft.com/office/drawing/2014/main" id="{586A7D10-51D3-D54C-27C8-DCE4693B3EB5}"/>
+              </a:ext>
+            </a:extLst>
+          </p:cNvPr>
+          <p:cNvSpPr>
+            <a:spLocks noGrp="1"/>
+          </p:cNvSpPr>
+          <p:nvPr>
+            <p:ph type="dt" sz="half" idx="10"/>
+          </p:nvPr>
+        </p:nvSpPr>
+        <p:spPr/>
+        <p:txBody>
+          <a:bodyPr/>
+          <a:lstStyle/>
+          <a:p>
+            <a:r>
+              <a:rPr lang="en-CH"/>
+              <a:t>30/03/2026</a:t>
+            </a:r>
+            <a:endParaRPr lang="en-CH" dirty="0"/>
+          </a:p>
+        </p:txBody>
+      </p:sp>
+      <p:sp>
+        <p:nvSpPr>
+          <p:cNvPr id="27" name="Footer Placeholder 26">
+            <a:extLst>
+              <a:ext uri="{FF2B5EF4-FFF2-40B4-BE49-F238E27FC236}">
+                <a16:creationId xmlns:a16="http://schemas.microsoft.com/office/drawing/2014/main" id="{AA7C436B-D603-5A04-924B-263F10E2AA76}"/>
+              </a:ext>
+            </a:extLst>
+          </p:cNvPr>
+          <p:cNvSpPr>
+            <a:spLocks noGrp="1"/>
+          </p:cNvSpPr>
+          <p:nvPr>
+            <p:ph type="ftr" sz="quarter" idx="11"/>
+          </p:nvPr>
+        </p:nvSpPr>
+        <p:spPr/>
+        <p:txBody>
+          <a:bodyPr/>
+          <a:lstStyle/>
+          <a:p>
+            <a:r>
+              <a:rPr lang="en-US">
+                <a:solidFill>
+                  <a:schemeClr val="tx2"/>
+                </a:solidFill>
+              </a:rPr>
+              <a:t>Eliminating Reentrancy through Language Design</a:t>
+            </a:r>
+            <a:endParaRPr lang="en-CH" dirty="0">
+              <a:solidFill>
+                <a:schemeClr val="tx2"/>
+              </a:solidFill>
+            </a:endParaRPr>
+          </a:p>
+        </p:txBody>
+      </p:sp>
+      <p:sp>
+        <p:nvSpPr>
+          <p:cNvPr id="28" name="Slide Number Placeholder 27">
+            <a:extLst>
+              <a:ext uri="{FF2B5EF4-FFF2-40B4-BE49-F238E27FC236}">
+                <a16:creationId xmlns:a16="http://schemas.microsoft.com/office/drawing/2014/main" id="{A214C7FE-3A4B-3187-7F33-445DC2F6947F}"/>
+              </a:ext>
+            </a:extLst>
+          </p:cNvPr>
+          <p:cNvSpPr>
+            <a:spLocks noGrp="1"/>
+          </p:cNvSpPr>
+          <p:nvPr>
+            <p:ph type="sldNum" sz="quarter" idx="12"/>
+          </p:nvPr>
+        </p:nvSpPr>
+        <p:spPr/>
+        <p:txBody>
+          <a:bodyPr/>
+          <a:lstStyle/>
+          <a:p>
+            <a:fld id="{1013ED95-016C-42D7-B550-5C99AA40E4D5}" type="slidenum">
+              <a:rPr lang="en-CH" smtClean="0"/>
+              <a:pPr/>
+              <a:t>39</a:t>
+            </a:fld>
+            <a:r>
+              <a:rPr lang="en-CH"/>
+              <a:t> / XX</a:t>
+            </a:r>
+            <a:endParaRPr lang="en-CH" dirty="0"/>
+          </a:p>
+        </p:txBody>
+      </p:sp>
+      <p:cxnSp>
+        <p:nvCxnSpPr>
+          <p:cNvPr id="30" name="Straight Connector 29">
+            <a:extLst>
+              <a:ext uri="{FF2B5EF4-FFF2-40B4-BE49-F238E27FC236}">
+                <a16:creationId xmlns:a16="http://schemas.microsoft.com/office/drawing/2014/main" id="{C4EAE103-83D2-5EAF-C6C3-AF918081C579}"/>
+              </a:ext>
+            </a:extLst>
+          </p:cNvPr>
+          <p:cNvCxnSpPr>
+            <a:cxnSpLocks/>
+          </p:cNvCxnSpPr>
+          <p:nvPr/>
+        </p:nvCxnSpPr>
+        <p:spPr>
+          <a:xfrm>
+            <a:off x="1276350" y="1825625"/>
+            <a:ext cx="0" cy="2853380"/>
+          </a:xfrm>
+          <a:prstGeom prst="line">
+            <a:avLst/>
+          </a:prstGeom>
+          <a:ln>
+            <a:solidFill>
+              <a:schemeClr val="tx2"/>
+            </a:solidFill>
+          </a:ln>
+        </p:spPr>
+        <p:style>
+          <a:lnRef idx="2">
+            <a:schemeClr val="accent1"/>
+          </a:lnRef>
+          <a:fillRef idx="0">
+            <a:schemeClr val="accent1"/>
+          </a:fillRef>
+          <a:effectRef idx="1">
+            <a:schemeClr val="accent1"/>
+          </a:effectRef>
+          <a:fontRef idx="minor">
+            <a:schemeClr val="tx1"/>
+          </a:fontRef>
+        </p:style>
+      </p:cxnSp>
+    </p:spTree>
+    <p:extLst>
+      <p:ext uri="{BB962C8B-B14F-4D97-AF65-F5344CB8AC3E}">
+        <p14:creationId xmlns:p14="http://schemas.microsoft.com/office/powerpoint/2010/main" val="2813159886"/>
       </p:ext>
     </p:extLst>
   </p:cSld>
@@ -42814,6 +44549,1882 @@
           <p:cNvPr id="2" name="Title 1">
             <a:extLst>
               <a:ext uri="{FF2B5EF4-FFF2-40B4-BE49-F238E27FC236}">
+                <a16:creationId xmlns:a16="http://schemas.microsoft.com/office/drawing/2014/main" id="{D99159EB-6C55-B8E4-3060-59896726BAEA}"/>
+              </a:ext>
+            </a:extLst>
+          </p:cNvPr>
+          <p:cNvSpPr>
+            <a:spLocks noGrp="1"/>
+          </p:cNvSpPr>
+          <p:nvPr>
+            <p:ph type="title"/>
+          </p:nvPr>
+        </p:nvSpPr>
+        <p:spPr/>
+        <p:txBody>
+          <a:bodyPr/>
+          <a:lstStyle/>
+          <a:p>
+            <a:r>
+              <a:rPr lang="en-CH" dirty="0"/>
+              <a:t>Cost of Reentrancy Guards</a:t>
+            </a:r>
+          </a:p>
+        </p:txBody>
+      </p:sp>
+      <p:sp>
+        <p:nvSpPr>
+          <p:cNvPr id="3" name="Content Placeholder 2">
+            <a:extLst>
+              <a:ext uri="{FF2B5EF4-FFF2-40B4-BE49-F238E27FC236}">
+                <a16:creationId xmlns:a16="http://schemas.microsoft.com/office/drawing/2014/main" id="{49546448-4ADB-24B4-577F-C88398AB8A53}"/>
+              </a:ext>
+            </a:extLst>
+          </p:cNvPr>
+          <p:cNvSpPr>
+            <a:spLocks noGrp="1"/>
+          </p:cNvSpPr>
+          <p:nvPr>
+            <p:ph idx="1"/>
+          </p:nvPr>
+        </p:nvSpPr>
+        <p:spPr>
+          <a:xfrm>
+            <a:off x="838200" y="1825624"/>
+            <a:ext cx="10515600" cy="4223906"/>
+          </a:xfrm>
+        </p:spPr>
+        <p:txBody>
+          <a:bodyPr>
+            <a:normAutofit/>
+          </a:bodyPr>
+          <a:lstStyle/>
+          <a:p>
+            <a:pPr marL="0" indent="0">
+              <a:buNone/>
+            </a:pPr>
+            <a:r>
+              <a:rPr lang="en-CH" dirty="0"/>
+              <a:t>Reading / Writing Storage is expensive!</a:t>
+            </a:r>
+          </a:p>
+          <a:p>
+            <a:pPr marL="0" indent="0">
+              <a:buNone/>
+            </a:pPr>
+            <a:r>
+              <a:rPr lang="en-CH" dirty="0"/>
+              <a:t>Reference Costs:</a:t>
+            </a:r>
+          </a:p>
+          <a:p>
+            <a:r>
+              <a:rPr lang="en-CH" sz="2400" dirty="0"/>
+              <a:t>Base transaction cost: 21’000 gas</a:t>
+            </a:r>
+          </a:p>
+          <a:p>
+            <a:r>
+              <a:rPr lang="en-CH" sz="2400" dirty="0"/>
+              <a:t>External call (cold): 2600 gas</a:t>
+            </a:r>
+          </a:p>
+          <a:p>
+            <a:r>
+              <a:rPr lang="en-CH" sz="2400" dirty="0"/>
+              <a:t>ERC20 Transfer: ~40k-65k gas</a:t>
+            </a:r>
+          </a:p>
+          <a:p>
+            <a:r>
+              <a:rPr lang="en-CH" sz="2400" dirty="0"/>
+              <a:t>DEX trade: ~200-400k gas</a:t>
+            </a:r>
+          </a:p>
+          <a:p>
+            <a:pPr marL="0" indent="0">
+              <a:buNone/>
+            </a:pPr>
+            <a:endParaRPr lang="en-CH" sz="2400" dirty="0"/>
+          </a:p>
+        </p:txBody>
+      </p:sp>
+      <p:sp>
+        <p:nvSpPr>
+          <p:cNvPr id="4" name="Date Placeholder 3">
+            <a:extLst>
+              <a:ext uri="{FF2B5EF4-FFF2-40B4-BE49-F238E27FC236}">
+                <a16:creationId xmlns:a16="http://schemas.microsoft.com/office/drawing/2014/main" id="{ED5EC1AB-6370-9FD4-956B-ABDD286580D3}"/>
+              </a:ext>
+            </a:extLst>
+          </p:cNvPr>
+          <p:cNvSpPr>
+            <a:spLocks noGrp="1"/>
+          </p:cNvSpPr>
+          <p:nvPr>
+            <p:ph type="dt" sz="half" idx="10"/>
+          </p:nvPr>
+        </p:nvSpPr>
+        <p:spPr/>
+        <p:txBody>
+          <a:bodyPr/>
+          <a:lstStyle/>
+          <a:p>
+            <a:r>
+              <a:rPr lang="en-CH"/>
+              <a:t>30/03/2026</a:t>
+            </a:r>
+            <a:endParaRPr lang="en-CH" dirty="0"/>
+          </a:p>
+        </p:txBody>
+      </p:sp>
+      <p:sp>
+        <p:nvSpPr>
+          <p:cNvPr id="5" name="Footer Placeholder 4">
+            <a:extLst>
+              <a:ext uri="{FF2B5EF4-FFF2-40B4-BE49-F238E27FC236}">
+                <a16:creationId xmlns:a16="http://schemas.microsoft.com/office/drawing/2014/main" id="{BD9060E1-89C3-BA1F-21B5-346F6C5D2637}"/>
+              </a:ext>
+            </a:extLst>
+          </p:cNvPr>
+          <p:cNvSpPr>
+            <a:spLocks noGrp="1"/>
+          </p:cNvSpPr>
+          <p:nvPr>
+            <p:ph type="ftr" sz="quarter" idx="11"/>
+          </p:nvPr>
+        </p:nvSpPr>
+        <p:spPr/>
+        <p:txBody>
+          <a:bodyPr/>
+          <a:lstStyle/>
+          <a:p>
+            <a:r>
+              <a:rPr lang="en-CH"/>
+              <a:t>Eliminating Reentrancy through Language Design</a:t>
+            </a:r>
+            <a:endParaRPr lang="en-CH" dirty="0">
+              <a:solidFill>
+                <a:schemeClr val="tx2"/>
+              </a:solidFill>
+            </a:endParaRPr>
+          </a:p>
+        </p:txBody>
+      </p:sp>
+      <p:sp>
+        <p:nvSpPr>
+          <p:cNvPr id="6" name="Slide Number Placeholder 5">
+            <a:extLst>
+              <a:ext uri="{FF2B5EF4-FFF2-40B4-BE49-F238E27FC236}">
+                <a16:creationId xmlns:a16="http://schemas.microsoft.com/office/drawing/2014/main" id="{5ABE10FC-33E4-FF06-BB8C-E3F3FCB535EA}"/>
+              </a:ext>
+            </a:extLst>
+          </p:cNvPr>
+          <p:cNvSpPr>
+            <a:spLocks noGrp="1"/>
+          </p:cNvSpPr>
+          <p:nvPr>
+            <p:ph type="sldNum" sz="quarter" idx="12"/>
+          </p:nvPr>
+        </p:nvSpPr>
+        <p:spPr/>
+        <p:txBody>
+          <a:bodyPr/>
+          <a:lstStyle/>
+          <a:p>
+            <a:fld id="{1013ED95-016C-42D7-B550-5C99AA40E4D5}" type="slidenum">
+              <a:rPr lang="en-CH" smtClean="0"/>
+              <a:pPr/>
+              <a:t>40</a:t>
+            </a:fld>
+            <a:r>
+              <a:rPr lang="en-CH"/>
+              <a:t> / XX</a:t>
+            </a:r>
+            <a:endParaRPr lang="en-CH" dirty="0"/>
+          </a:p>
+        </p:txBody>
+      </p:sp>
+      <p:graphicFrame>
+        <p:nvGraphicFramePr>
+          <p:cNvPr id="7" name="Table 6">
+            <a:extLst>
+              <a:ext uri="{FF2B5EF4-FFF2-40B4-BE49-F238E27FC236}">
+                <a16:creationId xmlns:a16="http://schemas.microsoft.com/office/drawing/2014/main" id="{4E182278-90D1-7429-B210-681FF7FE575E}"/>
+              </a:ext>
+            </a:extLst>
+          </p:cNvPr>
+          <p:cNvGraphicFramePr>
+            <a:graphicFrameLocks noGrp="1"/>
+          </p:cNvGraphicFramePr>
+          <p:nvPr>
+            <p:extLst>
+              <p:ext uri="{D42A27DB-BD31-4B8C-83A1-F6EECF244321}">
+                <p14:modId xmlns:p14="http://schemas.microsoft.com/office/powerpoint/2010/main" val="1384630772"/>
+              </p:ext>
+            </p:extLst>
+          </p:nvPr>
+        </p:nvGraphicFramePr>
+        <p:xfrm>
+          <a:off x="5715000" y="2376690"/>
+          <a:ext cx="5951200" cy="3698240"/>
+        </p:xfrm>
+        <a:graphic>
+          <a:graphicData uri="http://schemas.openxmlformats.org/drawingml/2006/table">
+            <a:tbl>
+              <a:tblPr firstRow="1" firstCol="1" bandRow="1">
+                <a:tableStyleId>{073A0DAA-6AF3-43AB-8588-CEC1D06C72B9}</a:tableStyleId>
+              </a:tblPr>
+              <a:tblGrid>
+                <a:gridCol w="1625600">
+                  <a:extLst>
+                    <a:ext uri="{9D8B030D-6E8A-4147-A177-3AD203B41FA5}">
+                      <a16:colId xmlns:a16="http://schemas.microsoft.com/office/drawing/2014/main" val="1391336633"/>
+                    </a:ext>
+                  </a:extLst>
+                </a:gridCol>
+                <a:gridCol w="1625600">
+                  <a:extLst>
+                    <a:ext uri="{9D8B030D-6E8A-4147-A177-3AD203B41FA5}">
+                      <a16:colId xmlns:a16="http://schemas.microsoft.com/office/drawing/2014/main" val="3531957712"/>
+                    </a:ext>
+                  </a:extLst>
+                </a:gridCol>
+                <a:gridCol w="900000">
+                  <a:extLst>
+                    <a:ext uri="{9D8B030D-6E8A-4147-A177-3AD203B41FA5}">
+                      <a16:colId xmlns:a16="http://schemas.microsoft.com/office/drawing/2014/main" val="1010579451"/>
+                    </a:ext>
+                  </a:extLst>
+                </a:gridCol>
+                <a:gridCol w="900000">
+                  <a:extLst>
+                    <a:ext uri="{9D8B030D-6E8A-4147-A177-3AD203B41FA5}">
+                      <a16:colId xmlns:a16="http://schemas.microsoft.com/office/drawing/2014/main" val="2180995196"/>
+                    </a:ext>
+                  </a:extLst>
+                </a:gridCol>
+                <a:gridCol w="900000">
+                  <a:extLst>
+                    <a:ext uri="{9D8B030D-6E8A-4147-A177-3AD203B41FA5}">
+                      <a16:colId xmlns:a16="http://schemas.microsoft.com/office/drawing/2014/main" val="2563912578"/>
+                    </a:ext>
+                  </a:extLst>
+                </a:gridCol>
+              </a:tblGrid>
+              <a:tr h="370840">
+                <a:tc>
+                  <a:txBody>
+                    <a:bodyPr/>
+                    <a:lstStyle/>
+                    <a:p>
+                      <a:r>
+                        <a:rPr lang="en-CH" sz="2000" dirty="0"/>
+                        <a:t>Cache</a:t>
+                      </a:r>
+                    </a:p>
+                  </a:txBody>
+                  <a:tcPr>
+                    <a:lnL w="12700" cmpd="sng">
+                      <a:noFill/>
+                    </a:lnL>
+                    <a:lnR w="12700" cmpd="sng">
+                      <a:noFill/>
+                    </a:lnR>
+                    <a:lnT w="12700" cmpd="sng">
+                      <a:noFill/>
+                    </a:lnT>
+                    <a:lnB w="38100" cmpd="sng">
+                      <a:noFill/>
+                    </a:lnB>
+                    <a:lnTlToBr w="12700" cmpd="sng">
+                      <a:noFill/>
+                      <a:prstDash val="solid"/>
+                    </a:lnTlToBr>
+                    <a:lnBlToTr w="12700" cmpd="sng">
+                      <a:noFill/>
+                      <a:prstDash val="solid"/>
+                    </a:lnBlToTr>
+                  </a:tcPr>
+                </a:tc>
+                <a:tc>
+                  <a:txBody>
+                    <a:bodyPr/>
+                    <a:lstStyle/>
+                    <a:p>
+                      <a:r>
+                        <a:rPr lang="en-CH" sz="2000" dirty="0"/>
+                        <a:t>Scenario</a:t>
+                      </a:r>
+                    </a:p>
+                  </a:txBody>
+                  <a:tcPr>
+                    <a:lnL w="12700" cmpd="sng">
+                      <a:noFill/>
+                    </a:lnL>
+                    <a:lnR w="12700" cmpd="sng">
+                      <a:noFill/>
+                    </a:lnR>
+                    <a:lnT w="12700" cmpd="sng">
+                      <a:noFill/>
+                    </a:lnT>
+                    <a:lnB w="38100" cmpd="sng">
+                      <a:noFill/>
+                    </a:lnB>
+                    <a:lnTlToBr w="12700" cmpd="sng">
+                      <a:noFill/>
+                      <a:prstDash val="solid"/>
+                    </a:lnTlToBr>
+                    <a:lnBlToTr w="12700" cmpd="sng">
+                      <a:noFill/>
+                      <a:prstDash val="solid"/>
+                    </a:lnBlToTr>
+                  </a:tcPr>
+                </a:tc>
+                <a:tc>
+                  <a:txBody>
+                    <a:bodyPr/>
+                    <a:lstStyle/>
+                    <a:p>
+                      <a:r>
+                        <a:rPr lang="en-CH" sz="2000" dirty="0"/>
+                        <a:t>OZ</a:t>
+                      </a:r>
+                    </a:p>
+                  </a:txBody>
+                  <a:tcPr>
+                    <a:lnL w="12700" cmpd="sng">
+                      <a:noFill/>
+                    </a:lnL>
+                    <a:lnR w="12700" cmpd="sng">
+                      <a:noFill/>
+                    </a:lnR>
+                    <a:lnT w="12700" cmpd="sng">
+                      <a:noFill/>
+                    </a:lnT>
+                    <a:lnB w="38100" cmpd="sng">
+                      <a:noFill/>
+                    </a:lnB>
+                    <a:lnTlToBr w="12700" cmpd="sng">
+                      <a:noFill/>
+                      <a:prstDash val="solid"/>
+                    </a:lnTlToBr>
+                    <a:lnBlToTr w="12700" cmpd="sng">
+                      <a:noFill/>
+                      <a:prstDash val="solid"/>
+                    </a:lnBlToTr>
+                  </a:tcPr>
+                </a:tc>
+                <a:tc>
+                  <a:txBody>
+                    <a:bodyPr/>
+                    <a:lstStyle/>
+                    <a:p>
+                      <a:r>
+                        <a:rPr lang="en-CH" sz="2000" dirty="0"/>
+                        <a:t>Ours</a:t>
+                      </a:r>
+                    </a:p>
+                  </a:txBody>
+                  <a:tcPr>
+                    <a:lnL w="12700" cmpd="sng">
+                      <a:noFill/>
+                    </a:lnL>
+                    <a:lnR w="12700" cmpd="sng">
+                      <a:noFill/>
+                    </a:lnR>
+                    <a:lnT w="12700" cmpd="sng">
+                      <a:noFill/>
+                    </a:lnT>
+                    <a:lnB w="38100" cmpd="sng">
+                      <a:noFill/>
+                    </a:lnB>
+                    <a:lnTlToBr w="12700" cmpd="sng">
+                      <a:noFill/>
+                      <a:prstDash val="solid"/>
+                    </a:lnTlToBr>
+                    <a:lnBlToTr w="12700" cmpd="sng">
+                      <a:noFill/>
+                      <a:prstDash val="solid"/>
+                    </a:lnBlToTr>
+                  </a:tcPr>
+                </a:tc>
+                <a:tc>
+                  <a:txBody>
+                    <a:bodyPr/>
+                    <a:lstStyle/>
+                    <a:p>
+                      <a:r>
+                        <a:rPr lang="en-CH" sz="2000" dirty="0"/>
+                        <a:t>Delta</a:t>
+                      </a:r>
+                    </a:p>
+                  </a:txBody>
+                  <a:tcPr>
+                    <a:lnL w="12700" cmpd="sng">
+                      <a:noFill/>
+                    </a:lnL>
+                    <a:lnR w="12700" cmpd="sng">
+                      <a:noFill/>
+                    </a:lnR>
+                    <a:lnT w="12700" cmpd="sng">
+                      <a:noFill/>
+                    </a:lnT>
+                    <a:lnB w="38100" cmpd="sng">
+                      <a:noFill/>
+                    </a:lnB>
+                    <a:lnTlToBr w="12700" cmpd="sng">
+                      <a:noFill/>
+                      <a:prstDash val="solid"/>
+                    </a:lnTlToBr>
+                    <a:lnBlToTr w="12700" cmpd="sng">
+                      <a:noFill/>
+                      <a:prstDash val="solid"/>
+                    </a:lnBlToTr>
+                  </a:tcPr>
+                </a:tc>
+                <a:extLst>
+                  <a:ext uri="{0D108BD9-81ED-4DB2-BD59-A6C34878D82A}">
+                    <a16:rowId xmlns:a16="http://schemas.microsoft.com/office/drawing/2014/main" val="147760648"/>
+                  </a:ext>
+                </a:extLst>
+              </a:tr>
+              <a:tr h="370840">
+                <a:tc rowSpan="3">
+                  <a:txBody>
+                    <a:bodyPr/>
+                    <a:lstStyle/>
+                    <a:p>
+                      <a:r>
+                        <a:rPr lang="en-CH" dirty="0">
+                          <a:solidFill>
+                            <a:schemeClr val="bg1"/>
+                          </a:solidFill>
+                        </a:rPr>
+                        <a:t>Warm Slot</a:t>
+                      </a:r>
+                    </a:p>
+                  </a:txBody>
+                  <a:tcPr anchor="ctr">
+                    <a:lnL w="12700" cmpd="sng">
+                      <a:noFill/>
+                    </a:lnL>
+                    <a:lnR w="12700" cmpd="sng">
+                      <a:noFill/>
+                    </a:lnR>
+                    <a:lnT w="38100" cmpd="sng">
+                      <a:noFill/>
+                    </a:lnT>
+                    <a:lnB w="12700" cap="flat" cmpd="sng" algn="ctr">
+                      <a:solidFill>
+                        <a:schemeClr val="bg1"/>
+                      </a:solidFill>
+                      <a:prstDash val="solid"/>
+                      <a:round/>
+                      <a:headEnd type="none" w="med" len="med"/>
+                      <a:tailEnd type="none" w="med" len="med"/>
+                    </a:lnB>
+                    <a:lnTlToBr w="12700" cmpd="sng">
+                      <a:noFill/>
+                      <a:prstDash val="solid"/>
+                    </a:lnTlToBr>
+                    <a:lnBlToTr w="12700" cmpd="sng">
+                      <a:noFill/>
+                      <a:prstDash val="solid"/>
+                    </a:lnBlToTr>
+                    <a:solidFill>
+                      <a:schemeClr val="accent3">
+                        <a:lumMod val="40000"/>
+                        <a:lumOff val="60000"/>
+                      </a:schemeClr>
+                    </a:solidFill>
+                  </a:tcPr>
+                </a:tc>
+                <a:tc>
+                  <a:txBody>
+                    <a:bodyPr/>
+                    <a:lstStyle/>
+                    <a:p>
+                      <a:r>
+                        <a:rPr lang="en-CH" b="1" dirty="0"/>
+                        <a:t>Default</a:t>
+                      </a:r>
+                    </a:p>
+                  </a:txBody>
+                  <a:tcPr>
+                    <a:lnL w="12700" cmpd="sng">
+                      <a:noFill/>
+                    </a:lnL>
+                    <a:lnR w="12700" cmpd="sng">
+                      <a:noFill/>
+                    </a:lnR>
+                    <a:lnT w="38100" cmpd="sng">
+                      <a:noFill/>
+                    </a:lnT>
+                    <a:lnB w="12700" cmpd="sng">
+                      <a:noFill/>
+                    </a:lnB>
+                    <a:lnTlToBr w="12700" cmpd="sng">
+                      <a:noFill/>
+                      <a:prstDash val="solid"/>
+                    </a:lnTlToBr>
+                    <a:lnBlToTr w="12700" cmpd="sng">
+                      <a:noFill/>
+                      <a:prstDash val="solid"/>
+                    </a:lnBlToTr>
+                  </a:tcPr>
+                </a:tc>
+                <a:tc>
+                  <a:txBody>
+                    <a:bodyPr/>
+                    <a:lstStyle/>
+                    <a:p>
+                      <a:r>
+                        <a:rPr lang="en-CH" b="1" dirty="0"/>
+                        <a:t>300</a:t>
+                      </a:r>
+                    </a:p>
+                  </a:txBody>
+                  <a:tcPr>
+                    <a:lnL w="12700" cmpd="sng">
+                      <a:noFill/>
+                    </a:lnL>
+                    <a:lnR w="12700" cmpd="sng">
+                      <a:noFill/>
+                    </a:lnR>
+                    <a:lnT w="38100" cmpd="sng">
+                      <a:noFill/>
+                    </a:lnT>
+                    <a:lnB w="12700" cmpd="sng">
+                      <a:noFill/>
+                    </a:lnB>
+                    <a:lnTlToBr w="12700" cmpd="sng">
+                      <a:noFill/>
+                      <a:prstDash val="solid"/>
+                    </a:lnTlToBr>
+                    <a:lnBlToTr w="12700" cmpd="sng">
+                      <a:noFill/>
+                      <a:prstDash val="solid"/>
+                    </a:lnBlToTr>
+                  </a:tcPr>
+                </a:tc>
+                <a:tc>
+                  <a:txBody>
+                    <a:bodyPr/>
+                    <a:lstStyle/>
+                    <a:p>
+                      <a:r>
+                        <a:rPr lang="en-CH" b="1" dirty="0"/>
+                        <a:t>300</a:t>
+                      </a:r>
+                    </a:p>
+                  </a:txBody>
+                  <a:tcPr>
+                    <a:lnL w="12700" cmpd="sng">
+                      <a:noFill/>
+                    </a:lnL>
+                    <a:lnR w="12700" cmpd="sng">
+                      <a:noFill/>
+                    </a:lnR>
+                    <a:lnT w="38100" cmpd="sng">
+                      <a:noFill/>
+                    </a:lnT>
+                    <a:lnB w="12700" cmpd="sng">
+                      <a:noFill/>
+                    </a:lnB>
+                    <a:lnTlToBr w="12700" cmpd="sng">
+                      <a:noFill/>
+                      <a:prstDash val="solid"/>
+                    </a:lnTlToBr>
+                    <a:lnBlToTr w="12700" cmpd="sng">
+                      <a:noFill/>
+                      <a:prstDash val="solid"/>
+                    </a:lnBlToTr>
+                  </a:tcPr>
+                </a:tc>
+                <a:tc>
+                  <a:txBody>
+                    <a:bodyPr/>
+                    <a:lstStyle/>
+                    <a:p>
+                      <a:r>
+                        <a:rPr lang="en-CH" b="1" dirty="0"/>
+                        <a:t>0</a:t>
+                      </a:r>
+                    </a:p>
+                  </a:txBody>
+                  <a:tcPr>
+                    <a:lnL w="12700" cmpd="sng">
+                      <a:noFill/>
+                    </a:lnL>
+                    <a:lnR w="12700" cmpd="sng">
+                      <a:noFill/>
+                    </a:lnR>
+                    <a:lnT w="38100" cmpd="sng">
+                      <a:noFill/>
+                    </a:lnT>
+                    <a:lnB w="12700" cmpd="sng">
+                      <a:noFill/>
+                    </a:lnB>
+                    <a:lnTlToBr w="12700" cmpd="sng">
+                      <a:noFill/>
+                      <a:prstDash val="solid"/>
+                    </a:lnTlToBr>
+                    <a:lnBlToTr w="12700" cmpd="sng">
+                      <a:noFill/>
+                      <a:prstDash val="solid"/>
+                    </a:lnBlToTr>
+                    <a:solidFill>
+                      <a:schemeClr val="accent5">
+                        <a:lumMod val="40000"/>
+                        <a:lumOff val="60000"/>
+                      </a:schemeClr>
+                    </a:solidFill>
+                  </a:tcPr>
+                </a:tc>
+                <a:extLst>
+                  <a:ext uri="{0D108BD9-81ED-4DB2-BD59-A6C34878D82A}">
+                    <a16:rowId xmlns:a16="http://schemas.microsoft.com/office/drawing/2014/main" val="3755818381"/>
+                  </a:ext>
+                </a:extLst>
+              </a:tr>
+              <a:tr h="370840">
+                <a:tc vMerge="1">
+                  <a:txBody>
+                    <a:bodyPr/>
+                    <a:lstStyle/>
+                    <a:p>
+                      <a:endParaRPr lang="en-CH" dirty="0"/>
+                    </a:p>
+                  </a:txBody>
+                  <a:tcPr/>
+                </a:tc>
+                <a:tc>
+                  <a:txBody>
+                    <a:bodyPr/>
+                    <a:lstStyle/>
+                    <a:p>
+                      <a:r>
+                        <a:rPr lang="en-CH" b="1" dirty="0"/>
+                        <a:t>No external calls</a:t>
+                      </a:r>
+                    </a:p>
+                  </a:txBody>
+                  <a:tcPr>
+                    <a:lnL w="12700" cmpd="sng">
+                      <a:noFill/>
+                    </a:lnL>
+                    <a:lnR w="12700" cmpd="sng">
+                      <a:noFill/>
+                    </a:lnR>
+                    <a:lnT w="12700" cmpd="sng">
+                      <a:noFill/>
+                    </a:lnT>
+                    <a:lnB w="12700" cmpd="sng">
+                      <a:noFill/>
+                    </a:lnB>
+                    <a:lnTlToBr w="12700" cmpd="sng">
+                      <a:noFill/>
+                      <a:prstDash val="solid"/>
+                    </a:lnTlToBr>
+                    <a:lnBlToTr w="12700" cmpd="sng">
+                      <a:noFill/>
+                      <a:prstDash val="solid"/>
+                    </a:lnBlToTr>
+                  </a:tcPr>
+                </a:tc>
+                <a:tc>
+                  <a:txBody>
+                    <a:bodyPr/>
+                    <a:lstStyle/>
+                    <a:p>
+                      <a:r>
+                        <a:rPr lang="en-CH" b="1" dirty="0"/>
+                        <a:t>300</a:t>
+                      </a:r>
+                    </a:p>
+                  </a:txBody>
+                  <a:tcPr>
+                    <a:lnL w="12700" cmpd="sng">
+                      <a:noFill/>
+                    </a:lnL>
+                    <a:lnR w="12700" cmpd="sng">
+                      <a:noFill/>
+                    </a:lnR>
+                    <a:lnT w="12700" cmpd="sng">
+                      <a:noFill/>
+                    </a:lnT>
+                    <a:lnB w="12700" cmpd="sng">
+                      <a:noFill/>
+                    </a:lnB>
+                    <a:lnTlToBr w="12700" cmpd="sng">
+                      <a:noFill/>
+                      <a:prstDash val="solid"/>
+                    </a:lnTlToBr>
+                    <a:lnBlToTr w="12700" cmpd="sng">
+                      <a:noFill/>
+                      <a:prstDash val="solid"/>
+                    </a:lnBlToTr>
+                  </a:tcPr>
+                </a:tc>
+                <a:tc>
+                  <a:txBody>
+                    <a:bodyPr/>
+                    <a:lstStyle/>
+                    <a:p>
+                      <a:r>
+                        <a:rPr lang="en-CH" b="1" dirty="0"/>
+                        <a:t>100</a:t>
+                      </a:r>
+                    </a:p>
+                  </a:txBody>
+                  <a:tcPr>
+                    <a:lnL w="12700" cmpd="sng">
+                      <a:noFill/>
+                    </a:lnL>
+                    <a:lnR w="12700" cmpd="sng">
+                      <a:noFill/>
+                    </a:lnR>
+                    <a:lnT w="12700" cmpd="sng">
+                      <a:noFill/>
+                    </a:lnT>
+                    <a:lnB w="12700" cmpd="sng">
+                      <a:noFill/>
+                    </a:lnB>
+                    <a:lnTlToBr w="12700" cmpd="sng">
+                      <a:noFill/>
+                      <a:prstDash val="solid"/>
+                    </a:lnTlToBr>
+                    <a:lnBlToTr w="12700" cmpd="sng">
+                      <a:noFill/>
+                      <a:prstDash val="solid"/>
+                    </a:lnBlToTr>
+                  </a:tcPr>
+                </a:tc>
+                <a:tc>
+                  <a:txBody>
+                    <a:bodyPr/>
+                    <a:lstStyle/>
+                    <a:p>
+                      <a:r>
+                        <a:rPr lang="en-CH" b="1" dirty="0"/>
+                        <a:t>-200</a:t>
+                      </a:r>
+                    </a:p>
+                  </a:txBody>
+                  <a:tcPr>
+                    <a:lnL w="12700" cmpd="sng">
+                      <a:noFill/>
+                    </a:lnL>
+                    <a:lnR w="12700" cmpd="sng">
+                      <a:noFill/>
+                    </a:lnR>
+                    <a:lnT w="12700" cmpd="sng">
+                      <a:noFill/>
+                    </a:lnT>
+                    <a:lnB w="12700" cmpd="sng">
+                      <a:noFill/>
+                    </a:lnB>
+                    <a:lnTlToBr w="12700" cmpd="sng">
+                      <a:noFill/>
+                      <a:prstDash val="solid"/>
+                    </a:lnTlToBr>
+                    <a:lnBlToTr w="12700" cmpd="sng">
+                      <a:noFill/>
+                      <a:prstDash val="solid"/>
+                    </a:lnBlToTr>
+                    <a:solidFill>
+                      <a:schemeClr val="accent6">
+                        <a:lumMod val="40000"/>
+                        <a:lumOff val="60000"/>
+                      </a:schemeClr>
+                    </a:solidFill>
+                  </a:tcPr>
+                </a:tc>
+                <a:extLst>
+                  <a:ext uri="{0D108BD9-81ED-4DB2-BD59-A6C34878D82A}">
+                    <a16:rowId xmlns:a16="http://schemas.microsoft.com/office/drawing/2014/main" val="2299001220"/>
+                  </a:ext>
+                </a:extLst>
+              </a:tr>
+              <a:tr h="370840">
+                <a:tc vMerge="1">
+                  <a:txBody>
+                    <a:bodyPr/>
+                    <a:lstStyle/>
+                    <a:p>
+                      <a:endParaRPr lang="en-CH" dirty="0"/>
+                    </a:p>
+                  </a:txBody>
+                  <a:tcPr/>
+                </a:tc>
+                <a:tc>
+                  <a:txBody>
+                    <a:bodyPr/>
+                    <a:lstStyle/>
+                    <a:p>
+                      <a:r>
+                        <a:rPr lang="en-CH" b="1" dirty="0"/>
+                        <a:t>Read-only function</a:t>
+                      </a:r>
+                    </a:p>
+                  </a:txBody>
+                  <a:tcPr>
+                    <a:lnL w="12700" cmpd="sng">
+                      <a:noFill/>
+                    </a:lnL>
+                    <a:lnR w="12700" cmpd="sng">
+                      <a:noFill/>
+                    </a:lnR>
+                    <a:lnT w="12700" cmpd="sng">
+                      <a:noFill/>
+                    </a:lnT>
+                    <a:lnB w="12700" cap="flat" cmpd="sng" algn="ctr">
+                      <a:solidFill>
+                        <a:schemeClr val="bg1"/>
+                      </a:solidFill>
+                      <a:prstDash val="solid"/>
+                      <a:round/>
+                      <a:headEnd type="none" w="med" len="med"/>
+                      <a:tailEnd type="none" w="med" len="med"/>
+                    </a:lnB>
+                    <a:lnTlToBr w="12700" cmpd="sng">
+                      <a:noFill/>
+                      <a:prstDash val="solid"/>
+                    </a:lnTlToBr>
+                    <a:lnBlToTr w="12700" cmpd="sng">
+                      <a:noFill/>
+                      <a:prstDash val="solid"/>
+                    </a:lnBlToTr>
+                  </a:tcPr>
+                </a:tc>
+                <a:tc>
+                  <a:txBody>
+                    <a:bodyPr/>
+                    <a:lstStyle/>
+                    <a:p>
+                      <a:r>
+                        <a:rPr lang="en-CH" b="1" dirty="0"/>
+                        <a:t>0</a:t>
+                      </a:r>
+                    </a:p>
+                  </a:txBody>
+                  <a:tcPr>
+                    <a:lnL w="12700" cmpd="sng">
+                      <a:noFill/>
+                    </a:lnL>
+                    <a:lnR w="12700" cmpd="sng">
+                      <a:noFill/>
+                    </a:lnR>
+                    <a:lnT w="12700" cmpd="sng">
+                      <a:noFill/>
+                    </a:lnT>
+                    <a:lnB w="12700" cap="flat" cmpd="sng" algn="ctr">
+                      <a:solidFill>
+                        <a:schemeClr val="bg1"/>
+                      </a:solidFill>
+                      <a:prstDash val="solid"/>
+                      <a:round/>
+                      <a:headEnd type="none" w="med" len="med"/>
+                      <a:tailEnd type="none" w="med" len="med"/>
+                    </a:lnB>
+                    <a:lnTlToBr w="12700" cmpd="sng">
+                      <a:noFill/>
+                      <a:prstDash val="solid"/>
+                    </a:lnTlToBr>
+                    <a:lnBlToTr w="12700" cmpd="sng">
+                      <a:noFill/>
+                      <a:prstDash val="solid"/>
+                    </a:lnBlToTr>
+                  </a:tcPr>
+                </a:tc>
+                <a:tc>
+                  <a:txBody>
+                    <a:bodyPr/>
+                    <a:lstStyle/>
+                    <a:p>
+                      <a:r>
+                        <a:rPr lang="en-CH" b="1" dirty="0"/>
+                        <a:t>100</a:t>
+                      </a:r>
+                    </a:p>
+                  </a:txBody>
+                  <a:tcPr>
+                    <a:lnL w="12700" cmpd="sng">
+                      <a:noFill/>
+                    </a:lnL>
+                    <a:lnR w="12700" cmpd="sng">
+                      <a:noFill/>
+                    </a:lnR>
+                    <a:lnT w="12700" cmpd="sng">
+                      <a:noFill/>
+                    </a:lnT>
+                    <a:lnB w="12700" cap="flat" cmpd="sng" algn="ctr">
+                      <a:solidFill>
+                        <a:schemeClr val="bg1"/>
+                      </a:solidFill>
+                      <a:prstDash val="solid"/>
+                      <a:round/>
+                      <a:headEnd type="none" w="med" len="med"/>
+                      <a:tailEnd type="none" w="med" len="med"/>
+                    </a:lnB>
+                    <a:lnTlToBr w="12700" cmpd="sng">
+                      <a:noFill/>
+                      <a:prstDash val="solid"/>
+                    </a:lnTlToBr>
+                    <a:lnBlToTr w="12700" cmpd="sng">
+                      <a:noFill/>
+                      <a:prstDash val="solid"/>
+                    </a:lnBlToTr>
+                  </a:tcPr>
+                </a:tc>
+                <a:tc>
+                  <a:txBody>
+                    <a:bodyPr/>
+                    <a:lstStyle/>
+                    <a:p>
+                      <a:r>
+                        <a:rPr lang="en-CH" b="1" dirty="0"/>
+                        <a:t>100</a:t>
+                      </a:r>
+                    </a:p>
+                  </a:txBody>
+                  <a:tcPr>
+                    <a:lnL w="12700" cmpd="sng">
+                      <a:noFill/>
+                    </a:lnL>
+                    <a:lnR w="12700" cmpd="sng">
+                      <a:noFill/>
+                    </a:lnR>
+                    <a:lnT w="12700" cmpd="sng">
+                      <a:noFill/>
+                    </a:lnT>
+                    <a:lnB w="12700" cap="flat" cmpd="sng" algn="ctr">
+                      <a:solidFill>
+                        <a:schemeClr val="bg1"/>
+                      </a:solidFill>
+                      <a:prstDash val="solid"/>
+                      <a:round/>
+                      <a:headEnd type="none" w="med" len="med"/>
+                      <a:tailEnd type="none" w="med" len="med"/>
+                    </a:lnB>
+                    <a:lnTlToBr w="12700" cmpd="sng">
+                      <a:noFill/>
+                      <a:prstDash val="solid"/>
+                    </a:lnTlToBr>
+                    <a:lnBlToTr w="12700" cmpd="sng">
+                      <a:noFill/>
+                      <a:prstDash val="solid"/>
+                    </a:lnBlToTr>
+                    <a:solidFill>
+                      <a:schemeClr val="accent1">
+                        <a:lumMod val="40000"/>
+                        <a:lumOff val="60000"/>
+                      </a:schemeClr>
+                    </a:solidFill>
+                  </a:tcPr>
+                </a:tc>
+                <a:extLst>
+                  <a:ext uri="{0D108BD9-81ED-4DB2-BD59-A6C34878D82A}">
+                    <a16:rowId xmlns:a16="http://schemas.microsoft.com/office/drawing/2014/main" val="1629555795"/>
+                  </a:ext>
+                </a:extLst>
+              </a:tr>
+              <a:tr h="370840">
+                <a:tc rowSpan="3">
+                  <a:txBody>
+                    <a:bodyPr/>
+                    <a:lstStyle/>
+                    <a:p>
+                      <a:r>
+                        <a:rPr lang="en-CH" dirty="0">
+                          <a:solidFill>
+                            <a:schemeClr val="bg1"/>
+                          </a:solidFill>
+                        </a:rPr>
+                        <a:t>Cold Slot</a:t>
+                      </a:r>
+                    </a:p>
+                  </a:txBody>
+                  <a:tcPr anchor="ctr">
+                    <a:lnL w="12700" cmpd="sng">
+                      <a:noFill/>
+                    </a:lnL>
+                    <a:lnR w="12700" cmpd="sng">
+                      <a:noFill/>
+                    </a:lnR>
+                    <a:lnT w="12700" cap="flat" cmpd="sng" algn="ctr">
+                      <a:solidFill>
+                        <a:schemeClr val="bg1"/>
+                      </a:solidFill>
+                      <a:prstDash val="solid"/>
+                      <a:round/>
+                      <a:headEnd type="none" w="med" len="med"/>
+                      <a:tailEnd type="none" w="med" len="med"/>
+                    </a:lnT>
+                    <a:lnB w="12700" cap="flat" cmpd="sng" algn="ctr">
+                      <a:noFill/>
+                      <a:prstDash val="solid"/>
+                      <a:round/>
+                      <a:headEnd type="none" w="med" len="med"/>
+                      <a:tailEnd type="none" w="med" len="med"/>
+                    </a:lnB>
+                    <a:lnTlToBr w="12700" cmpd="sng">
+                      <a:noFill/>
+                      <a:prstDash val="solid"/>
+                    </a:lnTlToBr>
+                    <a:lnBlToTr w="12700" cmpd="sng">
+                      <a:noFill/>
+                      <a:prstDash val="solid"/>
+                    </a:lnBlToTr>
+                    <a:solidFill>
+                      <a:schemeClr val="accent2">
+                        <a:lumMod val="60000"/>
+                        <a:lumOff val="40000"/>
+                      </a:schemeClr>
+                    </a:solidFill>
+                  </a:tcPr>
+                </a:tc>
+                <a:tc>
+                  <a:txBody>
+                    <a:bodyPr/>
+                    <a:lstStyle/>
+                    <a:p>
+                      <a:r>
+                        <a:rPr lang="en-CH" b="1" dirty="0"/>
+                        <a:t>Default</a:t>
+                      </a:r>
+                    </a:p>
+                  </a:txBody>
+                  <a:tcPr>
+                    <a:lnL w="12700" cmpd="sng">
+                      <a:noFill/>
+                    </a:lnL>
+                    <a:lnR w="12700" cmpd="sng">
+                      <a:noFill/>
+                    </a:lnR>
+                    <a:lnT w="12700" cap="flat" cmpd="sng" algn="ctr">
+                      <a:solidFill>
+                        <a:schemeClr val="bg1"/>
+                      </a:solidFill>
+                      <a:prstDash val="solid"/>
+                      <a:round/>
+                      <a:headEnd type="none" w="med" len="med"/>
+                      <a:tailEnd type="none" w="med" len="med"/>
+                    </a:lnT>
+                    <a:lnB w="12700" cmpd="sng">
+                      <a:noFill/>
+                    </a:lnB>
+                    <a:lnTlToBr w="12700" cmpd="sng">
+                      <a:noFill/>
+                      <a:prstDash val="solid"/>
+                    </a:lnTlToBr>
+                    <a:lnBlToTr w="12700" cmpd="sng">
+                      <a:noFill/>
+                      <a:prstDash val="solid"/>
+                    </a:lnBlToTr>
+                  </a:tcPr>
+                </a:tc>
+                <a:tc>
+                  <a:txBody>
+                    <a:bodyPr/>
+                    <a:lstStyle/>
+                    <a:p>
+                      <a:r>
+                        <a:rPr lang="en-CH" b="1" dirty="0"/>
+                        <a:t>2300</a:t>
+                      </a:r>
+                    </a:p>
+                  </a:txBody>
+                  <a:tcPr>
+                    <a:lnL w="12700" cmpd="sng">
+                      <a:noFill/>
+                    </a:lnL>
+                    <a:lnR w="12700" cmpd="sng">
+                      <a:noFill/>
+                    </a:lnR>
+                    <a:lnT w="12700" cap="flat" cmpd="sng" algn="ctr">
+                      <a:solidFill>
+                        <a:schemeClr val="bg1"/>
+                      </a:solidFill>
+                      <a:prstDash val="solid"/>
+                      <a:round/>
+                      <a:headEnd type="none" w="med" len="med"/>
+                      <a:tailEnd type="none" w="med" len="med"/>
+                    </a:lnT>
+                    <a:lnB w="12700" cmpd="sng">
+                      <a:noFill/>
+                    </a:lnB>
+                    <a:lnTlToBr w="12700" cmpd="sng">
+                      <a:noFill/>
+                      <a:prstDash val="solid"/>
+                    </a:lnTlToBr>
+                    <a:lnBlToTr w="12700" cmpd="sng">
+                      <a:noFill/>
+                      <a:prstDash val="solid"/>
+                    </a:lnBlToTr>
+                  </a:tcPr>
+                </a:tc>
+                <a:tc>
+                  <a:txBody>
+                    <a:bodyPr/>
+                    <a:lstStyle/>
+                    <a:p>
+                      <a:r>
+                        <a:rPr lang="en-CH" b="1" dirty="0"/>
+                        <a:t>2300</a:t>
+                      </a:r>
+                    </a:p>
+                  </a:txBody>
+                  <a:tcPr>
+                    <a:lnL w="12700" cmpd="sng">
+                      <a:noFill/>
+                    </a:lnL>
+                    <a:lnR w="12700" cmpd="sng">
+                      <a:noFill/>
+                    </a:lnR>
+                    <a:lnT w="12700" cap="flat" cmpd="sng" algn="ctr">
+                      <a:solidFill>
+                        <a:schemeClr val="bg1"/>
+                      </a:solidFill>
+                      <a:prstDash val="solid"/>
+                      <a:round/>
+                      <a:headEnd type="none" w="med" len="med"/>
+                      <a:tailEnd type="none" w="med" len="med"/>
+                    </a:lnT>
+                    <a:lnB w="12700" cmpd="sng">
+                      <a:noFill/>
+                    </a:lnB>
+                    <a:lnTlToBr w="12700" cmpd="sng">
+                      <a:noFill/>
+                      <a:prstDash val="solid"/>
+                    </a:lnTlToBr>
+                    <a:lnBlToTr w="12700" cmpd="sng">
+                      <a:noFill/>
+                      <a:prstDash val="solid"/>
+                    </a:lnBlToTr>
+                  </a:tcPr>
+                </a:tc>
+                <a:tc>
+                  <a:txBody>
+                    <a:bodyPr/>
+                    <a:lstStyle/>
+                    <a:p>
+                      <a:r>
+                        <a:rPr lang="en-CH" b="1" dirty="0"/>
+                        <a:t>0</a:t>
+                      </a:r>
+                    </a:p>
+                  </a:txBody>
+                  <a:tcPr>
+                    <a:lnL w="12700" cmpd="sng">
+                      <a:noFill/>
+                    </a:lnL>
+                    <a:lnR w="12700" cmpd="sng">
+                      <a:noFill/>
+                    </a:lnR>
+                    <a:lnT w="12700" cap="flat" cmpd="sng" algn="ctr">
+                      <a:solidFill>
+                        <a:schemeClr val="bg1"/>
+                      </a:solidFill>
+                      <a:prstDash val="solid"/>
+                      <a:round/>
+                      <a:headEnd type="none" w="med" len="med"/>
+                      <a:tailEnd type="none" w="med" len="med"/>
+                    </a:lnT>
+                    <a:lnB w="12700" cmpd="sng">
+                      <a:noFill/>
+                    </a:lnB>
+                    <a:lnTlToBr w="12700" cmpd="sng">
+                      <a:noFill/>
+                      <a:prstDash val="solid"/>
+                    </a:lnTlToBr>
+                    <a:lnBlToTr w="12700" cmpd="sng">
+                      <a:noFill/>
+                      <a:prstDash val="solid"/>
+                    </a:lnBlToTr>
+                    <a:solidFill>
+                      <a:schemeClr val="accent5">
+                        <a:lumMod val="40000"/>
+                        <a:lumOff val="60000"/>
+                      </a:schemeClr>
+                    </a:solidFill>
+                  </a:tcPr>
+                </a:tc>
+                <a:extLst>
+                  <a:ext uri="{0D108BD9-81ED-4DB2-BD59-A6C34878D82A}">
+                    <a16:rowId xmlns:a16="http://schemas.microsoft.com/office/drawing/2014/main" val="4119820351"/>
+                  </a:ext>
+                </a:extLst>
+              </a:tr>
+              <a:tr h="370840">
+                <a:tc vMerge="1">
+                  <a:txBody>
+                    <a:bodyPr/>
+                    <a:lstStyle/>
+                    <a:p>
+                      <a:endParaRPr lang="en-CH" dirty="0"/>
+                    </a:p>
+                  </a:txBody>
+                  <a:tcPr/>
+                </a:tc>
+                <a:tc>
+                  <a:txBody>
+                    <a:bodyPr/>
+                    <a:lstStyle/>
+                    <a:p>
+                      <a:r>
+                        <a:rPr lang="en-CH" b="1" dirty="0"/>
+                        <a:t>No external calls</a:t>
+                      </a:r>
+                    </a:p>
+                  </a:txBody>
+                  <a:tcPr>
+                    <a:lnL w="12700" cmpd="sng">
+                      <a:noFill/>
+                    </a:lnL>
+                    <a:lnR w="12700" cmpd="sng">
+                      <a:noFill/>
+                    </a:lnR>
+                    <a:lnT w="12700" cmpd="sng">
+                      <a:noFill/>
+                    </a:lnT>
+                    <a:lnB w="12700" cmpd="sng">
+                      <a:noFill/>
+                    </a:lnB>
+                    <a:lnTlToBr w="12700" cmpd="sng">
+                      <a:noFill/>
+                      <a:prstDash val="solid"/>
+                    </a:lnTlToBr>
+                    <a:lnBlToTr w="12700" cmpd="sng">
+                      <a:noFill/>
+                      <a:prstDash val="solid"/>
+                    </a:lnBlToTr>
+                  </a:tcPr>
+                </a:tc>
+                <a:tc>
+                  <a:txBody>
+                    <a:bodyPr/>
+                    <a:lstStyle/>
+                    <a:p>
+                      <a:r>
+                        <a:rPr lang="en-CH" b="1" dirty="0"/>
+                        <a:t>2300</a:t>
+                      </a:r>
+                    </a:p>
+                  </a:txBody>
+                  <a:tcPr>
+                    <a:lnL w="12700" cmpd="sng">
+                      <a:noFill/>
+                    </a:lnL>
+                    <a:lnR w="12700" cmpd="sng">
+                      <a:noFill/>
+                    </a:lnR>
+                    <a:lnT w="12700" cmpd="sng">
+                      <a:noFill/>
+                    </a:lnT>
+                    <a:lnB w="12700" cmpd="sng">
+                      <a:noFill/>
+                    </a:lnB>
+                    <a:lnTlToBr w="12700" cmpd="sng">
+                      <a:noFill/>
+                      <a:prstDash val="solid"/>
+                    </a:lnTlToBr>
+                    <a:lnBlToTr w="12700" cmpd="sng">
+                      <a:noFill/>
+                      <a:prstDash val="solid"/>
+                    </a:lnBlToTr>
+                  </a:tcPr>
+                </a:tc>
+                <a:tc>
+                  <a:txBody>
+                    <a:bodyPr/>
+                    <a:lstStyle/>
+                    <a:p>
+                      <a:r>
+                        <a:rPr lang="en-CH" b="1" dirty="0"/>
+                        <a:t>2100</a:t>
+                      </a:r>
+                    </a:p>
+                  </a:txBody>
+                  <a:tcPr>
+                    <a:lnL w="12700" cmpd="sng">
+                      <a:noFill/>
+                    </a:lnL>
+                    <a:lnR w="12700" cmpd="sng">
+                      <a:noFill/>
+                    </a:lnR>
+                    <a:lnT w="12700" cmpd="sng">
+                      <a:noFill/>
+                    </a:lnT>
+                    <a:lnB w="12700" cmpd="sng">
+                      <a:noFill/>
+                    </a:lnB>
+                    <a:lnTlToBr w="12700" cmpd="sng">
+                      <a:noFill/>
+                      <a:prstDash val="solid"/>
+                    </a:lnTlToBr>
+                    <a:lnBlToTr w="12700" cmpd="sng">
+                      <a:noFill/>
+                      <a:prstDash val="solid"/>
+                    </a:lnBlToTr>
+                  </a:tcPr>
+                </a:tc>
+                <a:tc>
+                  <a:txBody>
+                    <a:bodyPr/>
+                    <a:lstStyle/>
+                    <a:p>
+                      <a:r>
+                        <a:rPr lang="en-CH" b="1" dirty="0"/>
+                        <a:t>-200</a:t>
+                      </a:r>
+                    </a:p>
+                  </a:txBody>
+                  <a:tcPr>
+                    <a:lnL w="12700" cmpd="sng">
+                      <a:noFill/>
+                    </a:lnL>
+                    <a:lnR w="12700" cmpd="sng">
+                      <a:noFill/>
+                    </a:lnR>
+                    <a:lnT w="12700" cmpd="sng">
+                      <a:noFill/>
+                    </a:lnT>
+                    <a:lnB w="12700" cmpd="sng">
+                      <a:noFill/>
+                    </a:lnB>
+                    <a:lnTlToBr w="12700" cmpd="sng">
+                      <a:noFill/>
+                      <a:prstDash val="solid"/>
+                    </a:lnTlToBr>
+                    <a:lnBlToTr w="12700" cmpd="sng">
+                      <a:noFill/>
+                      <a:prstDash val="solid"/>
+                    </a:lnBlToTr>
+                    <a:solidFill>
+                      <a:schemeClr val="accent6">
+                        <a:lumMod val="40000"/>
+                        <a:lumOff val="60000"/>
+                      </a:schemeClr>
+                    </a:solidFill>
+                  </a:tcPr>
+                </a:tc>
+                <a:extLst>
+                  <a:ext uri="{0D108BD9-81ED-4DB2-BD59-A6C34878D82A}">
+                    <a16:rowId xmlns:a16="http://schemas.microsoft.com/office/drawing/2014/main" val="3466696184"/>
+                  </a:ext>
+                </a:extLst>
+              </a:tr>
+              <a:tr h="370840">
+                <a:tc vMerge="1">
+                  <a:txBody>
+                    <a:bodyPr/>
+                    <a:lstStyle/>
+                    <a:p>
+                      <a:endParaRPr lang="en-CH" dirty="0"/>
+                    </a:p>
+                  </a:txBody>
+                  <a:tcPr/>
+                </a:tc>
+                <a:tc>
+                  <a:txBody>
+                    <a:bodyPr/>
+                    <a:lstStyle/>
+                    <a:p>
+                      <a:r>
+                        <a:rPr lang="en-CH" b="1" dirty="0"/>
+                        <a:t>Read-only function</a:t>
+                      </a:r>
+                    </a:p>
+                  </a:txBody>
+                  <a:tcPr>
+                    <a:lnL w="12700" cmpd="sng">
+                      <a:noFill/>
+                    </a:lnL>
+                    <a:lnR w="12700" cmpd="sng">
+                      <a:noFill/>
+                    </a:lnR>
+                    <a:lnT w="12700" cmpd="sng">
+                      <a:noFill/>
+                    </a:lnT>
+                    <a:lnB w="12700" cap="flat" cmpd="sng" algn="ctr">
+                      <a:noFill/>
+                      <a:prstDash val="solid"/>
+                      <a:round/>
+                      <a:headEnd type="none" w="med" len="med"/>
+                      <a:tailEnd type="none" w="med" len="med"/>
+                    </a:lnB>
+                    <a:lnTlToBr w="12700" cmpd="sng">
+                      <a:noFill/>
+                      <a:prstDash val="solid"/>
+                    </a:lnTlToBr>
+                    <a:lnBlToTr w="12700" cmpd="sng">
+                      <a:noFill/>
+                      <a:prstDash val="solid"/>
+                    </a:lnBlToTr>
+                  </a:tcPr>
+                </a:tc>
+                <a:tc>
+                  <a:txBody>
+                    <a:bodyPr/>
+                    <a:lstStyle/>
+                    <a:p>
+                      <a:r>
+                        <a:rPr lang="en-CH" b="1" dirty="0"/>
+                        <a:t>0</a:t>
+                      </a:r>
+                    </a:p>
+                  </a:txBody>
+                  <a:tcPr>
+                    <a:lnL w="12700" cmpd="sng">
+                      <a:noFill/>
+                    </a:lnL>
+                    <a:lnR w="12700" cmpd="sng">
+                      <a:noFill/>
+                    </a:lnR>
+                    <a:lnT w="12700" cmpd="sng">
+                      <a:noFill/>
+                    </a:lnT>
+                    <a:lnB w="12700" cap="flat" cmpd="sng" algn="ctr">
+                      <a:noFill/>
+                      <a:prstDash val="solid"/>
+                      <a:round/>
+                      <a:headEnd type="none" w="med" len="med"/>
+                      <a:tailEnd type="none" w="med" len="med"/>
+                    </a:lnB>
+                    <a:lnTlToBr w="12700" cmpd="sng">
+                      <a:noFill/>
+                      <a:prstDash val="solid"/>
+                    </a:lnTlToBr>
+                    <a:lnBlToTr w="12700" cmpd="sng">
+                      <a:noFill/>
+                      <a:prstDash val="solid"/>
+                    </a:lnBlToTr>
+                  </a:tcPr>
+                </a:tc>
+                <a:tc>
+                  <a:txBody>
+                    <a:bodyPr/>
+                    <a:lstStyle/>
+                    <a:p>
+                      <a:r>
+                        <a:rPr lang="en-CH" b="1" dirty="0"/>
+                        <a:t>2100</a:t>
+                      </a:r>
+                    </a:p>
+                  </a:txBody>
+                  <a:tcPr>
+                    <a:lnL w="12700" cmpd="sng">
+                      <a:noFill/>
+                    </a:lnL>
+                    <a:lnR w="12700" cmpd="sng">
+                      <a:noFill/>
+                    </a:lnR>
+                    <a:lnT w="12700" cmpd="sng">
+                      <a:noFill/>
+                    </a:lnT>
+                    <a:lnB w="12700" cap="flat" cmpd="sng" algn="ctr">
+                      <a:noFill/>
+                      <a:prstDash val="solid"/>
+                      <a:round/>
+                      <a:headEnd type="none" w="med" len="med"/>
+                      <a:tailEnd type="none" w="med" len="med"/>
+                    </a:lnB>
+                    <a:lnTlToBr w="12700" cmpd="sng">
+                      <a:noFill/>
+                      <a:prstDash val="solid"/>
+                    </a:lnTlToBr>
+                    <a:lnBlToTr w="12700" cmpd="sng">
+                      <a:noFill/>
+                      <a:prstDash val="solid"/>
+                    </a:lnBlToTr>
+                  </a:tcPr>
+                </a:tc>
+                <a:tc>
+                  <a:txBody>
+                    <a:bodyPr/>
+                    <a:lstStyle/>
+                    <a:p>
+                      <a:r>
+                        <a:rPr lang="en-CH" b="1" dirty="0"/>
+                        <a:t>2100</a:t>
+                      </a:r>
+                    </a:p>
+                  </a:txBody>
+                  <a:tcPr>
+                    <a:lnL w="12700" cmpd="sng">
+                      <a:noFill/>
+                    </a:lnL>
+                    <a:lnR w="12700" cmpd="sng">
+                      <a:noFill/>
+                    </a:lnR>
+                    <a:lnT w="12700" cmpd="sng">
+                      <a:noFill/>
+                    </a:lnT>
+                    <a:lnB w="12700" cap="flat" cmpd="sng" algn="ctr">
+                      <a:noFill/>
+                      <a:prstDash val="solid"/>
+                      <a:round/>
+                      <a:headEnd type="none" w="med" len="med"/>
+                      <a:tailEnd type="none" w="med" len="med"/>
+                    </a:lnB>
+                    <a:lnTlToBr w="12700" cmpd="sng">
+                      <a:noFill/>
+                      <a:prstDash val="solid"/>
+                    </a:lnTlToBr>
+                    <a:lnBlToTr w="12700" cmpd="sng">
+                      <a:noFill/>
+                      <a:prstDash val="solid"/>
+                    </a:lnBlToTr>
+                    <a:solidFill>
+                      <a:schemeClr val="accent1">
+                        <a:lumMod val="40000"/>
+                        <a:lumOff val="60000"/>
+                      </a:schemeClr>
+                    </a:solidFill>
+                  </a:tcPr>
+                </a:tc>
+                <a:extLst>
+                  <a:ext uri="{0D108BD9-81ED-4DB2-BD59-A6C34878D82A}">
+                    <a16:rowId xmlns:a16="http://schemas.microsoft.com/office/drawing/2014/main" val="402539574"/>
+                  </a:ext>
+                </a:extLst>
+              </a:tr>
+            </a:tbl>
+          </a:graphicData>
+        </a:graphic>
+      </p:graphicFrame>
+      <p:grpSp>
+        <p:nvGrpSpPr>
+          <p:cNvPr id="10" name="Group 9">
+            <a:extLst>
+              <a:ext uri="{FF2B5EF4-FFF2-40B4-BE49-F238E27FC236}">
+                <a16:creationId xmlns:a16="http://schemas.microsoft.com/office/drawing/2014/main" id="{A834BCC0-FC79-35C3-E45D-6B3CC6627B99}"/>
+              </a:ext>
+            </a:extLst>
+          </p:cNvPr>
+          <p:cNvGrpSpPr/>
+          <p:nvPr/>
+        </p:nvGrpSpPr>
+        <p:grpSpPr>
+          <a:xfrm>
+            <a:off x="7315200" y="3759200"/>
+            <a:ext cx="4351000" cy="2290330"/>
+            <a:chOff x="7315200" y="3759200"/>
+            <a:chExt cx="4351000" cy="2290330"/>
+          </a:xfrm>
+        </p:grpSpPr>
+        <p:sp>
+          <p:nvSpPr>
+            <p:cNvPr id="8" name="Rectangle 7">
+              <a:extLst>
+                <a:ext uri="{FF2B5EF4-FFF2-40B4-BE49-F238E27FC236}">
+                  <a16:creationId xmlns:a16="http://schemas.microsoft.com/office/drawing/2014/main" id="{163E2AC4-568B-BE0B-A171-F2E1183C4515}"/>
+                </a:ext>
+              </a:extLst>
+            </p:cNvPr>
+            <p:cNvSpPr/>
+            <p:nvPr/>
+          </p:nvSpPr>
+          <p:spPr>
+            <a:xfrm>
+              <a:off x="7315200" y="3759200"/>
+              <a:ext cx="4351000" cy="640080"/>
+            </a:xfrm>
+            <a:prstGeom prst="rect">
+              <a:avLst/>
+            </a:prstGeom>
+            <a:noFill/>
+            <a:ln w="38100">
+              <a:solidFill>
+                <a:schemeClr val="accent1">
+                  <a:lumMod val="75000"/>
+                </a:schemeClr>
+              </a:solidFill>
+            </a:ln>
+          </p:spPr>
+          <p:style>
+            <a:lnRef idx="2">
+              <a:schemeClr val="accent1">
+                <a:shade val="15000"/>
+              </a:schemeClr>
+            </a:lnRef>
+            <a:fillRef idx="1">
+              <a:schemeClr val="accent1"/>
+            </a:fillRef>
+            <a:effectRef idx="0">
+              <a:schemeClr val="accent1"/>
+            </a:effectRef>
+            <a:fontRef idx="minor">
+              <a:schemeClr val="lt1"/>
+            </a:fontRef>
+          </p:style>
+          <p:txBody>
+            <a:bodyPr rtlCol="0" anchor="ctr"/>
+            <a:lstStyle/>
+            <a:p>
+              <a:pPr algn="ctr"/>
+              <a:endParaRPr lang="en-CH"/>
+            </a:p>
+          </p:txBody>
+        </p:sp>
+        <p:sp>
+          <p:nvSpPr>
+            <p:cNvPr id="9" name="Rectangle 8">
+              <a:extLst>
+                <a:ext uri="{FF2B5EF4-FFF2-40B4-BE49-F238E27FC236}">
+                  <a16:creationId xmlns:a16="http://schemas.microsoft.com/office/drawing/2014/main" id="{F0B25E2E-EB14-A43F-E1E4-595689CC3D01}"/>
+                </a:ext>
+              </a:extLst>
+            </p:cNvPr>
+            <p:cNvSpPr/>
+            <p:nvPr/>
+          </p:nvSpPr>
+          <p:spPr>
+            <a:xfrm>
+              <a:off x="7315200" y="5409450"/>
+              <a:ext cx="4351000" cy="640080"/>
+            </a:xfrm>
+            <a:prstGeom prst="rect">
+              <a:avLst/>
+            </a:prstGeom>
+            <a:noFill/>
+            <a:ln w="38100">
+              <a:solidFill>
+                <a:schemeClr val="accent1">
+                  <a:lumMod val="75000"/>
+                </a:schemeClr>
+              </a:solidFill>
+            </a:ln>
+          </p:spPr>
+          <p:style>
+            <a:lnRef idx="2">
+              <a:schemeClr val="accent1">
+                <a:shade val="15000"/>
+              </a:schemeClr>
+            </a:lnRef>
+            <a:fillRef idx="1">
+              <a:schemeClr val="accent1"/>
+            </a:fillRef>
+            <a:effectRef idx="0">
+              <a:schemeClr val="accent1"/>
+            </a:effectRef>
+            <a:fontRef idx="minor">
+              <a:schemeClr val="lt1"/>
+            </a:fontRef>
+          </p:style>
+          <p:txBody>
+            <a:bodyPr rtlCol="0" anchor="ctr"/>
+            <a:lstStyle/>
+            <a:p>
+              <a:pPr algn="ctr"/>
+              <a:endParaRPr lang="en-CH"/>
+            </a:p>
+          </p:txBody>
+        </p:sp>
+      </p:grpSp>
+      <p:sp>
+        <p:nvSpPr>
+          <p:cNvPr id="11" name="TextBox 10">
+            <a:extLst>
+              <a:ext uri="{FF2B5EF4-FFF2-40B4-BE49-F238E27FC236}">
+                <a16:creationId xmlns:a16="http://schemas.microsoft.com/office/drawing/2014/main" id="{55BAD55D-A92F-7796-AD9A-C55FA5760706}"/>
+              </a:ext>
+            </a:extLst>
+          </p:cNvPr>
+          <p:cNvSpPr txBox="1"/>
+          <p:nvPr/>
+        </p:nvSpPr>
+        <p:spPr>
+          <a:xfrm>
+            <a:off x="1148080" y="5090160"/>
+            <a:ext cx="3972560" cy="954107"/>
+          </a:xfrm>
+          <a:prstGeom prst="rect">
+            <a:avLst/>
+          </a:prstGeom>
+          <a:noFill/>
+        </p:spPr>
+        <p:txBody>
+          <a:bodyPr wrap="square" rtlCol="0">
+            <a:spAutoFit/>
+          </a:bodyPr>
+          <a:lstStyle/>
+          <a:p>
+            <a:pPr algn="ctr"/>
+            <a:r>
+              <a:rPr lang="en-CH" sz="2800" dirty="0">
+                <a:solidFill>
+                  <a:schemeClr val="accent1">
+                    <a:lumMod val="75000"/>
+                  </a:schemeClr>
+                </a:solidFill>
+              </a:rPr>
+              <a:t>Potential Vulnerabilities!</a:t>
+            </a:r>
+            <a:br>
+              <a:rPr lang="en-CH" sz="2800" dirty="0">
+                <a:solidFill>
+                  <a:schemeClr val="accent1">
+                    <a:lumMod val="75000"/>
+                  </a:schemeClr>
+                </a:solidFill>
+              </a:rPr>
+            </a:br>
+            <a:r>
+              <a:rPr lang="en-CH" sz="2800" dirty="0">
+                <a:solidFill>
+                  <a:schemeClr val="accent1">
+                    <a:lumMod val="75000"/>
+                  </a:schemeClr>
+                </a:solidFill>
+              </a:rPr>
+              <a:t>(cross-protocol)</a:t>
+            </a:r>
+          </a:p>
+        </p:txBody>
+      </p:sp>
+    </p:spTree>
+    <p:extLst>
+      <p:ext uri="{BB962C8B-B14F-4D97-AF65-F5344CB8AC3E}">
+        <p14:creationId xmlns:p14="http://schemas.microsoft.com/office/powerpoint/2010/main" val="758905088"/>
+      </p:ext>
+    </p:extLst>
+  </p:cSld>
+  <p:clrMapOvr>
+    <a:masterClrMapping/>
+  </p:clrMapOvr>
+  <p:timing>
+    <p:tnLst>
+      <p:par>
+        <p:cTn id="1" dur="indefinite" restart="never" nodeType="tmRoot">
+          <p:childTnLst>
+            <p:seq concurrent="1" nextAc="seek">
+              <p:cTn id="2" dur="indefinite" nodeType="mainSeq">
+                <p:childTnLst>
+                  <p:par>
+                    <p:cTn id="3" fill="hold">
+                      <p:stCondLst>
+                        <p:cond delay="indefinite"/>
+                      </p:stCondLst>
+                      <p:childTnLst>
+                        <p:par>
+                          <p:cTn id="4" fill="hold">
+                            <p:stCondLst>
+                              <p:cond delay="0"/>
+                            </p:stCondLst>
+                            <p:childTnLst>
+                              <p:par>
+                                <p:cTn id="5" presetID="1" presetClass="entr" presetSubtype="0" fill="hold" nodeType="clickEffect">
+                                  <p:stCondLst>
+                                    <p:cond delay="0"/>
+                                  </p:stCondLst>
+                                  <p:childTnLst>
+                                    <p:set>
+                                      <p:cBhvr>
+                                        <p:cTn id="6" dur="1" fill="hold">
+                                          <p:stCondLst>
+                                            <p:cond delay="0"/>
+                                          </p:stCondLst>
+                                        </p:cTn>
+                                        <p:tgtEl>
+                                          <p:spTgt spid="10"/>
+                                        </p:tgtEl>
+                                        <p:attrNameLst>
+                                          <p:attrName>style.visibility</p:attrName>
+                                        </p:attrNameLst>
+                                      </p:cBhvr>
+                                      <p:to>
+                                        <p:strVal val="visible"/>
+                                      </p:to>
+                                    </p:set>
+                                  </p:childTnLst>
+                                </p:cTn>
+                              </p:par>
+                              <p:par>
+                                <p:cTn id="7" presetID="1" presetClass="entr" presetSubtype="0" fill="hold" grpId="0" nodeType="withEffect">
+                                  <p:stCondLst>
+                                    <p:cond delay="0"/>
+                                  </p:stCondLst>
+                                  <p:childTnLst>
+                                    <p:set>
+                                      <p:cBhvr>
+                                        <p:cTn id="8" dur="1" fill="hold">
+                                          <p:stCondLst>
+                                            <p:cond delay="0"/>
+                                          </p:stCondLst>
+                                        </p:cTn>
+                                        <p:tgtEl>
+                                          <p:spTgt spid="11"/>
+                                        </p:tgtEl>
+                                        <p:attrNameLst>
+                                          <p:attrName>style.visibility</p:attrName>
+                                        </p:attrNameLst>
+                                      </p:cBhvr>
+                                      <p:to>
+                                        <p:strVal val="visible"/>
+                                      </p:to>
+                                    </p:set>
+                                  </p:childTnLst>
+                                </p:cTn>
+                              </p:par>
+                            </p:childTnLst>
+                          </p:cTn>
+                        </p:par>
+                      </p:childTnLst>
+                    </p:cTn>
+                  </p:par>
+                </p:childTnLst>
+              </p:cTn>
+              <p:prevCondLst>
+                <p:cond evt="onPrev" delay="0">
+                  <p:tgtEl>
+                    <p:sldTgt/>
+                  </p:tgtEl>
+                </p:cond>
+              </p:prevCondLst>
+              <p:nextCondLst>
+                <p:cond evt="onNext" delay="0">
+                  <p:tgtEl>
+                    <p:sldTgt/>
+                  </p:tgtEl>
+                </p:cond>
+              </p:nextCondLst>
+            </p:seq>
+          </p:childTnLst>
+        </p:cTn>
+      </p:par>
+    </p:tnLst>
+    <p:bldLst>
+      <p:bldP spid="11" grpId="0"/>
+    </p:bldLst>
+  </p:timing>
+</p:sld>
+</file>
+
+<file path=ppt/slides/slide41.xml><?xml version="1.0" encoding="utf-8"?>
+<p:sld xmlns:a="http://schemas.openxmlformats.org/drawingml/2006/main" xmlns:r="http://schemas.openxmlformats.org/officeDocument/2006/relationships" xmlns:p="http://schemas.openxmlformats.org/presentationml/2006/main">
+  <p:cSld>
+    <p:spTree>
+      <p:nvGrpSpPr>
+        <p:cNvPr id="1" name=""/>
+        <p:cNvGrpSpPr/>
+        <p:nvPr/>
+      </p:nvGrpSpPr>
+      <p:grpSpPr>
+        <a:xfrm>
+          <a:off x="0" y="0"/>
+          <a:ext cx="0" cy="0"/>
+          <a:chOff x="0" y="0"/>
+          <a:chExt cx="0" cy="0"/>
+        </a:xfrm>
+      </p:grpSpPr>
+      <p:sp>
+        <p:nvSpPr>
+          <p:cNvPr id="2" name="Title 1">
+            <a:extLst>
+              <a:ext uri="{FF2B5EF4-FFF2-40B4-BE49-F238E27FC236}">
                 <a16:creationId xmlns:a16="http://schemas.microsoft.com/office/drawing/2014/main" id="{3F4947EC-EB1C-BC69-7E50-52FFCCB1A4C3}"/>
               </a:ext>
             </a:extLst>
@@ -42864,6 +46475,7 @@
             </a:r>
           </a:p>
           <a:p>
+            <a:pPr lvl="1"/>
             <a:r>
               <a:rPr lang="en-CH" dirty="0"/>
               <a:t>Facilitates (static) analysis across reentrant call paths</a:t>
@@ -42872,7 +46484,34 @@
           <a:p>
             <a:r>
               <a:rPr lang="en-CH" dirty="0"/>
-              <a:t>Effect annotations result in significant overhead</a:t>
+              <a:t>Effect annotations result in significant coding overhead</a:t>
+            </a:r>
+          </a:p>
+          <a:p>
+            <a:pPr lvl="1"/>
+            <a:r>
+              <a:rPr lang="en-CH" dirty="0"/>
+              <a:t>But improve auditability</a:t>
+            </a:r>
+          </a:p>
+          <a:p>
+            <a:pPr lvl="1"/>
+            <a:r>
+              <a:rPr lang="en-CH" dirty="0"/>
+              <a:t>Flag unexpected or missing side effects</a:t>
+            </a:r>
+          </a:p>
+          <a:p>
+            <a:r>
+              <a:rPr lang="en-CH" dirty="0"/>
+              <a:t>ADTs enable type-safe modelling of state machines</a:t>
+            </a:r>
+          </a:p>
+          <a:p>
+            <a:pPr lvl="1"/>
+            <a:r>
+              <a:rPr lang="en-CH" dirty="0"/>
+              <a:t>Code becomes less error-prone</a:t>
             </a:r>
           </a:p>
         </p:txBody>
@@ -42963,7 +46602,7 @@
             <a:fld id="{1013ED95-016C-42D7-B550-5C99AA40E4D5}" type="slidenum">
               <a:rPr lang="en-CH" smtClean="0"/>
               <a:pPr/>
-              <a:t>40</a:t>
+              <a:t>41</a:t>
             </a:fld>
             <a:r>
               <a:rPr lang="en-CH"/>
@@ -42986,7 +46625,7 @@
 </p:sld>
 </file>
 
-<file path=ppt/slides/slide41.xml><?xml version="1.0" encoding="utf-8"?>
+<file path=ppt/slides/slide42.xml><?xml version="1.0" encoding="utf-8"?>
 <p:sld xmlns:a="http://schemas.openxmlformats.org/drawingml/2006/main" xmlns:r="http://schemas.openxmlformats.org/officeDocument/2006/relationships" xmlns:p="http://schemas.openxmlformats.org/presentationml/2006/main">
   <p:cSld>
     <p:spTree>
@@ -43084,7 +46723,7 @@
             <a:pPr lvl="1"/>
             <a:r>
               <a:rPr lang="en-CH" dirty="0"/>
-              <a:t>Access Control Mechanisms</a:t>
+              <a:t>Access Control mechanisms</a:t>
             </a:r>
           </a:p>
           <a:p>
@@ -43100,7 +46739,7 @@
             <a:pPr lvl="1"/>
             <a:r>
               <a:rPr lang="en-CH" dirty="0"/>
-              <a:t>Memory Allocations</a:t>
+              <a:t>Optimize memory allocations</a:t>
             </a:r>
           </a:p>
           <a:p>
@@ -43332,7 +46971,7 @@
             <a:fld id="{1013ED95-016C-42D7-B550-5C99AA40E4D5}" type="slidenum">
               <a:rPr lang="en-CH" smtClean="0"/>
               <a:pPr/>
-              <a:t>41</a:t>
+              <a:t>42</a:t>
             </a:fld>
             <a:r>
               <a:rPr lang="en-CH"/>
@@ -43355,7 +46994,7 @@
 </p:sld>
 </file>
 
-<file path=ppt/slides/slide42.xml><?xml version="1.0" encoding="utf-8"?>
+<file path=ppt/slides/slide43.xml><?xml version="1.0" encoding="utf-8"?>
 <p:sld xmlns:a="http://schemas.openxmlformats.org/drawingml/2006/main" xmlns:r="http://schemas.openxmlformats.org/officeDocument/2006/relationships" xmlns:p="http://schemas.openxmlformats.org/presentationml/2006/main" show="0">
   <p:cSld>
     <p:spTree>
@@ -43530,7 +47169,7 @@
             <a:fld id="{1013ED95-016C-42D7-B550-5C99AA40E4D5}" type="slidenum">
               <a:rPr lang="en-CH" smtClean="0"/>
               <a:pPr/>
-              <a:t>42</a:t>
+              <a:t>43</a:t>
             </a:fld>
             <a:r>
               <a:rPr lang="en-CH"/>
@@ -43553,7 +47192,7 @@
 </p:sld>
 </file>
 
-<file path=ppt/slides/slide43.xml><?xml version="1.0" encoding="utf-8"?>
+<file path=ppt/slides/slide44.xml><?xml version="1.0" encoding="utf-8"?>
 <p:sld xmlns:a="http://schemas.openxmlformats.org/drawingml/2006/main" xmlns:r="http://schemas.openxmlformats.org/officeDocument/2006/relationships" xmlns:p="http://schemas.openxmlformats.org/presentationml/2006/main">
   <p:cSld>
     <p:spTree>
@@ -43709,7 +47348,7 @@
             <a:fld id="{1013ED95-016C-42D7-B550-5C99AA40E4D5}" type="slidenum">
               <a:rPr lang="en-CH" smtClean="0"/>
               <a:pPr/>
-              <a:t>43</a:t>
+              <a:t>44</a:t>
             </a:fld>
             <a:r>
               <a:rPr lang="en-CH"/>
@@ -43732,7 +47371,7 @@
 </p:sld>
 </file>
 
-<file path=ppt/slides/slide44.xml><?xml version="1.0" encoding="utf-8"?>
+<file path=ppt/slides/slide45.xml><?xml version="1.0" encoding="utf-8"?>
 <p:sld xmlns:a="http://schemas.openxmlformats.org/drawingml/2006/main" xmlns:r="http://schemas.openxmlformats.org/officeDocument/2006/relationships" xmlns:p="http://schemas.openxmlformats.org/presentationml/2006/main" show="0">
   <p:cSld>
     <p:spTree>
@@ -43907,7 +47546,7 @@
             <a:fld id="{1013ED95-016C-42D7-B550-5C99AA40E4D5}" type="slidenum">
               <a:rPr lang="en-CH" smtClean="0"/>
               <a:pPr/>
-              <a:t>44</a:t>
+              <a:t>45</a:t>
             </a:fld>
             <a:r>
               <a:rPr lang="en-CH"/>
@@ -43930,7 +47569,7 @@
 </p:sld>
 </file>
 
-<file path=ppt/slides/slide45.xml><?xml version="1.0" encoding="utf-8"?>
+<file path=ppt/slides/slide46.xml><?xml version="1.0" encoding="utf-8"?>
 <p:sld xmlns:a="http://schemas.openxmlformats.org/drawingml/2006/main" xmlns:r="http://schemas.openxmlformats.org/officeDocument/2006/relationships" xmlns:p="http://schemas.openxmlformats.org/presentationml/2006/main">
   <p:cSld>
     <p:spTree>
@@ -45877,7 +49516,7 @@
             <a:fld id="{1013ED95-016C-42D7-B550-5C99AA40E4D5}" type="slidenum">
               <a:rPr lang="en-CH" smtClean="0"/>
               <a:pPr/>
-              <a:t>45</a:t>
+              <a:t>46</a:t>
             </a:fld>
             <a:r>
               <a:rPr lang="en-CH"/>
@@ -45900,7 +49539,7 @@
 </p:sld>
 </file>
 
-<file path=ppt/slides/slide46.xml><?xml version="1.0" encoding="utf-8"?>
+<file path=ppt/slides/slide47.xml><?xml version="1.0" encoding="utf-8"?>
 <p:sld xmlns:a="http://schemas.openxmlformats.org/drawingml/2006/main" xmlns:r="http://schemas.openxmlformats.org/officeDocument/2006/relationships" xmlns:p="http://schemas.openxmlformats.org/presentationml/2006/main">
   <p:cSld>
     <p:spTree>
@@ -47847,7 +51486,7 @@
             <a:fld id="{1013ED95-016C-42D7-B550-5C99AA40E4D5}" type="slidenum">
               <a:rPr lang="en-CH" smtClean="0"/>
               <a:pPr/>
-              <a:t>46</a:t>
+              <a:t>47</a:t>
             </a:fld>
             <a:r>
               <a:rPr lang="en-CH"/>
@@ -47870,7 +51509,7 @@
 </p:sld>
 </file>
 
-<file path=ppt/slides/slide47.xml><?xml version="1.0" encoding="utf-8"?>
+<file path=ppt/slides/slide48.xml><?xml version="1.0" encoding="utf-8"?>
 <p:sld xmlns:a="http://schemas.openxmlformats.org/drawingml/2006/main" xmlns:r="http://schemas.openxmlformats.org/officeDocument/2006/relationships" xmlns:p="http://schemas.openxmlformats.org/presentationml/2006/main" show="0">
   <p:cSld>
     <p:spTree>
@@ -48039,7 +51678,7 @@
             <a:fld id="{1013ED95-016C-42D7-B550-5C99AA40E4D5}" type="slidenum">
               <a:rPr lang="en-CH" smtClean="0"/>
               <a:pPr/>
-              <a:t>47</a:t>
+              <a:t>48</a:t>
             </a:fld>
             <a:r>
               <a:rPr lang="en-CH"/>
@@ -48062,7 +51701,7 @@
 </p:sld>
 </file>
 
-<file path=ppt/slides/slide48.xml><?xml version="1.0" encoding="utf-8"?>
+<file path=ppt/slides/slide49.xml><?xml version="1.0" encoding="utf-8"?>
 <p:sld xmlns:a="http://schemas.openxmlformats.org/drawingml/2006/main" xmlns:r="http://schemas.openxmlformats.org/officeDocument/2006/relationships" xmlns:p="http://schemas.openxmlformats.org/presentationml/2006/main">
   <p:cSld>
     <p:spTree>
@@ -48928,7 +52567,7 @@
             <a:fld id="{1013ED95-016C-42D7-B550-5C99AA40E4D5}" type="slidenum">
               <a:rPr lang="en-CH" smtClean="0"/>
               <a:pPr/>
-              <a:t>48</a:t>
+              <a:t>49</a:t>
             </a:fld>
             <a:r>
               <a:rPr lang="en-CH"/>
@@ -48994,7 +52633,257 @@
 </p:sld>
 </file>
 
-<file path=ppt/slides/slide49.xml><?xml version="1.0" encoding="utf-8"?>
+<file path=ppt/slides/slide5.xml><?xml version="1.0" encoding="utf-8"?>
+<p:sld xmlns:a="http://schemas.openxmlformats.org/drawingml/2006/main" xmlns:r="http://schemas.openxmlformats.org/officeDocument/2006/relationships" xmlns:p="http://schemas.openxmlformats.org/presentationml/2006/main">
+  <p:cSld>
+    <p:spTree>
+      <p:nvGrpSpPr>
+        <p:cNvPr id="1" name=""/>
+        <p:cNvGrpSpPr/>
+        <p:nvPr/>
+      </p:nvGrpSpPr>
+      <p:grpSpPr>
+        <a:xfrm>
+          <a:off x="0" y="0"/>
+          <a:ext cx="0" cy="0"/>
+          <a:chOff x="0" y="0"/>
+          <a:chExt cx="0" cy="0"/>
+        </a:xfrm>
+      </p:grpSpPr>
+      <p:sp>
+        <p:nvSpPr>
+          <p:cNvPr id="2" name="Title 1">
+            <a:extLst>
+              <a:ext uri="{FF2B5EF4-FFF2-40B4-BE49-F238E27FC236}">
+                <a16:creationId xmlns:a16="http://schemas.microsoft.com/office/drawing/2014/main" id="{92FF9A32-A8EA-9746-7C0E-86807228BEDC}"/>
+              </a:ext>
+            </a:extLst>
+          </p:cNvPr>
+          <p:cNvSpPr>
+            <a:spLocks noGrp="1"/>
+          </p:cNvSpPr>
+          <p:nvPr>
+            <p:ph type="title"/>
+          </p:nvPr>
+        </p:nvSpPr>
+        <p:spPr/>
+        <p:txBody>
+          <a:bodyPr/>
+          <a:lstStyle/>
+          <a:p>
+            <a:r>
+              <a:rPr lang="en-CH" dirty="0"/>
+              <a:t>Smart Contract</a:t>
+            </a:r>
+          </a:p>
+        </p:txBody>
+      </p:sp>
+      <p:sp>
+        <p:nvSpPr>
+          <p:cNvPr id="3" name="Content Placeholder 2">
+            <a:extLst>
+              <a:ext uri="{FF2B5EF4-FFF2-40B4-BE49-F238E27FC236}">
+                <a16:creationId xmlns:a16="http://schemas.microsoft.com/office/drawing/2014/main" id="{6814A6EB-51BF-8ADC-967E-230DF8EAF4FD}"/>
+              </a:ext>
+            </a:extLst>
+          </p:cNvPr>
+          <p:cNvSpPr>
+            <a:spLocks noGrp="1"/>
+          </p:cNvSpPr>
+          <p:nvPr>
+            <p:ph idx="1"/>
+          </p:nvPr>
+        </p:nvSpPr>
+        <p:spPr/>
+        <p:txBody>
+          <a:bodyPr/>
+          <a:lstStyle/>
+          <a:p>
+            <a:r>
+              <a:rPr lang="en-CH" dirty="0"/>
+              <a:t>A “program” that runs on the blockchain</a:t>
+            </a:r>
+          </a:p>
+          <a:p>
+            <a:r>
+              <a:rPr lang="en-CH" dirty="0"/>
+              <a:t>Consists of:</a:t>
+            </a:r>
+          </a:p>
+          <a:p>
+            <a:pPr lvl="1"/>
+            <a:r>
+              <a:rPr lang="en-CH" dirty="0"/>
+              <a:t>Address (20-byte unique identifier)</a:t>
+            </a:r>
+          </a:p>
+          <a:p>
+            <a:pPr lvl="1"/>
+            <a:r>
+              <a:rPr lang="en-CH" dirty="0"/>
+              <a:t>Balance (of the native ETH currency)</a:t>
+            </a:r>
+          </a:p>
+          <a:p>
+            <a:pPr lvl="1"/>
+            <a:r>
+              <a:rPr lang="en-CH" dirty="0"/>
+              <a:t>Bytecode (max. 24’576 bytes)</a:t>
+            </a:r>
+          </a:p>
+          <a:p>
+            <a:pPr lvl="1"/>
+            <a:r>
+              <a:rPr lang="en-CH" dirty="0"/>
+              <a:t>Storage (uint256 </a:t>
+            </a:r>
+            <a:r>
+              <a:rPr lang="en-CH" dirty="0">
+                <a:latin typeface="Calibri" panose="020F0502020204030204" pitchFamily="34" charset="0"/>
+                <a:cs typeface="Calibri" panose="020F0502020204030204" pitchFamily="34" charset="0"/>
+              </a:rPr>
+              <a:t>→</a:t>
+            </a:r>
+            <a:r>
+              <a:rPr lang="en-CH" dirty="0"/>
+              <a:t> uint256 Hash Map)</a:t>
+            </a:r>
+          </a:p>
+          <a:p>
+            <a:endParaRPr lang="en-CH" dirty="0"/>
+          </a:p>
+          <a:p>
+            <a:r>
+              <a:rPr lang="en-CH" dirty="0"/>
+              <a:t>Executed by the Ethereum Virtual Machine</a:t>
+            </a:r>
+          </a:p>
+          <a:p>
+            <a:pPr lvl="1"/>
+            <a:endParaRPr lang="en-CH" dirty="0"/>
+          </a:p>
+        </p:txBody>
+      </p:sp>
+      <p:sp>
+        <p:nvSpPr>
+          <p:cNvPr id="4" name="Date Placeholder 3">
+            <a:extLst>
+              <a:ext uri="{FF2B5EF4-FFF2-40B4-BE49-F238E27FC236}">
+                <a16:creationId xmlns:a16="http://schemas.microsoft.com/office/drawing/2014/main" id="{DEA632C9-2054-2726-9B90-8F6B59A2D639}"/>
+              </a:ext>
+            </a:extLst>
+          </p:cNvPr>
+          <p:cNvSpPr>
+            <a:spLocks noGrp="1"/>
+          </p:cNvSpPr>
+          <p:nvPr>
+            <p:ph type="dt" sz="half" idx="10"/>
+          </p:nvPr>
+        </p:nvSpPr>
+        <p:spPr>
+          <a:xfrm>
+            <a:off x="838200" y="6356350"/>
+            <a:ext cx="2743200" cy="365125"/>
+          </a:xfrm>
+        </p:spPr>
+        <p:txBody>
+          <a:bodyPr/>
+          <a:lstStyle/>
+          <a:p>
+            <a:r>
+              <a:rPr lang="en-CH"/>
+              <a:t>30/03/2026</a:t>
+            </a:r>
+          </a:p>
+        </p:txBody>
+      </p:sp>
+      <p:sp>
+        <p:nvSpPr>
+          <p:cNvPr id="5" name="Footer Placeholder 4">
+            <a:extLst>
+              <a:ext uri="{FF2B5EF4-FFF2-40B4-BE49-F238E27FC236}">
+                <a16:creationId xmlns:a16="http://schemas.microsoft.com/office/drawing/2014/main" id="{947844DF-6BF6-B034-AB0D-BBFC998F1A91}"/>
+              </a:ext>
+            </a:extLst>
+          </p:cNvPr>
+          <p:cNvSpPr>
+            <a:spLocks noGrp="1"/>
+          </p:cNvSpPr>
+          <p:nvPr>
+            <p:ph type="ftr" sz="quarter" idx="11"/>
+          </p:nvPr>
+        </p:nvSpPr>
+        <p:spPr>
+          <a:xfrm>
+            <a:off x="4038600" y="6356350"/>
+            <a:ext cx="4114800" cy="365125"/>
+          </a:xfrm>
+        </p:spPr>
+        <p:txBody>
+          <a:bodyPr/>
+          <a:lstStyle/>
+          <a:p>
+            <a:r>
+              <a:rPr lang="en-US"/>
+              <a:t>Eliminating Reentrancy through Language Design</a:t>
+            </a:r>
+            <a:endParaRPr lang="en-CH"/>
+          </a:p>
+        </p:txBody>
+      </p:sp>
+      <p:sp>
+        <p:nvSpPr>
+          <p:cNvPr id="6" name="Slide Number Placeholder 5">
+            <a:extLst>
+              <a:ext uri="{FF2B5EF4-FFF2-40B4-BE49-F238E27FC236}">
+                <a16:creationId xmlns:a16="http://schemas.microsoft.com/office/drawing/2014/main" id="{D2E860A5-75AF-C811-25F7-D9545A9B9437}"/>
+              </a:ext>
+            </a:extLst>
+          </p:cNvPr>
+          <p:cNvSpPr>
+            <a:spLocks noGrp="1"/>
+          </p:cNvSpPr>
+          <p:nvPr>
+            <p:ph type="sldNum" sz="quarter" idx="12"/>
+          </p:nvPr>
+        </p:nvSpPr>
+        <p:spPr>
+          <a:xfrm>
+            <a:off x="8610600" y="6356350"/>
+            <a:ext cx="2743200" cy="365125"/>
+          </a:xfrm>
+        </p:spPr>
+        <p:txBody>
+          <a:bodyPr/>
+          <a:lstStyle/>
+          <a:p>
+            <a:fld id="{1013ED95-016C-42D7-B550-5C99AA40E4D5}" type="slidenum">
+              <a:rPr lang="en-CH" smtClean="0"/>
+              <a:pPr/>
+              <a:t>5</a:t>
+            </a:fld>
+            <a:r>
+              <a:rPr lang="en-CH"/>
+              <a:t> / XX</a:t>
+            </a:r>
+            <a:endParaRPr lang="en-CH" dirty="0"/>
+          </a:p>
+        </p:txBody>
+      </p:sp>
+    </p:spTree>
+    <p:extLst>
+      <p:ext uri="{BB962C8B-B14F-4D97-AF65-F5344CB8AC3E}">
+        <p14:creationId xmlns:p14="http://schemas.microsoft.com/office/powerpoint/2010/main" val="2220935303"/>
+      </p:ext>
+    </p:extLst>
+  </p:cSld>
+  <p:clrMapOvr>
+    <a:masterClrMapping/>
+  </p:clrMapOvr>
+</p:sld>
+</file>
+
+<file path=ppt/slides/slide50.xml><?xml version="1.0" encoding="utf-8"?>
 <p:sld xmlns:a="http://schemas.openxmlformats.org/drawingml/2006/main" xmlns:r="http://schemas.openxmlformats.org/officeDocument/2006/relationships" xmlns:p="http://schemas.openxmlformats.org/presentationml/2006/main">
   <p:cSld>
     <p:spTree>
@@ -49068,7 +52957,7 @@
             </a:extLst>
           </p:cNvPr>
           <p:cNvSpPr>
-            <a:spLocks/>
+            <a:spLocks noGrp="1"/>
           </p:cNvSpPr>
           <p:nvPr>
             <p:ph type="body" sz="quarter" idx="14"/>
@@ -49155,7 +53044,7 @@
             </a:extLst>
           </p:cNvPr>
           <p:cNvSpPr>
-            <a:spLocks/>
+            <a:spLocks noGrp="1"/>
           </p:cNvSpPr>
           <p:nvPr>
             <p:ph type="body" sz="quarter" idx="13"/>
@@ -50428,7 +54317,7 @@
             <a:fld id="{1013ED95-016C-42D7-B550-5C99AA40E4D5}" type="slidenum">
               <a:rPr lang="en-CH" smtClean="0"/>
               <a:pPr/>
-              <a:t>49</a:t>
+              <a:t>50</a:t>
             </a:fld>
             <a:r>
               <a:rPr lang="en-CH"/>
@@ -51013,257 +54902,7 @@
 </p:sld>
 </file>
 
-<file path=ppt/slides/slide5.xml><?xml version="1.0" encoding="utf-8"?>
-<p:sld xmlns:a="http://schemas.openxmlformats.org/drawingml/2006/main" xmlns:r="http://schemas.openxmlformats.org/officeDocument/2006/relationships" xmlns:p="http://schemas.openxmlformats.org/presentationml/2006/main">
-  <p:cSld>
-    <p:spTree>
-      <p:nvGrpSpPr>
-        <p:cNvPr id="1" name=""/>
-        <p:cNvGrpSpPr/>
-        <p:nvPr/>
-      </p:nvGrpSpPr>
-      <p:grpSpPr>
-        <a:xfrm>
-          <a:off x="0" y="0"/>
-          <a:ext cx="0" cy="0"/>
-          <a:chOff x="0" y="0"/>
-          <a:chExt cx="0" cy="0"/>
-        </a:xfrm>
-      </p:grpSpPr>
-      <p:sp>
-        <p:nvSpPr>
-          <p:cNvPr id="2" name="Title 1">
-            <a:extLst>
-              <a:ext uri="{FF2B5EF4-FFF2-40B4-BE49-F238E27FC236}">
-                <a16:creationId xmlns:a16="http://schemas.microsoft.com/office/drawing/2014/main" id="{92FF9A32-A8EA-9746-7C0E-86807228BEDC}"/>
-              </a:ext>
-            </a:extLst>
-          </p:cNvPr>
-          <p:cNvSpPr>
-            <a:spLocks noGrp="1"/>
-          </p:cNvSpPr>
-          <p:nvPr>
-            <p:ph type="title"/>
-          </p:nvPr>
-        </p:nvSpPr>
-        <p:spPr/>
-        <p:txBody>
-          <a:bodyPr/>
-          <a:lstStyle/>
-          <a:p>
-            <a:r>
-              <a:rPr lang="en-CH" dirty="0"/>
-              <a:t>Smart Contract</a:t>
-            </a:r>
-          </a:p>
-        </p:txBody>
-      </p:sp>
-      <p:sp>
-        <p:nvSpPr>
-          <p:cNvPr id="3" name="Content Placeholder 2">
-            <a:extLst>
-              <a:ext uri="{FF2B5EF4-FFF2-40B4-BE49-F238E27FC236}">
-                <a16:creationId xmlns:a16="http://schemas.microsoft.com/office/drawing/2014/main" id="{6814A6EB-51BF-8ADC-967E-230DF8EAF4FD}"/>
-              </a:ext>
-            </a:extLst>
-          </p:cNvPr>
-          <p:cNvSpPr>
-            <a:spLocks noGrp="1"/>
-          </p:cNvSpPr>
-          <p:nvPr>
-            <p:ph idx="1"/>
-          </p:nvPr>
-        </p:nvSpPr>
-        <p:spPr/>
-        <p:txBody>
-          <a:bodyPr/>
-          <a:lstStyle/>
-          <a:p>
-            <a:r>
-              <a:rPr lang="en-CH" dirty="0"/>
-              <a:t>A “program” that runs on the blockchain</a:t>
-            </a:r>
-          </a:p>
-          <a:p>
-            <a:r>
-              <a:rPr lang="en-CH" dirty="0"/>
-              <a:t>Consists of:</a:t>
-            </a:r>
-          </a:p>
-          <a:p>
-            <a:pPr lvl="1"/>
-            <a:r>
-              <a:rPr lang="en-CH" dirty="0"/>
-              <a:t>Address (20-byte unique identifier)</a:t>
-            </a:r>
-          </a:p>
-          <a:p>
-            <a:pPr lvl="1"/>
-            <a:r>
-              <a:rPr lang="en-CH" dirty="0"/>
-              <a:t>Balance (of the native ETH currency)</a:t>
-            </a:r>
-          </a:p>
-          <a:p>
-            <a:pPr lvl="1"/>
-            <a:r>
-              <a:rPr lang="en-CH" dirty="0"/>
-              <a:t>Bytecode (max. 24’576 bytes)</a:t>
-            </a:r>
-          </a:p>
-          <a:p>
-            <a:pPr lvl="1"/>
-            <a:r>
-              <a:rPr lang="en-CH" dirty="0"/>
-              <a:t>Storage (uint256 </a:t>
-            </a:r>
-            <a:r>
-              <a:rPr lang="en-CH" dirty="0">
-                <a:latin typeface="Calibri" panose="020F0502020204030204" pitchFamily="34" charset="0"/>
-                <a:cs typeface="Calibri" panose="020F0502020204030204" pitchFamily="34" charset="0"/>
-              </a:rPr>
-              <a:t>→</a:t>
-            </a:r>
-            <a:r>
-              <a:rPr lang="en-CH" dirty="0"/>
-              <a:t> uint256 Hash Map)</a:t>
-            </a:r>
-          </a:p>
-          <a:p>
-            <a:endParaRPr lang="en-CH" dirty="0"/>
-          </a:p>
-          <a:p>
-            <a:r>
-              <a:rPr lang="en-CH" dirty="0"/>
-              <a:t>Executed by the Ethereum Virtual Machine</a:t>
-            </a:r>
-          </a:p>
-          <a:p>
-            <a:pPr lvl="1"/>
-            <a:endParaRPr lang="en-CH" dirty="0"/>
-          </a:p>
-        </p:txBody>
-      </p:sp>
-      <p:sp>
-        <p:nvSpPr>
-          <p:cNvPr id="4" name="Date Placeholder 3">
-            <a:extLst>
-              <a:ext uri="{FF2B5EF4-FFF2-40B4-BE49-F238E27FC236}">
-                <a16:creationId xmlns:a16="http://schemas.microsoft.com/office/drawing/2014/main" id="{DEA632C9-2054-2726-9B90-8F6B59A2D639}"/>
-              </a:ext>
-            </a:extLst>
-          </p:cNvPr>
-          <p:cNvSpPr>
-            <a:spLocks noGrp="1"/>
-          </p:cNvSpPr>
-          <p:nvPr>
-            <p:ph type="dt" sz="half" idx="10"/>
-          </p:nvPr>
-        </p:nvSpPr>
-        <p:spPr>
-          <a:xfrm>
-            <a:off x="838200" y="6356350"/>
-            <a:ext cx="2743200" cy="365125"/>
-          </a:xfrm>
-        </p:spPr>
-        <p:txBody>
-          <a:bodyPr/>
-          <a:lstStyle/>
-          <a:p>
-            <a:r>
-              <a:rPr lang="en-CH"/>
-              <a:t>30/03/2026</a:t>
-            </a:r>
-          </a:p>
-        </p:txBody>
-      </p:sp>
-      <p:sp>
-        <p:nvSpPr>
-          <p:cNvPr id="5" name="Footer Placeholder 4">
-            <a:extLst>
-              <a:ext uri="{FF2B5EF4-FFF2-40B4-BE49-F238E27FC236}">
-                <a16:creationId xmlns:a16="http://schemas.microsoft.com/office/drawing/2014/main" id="{947844DF-6BF6-B034-AB0D-BBFC998F1A91}"/>
-              </a:ext>
-            </a:extLst>
-          </p:cNvPr>
-          <p:cNvSpPr>
-            <a:spLocks noGrp="1"/>
-          </p:cNvSpPr>
-          <p:nvPr>
-            <p:ph type="ftr" sz="quarter" idx="11"/>
-          </p:nvPr>
-        </p:nvSpPr>
-        <p:spPr>
-          <a:xfrm>
-            <a:off x="4038600" y="6356350"/>
-            <a:ext cx="4114800" cy="365125"/>
-          </a:xfrm>
-        </p:spPr>
-        <p:txBody>
-          <a:bodyPr/>
-          <a:lstStyle/>
-          <a:p>
-            <a:r>
-              <a:rPr lang="en-US"/>
-              <a:t>Eliminating Reentrancy through Language Design</a:t>
-            </a:r>
-            <a:endParaRPr lang="en-CH"/>
-          </a:p>
-        </p:txBody>
-      </p:sp>
-      <p:sp>
-        <p:nvSpPr>
-          <p:cNvPr id="6" name="Slide Number Placeholder 5">
-            <a:extLst>
-              <a:ext uri="{FF2B5EF4-FFF2-40B4-BE49-F238E27FC236}">
-                <a16:creationId xmlns:a16="http://schemas.microsoft.com/office/drawing/2014/main" id="{D2E860A5-75AF-C811-25F7-D9545A9B9437}"/>
-              </a:ext>
-            </a:extLst>
-          </p:cNvPr>
-          <p:cNvSpPr>
-            <a:spLocks noGrp="1"/>
-          </p:cNvSpPr>
-          <p:nvPr>
-            <p:ph type="sldNum" sz="quarter" idx="12"/>
-          </p:nvPr>
-        </p:nvSpPr>
-        <p:spPr>
-          <a:xfrm>
-            <a:off x="8610600" y="6356350"/>
-            <a:ext cx="2743200" cy="365125"/>
-          </a:xfrm>
-        </p:spPr>
-        <p:txBody>
-          <a:bodyPr/>
-          <a:lstStyle/>
-          <a:p>
-            <a:fld id="{1013ED95-016C-42D7-B550-5C99AA40E4D5}" type="slidenum">
-              <a:rPr lang="en-CH" smtClean="0"/>
-              <a:pPr/>
-              <a:t>5</a:t>
-            </a:fld>
-            <a:r>
-              <a:rPr lang="en-CH"/>
-              <a:t> / XX</a:t>
-            </a:r>
-            <a:endParaRPr lang="en-CH" dirty="0"/>
-          </a:p>
-        </p:txBody>
-      </p:sp>
-    </p:spTree>
-    <p:extLst>
-      <p:ext uri="{BB962C8B-B14F-4D97-AF65-F5344CB8AC3E}">
-        <p14:creationId xmlns:p14="http://schemas.microsoft.com/office/powerpoint/2010/main" val="2220935303"/>
-      </p:ext>
-    </p:extLst>
-  </p:cSld>
-  <p:clrMapOvr>
-    <a:masterClrMapping/>
-  </p:clrMapOvr>
-</p:sld>
-</file>
-
-<file path=ppt/slides/slide50.xml><?xml version="1.0" encoding="utf-8"?>
+<file path=ppt/slides/slide51.xml><?xml version="1.0" encoding="utf-8"?>
 <p:sld xmlns:a="http://schemas.openxmlformats.org/drawingml/2006/main" xmlns:r="http://schemas.openxmlformats.org/officeDocument/2006/relationships" xmlns:p="http://schemas.openxmlformats.org/presentationml/2006/main">
   <p:cSld>
     <p:spTree>
@@ -51483,7 +55122,7 @@
             <a:fld id="{1013ED95-016C-42D7-B550-5C99AA40E4D5}" type="slidenum">
               <a:rPr lang="en-CH" smtClean="0"/>
               <a:pPr/>
-              <a:t>50</a:t>
+              <a:t>51</a:t>
             </a:fld>
             <a:r>
               <a:rPr lang="en-CH"/>
@@ -51506,7 +55145,7 @@
 </p:sld>
 </file>
 
-<file path=ppt/slides/slide51.xml><?xml version="1.0" encoding="utf-8"?>
+<file path=ppt/slides/slide52.xml><?xml version="1.0" encoding="utf-8"?>
 <p:sld xmlns:a="http://schemas.openxmlformats.org/drawingml/2006/main" xmlns:r="http://schemas.openxmlformats.org/officeDocument/2006/relationships" xmlns:p="http://schemas.openxmlformats.org/presentationml/2006/main" show="0">
   <p:cSld>
     <p:spTree>
@@ -51873,7 +55512,7 @@
             <a:fld id="{1013ED95-016C-42D7-B550-5C99AA40E4D5}" type="slidenum">
               <a:rPr lang="en-CH" smtClean="0"/>
               <a:pPr/>
-              <a:t>51</a:t>
+              <a:t>52</a:t>
             </a:fld>
             <a:r>
               <a:rPr lang="en-CH"/>
@@ -51939,7 +55578,7 @@
 </p:sld>
 </file>
 
-<file path=ppt/slides/slide52.xml><?xml version="1.0" encoding="utf-8"?>
+<file path=ppt/slides/slide53.xml><?xml version="1.0" encoding="utf-8"?>
 <p:sld xmlns:a="http://schemas.openxmlformats.org/drawingml/2006/main" xmlns:r="http://schemas.openxmlformats.org/officeDocument/2006/relationships" xmlns:p="http://schemas.openxmlformats.org/presentationml/2006/main" show="0">
   <p:cSld>
     <p:spTree>
@@ -52301,7 +55940,7 @@
             <a:fld id="{1013ED95-016C-42D7-B550-5C99AA40E4D5}" type="slidenum">
               <a:rPr lang="en-CH" smtClean="0"/>
               <a:pPr/>
-              <a:t>52</a:t>
+              <a:t>53</a:t>
             </a:fld>
             <a:r>
               <a:rPr lang="en-CH"/>
@@ -52392,7 +56031,7 @@
 </p:sld>
 </file>
 
-<file path=ppt/slides/slide53.xml><?xml version="1.0" encoding="utf-8"?>
+<file path=ppt/slides/slide54.xml><?xml version="1.0" encoding="utf-8"?>
 <p:sld xmlns:a="http://schemas.openxmlformats.org/drawingml/2006/main" xmlns:r="http://schemas.openxmlformats.org/officeDocument/2006/relationships" xmlns:p="http://schemas.openxmlformats.org/presentationml/2006/main" show="0">
   <p:cSld>
     <p:spTree>
@@ -52931,7 +56570,7 @@
             <a:fld id="{1013ED95-016C-42D7-B550-5C99AA40E4D5}" type="slidenum">
               <a:rPr lang="en-CH" smtClean="0"/>
               <a:pPr/>
-              <a:t>53</a:t>
+              <a:t>54</a:t>
             </a:fld>
             <a:r>
               <a:rPr lang="en-CH"/>
@@ -53040,7 +56679,7 @@
 </p:sld>
 </file>
 
-<file path=ppt/slides/slide54.xml><?xml version="1.0" encoding="utf-8"?>
+<file path=ppt/slides/slide55.xml><?xml version="1.0" encoding="utf-8"?>
 <p:sld xmlns:a="http://schemas.openxmlformats.org/drawingml/2006/main" xmlns:r="http://schemas.openxmlformats.org/officeDocument/2006/relationships" xmlns:p="http://schemas.openxmlformats.org/presentationml/2006/main" show="0">
   <p:cSld>
     <p:spTree>
@@ -53485,7 +57124,7 @@
             <a:fld id="{1013ED95-016C-42D7-B550-5C99AA40E4D5}" type="slidenum">
               <a:rPr lang="en-CH" smtClean="0"/>
               <a:pPr/>
-              <a:t>54</a:t>
+              <a:t>55</a:t>
             </a:fld>
             <a:r>
               <a:rPr lang="en-CH"/>
